--- a/ref/발표자료/IPC_발표자료.pptx
+++ b/ref/발표자료/IPC_발표자료.pptx
@@ -2384,14 +2384,31 @@
           <a:lstStyle/>
           <a:p>
             <a:r>
-              <a:rPr lang="en-US" dirty="0"/>
-              <a:t>[2-1 UDP · TCP/IP · 약 2분]
-둘 다 IP 위에 올라가지만, 신뢰성을 커널이 책임지느냐 애플리케이션이 책임지느냐가 다릅니다.
-왼쪽 TCP 는 연결형입니다. 3-way handshake 로 연결을 맺고 시작하고, 순서 보장 · 유실 시 재전송 · 중복 제거를 커널이 다 해 줍니다. 그래서 한 건이라도 빠지면 안 되는 데이터 — 파일 전송, 명령 제어, 로그 수집에 씁니다. 오늘 ToDo#3 이 여기에 해당합니다. 단점은 헤더가 20바이트에 연결 유지 비용이 있고, 재전송 때문에 지연이 튈 수 있다는 점입니다.
-오른쪽 UDP 는 비연결형입니다. 주소만 알면 바로 보내고, 보낸 크기 그대로 도착하는 대신 도착 자체를 보장하지 않습니다. 대신 헤더가 8바이트로 가볍고 지연이 낮아서, 센서 데이터나 영상·음성 스트리밍처럼 "최신 값만 의미 있는" 주기 데이터에 씁니다. 브로드캐스트로 한 번에 여러 상대에게 뿌릴 수 있는 것도 UDP 만의 장점입니다.
-아래가 실제 구현할 때 가장 중요한 포인트입니다. TCP 는 바이트 스트림이라 메시지 경계가 없습니다. 4바이트를 요청해도 커널이 2바이트만 줄 수 있습니다. 그래서 요청한 크기를 다 채울 때까지 반복해서 받아야 하고, 저희 코드의 f_SocketRecvTCP_IPv4 도 그렇게 구현돼 있습니다.</a:t>
-            </a:r>
-            <a:endParaRPr lang="en-US" dirty="0"/>
+              <a:t>[2-1 UDP · TCP/IP · 약 1분 30초]</a:t>
+            </a:r>
+          </a:p>
+          <a:p>
+            <a:r>
+              <a:t>둘 다 IP 위에 올라갑니다. 차이는 사실상 하나입니다. 신뢰성을 커널이 책임지느냐, 애플리케이션이 책임지느냐.</a:t>
+            </a:r>
+          </a:p>
+          <a:p/>
+          <a:p>
+            <a:r>
+              <a:t>표를 위에서부터 한 줄씩 보시면 됩니다. TCP 는 3-way handshake 로 연결을 맺고 시작하고, UDP 는 연결 절차 없이 주소만 알면 바로 보냅니다. 유실이 나면 TCP 는 커널이 재전송하고 순서까지 맞춰 주지만, UDP 는 그 처리를 애플리케이션이 떠안습니다. 그 대가로 TCP 는 헤더가 20 바이트에 재전송 때문에 지연이 튀고, UDP 는 헤더 8 바이트에 지연이 낮습니다.</a:t>
+            </a:r>
+          </a:p>
+          <a:p/>
+          <a:p>
+            <a:r>
+              <a:t>그래서 쓰는 곳이 갈립니다. 한 건도 빠지면 안 되는 파일 전송이나 명령 제어는 TCP, 최신 값만 의미 있는 센서나 영상·음성 스트리밍은 UDP 입니다. 이번 과제에서는 ToDo#3 의 데이터 송수신에 TCP 를 쓰고, UDP 는 TCP Sync 라인체크에만 씁니다.</a:t>
+            </a:r>
+          </a:p>
+          <a:p/>
+          <a:p>
+            <a:r>
+              <a:t>아래가 구현할 때 실제로 걸린 부분입니다. TCP 는 바이트 스트림이라 메시지 경계가 없습니다. 송신이 4 바이트를 한 번에 보내도 커널 버퍼에는 그냥 바이트로 쌓이고, 수신은 2 바이트만 받을 수 있습니다. 그래서 남은 만큼 다시 받아 요청한 크기를 다 채울 때까지 반복해야 하고, f_SocketRecvTCP_IPv4 가 정확히 그 루프로 되어 있습니다.</a:t>
+            </a:r>
           </a:p>
         </p:txBody>
       </p:sp>
@@ -38943,1460 +38960,1727 @@
                 <a:ea typeface="맑은 고딕" pitchFamily="34" charset="-122"/>
                 <a:cs typeface="맑은 고딕" pitchFamily="34" charset="-120"/>
               </a:rPr>
-              <a:t>같은 IP 위에 올라가지만, 신뢰성을 커널이 책임지느냐 애플리케이션이 책임지느냐가 다르다</a:t>
+              <a:t>둘 다 IP 위에 올라간다. 차이는 하나 — 신뢰성을 커널이 책임지느냐, 앱이 책임지느냐</a:t>
             </a:r>
             <a:endParaRPr lang="en-US" sz="1250" dirty="0"/>
           </a:p>
         </p:txBody>
       </p:sp>
-      <p:sp>
-        <p:nvSpPr>
-          <p:cNvPr id="6" name="Shape 4"/>
+      <p:graphicFrame>
+        <p:nvGraphicFramePr>
+          <p:cNvPr id="6" name="Table 0"/>
+          <p:cNvGraphicFramePr>
+            <a:graphicFrameLocks noGrp="1"/>
+          </p:cNvGraphicFramePr>
+          <p:nvPr>
+            <p:extLst>
+              <p:ext uri="{D42A27DB-BD31-4B8C-83A1-F6EECF244321}">
+                <p14:modId xmlns:p14="http://schemas.microsoft.com/office/powerpoint/2010/main" val="1579011935"/>
+              </p:ext>
+            </p:extLst>
+          </p:nvPr>
+        </p:nvGraphicFramePr>
+        <p:xfrm>
+          <a:off x="548640" y="1298448"/>
+          <a:ext cx="11094415" cy="914400"/>
+        </p:xfrm>
+        <a:graphic>
+          <a:graphicData uri="http://schemas.openxmlformats.org/drawingml/2006/table">
+            <a:tbl>
+              <a:tblPr/>
+              <a:tblGrid>
+                <a:gridCol w="1920240"/>
+                <a:gridCol w="4587088"/>
+                <a:gridCol w="4587087"/>
+              </a:tblGrid>
+              <a:tr h="384048">
+                <a:tc>
+                  <a:txBody>
+                    <a:bodyPr/>
+                    <a:lstStyle/>
+                    <a:p>
+                      <a:pPr algn="l" indent="0" marL="0">
+                        <a:buNone/>
+                      </a:pPr>
+                      <a:r>
+                        <a:rPr lang="en-US" sz="1150" b="1" dirty="0">
+                          <a:solidFill>
+                            <a:srgbClr val="FFFFFF"/>
+                          </a:solidFill>
+                          <a:latin typeface="맑은 고딕" pitchFamily="34" charset="0"/>
+                          <a:ea typeface="맑은 고딕" pitchFamily="34" charset="-122"/>
+                          <a:cs typeface="맑은 고딕" pitchFamily="34" charset="-120"/>
+                        </a:rPr>
+                        <a:t>구분</a:t>
+                      </a:r>
+                      <a:endParaRPr lang="en-US" sz="1150" dirty="0">
+                        <a:latin typeface="맑은 고딕" charset="0"/>
+                        <a:ea typeface="맑은 고딕" charset="0"/>
+                        <a:cs typeface="맑은 고딕" charset="0"/>
+                      </a:endParaRPr>
+                    </a:p>
+                  </a:txBody>
+                  <a:tcPr marL="76200" marR="76200" marT="25400" marB="25400" anchor="ctr">
+                    <a:lnL w="9525" cap="flat" cmpd="sng" algn="ctr">
+                      <a:solidFill>
+                        <a:srgbClr val="D5DBE4"/>
+                      </a:solidFill>
+                      <a:prstDash val="solid"/>
+                      <a:round/>
+                      <a:headEnd type="none" w="med" len="med"/>
+                      <a:tailEnd type="none" w="med" len="med"/>
+                    </a:lnL>
+                    <a:lnR w="9525" cap="flat" cmpd="sng" algn="ctr">
+                      <a:solidFill>
+                        <a:srgbClr val="D5DBE4"/>
+                      </a:solidFill>
+                      <a:prstDash val="solid"/>
+                      <a:round/>
+                      <a:headEnd type="none" w="med" len="med"/>
+                      <a:tailEnd type="none" w="med" len="med"/>
+                    </a:lnR>
+                    <a:lnT w="9525" cap="flat" cmpd="sng" algn="ctr">
+                      <a:solidFill>
+                        <a:srgbClr val="D5DBE4"/>
+                      </a:solidFill>
+                      <a:prstDash val="solid"/>
+                      <a:round/>
+                      <a:headEnd type="none" w="med" len="med"/>
+                      <a:tailEnd type="none" w="med" len="med"/>
+                    </a:lnT>
+                    <a:lnB w="9525" cap="flat" cmpd="sng" algn="ctr">
+                      <a:solidFill>
+                        <a:srgbClr val="D5DBE4"/>
+                      </a:solidFill>
+                      <a:prstDash val="solid"/>
+                      <a:round/>
+                      <a:headEnd type="none" w="med" len="med"/>
+                      <a:tailEnd type="none" w="med" len="med"/>
+                    </a:lnB>
+                    <a:solidFill>
+                      <a:srgbClr val="1E232E"/>
+                    </a:solidFill>
+                  </a:tcPr>
+                </a:tc>
+                <a:tc>
+                  <a:txBody>
+                    <a:bodyPr/>
+                    <a:lstStyle/>
+                    <a:p>
+                      <a:pPr algn="ctr" indent="0" marL="0">
+                        <a:buNone/>
+                      </a:pPr>
+                      <a:r>
+                        <a:rPr lang="en-US" sz="1150" b="1" dirty="0">
+                          <a:solidFill>
+                            <a:srgbClr val="FFFFFF"/>
+                          </a:solidFill>
+                          <a:latin typeface="맑은 고딕" pitchFamily="34" charset="0"/>
+                          <a:ea typeface="맑은 고딕" pitchFamily="34" charset="-122"/>
+                          <a:cs typeface="맑은 고딕" pitchFamily="34" charset="-120"/>
+                        </a:rPr>
+                        <a:t>TCP / IP</a:t>
+                      </a:r>
+                      <a:r>
+                        <a:rPr lang="en-US" sz="850" b="0" dirty="0">
+                          <a:solidFill>
+                            <a:srgbClr val="9AA5B4"/>
+                          </a:solidFill>
+                          <a:latin typeface="맑은 고딕" pitchFamily="34" charset="0"/>
+                          <a:ea typeface="맑은 고딕" pitchFamily="34" charset="-122"/>
+                          <a:cs typeface="맑은 고딕" pitchFamily="34" charset="-120"/>
+                        </a:rPr>
+                        <a:t>   Transmission Control Protocol</a:t>
+                      </a:r>
+                      <a:endParaRPr lang="en-US" sz="1150" dirty="0">
+                        <a:latin typeface="맑은 고딕" charset="0"/>
+                        <a:ea typeface="맑은 고딕" charset="0"/>
+                        <a:cs typeface="맑은 고딕" charset="0"/>
+                      </a:endParaRPr>
+                    </a:p>
+                  </a:txBody>
+                  <a:tcPr marL="76200" marR="76200" marT="25400" marB="25400" anchor="ctr">
+                    <a:lnL w="9525" cap="flat" cmpd="sng" algn="ctr">
+                      <a:solidFill>
+                        <a:srgbClr val="D5DBE4"/>
+                      </a:solidFill>
+                      <a:prstDash val="solid"/>
+                      <a:round/>
+                      <a:headEnd type="none" w="med" len="med"/>
+                      <a:tailEnd type="none" w="med" len="med"/>
+                    </a:lnL>
+                    <a:lnR w="9525" cap="flat" cmpd="sng" algn="ctr">
+                      <a:solidFill>
+                        <a:srgbClr val="D5DBE4"/>
+                      </a:solidFill>
+                      <a:prstDash val="solid"/>
+                      <a:round/>
+                      <a:headEnd type="none" w="med" len="med"/>
+                      <a:tailEnd type="none" w="med" len="med"/>
+                    </a:lnR>
+                    <a:lnT w="9525" cap="flat" cmpd="sng" algn="ctr">
+                      <a:solidFill>
+                        <a:srgbClr val="D5DBE4"/>
+                      </a:solidFill>
+                      <a:prstDash val="solid"/>
+                      <a:round/>
+                      <a:headEnd type="none" w="med" len="med"/>
+                      <a:tailEnd type="none" w="med" len="med"/>
+                    </a:lnT>
+                    <a:lnB w="9525" cap="flat" cmpd="sng" algn="ctr">
+                      <a:solidFill>
+                        <a:srgbClr val="D5DBE4"/>
+                      </a:solidFill>
+                      <a:prstDash val="solid"/>
+                      <a:round/>
+                      <a:headEnd type="none" w="med" len="med"/>
+                      <a:tailEnd type="none" w="med" len="med"/>
+                    </a:lnB>
+                    <a:solidFill>
+                      <a:srgbClr val="1E232E"/>
+                    </a:solidFill>
+                  </a:tcPr>
+                </a:tc>
+                <a:tc>
+                  <a:txBody>
+                    <a:bodyPr/>
+                    <a:lstStyle/>
+                    <a:p>
+                      <a:pPr algn="ctr" indent="0" marL="0">
+                        <a:buNone/>
+                      </a:pPr>
+                      <a:r>
+                        <a:rPr lang="en-US" sz="1150" b="1" dirty="0">
+                          <a:solidFill>
+                            <a:srgbClr val="FFFFFF"/>
+                          </a:solidFill>
+                          <a:latin typeface="맑은 고딕" pitchFamily="34" charset="0"/>
+                          <a:ea typeface="맑은 고딕" pitchFamily="34" charset="-122"/>
+                          <a:cs typeface="맑은 고딕" pitchFamily="34" charset="-120"/>
+                        </a:rPr>
+                        <a:t>UDP</a:t>
+                      </a:r>
+                      <a:r>
+                        <a:rPr lang="en-US" sz="850" b="0" dirty="0">
+                          <a:solidFill>
+                            <a:srgbClr val="9AA5B4"/>
+                          </a:solidFill>
+                          <a:latin typeface="맑은 고딕" pitchFamily="34" charset="0"/>
+                          <a:ea typeface="맑은 고딕" pitchFamily="34" charset="-122"/>
+                          <a:cs typeface="맑은 고딕" pitchFamily="34" charset="-120"/>
+                        </a:rPr>
+                        <a:t>   User Datagram Protocol</a:t>
+                      </a:r>
+                      <a:endParaRPr lang="en-US" sz="1150" dirty="0">
+                        <a:latin typeface="맑은 고딕" charset="0"/>
+                        <a:ea typeface="맑은 고딕" charset="0"/>
+                        <a:cs typeface="맑은 고딕" charset="0"/>
+                      </a:endParaRPr>
+                    </a:p>
+                  </a:txBody>
+                  <a:tcPr marL="76200" marR="76200" marT="25400" marB="25400" anchor="ctr">
+                    <a:lnL w="9525" cap="flat" cmpd="sng" algn="ctr">
+                      <a:solidFill>
+                        <a:srgbClr val="D5DBE4"/>
+                      </a:solidFill>
+                      <a:prstDash val="solid"/>
+                      <a:round/>
+                      <a:headEnd type="none" w="med" len="med"/>
+                      <a:tailEnd type="none" w="med" len="med"/>
+                    </a:lnL>
+                    <a:lnR w="9525" cap="flat" cmpd="sng" algn="ctr">
+                      <a:solidFill>
+                        <a:srgbClr val="D5DBE4"/>
+                      </a:solidFill>
+                      <a:prstDash val="solid"/>
+                      <a:round/>
+                      <a:headEnd type="none" w="med" len="med"/>
+                      <a:tailEnd type="none" w="med" len="med"/>
+                    </a:lnR>
+                    <a:lnT w="9525" cap="flat" cmpd="sng" algn="ctr">
+                      <a:solidFill>
+                        <a:srgbClr val="D5DBE4"/>
+                      </a:solidFill>
+                      <a:prstDash val="solid"/>
+                      <a:round/>
+                      <a:headEnd type="none" w="med" len="med"/>
+                      <a:tailEnd type="none" w="med" len="med"/>
+                    </a:lnT>
+                    <a:lnB w="9525" cap="flat" cmpd="sng" algn="ctr">
+                      <a:solidFill>
+                        <a:srgbClr val="D5DBE4"/>
+                      </a:solidFill>
+                      <a:prstDash val="solid"/>
+                      <a:round/>
+                      <a:headEnd type="none" w="med" len="med"/>
+                      <a:tailEnd type="none" w="med" len="med"/>
+                    </a:lnB>
+                    <a:solidFill>
+                      <a:srgbClr val="1E232E"/>
+                    </a:solidFill>
+                  </a:tcPr>
+                </a:tc>
+              </a:tr>
+              <a:tr h="384048">
+                <a:tc>
+                  <a:txBody>
+                    <a:bodyPr/>
+                    <a:lstStyle/>
+                    <a:p>
+                      <a:pPr algn="l" indent="0" marL="0">
+                        <a:buNone/>
+                      </a:pPr>
+                      <a:r>
+                        <a:rPr lang="en-US" sz="1100" b="1" dirty="0">
+                          <a:solidFill>
+                            <a:srgbClr val="1E232E"/>
+                          </a:solidFill>
+                          <a:latin typeface="맑은 고딕" pitchFamily="34" charset="0"/>
+                          <a:ea typeface="맑은 고딕" pitchFamily="34" charset="-122"/>
+                          <a:cs typeface="맑은 고딕" pitchFamily="34" charset="-120"/>
+                        </a:rPr>
+                        <a:t>연결</a:t>
+                      </a:r>
+                      <a:endParaRPr lang="en-US" sz="1100" dirty="0">
+                        <a:latin typeface="맑은 고딕" charset="0"/>
+                        <a:ea typeface="맑은 고딕" charset="0"/>
+                        <a:cs typeface="맑은 고딕" charset="0"/>
+                      </a:endParaRPr>
+                    </a:p>
+                  </a:txBody>
+                  <a:tcPr marL="76200" marR="76200" marT="25400" marB="25400" anchor="ctr">
+                    <a:lnL w="9525" cap="flat" cmpd="sng" algn="ctr">
+                      <a:solidFill>
+                        <a:srgbClr val="D5DBE4"/>
+                      </a:solidFill>
+                      <a:prstDash val="solid"/>
+                      <a:round/>
+                      <a:headEnd type="none" w="med" len="med"/>
+                      <a:tailEnd type="none" w="med" len="med"/>
+                    </a:lnL>
+                    <a:lnR w="9525" cap="flat" cmpd="sng" algn="ctr">
+                      <a:solidFill>
+                        <a:srgbClr val="D5DBE4"/>
+                      </a:solidFill>
+                      <a:prstDash val="solid"/>
+                      <a:round/>
+                      <a:headEnd type="none" w="med" len="med"/>
+                      <a:tailEnd type="none" w="med" len="med"/>
+                    </a:lnR>
+                    <a:lnT w="9525" cap="flat" cmpd="sng" algn="ctr">
+                      <a:solidFill>
+                        <a:srgbClr val="D5DBE4"/>
+                      </a:solidFill>
+                      <a:prstDash val="solid"/>
+                      <a:round/>
+                      <a:headEnd type="none" w="med" len="med"/>
+                      <a:tailEnd type="none" w="med" len="med"/>
+                    </a:lnT>
+                    <a:lnB w="9525" cap="flat" cmpd="sng" algn="ctr">
+                      <a:solidFill>
+                        <a:srgbClr val="D5DBE4"/>
+                      </a:solidFill>
+                      <a:prstDash val="solid"/>
+                      <a:round/>
+                      <a:headEnd type="none" w="med" len="med"/>
+                      <a:tailEnd type="none" w="med" len="med"/>
+                    </a:lnB>
+                    <a:solidFill>
+                      <a:srgbClr val="FFFFFF"/>
+                    </a:solidFill>
+                  </a:tcPr>
+                </a:tc>
+                <a:tc>
+                  <a:txBody>
+                    <a:bodyPr/>
+                    <a:lstStyle/>
+                    <a:p>
+                      <a:pPr algn="ctr" indent="0" marL="0">
+                        <a:buNone/>
+                      </a:pPr>
+                      <a:r>
+                        <a:rPr lang="en-US" sz="1100" dirty="0">
+                          <a:solidFill>
+                            <a:srgbClr val="3D4451"/>
+                          </a:solidFill>
+                          <a:latin typeface="맑은 고딕" pitchFamily="34" charset="0"/>
+                          <a:ea typeface="맑은 고딕" pitchFamily="34" charset="-122"/>
+                          <a:cs typeface="맑은 고딕" pitchFamily="34" charset="-120"/>
+                        </a:rPr>
+                        <a:t>3-way handshake 로 맺고 시작한다</a:t>
+                      </a:r>
+                      <a:endParaRPr lang="en-US" sz="1100" dirty="0">
+                        <a:latin typeface="맑은 고딕" charset="0"/>
+                        <a:ea typeface="맑은 고딕" charset="0"/>
+                        <a:cs typeface="맑은 고딕" charset="0"/>
+                      </a:endParaRPr>
+                    </a:p>
+                  </a:txBody>
+                  <a:tcPr marL="76200" marR="76200" marT="25400" marB="25400" anchor="ctr">
+                    <a:lnL w="9525" cap="flat" cmpd="sng" algn="ctr">
+                      <a:solidFill>
+                        <a:srgbClr val="D5DBE4"/>
+                      </a:solidFill>
+                      <a:prstDash val="solid"/>
+                      <a:round/>
+                      <a:headEnd type="none" w="med" len="med"/>
+                      <a:tailEnd type="none" w="med" len="med"/>
+                    </a:lnL>
+                    <a:lnR w="9525" cap="flat" cmpd="sng" algn="ctr">
+                      <a:solidFill>
+                        <a:srgbClr val="D5DBE4"/>
+                      </a:solidFill>
+                      <a:prstDash val="solid"/>
+                      <a:round/>
+                      <a:headEnd type="none" w="med" len="med"/>
+                      <a:tailEnd type="none" w="med" len="med"/>
+                    </a:lnR>
+                    <a:lnT w="9525" cap="flat" cmpd="sng" algn="ctr">
+                      <a:solidFill>
+                        <a:srgbClr val="D5DBE4"/>
+                      </a:solidFill>
+                      <a:prstDash val="solid"/>
+                      <a:round/>
+                      <a:headEnd type="none" w="med" len="med"/>
+                      <a:tailEnd type="none" w="med" len="med"/>
+                    </a:lnT>
+                    <a:lnB w="9525" cap="flat" cmpd="sng" algn="ctr">
+                      <a:solidFill>
+                        <a:srgbClr val="D5DBE4"/>
+                      </a:solidFill>
+                      <a:prstDash val="solid"/>
+                      <a:round/>
+                      <a:headEnd type="none" w="med" len="med"/>
+                      <a:tailEnd type="none" w="med" len="med"/>
+                    </a:lnB>
+                    <a:solidFill>
+                      <a:srgbClr val="FFFFFF"/>
+                    </a:solidFill>
+                  </a:tcPr>
+                </a:tc>
+                <a:tc>
+                  <a:txBody>
+                    <a:bodyPr/>
+                    <a:lstStyle/>
+                    <a:p>
+                      <a:pPr algn="ctr" indent="0" marL="0">
+                        <a:buNone/>
+                      </a:pPr>
+                      <a:r>
+                        <a:rPr lang="en-US" sz="1100" dirty="0">
+                          <a:solidFill>
+                            <a:srgbClr val="3D4451"/>
+                          </a:solidFill>
+                          <a:latin typeface="맑은 고딕" pitchFamily="34" charset="0"/>
+                          <a:ea typeface="맑은 고딕" pitchFamily="34" charset="-122"/>
+                          <a:cs typeface="맑은 고딕" pitchFamily="34" charset="-120"/>
+                        </a:rPr>
+                        <a:t>없음 — 주소만 알면 바로 보낸다</a:t>
+                      </a:r>
+                      <a:endParaRPr lang="en-US" sz="1100" dirty="0">
+                        <a:latin typeface="맑은 고딕" charset="0"/>
+                        <a:ea typeface="맑은 고딕" charset="0"/>
+                        <a:cs typeface="맑은 고딕" charset="0"/>
+                      </a:endParaRPr>
+                    </a:p>
+                  </a:txBody>
+                  <a:tcPr marL="76200" marR="76200" marT="25400" marB="25400" anchor="ctr">
+                    <a:lnL w="9525" cap="flat" cmpd="sng" algn="ctr">
+                      <a:solidFill>
+                        <a:srgbClr val="D5DBE4"/>
+                      </a:solidFill>
+                      <a:prstDash val="solid"/>
+                      <a:round/>
+                      <a:headEnd type="none" w="med" len="med"/>
+                      <a:tailEnd type="none" w="med" len="med"/>
+                    </a:lnL>
+                    <a:lnR w="9525" cap="flat" cmpd="sng" algn="ctr">
+                      <a:solidFill>
+                        <a:srgbClr val="D5DBE4"/>
+                      </a:solidFill>
+                      <a:prstDash val="solid"/>
+                      <a:round/>
+                      <a:headEnd type="none" w="med" len="med"/>
+                      <a:tailEnd type="none" w="med" len="med"/>
+                    </a:lnR>
+                    <a:lnT w="9525" cap="flat" cmpd="sng" algn="ctr">
+                      <a:solidFill>
+                        <a:srgbClr val="D5DBE4"/>
+                      </a:solidFill>
+                      <a:prstDash val="solid"/>
+                      <a:round/>
+                      <a:headEnd type="none" w="med" len="med"/>
+                      <a:tailEnd type="none" w="med" len="med"/>
+                    </a:lnT>
+                    <a:lnB w="9525" cap="flat" cmpd="sng" algn="ctr">
+                      <a:solidFill>
+                        <a:srgbClr val="D5DBE4"/>
+                      </a:solidFill>
+                      <a:prstDash val="solid"/>
+                      <a:round/>
+                      <a:headEnd type="none" w="med" len="med"/>
+                      <a:tailEnd type="none" w="med" len="med"/>
+                    </a:lnB>
+                    <a:solidFill>
+                      <a:srgbClr val="FFFFFF"/>
+                    </a:solidFill>
+                  </a:tcPr>
+                </a:tc>
+              </a:tr>
+              <a:tr h="384048">
+                <a:tc>
+                  <a:txBody>
+                    <a:bodyPr/>
+                    <a:lstStyle/>
+                    <a:p>
+                      <a:pPr algn="l" indent="0" marL="0">
+                        <a:buNone/>
+                      </a:pPr>
+                      <a:r>
+                        <a:rPr lang="en-US" sz="1100" b="1" dirty="0">
+                          <a:solidFill>
+                            <a:srgbClr val="1E232E"/>
+                          </a:solidFill>
+                          <a:latin typeface="맑은 고딕" pitchFamily="34" charset="0"/>
+                          <a:ea typeface="맑은 고딕" pitchFamily="34" charset="-122"/>
+                          <a:cs typeface="맑은 고딕" pitchFamily="34" charset="-120"/>
+                        </a:rPr>
+                        <a:t>신뢰성</a:t>
+                      </a:r>
+                      <a:endParaRPr lang="en-US" sz="1100" dirty="0">
+                        <a:latin typeface="맑은 고딕" charset="0"/>
+                        <a:ea typeface="맑은 고딕" charset="0"/>
+                        <a:cs typeface="맑은 고딕" charset="0"/>
+                      </a:endParaRPr>
+                    </a:p>
+                  </a:txBody>
+                  <a:tcPr marL="76200" marR="76200" marT="25400" marB="25400" anchor="ctr">
+                    <a:lnL w="9525" cap="flat" cmpd="sng" algn="ctr">
+                      <a:solidFill>
+                        <a:srgbClr val="D5DBE4"/>
+                      </a:solidFill>
+                      <a:prstDash val="solid"/>
+                      <a:round/>
+                      <a:headEnd type="none" w="med" len="med"/>
+                      <a:tailEnd type="none" w="med" len="med"/>
+                    </a:lnL>
+                    <a:lnR w="9525" cap="flat" cmpd="sng" algn="ctr">
+                      <a:solidFill>
+                        <a:srgbClr val="D5DBE4"/>
+                      </a:solidFill>
+                      <a:prstDash val="solid"/>
+                      <a:round/>
+                      <a:headEnd type="none" w="med" len="med"/>
+                      <a:tailEnd type="none" w="med" len="med"/>
+                    </a:lnR>
+                    <a:lnT w="9525" cap="flat" cmpd="sng" algn="ctr">
+                      <a:solidFill>
+                        <a:srgbClr val="D5DBE4"/>
+                      </a:solidFill>
+                      <a:prstDash val="solid"/>
+                      <a:round/>
+                      <a:headEnd type="none" w="med" len="med"/>
+                      <a:tailEnd type="none" w="med" len="med"/>
+                    </a:lnT>
+                    <a:lnB w="9525" cap="flat" cmpd="sng" algn="ctr">
+                      <a:solidFill>
+                        <a:srgbClr val="D5DBE4"/>
+                      </a:solidFill>
+                      <a:prstDash val="solid"/>
+                      <a:round/>
+                      <a:headEnd type="none" w="med" len="med"/>
+                      <a:tailEnd type="none" w="med" len="med"/>
+                    </a:lnB>
+                    <a:solidFill>
+                      <a:srgbClr val="F2F4F7"/>
+                    </a:solidFill>
+                  </a:tcPr>
+                </a:tc>
+                <a:tc>
+                  <a:txBody>
+                    <a:bodyPr/>
+                    <a:lstStyle/>
+                    <a:p>
+                      <a:pPr algn="ctr" indent="0" marL="0">
+                        <a:buNone/>
+                      </a:pPr>
+                      <a:r>
+                        <a:rPr lang="en-US" sz="1100" dirty="0">
+                          <a:solidFill>
+                            <a:srgbClr val="3D4451"/>
+                          </a:solidFill>
+                          <a:latin typeface="맑은 고딕" pitchFamily="34" charset="0"/>
+                          <a:ea typeface="맑은 고딕" pitchFamily="34" charset="-122"/>
+                          <a:cs typeface="맑은 고딕" pitchFamily="34" charset="-120"/>
+                        </a:rPr>
+                        <a:t>커널이 보장 (재전송 · 순서 · 중복)</a:t>
+                      </a:r>
+                      <a:endParaRPr lang="en-US" sz="1100" dirty="0">
+                        <a:latin typeface="맑은 고딕" charset="0"/>
+                        <a:ea typeface="맑은 고딕" charset="0"/>
+                        <a:cs typeface="맑은 고딕" charset="0"/>
+                      </a:endParaRPr>
+                    </a:p>
+                  </a:txBody>
+                  <a:tcPr marL="76200" marR="76200" marT="25400" marB="25400" anchor="ctr">
+                    <a:lnL w="9525" cap="flat" cmpd="sng" algn="ctr">
+                      <a:solidFill>
+                        <a:srgbClr val="D5DBE4"/>
+                      </a:solidFill>
+                      <a:prstDash val="solid"/>
+                      <a:round/>
+                      <a:headEnd type="none" w="med" len="med"/>
+                      <a:tailEnd type="none" w="med" len="med"/>
+                    </a:lnL>
+                    <a:lnR w="9525" cap="flat" cmpd="sng" algn="ctr">
+                      <a:solidFill>
+                        <a:srgbClr val="D5DBE4"/>
+                      </a:solidFill>
+                      <a:prstDash val="solid"/>
+                      <a:round/>
+                      <a:headEnd type="none" w="med" len="med"/>
+                      <a:tailEnd type="none" w="med" len="med"/>
+                    </a:lnR>
+                    <a:lnT w="9525" cap="flat" cmpd="sng" algn="ctr">
+                      <a:solidFill>
+                        <a:srgbClr val="D5DBE4"/>
+                      </a:solidFill>
+                      <a:prstDash val="solid"/>
+                      <a:round/>
+                      <a:headEnd type="none" w="med" len="med"/>
+                      <a:tailEnd type="none" w="med" len="med"/>
+                    </a:lnT>
+                    <a:lnB w="9525" cap="flat" cmpd="sng" algn="ctr">
+                      <a:solidFill>
+                        <a:srgbClr val="D5DBE4"/>
+                      </a:solidFill>
+                      <a:prstDash val="solid"/>
+                      <a:round/>
+                      <a:headEnd type="none" w="med" len="med"/>
+                      <a:tailEnd type="none" w="med" len="med"/>
+                    </a:lnB>
+                    <a:solidFill>
+                      <a:srgbClr val="F2F4F7"/>
+                    </a:solidFill>
+                  </a:tcPr>
+                </a:tc>
+                <a:tc>
+                  <a:txBody>
+                    <a:bodyPr/>
+                    <a:lstStyle/>
+                    <a:p>
+                      <a:pPr algn="ctr" indent="0" marL="0">
+                        <a:buNone/>
+                      </a:pPr>
+                      <a:r>
+                        <a:rPr lang="en-US" sz="1100" dirty="0">
+                          <a:solidFill>
+                            <a:srgbClr val="3D4451"/>
+                          </a:solidFill>
+                          <a:latin typeface="맑은 고딕" pitchFamily="34" charset="0"/>
+                          <a:ea typeface="맑은 고딕" pitchFamily="34" charset="-122"/>
+                          <a:cs typeface="맑은 고딕" pitchFamily="34" charset="-120"/>
+                        </a:rPr>
+                        <a:t>보장 없음 — 앱이 직접 처리</a:t>
+                      </a:r>
+                      <a:endParaRPr lang="en-US" sz="1100" dirty="0">
+                        <a:latin typeface="맑은 고딕" charset="0"/>
+                        <a:ea typeface="맑은 고딕" charset="0"/>
+                        <a:cs typeface="맑은 고딕" charset="0"/>
+                      </a:endParaRPr>
+                    </a:p>
+                  </a:txBody>
+                  <a:tcPr marL="76200" marR="76200" marT="25400" marB="25400" anchor="ctr">
+                    <a:lnL w="9525" cap="flat" cmpd="sng" algn="ctr">
+                      <a:solidFill>
+                        <a:srgbClr val="D5DBE4"/>
+                      </a:solidFill>
+                      <a:prstDash val="solid"/>
+                      <a:round/>
+                      <a:headEnd type="none" w="med" len="med"/>
+                      <a:tailEnd type="none" w="med" len="med"/>
+                    </a:lnL>
+                    <a:lnR w="9525" cap="flat" cmpd="sng" algn="ctr">
+                      <a:solidFill>
+                        <a:srgbClr val="D5DBE4"/>
+                      </a:solidFill>
+                      <a:prstDash val="solid"/>
+                      <a:round/>
+                      <a:headEnd type="none" w="med" len="med"/>
+                      <a:tailEnd type="none" w="med" len="med"/>
+                    </a:lnR>
+                    <a:lnT w="9525" cap="flat" cmpd="sng" algn="ctr">
+                      <a:solidFill>
+                        <a:srgbClr val="D5DBE4"/>
+                      </a:solidFill>
+                      <a:prstDash val="solid"/>
+                      <a:round/>
+                      <a:headEnd type="none" w="med" len="med"/>
+                      <a:tailEnd type="none" w="med" len="med"/>
+                    </a:lnT>
+                    <a:lnB w="9525" cap="flat" cmpd="sng" algn="ctr">
+                      <a:solidFill>
+                        <a:srgbClr val="D5DBE4"/>
+                      </a:solidFill>
+                      <a:prstDash val="solid"/>
+                      <a:round/>
+                      <a:headEnd type="none" w="med" len="med"/>
+                      <a:tailEnd type="none" w="med" len="med"/>
+                    </a:lnB>
+                    <a:solidFill>
+                      <a:srgbClr val="F2F4F7"/>
+                    </a:solidFill>
+                  </a:tcPr>
+                </a:tc>
+              </a:tr>
+              <a:tr h="384048">
+                <a:tc>
+                  <a:txBody>
+                    <a:bodyPr/>
+                    <a:lstStyle/>
+                    <a:p>
+                      <a:pPr algn="l" indent="0" marL="0">
+                        <a:buNone/>
+                      </a:pPr>
+                      <a:r>
+                        <a:rPr lang="en-US" sz="1100" b="1" dirty="0">
+                          <a:solidFill>
+                            <a:srgbClr val="1E232E"/>
+                          </a:solidFill>
+                          <a:latin typeface="맑은 고딕" pitchFamily="34" charset="0"/>
+                          <a:ea typeface="맑은 고딕" pitchFamily="34" charset="-122"/>
+                          <a:cs typeface="맑은 고딕" pitchFamily="34" charset="-120"/>
+                        </a:rPr>
+                        <a:t>데이터 단위</a:t>
+                      </a:r>
+                      <a:endParaRPr lang="en-US" sz="1100" dirty="0">
+                        <a:latin typeface="맑은 고딕" charset="0"/>
+                        <a:ea typeface="맑은 고딕" charset="0"/>
+                        <a:cs typeface="맑은 고딕" charset="0"/>
+                      </a:endParaRPr>
+                    </a:p>
+                  </a:txBody>
+                  <a:tcPr marL="76200" marR="76200" marT="25400" marB="25400" anchor="ctr">
+                    <a:lnL w="9525" cap="flat" cmpd="sng" algn="ctr">
+                      <a:solidFill>
+                        <a:srgbClr val="D5DBE4"/>
+                      </a:solidFill>
+                      <a:prstDash val="solid"/>
+                      <a:round/>
+                      <a:headEnd type="none" w="med" len="med"/>
+                      <a:tailEnd type="none" w="med" len="med"/>
+                    </a:lnL>
+                    <a:lnR w="9525" cap="flat" cmpd="sng" algn="ctr">
+                      <a:solidFill>
+                        <a:srgbClr val="D5DBE4"/>
+                      </a:solidFill>
+                      <a:prstDash val="solid"/>
+                      <a:round/>
+                      <a:headEnd type="none" w="med" len="med"/>
+                      <a:tailEnd type="none" w="med" len="med"/>
+                    </a:lnR>
+                    <a:lnT w="9525" cap="flat" cmpd="sng" algn="ctr">
+                      <a:solidFill>
+                        <a:srgbClr val="D5DBE4"/>
+                      </a:solidFill>
+                      <a:prstDash val="solid"/>
+                      <a:round/>
+                      <a:headEnd type="none" w="med" len="med"/>
+                      <a:tailEnd type="none" w="med" len="med"/>
+                    </a:lnT>
+                    <a:lnB w="9525" cap="flat" cmpd="sng" algn="ctr">
+                      <a:solidFill>
+                        <a:srgbClr val="D5DBE4"/>
+                      </a:solidFill>
+                      <a:prstDash val="solid"/>
+                      <a:round/>
+                      <a:headEnd type="none" w="med" len="med"/>
+                      <a:tailEnd type="none" w="med" len="med"/>
+                    </a:lnB>
+                    <a:solidFill>
+                      <a:srgbClr val="FFFFFF"/>
+                    </a:solidFill>
+                  </a:tcPr>
+                </a:tc>
+                <a:tc>
+                  <a:txBody>
+                    <a:bodyPr/>
+                    <a:lstStyle/>
+                    <a:p>
+                      <a:pPr algn="ctr" indent="0" marL="0">
+                        <a:buNone/>
+                      </a:pPr>
+                      <a:r>
+                        <a:rPr lang="en-US" sz="1100" dirty="0">
+                          <a:solidFill>
+                            <a:srgbClr val="3D4451"/>
+                          </a:solidFill>
+                          <a:latin typeface="맑은 고딕" pitchFamily="34" charset="0"/>
+                          <a:ea typeface="맑은 고딕" pitchFamily="34" charset="-122"/>
+                          <a:cs typeface="맑은 고딕" pitchFamily="34" charset="-120"/>
+                        </a:rPr>
+                        <a:t>바이트 스트림 — 경계가 없다</a:t>
+                      </a:r>
+                      <a:endParaRPr lang="en-US" sz="1100" dirty="0">
+                        <a:latin typeface="맑은 고딕" charset="0"/>
+                        <a:ea typeface="맑은 고딕" charset="0"/>
+                        <a:cs typeface="맑은 고딕" charset="0"/>
+                      </a:endParaRPr>
+                    </a:p>
+                  </a:txBody>
+                  <a:tcPr marL="76200" marR="76200" marT="25400" marB="25400" anchor="ctr">
+                    <a:lnL w="9525" cap="flat" cmpd="sng" algn="ctr">
+                      <a:solidFill>
+                        <a:srgbClr val="D5DBE4"/>
+                      </a:solidFill>
+                      <a:prstDash val="solid"/>
+                      <a:round/>
+                      <a:headEnd type="none" w="med" len="med"/>
+                      <a:tailEnd type="none" w="med" len="med"/>
+                    </a:lnL>
+                    <a:lnR w="9525" cap="flat" cmpd="sng" algn="ctr">
+                      <a:solidFill>
+                        <a:srgbClr val="D5DBE4"/>
+                      </a:solidFill>
+                      <a:prstDash val="solid"/>
+                      <a:round/>
+                      <a:headEnd type="none" w="med" len="med"/>
+                      <a:tailEnd type="none" w="med" len="med"/>
+                    </a:lnR>
+                    <a:lnT w="9525" cap="flat" cmpd="sng" algn="ctr">
+                      <a:solidFill>
+                        <a:srgbClr val="D5DBE4"/>
+                      </a:solidFill>
+                      <a:prstDash val="solid"/>
+                      <a:round/>
+                      <a:headEnd type="none" w="med" len="med"/>
+                      <a:tailEnd type="none" w="med" len="med"/>
+                    </a:lnT>
+                    <a:lnB w="9525" cap="flat" cmpd="sng" algn="ctr">
+                      <a:solidFill>
+                        <a:srgbClr val="D5DBE4"/>
+                      </a:solidFill>
+                      <a:prstDash val="solid"/>
+                      <a:round/>
+                      <a:headEnd type="none" w="med" len="med"/>
+                      <a:tailEnd type="none" w="med" len="med"/>
+                    </a:lnB>
+                    <a:solidFill>
+                      <a:srgbClr val="FFFFFF"/>
+                    </a:solidFill>
+                  </a:tcPr>
+                </a:tc>
+                <a:tc>
+                  <a:txBody>
+                    <a:bodyPr/>
+                    <a:lstStyle/>
+                    <a:p>
+                      <a:pPr algn="ctr" indent="0" marL="0">
+                        <a:buNone/>
+                      </a:pPr>
+                      <a:r>
+                        <a:rPr lang="en-US" sz="1100" dirty="0">
+                          <a:solidFill>
+                            <a:srgbClr val="3D4451"/>
+                          </a:solidFill>
+                          <a:latin typeface="맑은 고딕" pitchFamily="34" charset="0"/>
+                          <a:ea typeface="맑은 고딕" pitchFamily="34" charset="-122"/>
+                          <a:cs typeface="맑은 고딕" pitchFamily="34" charset="-120"/>
+                        </a:rPr>
+                        <a:t>데이터그램 — 보낸 크기 그대로</a:t>
+                      </a:r>
+                      <a:endParaRPr lang="en-US" sz="1100" dirty="0">
+                        <a:latin typeface="맑은 고딕" charset="0"/>
+                        <a:ea typeface="맑은 고딕" charset="0"/>
+                        <a:cs typeface="맑은 고딕" charset="0"/>
+                      </a:endParaRPr>
+                    </a:p>
+                  </a:txBody>
+                  <a:tcPr marL="76200" marR="76200" marT="25400" marB="25400" anchor="ctr">
+                    <a:lnL w="9525" cap="flat" cmpd="sng" algn="ctr">
+                      <a:solidFill>
+                        <a:srgbClr val="D5DBE4"/>
+                      </a:solidFill>
+                      <a:prstDash val="solid"/>
+                      <a:round/>
+                      <a:headEnd type="none" w="med" len="med"/>
+                      <a:tailEnd type="none" w="med" len="med"/>
+                    </a:lnL>
+                    <a:lnR w="9525" cap="flat" cmpd="sng" algn="ctr">
+                      <a:solidFill>
+                        <a:srgbClr val="D5DBE4"/>
+                      </a:solidFill>
+                      <a:prstDash val="solid"/>
+                      <a:round/>
+                      <a:headEnd type="none" w="med" len="med"/>
+                      <a:tailEnd type="none" w="med" len="med"/>
+                    </a:lnR>
+                    <a:lnT w="9525" cap="flat" cmpd="sng" algn="ctr">
+                      <a:solidFill>
+                        <a:srgbClr val="D5DBE4"/>
+                      </a:solidFill>
+                      <a:prstDash val="solid"/>
+                      <a:round/>
+                      <a:headEnd type="none" w="med" len="med"/>
+                      <a:tailEnd type="none" w="med" len="med"/>
+                    </a:lnT>
+                    <a:lnB w="9525" cap="flat" cmpd="sng" algn="ctr">
+                      <a:solidFill>
+                        <a:srgbClr val="D5DBE4"/>
+                      </a:solidFill>
+                      <a:prstDash val="solid"/>
+                      <a:round/>
+                      <a:headEnd type="none" w="med" len="med"/>
+                      <a:tailEnd type="none" w="med" len="med"/>
+                    </a:lnB>
+                    <a:solidFill>
+                      <a:srgbClr val="FFFFFF"/>
+                    </a:solidFill>
+                  </a:tcPr>
+                </a:tc>
+              </a:tr>
+              <a:tr h="384048">
+                <a:tc>
+                  <a:txBody>
+                    <a:bodyPr/>
+                    <a:lstStyle/>
+                    <a:p>
+                      <a:pPr algn="l" indent="0" marL="0">
+                        <a:buNone/>
+                      </a:pPr>
+                      <a:r>
+                        <a:rPr lang="en-US" sz="1100" b="1" dirty="0">
+                          <a:solidFill>
+                            <a:srgbClr val="1E232E"/>
+                          </a:solidFill>
+                          <a:latin typeface="맑은 고딕" pitchFamily="34" charset="0"/>
+                          <a:ea typeface="맑은 고딕" pitchFamily="34" charset="-122"/>
+                          <a:cs typeface="맑은 고딕" pitchFamily="34" charset="-120"/>
+                        </a:rPr>
+                        <a:t>통신 상대</a:t>
+                      </a:r>
+                      <a:endParaRPr lang="en-US" sz="1100" dirty="0">
+                        <a:latin typeface="맑은 고딕" charset="0"/>
+                        <a:ea typeface="맑은 고딕" charset="0"/>
+                        <a:cs typeface="맑은 고딕" charset="0"/>
+                      </a:endParaRPr>
+                    </a:p>
+                  </a:txBody>
+                  <a:tcPr marL="76200" marR="76200" marT="25400" marB="25400" anchor="ctr">
+                    <a:lnL w="9525" cap="flat" cmpd="sng" algn="ctr">
+                      <a:solidFill>
+                        <a:srgbClr val="D5DBE4"/>
+                      </a:solidFill>
+                      <a:prstDash val="solid"/>
+                      <a:round/>
+                      <a:headEnd type="none" w="med" len="med"/>
+                      <a:tailEnd type="none" w="med" len="med"/>
+                    </a:lnL>
+                    <a:lnR w="9525" cap="flat" cmpd="sng" algn="ctr">
+                      <a:solidFill>
+                        <a:srgbClr val="D5DBE4"/>
+                      </a:solidFill>
+                      <a:prstDash val="solid"/>
+                      <a:round/>
+                      <a:headEnd type="none" w="med" len="med"/>
+                      <a:tailEnd type="none" w="med" len="med"/>
+                    </a:lnR>
+                    <a:lnT w="9525" cap="flat" cmpd="sng" algn="ctr">
+                      <a:solidFill>
+                        <a:srgbClr val="D5DBE4"/>
+                      </a:solidFill>
+                      <a:prstDash val="solid"/>
+                      <a:round/>
+                      <a:headEnd type="none" w="med" len="med"/>
+                      <a:tailEnd type="none" w="med" len="med"/>
+                    </a:lnT>
+                    <a:lnB w="9525" cap="flat" cmpd="sng" algn="ctr">
+                      <a:solidFill>
+                        <a:srgbClr val="D5DBE4"/>
+                      </a:solidFill>
+                      <a:prstDash val="solid"/>
+                      <a:round/>
+                      <a:headEnd type="none" w="med" len="med"/>
+                      <a:tailEnd type="none" w="med" len="med"/>
+                    </a:lnB>
+                    <a:solidFill>
+                      <a:srgbClr val="F2F4F7"/>
+                    </a:solidFill>
+                  </a:tcPr>
+                </a:tc>
+                <a:tc>
+                  <a:txBody>
+                    <a:bodyPr/>
+                    <a:lstStyle/>
+                    <a:p>
+                      <a:pPr algn="ctr" indent="0" marL="0">
+                        <a:buNone/>
+                      </a:pPr>
+                      <a:r>
+                        <a:rPr lang="en-US" sz="1100" dirty="0">
+                          <a:solidFill>
+                            <a:srgbClr val="3D4451"/>
+                          </a:solidFill>
+                          <a:latin typeface="맑은 고딕" pitchFamily="34" charset="0"/>
+                          <a:ea typeface="맑은 고딕" pitchFamily="34" charset="-122"/>
+                          <a:cs typeface="맑은 고딕" pitchFamily="34" charset="-120"/>
+                        </a:rPr>
+                        <a:t>1 : 1 만 가능</a:t>
+                      </a:r>
+                      <a:endParaRPr lang="en-US" sz="1100" dirty="0">
+                        <a:latin typeface="맑은 고딕" charset="0"/>
+                        <a:ea typeface="맑은 고딕" charset="0"/>
+                        <a:cs typeface="맑은 고딕" charset="0"/>
+                      </a:endParaRPr>
+                    </a:p>
+                  </a:txBody>
+                  <a:tcPr marL="76200" marR="76200" marT="25400" marB="25400" anchor="ctr">
+                    <a:lnL w="9525" cap="flat" cmpd="sng" algn="ctr">
+                      <a:solidFill>
+                        <a:srgbClr val="D5DBE4"/>
+                      </a:solidFill>
+                      <a:prstDash val="solid"/>
+                      <a:round/>
+                      <a:headEnd type="none" w="med" len="med"/>
+                      <a:tailEnd type="none" w="med" len="med"/>
+                    </a:lnL>
+                    <a:lnR w="9525" cap="flat" cmpd="sng" algn="ctr">
+                      <a:solidFill>
+                        <a:srgbClr val="D5DBE4"/>
+                      </a:solidFill>
+                      <a:prstDash val="solid"/>
+                      <a:round/>
+                      <a:headEnd type="none" w="med" len="med"/>
+                      <a:tailEnd type="none" w="med" len="med"/>
+                    </a:lnR>
+                    <a:lnT w="9525" cap="flat" cmpd="sng" algn="ctr">
+                      <a:solidFill>
+                        <a:srgbClr val="D5DBE4"/>
+                      </a:solidFill>
+                      <a:prstDash val="solid"/>
+                      <a:round/>
+                      <a:headEnd type="none" w="med" len="med"/>
+                      <a:tailEnd type="none" w="med" len="med"/>
+                    </a:lnT>
+                    <a:lnB w="9525" cap="flat" cmpd="sng" algn="ctr">
+                      <a:solidFill>
+                        <a:srgbClr val="D5DBE4"/>
+                      </a:solidFill>
+                      <a:prstDash val="solid"/>
+                      <a:round/>
+                      <a:headEnd type="none" w="med" len="med"/>
+                      <a:tailEnd type="none" w="med" len="med"/>
+                    </a:lnB>
+                    <a:solidFill>
+                      <a:srgbClr val="F2F4F7"/>
+                    </a:solidFill>
+                  </a:tcPr>
+                </a:tc>
+                <a:tc>
+                  <a:txBody>
+                    <a:bodyPr/>
+                    <a:lstStyle/>
+                    <a:p>
+                      <a:pPr algn="ctr" indent="0" marL="0">
+                        <a:buNone/>
+                      </a:pPr>
+                      <a:r>
+                        <a:rPr lang="en-US" sz="1100" dirty="0">
+                          <a:solidFill>
+                            <a:srgbClr val="3D4451"/>
+                          </a:solidFill>
+                          <a:latin typeface="맑은 고딕" pitchFamily="34" charset="0"/>
+                          <a:ea typeface="맑은 고딕" pitchFamily="34" charset="-122"/>
+                          <a:cs typeface="맑은 고딕" pitchFamily="34" charset="-120"/>
+                        </a:rPr>
+                        <a:t>1 : N 브로드캐스트 · 멀티캐스트</a:t>
+                      </a:r>
+                      <a:endParaRPr lang="en-US" sz="1100" dirty="0">
+                        <a:latin typeface="맑은 고딕" charset="0"/>
+                        <a:ea typeface="맑은 고딕" charset="0"/>
+                        <a:cs typeface="맑은 고딕" charset="0"/>
+                      </a:endParaRPr>
+                    </a:p>
+                  </a:txBody>
+                  <a:tcPr marL="76200" marR="76200" marT="25400" marB="25400" anchor="ctr">
+                    <a:lnL w="9525" cap="flat" cmpd="sng" algn="ctr">
+                      <a:solidFill>
+                        <a:srgbClr val="D5DBE4"/>
+                      </a:solidFill>
+                      <a:prstDash val="solid"/>
+                      <a:round/>
+                      <a:headEnd type="none" w="med" len="med"/>
+                      <a:tailEnd type="none" w="med" len="med"/>
+                    </a:lnL>
+                    <a:lnR w="9525" cap="flat" cmpd="sng" algn="ctr">
+                      <a:solidFill>
+                        <a:srgbClr val="D5DBE4"/>
+                      </a:solidFill>
+                      <a:prstDash val="solid"/>
+                      <a:round/>
+                      <a:headEnd type="none" w="med" len="med"/>
+                      <a:tailEnd type="none" w="med" len="med"/>
+                    </a:lnR>
+                    <a:lnT w="9525" cap="flat" cmpd="sng" algn="ctr">
+                      <a:solidFill>
+                        <a:srgbClr val="D5DBE4"/>
+                      </a:solidFill>
+                      <a:prstDash val="solid"/>
+                      <a:round/>
+                      <a:headEnd type="none" w="med" len="med"/>
+                      <a:tailEnd type="none" w="med" len="med"/>
+                    </a:lnT>
+                    <a:lnB w="9525" cap="flat" cmpd="sng" algn="ctr">
+                      <a:solidFill>
+                        <a:srgbClr val="D5DBE4"/>
+                      </a:solidFill>
+                      <a:prstDash val="solid"/>
+                      <a:round/>
+                      <a:headEnd type="none" w="med" len="med"/>
+                      <a:tailEnd type="none" w="med" len="med"/>
+                    </a:lnB>
+                    <a:solidFill>
+                      <a:srgbClr val="F2F4F7"/>
+                    </a:solidFill>
+                  </a:tcPr>
+                </a:tc>
+              </a:tr>
+              <a:tr h="384048">
+                <a:tc>
+                  <a:txBody>
+                    <a:bodyPr/>
+                    <a:lstStyle/>
+                    <a:p>
+                      <a:pPr algn="l" indent="0" marL="0">
+                        <a:buNone/>
+                      </a:pPr>
+                      <a:r>
+                        <a:rPr lang="en-US" sz="1100" b="1" dirty="0">
+                          <a:solidFill>
+                            <a:srgbClr val="1E232E"/>
+                          </a:solidFill>
+                          <a:latin typeface="맑은 고딕" pitchFamily="34" charset="0"/>
+                          <a:ea typeface="맑은 고딕" pitchFamily="34" charset="-122"/>
+                          <a:cs typeface="맑은 고딕" pitchFamily="34" charset="-120"/>
+                        </a:rPr>
+                        <a:t>헤더 · 지연</a:t>
+                      </a:r>
+                      <a:endParaRPr lang="en-US" sz="1100" dirty="0">
+                        <a:latin typeface="맑은 고딕" charset="0"/>
+                        <a:ea typeface="맑은 고딕" charset="0"/>
+                        <a:cs typeface="맑은 고딕" charset="0"/>
+                      </a:endParaRPr>
+                    </a:p>
+                  </a:txBody>
+                  <a:tcPr marL="76200" marR="76200" marT="25400" marB="25400" anchor="ctr">
+                    <a:lnL w="9525" cap="flat" cmpd="sng" algn="ctr">
+                      <a:solidFill>
+                        <a:srgbClr val="D5DBE4"/>
+                      </a:solidFill>
+                      <a:prstDash val="solid"/>
+                      <a:round/>
+                      <a:headEnd type="none" w="med" len="med"/>
+                      <a:tailEnd type="none" w="med" len="med"/>
+                    </a:lnL>
+                    <a:lnR w="9525" cap="flat" cmpd="sng" algn="ctr">
+                      <a:solidFill>
+                        <a:srgbClr val="D5DBE4"/>
+                      </a:solidFill>
+                      <a:prstDash val="solid"/>
+                      <a:round/>
+                      <a:headEnd type="none" w="med" len="med"/>
+                      <a:tailEnd type="none" w="med" len="med"/>
+                    </a:lnR>
+                    <a:lnT w="9525" cap="flat" cmpd="sng" algn="ctr">
+                      <a:solidFill>
+                        <a:srgbClr val="D5DBE4"/>
+                      </a:solidFill>
+                      <a:prstDash val="solid"/>
+                      <a:round/>
+                      <a:headEnd type="none" w="med" len="med"/>
+                      <a:tailEnd type="none" w="med" len="med"/>
+                    </a:lnT>
+                    <a:lnB w="9525" cap="flat" cmpd="sng" algn="ctr">
+                      <a:solidFill>
+                        <a:srgbClr val="D5DBE4"/>
+                      </a:solidFill>
+                      <a:prstDash val="solid"/>
+                      <a:round/>
+                      <a:headEnd type="none" w="med" len="med"/>
+                      <a:tailEnd type="none" w="med" len="med"/>
+                    </a:lnB>
+                    <a:solidFill>
+                      <a:srgbClr val="FFFFFF"/>
+                    </a:solidFill>
+                  </a:tcPr>
+                </a:tc>
+                <a:tc>
+                  <a:txBody>
+                    <a:bodyPr/>
+                    <a:lstStyle/>
+                    <a:p>
+                      <a:pPr algn="ctr" indent="0" marL="0">
+                        <a:buNone/>
+                      </a:pPr>
+                      <a:r>
+                        <a:rPr lang="en-US" sz="1100" dirty="0">
+                          <a:solidFill>
+                            <a:srgbClr val="3D4451"/>
+                          </a:solidFill>
+                          <a:latin typeface="맑은 고딕" pitchFamily="34" charset="0"/>
+                          <a:ea typeface="맑은 고딕" pitchFamily="34" charset="-122"/>
+                          <a:cs typeface="맑은 고딕" pitchFamily="34" charset="-120"/>
+                        </a:rPr>
+                        <a:t>20 byte · 재전송으로 지연이 튄다</a:t>
+                      </a:r>
+                      <a:endParaRPr lang="en-US" sz="1100" dirty="0">
+                        <a:latin typeface="맑은 고딕" charset="0"/>
+                        <a:ea typeface="맑은 고딕" charset="0"/>
+                        <a:cs typeface="맑은 고딕" charset="0"/>
+                      </a:endParaRPr>
+                    </a:p>
+                  </a:txBody>
+                  <a:tcPr marL="76200" marR="76200" marT="25400" marB="25400" anchor="ctr">
+                    <a:lnL w="9525" cap="flat" cmpd="sng" algn="ctr">
+                      <a:solidFill>
+                        <a:srgbClr val="D5DBE4"/>
+                      </a:solidFill>
+                      <a:prstDash val="solid"/>
+                      <a:round/>
+                      <a:headEnd type="none" w="med" len="med"/>
+                      <a:tailEnd type="none" w="med" len="med"/>
+                    </a:lnL>
+                    <a:lnR w="9525" cap="flat" cmpd="sng" algn="ctr">
+                      <a:solidFill>
+                        <a:srgbClr val="D5DBE4"/>
+                      </a:solidFill>
+                      <a:prstDash val="solid"/>
+                      <a:round/>
+                      <a:headEnd type="none" w="med" len="med"/>
+                      <a:tailEnd type="none" w="med" len="med"/>
+                    </a:lnR>
+                    <a:lnT w="9525" cap="flat" cmpd="sng" algn="ctr">
+                      <a:solidFill>
+                        <a:srgbClr val="D5DBE4"/>
+                      </a:solidFill>
+                      <a:prstDash val="solid"/>
+                      <a:round/>
+                      <a:headEnd type="none" w="med" len="med"/>
+                      <a:tailEnd type="none" w="med" len="med"/>
+                    </a:lnT>
+                    <a:lnB w="9525" cap="flat" cmpd="sng" algn="ctr">
+                      <a:solidFill>
+                        <a:srgbClr val="D5DBE4"/>
+                      </a:solidFill>
+                      <a:prstDash val="solid"/>
+                      <a:round/>
+                      <a:headEnd type="none" w="med" len="med"/>
+                      <a:tailEnd type="none" w="med" len="med"/>
+                    </a:lnB>
+                    <a:solidFill>
+                      <a:srgbClr val="FFFFFF"/>
+                    </a:solidFill>
+                  </a:tcPr>
+                </a:tc>
+                <a:tc>
+                  <a:txBody>
+                    <a:bodyPr/>
+                    <a:lstStyle/>
+                    <a:p>
+                      <a:pPr algn="ctr" indent="0" marL="0">
+                        <a:buNone/>
+                      </a:pPr>
+                      <a:r>
+                        <a:rPr lang="en-US" sz="1100" dirty="0">
+                          <a:solidFill>
+                            <a:srgbClr val="3D4451"/>
+                          </a:solidFill>
+                          <a:latin typeface="맑은 고딕" pitchFamily="34" charset="0"/>
+                          <a:ea typeface="맑은 고딕" pitchFamily="34" charset="-122"/>
+                          <a:cs typeface="맑은 고딕" pitchFamily="34" charset="-120"/>
+                        </a:rPr>
+                        <a:t>8 byte · 가볍고 지연이 낮다</a:t>
+                      </a:r>
+                      <a:endParaRPr lang="en-US" sz="1100" dirty="0">
+                        <a:latin typeface="맑은 고딕" charset="0"/>
+                        <a:ea typeface="맑은 고딕" charset="0"/>
+                        <a:cs typeface="맑은 고딕" charset="0"/>
+                      </a:endParaRPr>
+                    </a:p>
+                  </a:txBody>
+                  <a:tcPr marL="76200" marR="76200" marT="25400" marB="25400" anchor="ctr">
+                    <a:lnL w="9525" cap="flat" cmpd="sng" algn="ctr">
+                      <a:solidFill>
+                        <a:srgbClr val="D5DBE4"/>
+                      </a:solidFill>
+                      <a:prstDash val="solid"/>
+                      <a:round/>
+                      <a:headEnd type="none" w="med" len="med"/>
+                      <a:tailEnd type="none" w="med" len="med"/>
+                    </a:lnL>
+                    <a:lnR w="9525" cap="flat" cmpd="sng" algn="ctr">
+                      <a:solidFill>
+                        <a:srgbClr val="D5DBE4"/>
+                      </a:solidFill>
+                      <a:prstDash val="solid"/>
+                      <a:round/>
+                      <a:headEnd type="none" w="med" len="med"/>
+                      <a:tailEnd type="none" w="med" len="med"/>
+                    </a:lnR>
+                    <a:lnT w="9525" cap="flat" cmpd="sng" algn="ctr">
+                      <a:solidFill>
+                        <a:srgbClr val="D5DBE4"/>
+                      </a:solidFill>
+                      <a:prstDash val="solid"/>
+                      <a:round/>
+                      <a:headEnd type="none" w="med" len="med"/>
+                      <a:tailEnd type="none" w="med" len="med"/>
+                    </a:lnT>
+                    <a:lnB w="9525" cap="flat" cmpd="sng" algn="ctr">
+                      <a:solidFill>
+                        <a:srgbClr val="D5DBE4"/>
+                      </a:solidFill>
+                      <a:prstDash val="solid"/>
+                      <a:round/>
+                      <a:headEnd type="none" w="med" len="med"/>
+                      <a:tailEnd type="none" w="med" len="med"/>
+                    </a:lnB>
+                    <a:solidFill>
+                      <a:srgbClr val="FFFFFF"/>
+                    </a:solidFill>
+                  </a:tcPr>
+                </a:tc>
+              </a:tr>
+              <a:tr h="384048">
+                <a:tc>
+                  <a:txBody>
+                    <a:bodyPr/>
+                    <a:lstStyle/>
+                    <a:p>
+                      <a:pPr algn="l" indent="0" marL="0">
+                        <a:buNone/>
+                      </a:pPr>
+                      <a:r>
+                        <a:rPr lang="en-US" sz="1100" b="1" dirty="0">
+                          <a:solidFill>
+                            <a:srgbClr val="1E232E"/>
+                          </a:solidFill>
+                          <a:latin typeface="맑은 고딕" pitchFamily="34" charset="0"/>
+                          <a:ea typeface="맑은 고딕" pitchFamily="34" charset="-122"/>
+                          <a:cs typeface="맑은 고딕" pitchFamily="34" charset="-120"/>
+                        </a:rPr>
+                        <a:t>쓰는 곳</a:t>
+                      </a:r>
+                      <a:endParaRPr lang="en-US" sz="1100" dirty="0">
+                        <a:latin typeface="맑은 고딕" charset="0"/>
+                        <a:ea typeface="맑은 고딕" charset="0"/>
+                        <a:cs typeface="맑은 고딕" charset="0"/>
+                      </a:endParaRPr>
+                    </a:p>
+                  </a:txBody>
+                  <a:tcPr marL="76200" marR="76200" marT="25400" marB="25400" anchor="ctr">
+                    <a:lnL w="9525" cap="flat" cmpd="sng" algn="ctr">
+                      <a:solidFill>
+                        <a:srgbClr val="D5DBE4"/>
+                      </a:solidFill>
+                      <a:prstDash val="solid"/>
+                      <a:round/>
+                      <a:headEnd type="none" w="med" len="med"/>
+                      <a:tailEnd type="none" w="med" len="med"/>
+                    </a:lnL>
+                    <a:lnR w="9525" cap="flat" cmpd="sng" algn="ctr">
+                      <a:solidFill>
+                        <a:srgbClr val="D5DBE4"/>
+                      </a:solidFill>
+                      <a:prstDash val="solid"/>
+                      <a:round/>
+                      <a:headEnd type="none" w="med" len="med"/>
+                      <a:tailEnd type="none" w="med" len="med"/>
+                    </a:lnR>
+                    <a:lnT w="9525" cap="flat" cmpd="sng" algn="ctr">
+                      <a:solidFill>
+                        <a:srgbClr val="D5DBE4"/>
+                      </a:solidFill>
+                      <a:prstDash val="solid"/>
+                      <a:round/>
+                      <a:headEnd type="none" w="med" len="med"/>
+                      <a:tailEnd type="none" w="med" len="med"/>
+                    </a:lnT>
+                    <a:lnB w="9525" cap="flat" cmpd="sng" algn="ctr">
+                      <a:solidFill>
+                        <a:srgbClr val="D5DBE4"/>
+                      </a:solidFill>
+                      <a:prstDash val="solid"/>
+                      <a:round/>
+                      <a:headEnd type="none" w="med" len="med"/>
+                      <a:tailEnd type="none" w="med" len="med"/>
+                    </a:lnB>
+                    <a:solidFill>
+                      <a:srgbClr val="F2F4F7"/>
+                    </a:solidFill>
+                  </a:tcPr>
+                </a:tc>
+                <a:tc>
+                  <a:txBody>
+                    <a:bodyPr/>
+                    <a:lstStyle/>
+                    <a:p>
+                      <a:pPr algn="ctr" indent="0" marL="0">
+                        <a:buNone/>
+                      </a:pPr>
+                      <a:r>
+                        <a:rPr lang="en-US" sz="1100" dirty="0">
+                          <a:solidFill>
+                            <a:srgbClr val="3D4451"/>
+                          </a:solidFill>
+                          <a:latin typeface="맑은 고딕" pitchFamily="34" charset="0"/>
+                          <a:ea typeface="맑은 고딕" pitchFamily="34" charset="-122"/>
+                          <a:cs typeface="맑은 고딕" pitchFamily="34" charset="-120"/>
+                        </a:rPr>
+                        <a:t>파일 전송 · 명령 / 제어 · 로그 수집</a:t>
+                      </a:r>
+                      <a:endParaRPr lang="en-US" sz="1100" dirty="0">
+                        <a:latin typeface="맑은 고딕" charset="0"/>
+                        <a:ea typeface="맑은 고딕" charset="0"/>
+                        <a:cs typeface="맑은 고딕" charset="0"/>
+                      </a:endParaRPr>
+                    </a:p>
+                  </a:txBody>
+                  <a:tcPr marL="76200" marR="76200" marT="25400" marB="25400" anchor="ctr">
+                    <a:lnL w="9525" cap="flat" cmpd="sng" algn="ctr">
+                      <a:solidFill>
+                        <a:srgbClr val="D5DBE4"/>
+                      </a:solidFill>
+                      <a:prstDash val="solid"/>
+                      <a:round/>
+                      <a:headEnd type="none" w="med" len="med"/>
+                      <a:tailEnd type="none" w="med" len="med"/>
+                    </a:lnL>
+                    <a:lnR w="9525" cap="flat" cmpd="sng" algn="ctr">
+                      <a:solidFill>
+                        <a:srgbClr val="D5DBE4"/>
+                      </a:solidFill>
+                      <a:prstDash val="solid"/>
+                      <a:round/>
+                      <a:headEnd type="none" w="med" len="med"/>
+                      <a:tailEnd type="none" w="med" len="med"/>
+                    </a:lnR>
+                    <a:lnT w="9525" cap="flat" cmpd="sng" algn="ctr">
+                      <a:solidFill>
+                        <a:srgbClr val="D5DBE4"/>
+                      </a:solidFill>
+                      <a:prstDash val="solid"/>
+                      <a:round/>
+                      <a:headEnd type="none" w="med" len="med"/>
+                      <a:tailEnd type="none" w="med" len="med"/>
+                    </a:lnT>
+                    <a:lnB w="9525" cap="flat" cmpd="sng" algn="ctr">
+                      <a:solidFill>
+                        <a:srgbClr val="D5DBE4"/>
+                      </a:solidFill>
+                      <a:prstDash val="solid"/>
+                      <a:round/>
+                      <a:headEnd type="none" w="med" len="med"/>
+                      <a:tailEnd type="none" w="med" len="med"/>
+                    </a:lnB>
+                    <a:solidFill>
+                      <a:srgbClr val="F2F4F7"/>
+                    </a:solidFill>
+                  </a:tcPr>
+                </a:tc>
+                <a:tc>
+                  <a:txBody>
+                    <a:bodyPr/>
+                    <a:lstStyle/>
+                    <a:p>
+                      <a:pPr algn="ctr" indent="0" marL="0">
+                        <a:buNone/>
+                      </a:pPr>
+                      <a:r>
+                        <a:rPr lang="en-US" sz="1100" dirty="0">
+                          <a:solidFill>
+                            <a:srgbClr val="3D4451"/>
+                          </a:solidFill>
+                          <a:latin typeface="맑은 고딕" pitchFamily="34" charset="0"/>
+                          <a:ea typeface="맑은 고딕" pitchFamily="34" charset="-122"/>
+                          <a:cs typeface="맑은 고딕" pitchFamily="34" charset="-120"/>
+                        </a:rPr>
+                        <a:t>센서 · 음성 / 영상 스트리밍</a:t>
+                      </a:r>
+                      <a:endParaRPr lang="en-US" sz="1100" dirty="0">
+                        <a:latin typeface="맑은 고딕" charset="0"/>
+                        <a:ea typeface="맑은 고딕" charset="0"/>
+                        <a:cs typeface="맑은 고딕" charset="0"/>
+                      </a:endParaRPr>
+                    </a:p>
+                  </a:txBody>
+                  <a:tcPr marL="76200" marR="76200" marT="25400" marB="25400" anchor="ctr">
+                    <a:lnL w="9525" cap="flat" cmpd="sng" algn="ctr">
+                      <a:solidFill>
+                        <a:srgbClr val="D5DBE4"/>
+                      </a:solidFill>
+                      <a:prstDash val="solid"/>
+                      <a:round/>
+                      <a:headEnd type="none" w="med" len="med"/>
+                      <a:tailEnd type="none" w="med" len="med"/>
+                    </a:lnL>
+                    <a:lnR w="9525" cap="flat" cmpd="sng" algn="ctr">
+                      <a:solidFill>
+                        <a:srgbClr val="D5DBE4"/>
+                      </a:solidFill>
+                      <a:prstDash val="solid"/>
+                      <a:round/>
+                      <a:headEnd type="none" w="med" len="med"/>
+                      <a:tailEnd type="none" w="med" len="med"/>
+                    </a:lnR>
+                    <a:lnT w="9525" cap="flat" cmpd="sng" algn="ctr">
+                      <a:solidFill>
+                        <a:srgbClr val="D5DBE4"/>
+                      </a:solidFill>
+                      <a:prstDash val="solid"/>
+                      <a:round/>
+                      <a:headEnd type="none" w="med" len="med"/>
+                      <a:tailEnd type="none" w="med" len="med"/>
+                    </a:lnT>
+                    <a:lnB w="9525" cap="flat" cmpd="sng" algn="ctr">
+                      <a:solidFill>
+                        <a:srgbClr val="D5DBE4"/>
+                      </a:solidFill>
+                      <a:prstDash val="solid"/>
+                      <a:round/>
+                      <a:headEnd type="none" w="med" len="med"/>
+                      <a:tailEnd type="none" w="med" len="med"/>
+                    </a:lnB>
+                    <a:solidFill>
+                      <a:srgbClr val="F2F4F7"/>
+                    </a:solidFill>
+                  </a:tcPr>
+                </a:tc>
+              </a:tr>
+              <a:tr h="384048">
+                <a:tc>
+                  <a:txBody>
+                    <a:bodyPr/>
+                    <a:lstStyle/>
+                    <a:p>
+                      <a:pPr algn="l" indent="0" marL="0">
+                        <a:buNone/>
+                      </a:pPr>
+                      <a:r>
+                        <a:rPr lang="en-US" sz="1100" b="1" dirty="0">
+                          <a:solidFill>
+                            <a:srgbClr val="1E232E"/>
+                          </a:solidFill>
+                          <a:latin typeface="맑은 고딕" pitchFamily="34" charset="0"/>
+                          <a:ea typeface="맑은 고딕" pitchFamily="34" charset="-122"/>
+                          <a:cs typeface="맑은 고딕" pitchFamily="34" charset="-120"/>
+                        </a:rPr>
+                        <a:t>과제 적용</a:t>
+                      </a:r>
+                      <a:endParaRPr lang="en-US" sz="1100" dirty="0">
+                        <a:latin typeface="맑은 고딕" charset="0"/>
+                        <a:ea typeface="맑은 고딕" charset="0"/>
+                        <a:cs typeface="맑은 고딕" charset="0"/>
+                      </a:endParaRPr>
+                    </a:p>
+                  </a:txBody>
+                  <a:tcPr marL="76200" marR="76200" marT="25400" marB="25400" anchor="ctr">
+                    <a:lnL w="9525" cap="flat" cmpd="sng" algn="ctr">
+                      <a:solidFill>
+                        <a:srgbClr val="D5DBE4"/>
+                      </a:solidFill>
+                      <a:prstDash val="solid"/>
+                      <a:round/>
+                      <a:headEnd type="none" w="med" len="med"/>
+                      <a:tailEnd type="none" w="med" len="med"/>
+                    </a:lnL>
+                    <a:lnR w="9525" cap="flat" cmpd="sng" algn="ctr">
+                      <a:solidFill>
+                        <a:srgbClr val="D5DBE4"/>
+                      </a:solidFill>
+                      <a:prstDash val="solid"/>
+                      <a:round/>
+                      <a:headEnd type="none" w="med" len="med"/>
+                      <a:tailEnd type="none" w="med" len="med"/>
+                    </a:lnR>
+                    <a:lnT w="9525" cap="flat" cmpd="sng" algn="ctr">
+                      <a:solidFill>
+                        <a:srgbClr val="D5DBE4"/>
+                      </a:solidFill>
+                      <a:prstDash val="solid"/>
+                      <a:round/>
+                      <a:headEnd type="none" w="med" len="med"/>
+                      <a:tailEnd type="none" w="med" len="med"/>
+                    </a:lnT>
+                    <a:lnB w="9525" cap="flat" cmpd="sng" algn="ctr">
+                      <a:solidFill>
+                        <a:srgbClr val="D5DBE4"/>
+                      </a:solidFill>
+                      <a:prstDash val="solid"/>
+                      <a:round/>
+                      <a:headEnd type="none" w="med" len="med"/>
+                      <a:tailEnd type="none" w="med" len="med"/>
+                    </a:lnB>
+                    <a:solidFill>
+                      <a:srgbClr val="FFFFFF"/>
+                    </a:solidFill>
+                  </a:tcPr>
+                </a:tc>
+                <a:tc>
+                  <a:txBody>
+                    <a:bodyPr/>
+                    <a:lstStyle/>
+                    <a:p>
+                      <a:pPr algn="ctr" indent="0" marL="0">
+                        <a:buNone/>
+                      </a:pPr>
+                      <a:r>
+                        <a:rPr lang="en-US" sz="1100" dirty="0">
+                          <a:solidFill>
+                            <a:srgbClr val="3D4451"/>
+                          </a:solidFill>
+                          <a:latin typeface="맑은 고딕" pitchFamily="34" charset="0"/>
+                          <a:ea typeface="맑은 고딕" pitchFamily="34" charset="-122"/>
+                          <a:cs typeface="맑은 고딕" pitchFamily="34" charset="-120"/>
+                        </a:rPr>
+                        <a:t>ToDo#3 의 데이터 송 / 수신</a:t>
+                      </a:r>
+                      <a:endParaRPr lang="en-US" sz="1100" dirty="0">
+                        <a:latin typeface="맑은 고딕" charset="0"/>
+                        <a:ea typeface="맑은 고딕" charset="0"/>
+                        <a:cs typeface="맑은 고딕" charset="0"/>
+                      </a:endParaRPr>
+                    </a:p>
+                  </a:txBody>
+                  <a:tcPr marL="76200" marR="76200" marT="25400" marB="25400" anchor="ctr">
+                    <a:lnL w="9525" cap="flat" cmpd="sng" algn="ctr">
+                      <a:solidFill>
+                        <a:srgbClr val="D5DBE4"/>
+                      </a:solidFill>
+                      <a:prstDash val="solid"/>
+                      <a:round/>
+                      <a:headEnd type="none" w="med" len="med"/>
+                      <a:tailEnd type="none" w="med" len="med"/>
+                    </a:lnL>
+                    <a:lnR w="9525" cap="flat" cmpd="sng" algn="ctr">
+                      <a:solidFill>
+                        <a:srgbClr val="D5DBE4"/>
+                      </a:solidFill>
+                      <a:prstDash val="solid"/>
+                      <a:round/>
+                      <a:headEnd type="none" w="med" len="med"/>
+                      <a:tailEnd type="none" w="med" len="med"/>
+                    </a:lnR>
+                    <a:lnT w="9525" cap="flat" cmpd="sng" algn="ctr">
+                      <a:solidFill>
+                        <a:srgbClr val="D5DBE4"/>
+                      </a:solidFill>
+                      <a:prstDash val="solid"/>
+                      <a:round/>
+                      <a:headEnd type="none" w="med" len="med"/>
+                      <a:tailEnd type="none" w="med" len="med"/>
+                    </a:lnT>
+                    <a:lnB w="9525" cap="flat" cmpd="sng" algn="ctr">
+                      <a:solidFill>
+                        <a:srgbClr val="D5DBE4"/>
+                      </a:solidFill>
+                      <a:prstDash val="solid"/>
+                      <a:round/>
+                      <a:headEnd type="none" w="med" len="med"/>
+                      <a:tailEnd type="none" w="med" len="med"/>
+                    </a:lnB>
+                    <a:solidFill>
+                      <a:srgbClr val="FFFFFF"/>
+                    </a:solidFill>
+                  </a:tcPr>
+                </a:tc>
+                <a:tc>
+                  <a:txBody>
+                    <a:bodyPr/>
+                    <a:lstStyle/>
+                    <a:p>
+                      <a:pPr algn="ctr" indent="0" marL="0">
+                        <a:buNone/>
+                      </a:pPr>
+                      <a:r>
+                        <a:rPr lang="en-US" sz="1100" dirty="0">
+                          <a:solidFill>
+                            <a:srgbClr val="3D4451"/>
+                          </a:solidFill>
+                          <a:latin typeface="맑은 고딕" pitchFamily="34" charset="0"/>
+                          <a:ea typeface="맑은 고딕" pitchFamily="34" charset="-122"/>
+                          <a:cs typeface="맑은 고딕" pitchFamily="34" charset="-120"/>
+                        </a:rPr>
+                        <a:t>TCP Sync 라인체크에만 사용</a:t>
+                      </a:r>
+                      <a:endParaRPr lang="en-US" sz="1100" dirty="0">
+                        <a:latin typeface="맑은 고딕" charset="0"/>
+                        <a:ea typeface="맑은 고딕" charset="0"/>
+                        <a:cs typeface="맑은 고딕" charset="0"/>
+                      </a:endParaRPr>
+                    </a:p>
+                  </a:txBody>
+                  <a:tcPr marL="76200" marR="76200" marT="25400" marB="25400" anchor="ctr">
+                    <a:lnL w="9525" cap="flat" cmpd="sng" algn="ctr">
+                      <a:solidFill>
+                        <a:srgbClr val="D5DBE4"/>
+                      </a:solidFill>
+                      <a:prstDash val="solid"/>
+                      <a:round/>
+                      <a:headEnd type="none" w="med" len="med"/>
+                      <a:tailEnd type="none" w="med" len="med"/>
+                    </a:lnL>
+                    <a:lnR w="9525" cap="flat" cmpd="sng" algn="ctr">
+                      <a:solidFill>
+                        <a:srgbClr val="D5DBE4"/>
+                      </a:solidFill>
+                      <a:prstDash val="solid"/>
+                      <a:round/>
+                      <a:headEnd type="none" w="med" len="med"/>
+                      <a:tailEnd type="none" w="med" len="med"/>
+                    </a:lnR>
+                    <a:lnT w="9525" cap="flat" cmpd="sng" algn="ctr">
+                      <a:solidFill>
+                        <a:srgbClr val="D5DBE4"/>
+                      </a:solidFill>
+                      <a:prstDash val="solid"/>
+                      <a:round/>
+                      <a:headEnd type="none" w="med" len="med"/>
+                      <a:tailEnd type="none" w="med" len="med"/>
+                    </a:lnT>
+                    <a:lnB w="9525" cap="flat" cmpd="sng" algn="ctr">
+                      <a:solidFill>
+                        <a:srgbClr val="D5DBE4"/>
+                      </a:solidFill>
+                      <a:prstDash val="solid"/>
+                      <a:round/>
+                      <a:headEnd type="none" w="med" len="med"/>
+                      <a:tailEnd type="none" w="med" len="med"/>
+                    </a:lnB>
+                    <a:solidFill>
+                      <a:srgbClr val="FFFFFF"/>
+                    </a:solidFill>
+                  </a:tcPr>
+                </a:tc>
+              </a:tr>
+            </a:tbl>
+          </a:graphicData>
+        </a:graphic>
+      </p:graphicFrame>
+      <p:sp>
+        <p:nvSpPr>
+          <p:cNvPr id="7" name="Shape 4"/>
           <p:cNvSpPr/>
           <p:nvPr/>
         </p:nvSpPr>
         <p:spPr>
           <a:xfrm>
-            <a:off x="548640" y="1280160"/>
-            <a:ext cx="5449824" cy="4224528"/>
+            <a:off x="548640" y="4590288"/>
+            <a:ext cx="11094415" cy="1764792"/>
           </a:xfrm>
           <a:prstGeom prst="roundRect">
             <a:avLst>
-              <a:gd name="adj" fmla="val 1299"/>
-            </a:avLst>
-          </a:prstGeom>
-          <a:solidFill>
-            <a:srgbClr val="FFFFFF"/>
-          </a:solidFill>
-          <a:ln w="12700">
-            <a:solidFill>
-              <a:srgbClr val="D5DBE4"/>
-            </a:solidFill>
-            <a:prstDash val="solid"/>
-          </a:ln>
-        </p:spPr>
-      </p:sp>
-      <p:sp>
-        <p:nvSpPr>
-          <p:cNvPr id="7" name="Shape 5"/>
-          <p:cNvSpPr/>
-          <p:nvPr/>
-        </p:nvSpPr>
-        <p:spPr>
-          <a:xfrm>
-            <a:off x="548640" y="1280160"/>
-            <a:ext cx="5449824" cy="713232"/>
-          </a:xfrm>
-          <a:prstGeom prst="roundRect">
-            <a:avLst>
-              <a:gd name="adj" fmla="val 7692"/>
-            </a:avLst>
-          </a:prstGeom>
-          <a:solidFill>
-            <a:srgbClr val="13757A"/>
-          </a:solidFill>
-          <a:ln w="12700">
-            <a:solidFill>
-              <a:srgbClr val="13757A"/>
-            </a:solidFill>
-            <a:prstDash val="solid"/>
-          </a:ln>
-        </p:spPr>
-      </p:sp>
-      <p:sp>
-        <p:nvSpPr>
-          <p:cNvPr id="8" name="Text 6"/>
-          <p:cNvSpPr txBox="1"/>
-          <p:nvPr/>
-        </p:nvSpPr>
-        <p:spPr>
-          <a:xfrm>
-            <a:off x="804672" y="1316736"/>
-            <a:ext cx="3108960" cy="384048"/>
-          </a:xfrm>
-          <a:prstGeom prst="rect">
-            <a:avLst/>
-          </a:prstGeom>
-          <a:noFill/>
-          <a:ln/>
-        </p:spPr>
-        <p:txBody>
-          <a:bodyPr wrap="square" lIns="0" tIns="0" rIns="0" bIns="0" rtlCol="0" anchor="ctr"/>
-          <a:lstStyle/>
-          <a:p>
-            <a:pPr indent="0" marL="0">
-              <a:buNone/>
-            </a:pPr>
-            <a:r>
-              <a:rPr lang="en-US" sz="2100" b="1" dirty="0">
-                <a:solidFill>
-                  <a:srgbClr val="FFFFFF"/>
-                </a:solidFill>
-                <a:latin typeface="맑은 고딕" pitchFamily="34" charset="0"/>
-                <a:ea typeface="맑은 고딕" pitchFamily="34" charset="-122"/>
-                <a:cs typeface="맑은 고딕" pitchFamily="34" charset="-120"/>
-              </a:rPr>
-              <a:t>TCP / IP</a:t>
-            </a:r>
-            <a:endParaRPr lang="en-US" sz="2100" dirty="0"/>
-          </a:p>
-        </p:txBody>
-      </p:sp>
-      <p:sp>
-        <p:nvSpPr>
-          <p:cNvPr id="9" name="Text 7"/>
-          <p:cNvSpPr txBox="1"/>
-          <p:nvPr/>
-        </p:nvSpPr>
-        <p:spPr>
-          <a:xfrm>
-            <a:off x="804672" y="1682496"/>
-            <a:ext cx="4023360" cy="237744"/>
-          </a:xfrm>
-          <a:prstGeom prst="rect">
-            <a:avLst/>
-          </a:prstGeom>
-          <a:noFill/>
-          <a:ln/>
-        </p:spPr>
-        <p:txBody>
-          <a:bodyPr wrap="square" lIns="0" tIns="0" rIns="0" bIns="0" rtlCol="0" anchor="ctr"/>
-          <a:lstStyle/>
-          <a:p>
-            <a:pPr indent="0" marL="0">
-              <a:buNone/>
-            </a:pPr>
-            <a:r>
-              <a:rPr lang="en-US" sz="880" dirty="0">
-                <a:solidFill>
-                  <a:srgbClr val="F2F6F8"/>
-                </a:solidFill>
-                <a:latin typeface="Consolas" pitchFamily="34" charset="0"/>
-                <a:ea typeface="Consolas" pitchFamily="34" charset="-122"/>
-                <a:cs typeface="Consolas" pitchFamily="34" charset="-120"/>
-              </a:rPr>
-              <a:t>Transmission Control Protocol</a:t>
-            </a:r>
-            <a:endParaRPr lang="en-US" sz="880" dirty="0"/>
-          </a:p>
-        </p:txBody>
-      </p:sp>
-      <p:sp>
-        <p:nvSpPr>
-          <p:cNvPr id="10" name="Text 8"/>
-          <p:cNvSpPr txBox="1"/>
-          <p:nvPr/>
-        </p:nvSpPr>
-        <p:spPr>
-          <a:xfrm>
-            <a:off x="804672" y="2084832"/>
-            <a:ext cx="4937760" cy="292608"/>
-          </a:xfrm>
-          <a:prstGeom prst="rect">
-            <a:avLst/>
-          </a:prstGeom>
-          <a:noFill/>
-          <a:ln/>
-        </p:spPr>
-        <p:txBody>
-          <a:bodyPr wrap="square" lIns="0" tIns="0" rIns="0" bIns="0" rtlCol="0" anchor="ctr"/>
-          <a:lstStyle/>
-          <a:p>
-            <a:pPr indent="0" marL="0">
-              <a:buNone/>
-            </a:pPr>
-            <a:r>
-              <a:rPr lang="en-US" sz="1200" b="1" dirty="0">
-                <a:solidFill>
-                  <a:srgbClr val="13757A"/>
-                </a:solidFill>
-                <a:latin typeface="맑은 고딕" pitchFamily="34" charset="0"/>
-                <a:ea typeface="맑은 고딕" pitchFamily="34" charset="-122"/>
-                <a:cs typeface="맑은 고딕" pitchFamily="34" charset="-120"/>
-              </a:rPr>
-              <a:t>연결형 · 바이트 스트림 · 신뢰성 보장</a:t>
-            </a:r>
-            <a:endParaRPr lang="en-US" sz="1200" dirty="0"/>
-          </a:p>
-        </p:txBody>
-      </p:sp>
-      <p:sp>
-        <p:nvSpPr>
-          <p:cNvPr id="11" name="Text 9"/>
-          <p:cNvSpPr txBox="1"/>
-          <p:nvPr/>
-        </p:nvSpPr>
-        <p:spPr>
-          <a:xfrm>
-            <a:off x="804672" y="2450592"/>
-            <a:ext cx="1828800" cy="237744"/>
-          </a:xfrm>
-          <a:prstGeom prst="rect">
-            <a:avLst/>
-          </a:prstGeom>
-          <a:noFill/>
-          <a:ln/>
-        </p:spPr>
-        <p:txBody>
-          <a:bodyPr wrap="square" lIns="0" tIns="0" rIns="0" bIns="0" rtlCol="0" anchor="ctr"/>
-          <a:lstStyle/>
-          <a:p>
-            <a:pPr indent="0" marL="0">
-              <a:buNone/>
-            </a:pPr>
-            <a:r>
-              <a:rPr lang="en-US" sz="1050" b="1" spc="60" kern="0" dirty="0">
-                <a:solidFill>
-                  <a:srgbClr val="1E232E"/>
-                </a:solidFill>
-                <a:latin typeface="맑은 고딕" pitchFamily="34" charset="0"/>
-                <a:ea typeface="맑은 고딕" pitchFamily="34" charset="-122"/>
-                <a:cs typeface="맑은 고딕" pitchFamily="34" charset="-120"/>
-              </a:rPr>
-              <a:t>특 징</a:t>
-            </a:r>
-            <a:endParaRPr lang="en-US" sz="1050" dirty="0"/>
-          </a:p>
-        </p:txBody>
-      </p:sp>
-      <p:sp>
-        <p:nvSpPr>
-          <p:cNvPr id="12" name="Text 10"/>
-          <p:cNvSpPr txBox="1"/>
-          <p:nvPr/>
-        </p:nvSpPr>
-        <p:spPr>
-          <a:xfrm>
-            <a:off x="804672" y="2706624"/>
-            <a:ext cx="4937760" cy="932688"/>
-          </a:xfrm>
-          <a:prstGeom prst="rect">
-            <a:avLst/>
-          </a:prstGeom>
-          <a:noFill/>
-          <a:ln/>
-        </p:spPr>
-        <p:txBody>
-          <a:bodyPr wrap="square" lIns="0" tIns="0" rIns="0" bIns="0" rtlCol="0" anchor="t"/>
-          <a:lstStyle/>
-          <a:p>
-            <a:pPr marL="342900" indent="-342900">
-              <a:lnSpc>
-                <a:spcPts val="1400"/>
-              </a:lnSpc>
-              <a:spcAft>
-                <a:spcPts val="200"/>
-              </a:spcAft>
-              <a:buSzPct val="100000"/>
-              <a:buChar char="•"/>
-            </a:pPr>
-            <a:r>
-              <a:rPr lang="en-US" sz="1000" dirty="0">
-                <a:solidFill>
-                  <a:srgbClr val="3D4451"/>
-                </a:solidFill>
-                <a:latin typeface="맑은 고딕" pitchFamily="34" charset="0"/>
-                <a:ea typeface="맑은 고딕" pitchFamily="34" charset="-122"/>
-                <a:cs typeface="맑은 고딕" pitchFamily="34" charset="-120"/>
-              </a:rPr>
-              <a:t>3-way handshake 로 연결을 맺고 시작한다</a:t>
-            </a:r>
-            <a:endParaRPr lang="en-US" sz="1000" dirty="0"/>
-          </a:p>
-          <a:p>
-            <a:pPr marL="342900" indent="-342900">
-              <a:lnSpc>
-                <a:spcPts val="1400"/>
-              </a:lnSpc>
-              <a:spcAft>
-                <a:spcPts val="200"/>
-              </a:spcAft>
-              <a:buSzPct val="100000"/>
-              <a:buChar char="•"/>
-            </a:pPr>
-            <a:r>
-              <a:rPr lang="en-US" sz="1000" dirty="0">
-                <a:solidFill>
-                  <a:srgbClr val="3D4451"/>
-                </a:solidFill>
-                <a:latin typeface="맑은 고딕" pitchFamily="34" charset="0"/>
-                <a:ea typeface="맑은 고딕" pitchFamily="34" charset="-122"/>
-                <a:cs typeface="맑은 고딕" pitchFamily="34" charset="-120"/>
-              </a:rPr>
-              <a:t>순서 보장 · 유실 시 자동 재전송 · 중복 제거</a:t>
-            </a:r>
-            <a:endParaRPr lang="en-US" sz="1000" dirty="0"/>
-          </a:p>
-          <a:p>
-            <a:pPr marL="342900" indent="-342900">
-              <a:lnSpc>
-                <a:spcPts val="1400"/>
-              </a:lnSpc>
-              <a:spcAft>
-                <a:spcPts val="200"/>
-              </a:spcAft>
-              <a:buSzPct val="100000"/>
-              <a:buChar char="•"/>
-            </a:pPr>
-            <a:r>
-              <a:rPr lang="en-US" sz="1000" dirty="0">
-                <a:solidFill>
-                  <a:srgbClr val="3D4451"/>
-                </a:solidFill>
-                <a:latin typeface="맑은 고딕" pitchFamily="34" charset="0"/>
-                <a:ea typeface="맑은 고딕" pitchFamily="34" charset="-122"/>
-                <a:cs typeface="맑은 고딕" pitchFamily="34" charset="-120"/>
-              </a:rPr>
-              <a:t>흐름 제어와 혼잡 제어를 커널이 해준다</a:t>
-            </a:r>
-            <a:endParaRPr lang="en-US" sz="1000" dirty="0"/>
-          </a:p>
-          <a:p>
-            <a:pPr marL="342900" indent="-342900">
-              <a:lnSpc>
-                <a:spcPts val="1400"/>
-              </a:lnSpc>
-              <a:spcAft>
-                <a:spcPts val="200"/>
-              </a:spcAft>
-              <a:buSzPct val="100000"/>
-              <a:buChar char="•"/>
-            </a:pPr>
-            <a:r>
-              <a:rPr lang="en-US" sz="1000" dirty="0">
-                <a:solidFill>
-                  <a:srgbClr val="3D4451"/>
-                </a:solidFill>
-                <a:latin typeface="맑은 고딕" pitchFamily="34" charset="0"/>
-                <a:ea typeface="맑은 고딕" pitchFamily="34" charset="-122"/>
-                <a:cs typeface="맑은 고딕" pitchFamily="34" charset="-120"/>
-              </a:rPr>
-              <a:t>1 : 1 통신만 가능 (브로드캐스트 불가)</a:t>
-            </a:r>
-            <a:endParaRPr lang="en-US" sz="1000" dirty="0"/>
-          </a:p>
-        </p:txBody>
-      </p:sp>
-      <p:sp>
-        <p:nvSpPr>
-          <p:cNvPr id="13" name="Text 11"/>
-          <p:cNvSpPr txBox="1"/>
-          <p:nvPr/>
-        </p:nvSpPr>
-        <p:spPr>
-          <a:xfrm>
-            <a:off x="804672" y="3694176"/>
-            <a:ext cx="2926080" cy="237744"/>
-          </a:xfrm>
-          <a:prstGeom prst="rect">
-            <a:avLst/>
-          </a:prstGeom>
-          <a:noFill/>
-          <a:ln/>
-        </p:spPr>
-        <p:txBody>
-          <a:bodyPr wrap="square" lIns="0" tIns="0" rIns="0" bIns="0" rtlCol="0" anchor="ctr"/>
-          <a:lstStyle/>
-          <a:p>
-            <a:pPr indent="0" marL="0">
-              <a:buNone/>
-            </a:pPr>
-            <a:r>
-              <a:rPr lang="en-US" sz="1050" b="1" spc="60" kern="0" dirty="0">
-                <a:solidFill>
-                  <a:srgbClr val="8A5E10"/>
-                </a:solidFill>
-                <a:latin typeface="맑은 고딕" pitchFamily="34" charset="0"/>
-                <a:ea typeface="맑은 고딕" pitchFamily="34" charset="-122"/>
-                <a:cs typeface="맑은 고딕" pitchFamily="34" charset="-120"/>
-              </a:rPr>
-              <a:t>어떤 상황에서 쓰는가</a:t>
-            </a:r>
-            <a:endParaRPr lang="en-US" sz="1050" dirty="0"/>
-          </a:p>
-        </p:txBody>
-      </p:sp>
-      <p:sp>
-        <p:nvSpPr>
-          <p:cNvPr id="14" name="Text 12"/>
-          <p:cNvSpPr txBox="1"/>
-          <p:nvPr/>
-        </p:nvSpPr>
-        <p:spPr>
-          <a:xfrm>
-            <a:off x="804672" y="3950208"/>
-            <a:ext cx="4937760" cy="731520"/>
-          </a:xfrm>
-          <a:prstGeom prst="rect">
-            <a:avLst/>
-          </a:prstGeom>
-          <a:noFill/>
-          <a:ln/>
-        </p:spPr>
-        <p:txBody>
-          <a:bodyPr wrap="square" lIns="0" tIns="0" rIns="0" bIns="0" rtlCol="0" anchor="t"/>
-          <a:lstStyle/>
-          <a:p>
-            <a:pPr marL="342900" indent="-342900">
-              <a:lnSpc>
-                <a:spcPts val="1400"/>
-              </a:lnSpc>
-              <a:spcAft>
-                <a:spcPts val="200"/>
-              </a:spcAft>
-              <a:buSzPct val="100000"/>
-              <a:buChar char="•"/>
-            </a:pPr>
-            <a:r>
-              <a:rPr lang="en-US" sz="1000" dirty="0">
-                <a:solidFill>
-                  <a:srgbClr val="3D4451"/>
-                </a:solidFill>
-                <a:latin typeface="맑은 고딕" pitchFamily="34" charset="0"/>
-                <a:ea typeface="맑은 고딕" pitchFamily="34" charset="-122"/>
-                <a:cs typeface="맑은 고딕" pitchFamily="34" charset="-120"/>
-              </a:rPr>
-              <a:t>한 건이라도 빠지면 안 되는 데이터</a:t>
-            </a:r>
-            <a:endParaRPr lang="en-US" sz="1000" dirty="0"/>
-          </a:p>
-          <a:p>
-            <a:pPr marL="342900" indent="-342900">
-              <a:lnSpc>
-                <a:spcPts val="1400"/>
-              </a:lnSpc>
-              <a:spcAft>
-                <a:spcPts val="200"/>
-              </a:spcAft>
-              <a:buSzPct val="100000"/>
-              <a:buChar char="•"/>
-            </a:pPr>
-            <a:r>
-              <a:rPr lang="en-US" sz="1000" dirty="0">
-                <a:solidFill>
-                  <a:srgbClr val="3D4451"/>
-                </a:solidFill>
-                <a:latin typeface="맑은 고딕" pitchFamily="34" charset="0"/>
-                <a:ea typeface="맑은 고딕" pitchFamily="34" charset="-122"/>
-                <a:cs typeface="맑은 고딕" pitchFamily="34" charset="-120"/>
-              </a:rPr>
-              <a:t>파일 전송, 명령 / 제어, 로그 수집</a:t>
-            </a:r>
-            <a:endParaRPr lang="en-US" sz="1000" dirty="0"/>
-          </a:p>
-          <a:p>
-            <a:pPr marL="342900" indent="-342900">
-              <a:lnSpc>
-                <a:spcPts val="1400"/>
-              </a:lnSpc>
-              <a:spcAft>
-                <a:spcPts val="200"/>
-              </a:spcAft>
-              <a:buSzPct val="100000"/>
-              <a:buChar char="•"/>
-            </a:pPr>
-            <a:r>
-              <a:rPr lang="en-US" sz="1000" dirty="0">
-                <a:solidFill>
-                  <a:srgbClr val="3D4451"/>
-                </a:solidFill>
-                <a:latin typeface="맑은 고딕" pitchFamily="34" charset="0"/>
-                <a:ea typeface="맑은 고딕" pitchFamily="34" charset="-122"/>
-                <a:cs typeface="맑은 고딕" pitchFamily="34" charset="-120"/>
-              </a:rPr>
-              <a:t>본 과제 ToDo#3 이 여기에 해당</a:t>
-            </a:r>
-            <a:endParaRPr lang="en-US" sz="1000" dirty="0"/>
-          </a:p>
-        </p:txBody>
-      </p:sp>
-      <p:sp>
-        <p:nvSpPr>
-          <p:cNvPr id="15" name="Shape 13"/>
-          <p:cNvSpPr/>
-          <p:nvPr/>
-        </p:nvSpPr>
-        <p:spPr>
-          <a:xfrm>
-            <a:off x="804672" y="4700016"/>
-            <a:ext cx="2377440" cy="731520"/>
-          </a:xfrm>
-          <a:prstGeom prst="roundRect">
-            <a:avLst>
-              <a:gd name="adj" fmla="val 5000"/>
-            </a:avLst>
-          </a:prstGeom>
-          <a:solidFill>
-            <a:srgbClr val="E4F1F1"/>
-          </a:solidFill>
-          <a:ln w="12700">
-            <a:solidFill>
-              <a:srgbClr val="E4F1F1"/>
-            </a:solidFill>
-            <a:prstDash val="solid"/>
-          </a:ln>
-        </p:spPr>
-      </p:sp>
-      <p:sp>
-        <p:nvSpPr>
-          <p:cNvPr id="16" name="Shape 14"/>
-          <p:cNvSpPr/>
-          <p:nvPr/>
-        </p:nvSpPr>
-        <p:spPr>
-          <a:xfrm>
-            <a:off x="3364992" y="4700016"/>
-            <a:ext cx="2377440" cy="731520"/>
-          </a:xfrm>
-          <a:prstGeom prst="roundRect">
-            <a:avLst>
-              <a:gd name="adj" fmla="val 5000"/>
-            </a:avLst>
-          </a:prstGeom>
-          <a:solidFill>
-            <a:srgbClr val="FBEDE8"/>
-          </a:solidFill>
-          <a:ln w="12700">
-            <a:solidFill>
-              <a:srgbClr val="FBEDE8"/>
-            </a:solidFill>
-            <a:prstDash val="solid"/>
-          </a:ln>
-        </p:spPr>
-      </p:sp>
-      <p:sp>
-        <p:nvSpPr>
-          <p:cNvPr id="17" name="Text 15"/>
-          <p:cNvSpPr txBox="1"/>
-          <p:nvPr/>
-        </p:nvSpPr>
-        <p:spPr>
-          <a:xfrm>
-            <a:off x="914400" y="4736592"/>
-            <a:ext cx="548640" cy="201168"/>
-          </a:xfrm>
-          <a:prstGeom prst="rect">
-            <a:avLst/>
-          </a:prstGeom>
-          <a:noFill/>
-          <a:ln/>
-        </p:spPr>
-        <p:txBody>
-          <a:bodyPr wrap="square" lIns="0" tIns="0" rIns="0" bIns="0" rtlCol="0" anchor="ctr"/>
-          <a:lstStyle/>
-          <a:p>
-            <a:pPr indent="0" marL="0">
-              <a:buNone/>
-            </a:pPr>
-            <a:r>
-              <a:rPr lang="en-US" sz="950" b="1" dirty="0">
-                <a:solidFill>
-                  <a:srgbClr val="13757A"/>
-                </a:solidFill>
-                <a:latin typeface="맑은 고딕" pitchFamily="34" charset="0"/>
-                <a:ea typeface="맑은 고딕" pitchFamily="34" charset="-122"/>
-                <a:cs typeface="맑은 고딕" pitchFamily="34" charset="-120"/>
-              </a:rPr>
-              <a:t>장점</a:t>
-            </a:r>
-            <a:endParaRPr lang="en-US" sz="950" dirty="0"/>
-          </a:p>
-        </p:txBody>
-      </p:sp>
-      <p:sp>
-        <p:nvSpPr>
-          <p:cNvPr id="18" name="Text 16"/>
-          <p:cNvSpPr txBox="1"/>
-          <p:nvPr/>
-        </p:nvSpPr>
-        <p:spPr>
-          <a:xfrm>
-            <a:off x="3474720" y="4736592"/>
-            <a:ext cx="548640" cy="201168"/>
-          </a:xfrm>
-          <a:prstGeom prst="rect">
-            <a:avLst/>
-          </a:prstGeom>
-          <a:noFill/>
-          <a:ln/>
-        </p:spPr>
-        <p:txBody>
-          <a:bodyPr wrap="square" lIns="0" tIns="0" rIns="0" bIns="0" rtlCol="0" anchor="ctr"/>
-          <a:lstStyle/>
-          <a:p>
-            <a:pPr indent="0" marL="0">
-              <a:buNone/>
-            </a:pPr>
-            <a:r>
-              <a:rPr lang="en-US" sz="950" b="1" dirty="0">
-                <a:solidFill>
-                  <a:srgbClr val="D9532B"/>
-                </a:solidFill>
-                <a:latin typeface="맑은 고딕" pitchFamily="34" charset="0"/>
-                <a:ea typeface="맑은 고딕" pitchFamily="34" charset="-122"/>
-                <a:cs typeface="맑은 고딕" pitchFamily="34" charset="-120"/>
-              </a:rPr>
-              <a:t>단점</a:t>
-            </a:r>
-            <a:endParaRPr lang="en-US" sz="950" dirty="0"/>
-          </a:p>
-        </p:txBody>
-      </p:sp>
-      <p:sp>
-        <p:nvSpPr>
-          <p:cNvPr id="19" name="Text 17"/>
-          <p:cNvSpPr txBox="1"/>
-          <p:nvPr/>
-        </p:nvSpPr>
-        <p:spPr>
-          <a:xfrm>
-            <a:off x="914400" y="4956048"/>
-            <a:ext cx="2157984" cy="438912"/>
-          </a:xfrm>
-          <a:prstGeom prst="rect">
-            <a:avLst/>
-          </a:prstGeom>
-          <a:noFill/>
-          <a:ln/>
-        </p:spPr>
-        <p:txBody>
-          <a:bodyPr wrap="square" lIns="0" tIns="0" rIns="0" bIns="0" rtlCol="0" anchor="t"/>
-          <a:lstStyle/>
-          <a:p>
-            <a:pPr algn="l" indent="0" marL="0">
-              <a:lnSpc>
-                <a:spcPts val="1250"/>
-              </a:lnSpc>
-              <a:buNone/>
-            </a:pPr>
-            <a:r>
-              <a:rPr lang="en-US" sz="900" dirty="0">
-                <a:solidFill>
-                  <a:srgbClr val="245A5E"/>
-                </a:solidFill>
-                <a:latin typeface="맑은 고딕" pitchFamily="34" charset="0"/>
-                <a:ea typeface="맑은 고딕" pitchFamily="34" charset="-122"/>
-                <a:cs typeface="맑은 고딕" pitchFamily="34" charset="-120"/>
-              </a:rPr>
-              <a:t>도착 · 순서 · 무결성을 커널이 보장</a:t>
-            </a:r>
-            <a:endParaRPr lang="en-US" sz="900" dirty="0"/>
-          </a:p>
-          <a:p>
-            <a:pPr algn="l" indent="0" marL="0">
-              <a:lnSpc>
-                <a:spcPts val="1250"/>
-              </a:lnSpc>
-              <a:buNone/>
-            </a:pPr>
-            <a:r>
-              <a:rPr lang="en-US" sz="900" dirty="0">
-                <a:solidFill>
-                  <a:srgbClr val="245A5E"/>
-                </a:solidFill>
-                <a:latin typeface="맑은 고딕" pitchFamily="34" charset="0"/>
-                <a:ea typeface="맑은 고딕" pitchFamily="34" charset="-122"/>
-                <a:cs typeface="맑은 고딕" pitchFamily="34" charset="-120"/>
-              </a:rPr>
-              <a:t>애플리케이션 코드가 단순해진다</a:t>
-            </a:r>
-            <a:endParaRPr lang="en-US" sz="900" dirty="0"/>
-          </a:p>
-        </p:txBody>
-      </p:sp>
-      <p:sp>
-        <p:nvSpPr>
-          <p:cNvPr id="20" name="Text 18"/>
-          <p:cNvSpPr txBox="1"/>
-          <p:nvPr/>
-        </p:nvSpPr>
-        <p:spPr>
-          <a:xfrm>
-            <a:off x="3474720" y="4956048"/>
-            <a:ext cx="2157984" cy="438912"/>
-          </a:xfrm>
-          <a:prstGeom prst="rect">
-            <a:avLst/>
-          </a:prstGeom>
-          <a:noFill/>
-          <a:ln/>
-        </p:spPr>
-        <p:txBody>
-          <a:bodyPr wrap="square" lIns="0" tIns="0" rIns="0" bIns="0" rtlCol="0" anchor="t"/>
-          <a:lstStyle/>
-          <a:p>
-            <a:pPr algn="l" indent="0" marL="0">
-              <a:lnSpc>
-                <a:spcPts val="1250"/>
-              </a:lnSpc>
-              <a:buNone/>
-            </a:pPr>
-            <a:r>
-              <a:rPr lang="en-US" sz="900" dirty="0">
-                <a:solidFill>
-                  <a:srgbClr val="9B3A17"/>
-                </a:solidFill>
-                <a:latin typeface="맑은 고딕" pitchFamily="34" charset="0"/>
-                <a:ea typeface="맑은 고딕" pitchFamily="34" charset="-122"/>
-                <a:cs typeface="맑은 고딕" pitchFamily="34" charset="-120"/>
-              </a:rPr>
-              <a:t>헤더 20 byte + 연결 유지 비용</a:t>
-            </a:r>
-            <a:endParaRPr lang="en-US" sz="900" dirty="0"/>
-          </a:p>
-          <a:p>
-            <a:pPr algn="l" indent="0" marL="0">
-              <a:lnSpc>
-                <a:spcPts val="1250"/>
-              </a:lnSpc>
-              <a:buNone/>
-            </a:pPr>
-            <a:r>
-              <a:rPr lang="en-US" sz="900" dirty="0">
-                <a:solidFill>
-                  <a:srgbClr val="9B3A17"/>
-                </a:solidFill>
-                <a:latin typeface="맑은 고딕" pitchFamily="34" charset="0"/>
-                <a:ea typeface="맑은 고딕" pitchFamily="34" charset="-122"/>
-                <a:cs typeface="맑은 고딕" pitchFamily="34" charset="-120"/>
-              </a:rPr>
-              <a:t>재전송 때문에 지연이 튈 수 있다</a:t>
-            </a:r>
-            <a:endParaRPr lang="en-US" sz="900" dirty="0"/>
-          </a:p>
-        </p:txBody>
-      </p:sp>
-      <p:sp>
-        <p:nvSpPr>
-          <p:cNvPr id="21" name="Shape 19"/>
-          <p:cNvSpPr/>
-          <p:nvPr/>
-        </p:nvSpPr>
-        <p:spPr>
-          <a:xfrm>
-            <a:off x="6217920" y="1280160"/>
-            <a:ext cx="5449824" cy="4224528"/>
-          </a:xfrm>
-          <a:prstGeom prst="roundRect">
-            <a:avLst>
-              <a:gd name="adj" fmla="val 1299"/>
-            </a:avLst>
-          </a:prstGeom>
-          <a:solidFill>
-            <a:srgbClr val="FFFFFF"/>
-          </a:solidFill>
-          <a:ln w="12700">
-            <a:solidFill>
-              <a:srgbClr val="D5DBE4"/>
-            </a:solidFill>
-            <a:prstDash val="solid"/>
-          </a:ln>
-        </p:spPr>
-      </p:sp>
-      <p:sp>
-        <p:nvSpPr>
-          <p:cNvPr id="22" name="Shape 20"/>
-          <p:cNvSpPr/>
-          <p:nvPr/>
-        </p:nvSpPr>
-        <p:spPr>
-          <a:xfrm>
-            <a:off x="6217920" y="1280160"/>
-            <a:ext cx="5449824" cy="713232"/>
-          </a:xfrm>
-          <a:prstGeom prst="roundRect">
-            <a:avLst>
-              <a:gd name="adj" fmla="val 7692"/>
-            </a:avLst>
-          </a:prstGeom>
-          <a:solidFill>
-            <a:srgbClr val="C8891F"/>
-          </a:solidFill>
-          <a:ln w="12700">
-            <a:solidFill>
-              <a:srgbClr val="C8891F"/>
-            </a:solidFill>
-            <a:prstDash val="solid"/>
-          </a:ln>
-        </p:spPr>
-      </p:sp>
-      <p:sp>
-        <p:nvSpPr>
-          <p:cNvPr id="23" name="Text 21"/>
-          <p:cNvSpPr txBox="1"/>
-          <p:nvPr/>
-        </p:nvSpPr>
-        <p:spPr>
-          <a:xfrm>
-            <a:off x="6473952" y="1316736"/>
-            <a:ext cx="3108960" cy="384048"/>
-          </a:xfrm>
-          <a:prstGeom prst="rect">
-            <a:avLst/>
-          </a:prstGeom>
-          <a:noFill/>
-          <a:ln/>
-        </p:spPr>
-        <p:txBody>
-          <a:bodyPr wrap="square" lIns="0" tIns="0" rIns="0" bIns="0" rtlCol="0" anchor="ctr"/>
-          <a:lstStyle/>
-          <a:p>
-            <a:pPr indent="0" marL="0">
-              <a:buNone/>
-            </a:pPr>
-            <a:r>
-              <a:rPr lang="en-US" sz="2100" b="1" dirty="0">
-                <a:solidFill>
-                  <a:srgbClr val="FFFFFF"/>
-                </a:solidFill>
-                <a:latin typeface="맑은 고딕" pitchFamily="34" charset="0"/>
-                <a:ea typeface="맑은 고딕" pitchFamily="34" charset="-122"/>
-                <a:cs typeface="맑은 고딕" pitchFamily="34" charset="-120"/>
-              </a:rPr>
-              <a:t>UDP</a:t>
-            </a:r>
-            <a:endParaRPr lang="en-US" sz="2100" dirty="0"/>
-          </a:p>
-        </p:txBody>
-      </p:sp>
-      <p:sp>
-        <p:nvSpPr>
-          <p:cNvPr id="24" name="Text 22"/>
-          <p:cNvSpPr txBox="1"/>
-          <p:nvPr/>
-        </p:nvSpPr>
-        <p:spPr>
-          <a:xfrm>
-            <a:off x="6473952" y="1682496"/>
-            <a:ext cx="4023360" cy="237744"/>
-          </a:xfrm>
-          <a:prstGeom prst="rect">
-            <a:avLst/>
-          </a:prstGeom>
-          <a:noFill/>
-          <a:ln/>
-        </p:spPr>
-        <p:txBody>
-          <a:bodyPr wrap="square" lIns="0" tIns="0" rIns="0" bIns="0" rtlCol="0" anchor="ctr"/>
-          <a:lstStyle/>
-          <a:p>
-            <a:pPr indent="0" marL="0">
-              <a:buNone/>
-            </a:pPr>
-            <a:r>
-              <a:rPr lang="en-US" sz="880" dirty="0">
-                <a:solidFill>
-                  <a:srgbClr val="F2F6F8"/>
-                </a:solidFill>
-                <a:latin typeface="Consolas" pitchFamily="34" charset="0"/>
-                <a:ea typeface="Consolas" pitchFamily="34" charset="-122"/>
-                <a:cs typeface="Consolas" pitchFamily="34" charset="-120"/>
-              </a:rPr>
-              <a:t>User Datagram Protocol</a:t>
-            </a:r>
-            <a:endParaRPr lang="en-US" sz="880" dirty="0"/>
-          </a:p>
-        </p:txBody>
-      </p:sp>
-      <p:sp>
-        <p:nvSpPr>
-          <p:cNvPr id="25" name="Text 23"/>
-          <p:cNvSpPr txBox="1"/>
-          <p:nvPr/>
-        </p:nvSpPr>
-        <p:spPr>
-          <a:xfrm>
-            <a:off x="6473952" y="2084832"/>
-            <a:ext cx="4937760" cy="292608"/>
-          </a:xfrm>
-          <a:prstGeom prst="rect">
-            <a:avLst/>
-          </a:prstGeom>
-          <a:noFill/>
-          <a:ln/>
-        </p:spPr>
-        <p:txBody>
-          <a:bodyPr wrap="square" lIns="0" tIns="0" rIns="0" bIns="0" rtlCol="0" anchor="ctr"/>
-          <a:lstStyle/>
-          <a:p>
-            <a:pPr indent="0" marL="0">
-              <a:buNone/>
-            </a:pPr>
-            <a:r>
-              <a:rPr lang="en-US" sz="1200" b="1" dirty="0">
-                <a:solidFill>
-                  <a:srgbClr val="C8891F"/>
-                </a:solidFill>
-                <a:latin typeface="맑은 고딕" pitchFamily="34" charset="0"/>
-                <a:ea typeface="맑은 고딕" pitchFamily="34" charset="-122"/>
-                <a:cs typeface="맑은 고딕" pitchFamily="34" charset="-120"/>
-              </a:rPr>
-              <a:t>비연결형 · 데이터그램 · 최선 노력 전달</a:t>
-            </a:r>
-            <a:endParaRPr lang="en-US" sz="1200" dirty="0"/>
-          </a:p>
-        </p:txBody>
-      </p:sp>
-      <p:sp>
-        <p:nvSpPr>
-          <p:cNvPr id="26" name="Text 24"/>
-          <p:cNvSpPr txBox="1"/>
-          <p:nvPr/>
-        </p:nvSpPr>
-        <p:spPr>
-          <a:xfrm>
-            <a:off x="6473952" y="2450592"/>
-            <a:ext cx="1828800" cy="237744"/>
-          </a:xfrm>
-          <a:prstGeom prst="rect">
-            <a:avLst/>
-          </a:prstGeom>
-          <a:noFill/>
-          <a:ln/>
-        </p:spPr>
-        <p:txBody>
-          <a:bodyPr wrap="square" lIns="0" tIns="0" rIns="0" bIns="0" rtlCol="0" anchor="ctr"/>
-          <a:lstStyle/>
-          <a:p>
-            <a:pPr indent="0" marL="0">
-              <a:buNone/>
-            </a:pPr>
-            <a:r>
-              <a:rPr lang="en-US" sz="1050" b="1" spc="60" kern="0" dirty="0">
-                <a:solidFill>
-                  <a:srgbClr val="1E232E"/>
-                </a:solidFill>
-                <a:latin typeface="맑은 고딕" pitchFamily="34" charset="0"/>
-                <a:ea typeface="맑은 고딕" pitchFamily="34" charset="-122"/>
-                <a:cs typeface="맑은 고딕" pitchFamily="34" charset="-120"/>
-              </a:rPr>
-              <a:t>특 징</a:t>
-            </a:r>
-            <a:endParaRPr lang="en-US" sz="1050" dirty="0"/>
-          </a:p>
-        </p:txBody>
-      </p:sp>
-      <p:sp>
-        <p:nvSpPr>
-          <p:cNvPr id="27" name="Text 25"/>
-          <p:cNvSpPr txBox="1"/>
-          <p:nvPr/>
-        </p:nvSpPr>
-        <p:spPr>
-          <a:xfrm>
-            <a:off x="6473952" y="2706624"/>
-            <a:ext cx="4937760" cy="932688"/>
-          </a:xfrm>
-          <a:prstGeom prst="rect">
-            <a:avLst/>
-          </a:prstGeom>
-          <a:noFill/>
-          <a:ln/>
-        </p:spPr>
-        <p:txBody>
-          <a:bodyPr wrap="square" lIns="0" tIns="0" rIns="0" bIns="0" rtlCol="0" anchor="t"/>
-          <a:lstStyle/>
-          <a:p>
-            <a:pPr marL="342900" indent="-342900">
-              <a:lnSpc>
-                <a:spcPts val="1400"/>
-              </a:lnSpc>
-              <a:spcAft>
-                <a:spcPts val="200"/>
-              </a:spcAft>
-              <a:buSzPct val="100000"/>
-              <a:buChar char="•"/>
-            </a:pPr>
-            <a:r>
-              <a:rPr lang="en-US" sz="1000" dirty="0">
-                <a:solidFill>
-                  <a:srgbClr val="3D4451"/>
-                </a:solidFill>
-                <a:latin typeface="맑은 고딕" pitchFamily="34" charset="0"/>
-                <a:ea typeface="맑은 고딕" pitchFamily="34" charset="-122"/>
-                <a:cs typeface="맑은 고딕" pitchFamily="34" charset="-120"/>
-              </a:rPr>
-              <a:t>연결 절차 없이 주소만 알면 바로 보낸다</a:t>
-            </a:r>
-            <a:endParaRPr lang="en-US" sz="1000" dirty="0"/>
-          </a:p>
-          <a:p>
-            <a:pPr marL="342900" indent="-342900">
-              <a:lnSpc>
-                <a:spcPts val="1400"/>
-              </a:lnSpc>
-              <a:spcAft>
-                <a:spcPts val="200"/>
-              </a:spcAft>
-              <a:buSzPct val="100000"/>
-              <a:buChar char="•"/>
-            </a:pPr>
-            <a:r>
-              <a:rPr lang="en-US" sz="1000" dirty="0">
-                <a:solidFill>
-                  <a:srgbClr val="3D4451"/>
-                </a:solidFill>
-                <a:latin typeface="맑은 고딕" pitchFamily="34" charset="0"/>
-                <a:ea typeface="맑은 고딕" pitchFamily="34" charset="-122"/>
-                <a:cs typeface="맑은 고딕" pitchFamily="34" charset="-120"/>
-              </a:rPr>
-              <a:t>보낸 크기 그대로 도착한다 (경계 보존)</a:t>
-            </a:r>
-            <a:endParaRPr lang="en-US" sz="1000" dirty="0"/>
-          </a:p>
-          <a:p>
-            <a:pPr marL="342900" indent="-342900">
-              <a:lnSpc>
-                <a:spcPts val="1400"/>
-              </a:lnSpc>
-              <a:spcAft>
-                <a:spcPts val="200"/>
-              </a:spcAft>
-              <a:buSzPct val="100000"/>
-              <a:buChar char="•"/>
-            </a:pPr>
-            <a:r>
-              <a:rPr lang="en-US" sz="1000" dirty="0">
-                <a:solidFill>
-                  <a:srgbClr val="3D4451"/>
-                </a:solidFill>
-                <a:latin typeface="맑은 고딕" pitchFamily="34" charset="0"/>
-                <a:ea typeface="맑은 고딕" pitchFamily="34" charset="-122"/>
-                <a:cs typeface="맑은 고딕" pitchFamily="34" charset="-120"/>
-              </a:rPr>
-              <a:t>도착 · 순서 · 중복을 보장하지 않는다</a:t>
-            </a:r>
-            <a:endParaRPr lang="en-US" sz="1000" dirty="0"/>
-          </a:p>
-          <a:p>
-            <a:pPr marL="342900" indent="-342900">
-              <a:lnSpc>
-                <a:spcPts val="1400"/>
-              </a:lnSpc>
-              <a:spcAft>
-                <a:spcPts val="200"/>
-              </a:spcAft>
-              <a:buSzPct val="100000"/>
-              <a:buChar char="•"/>
-            </a:pPr>
-            <a:r>
-              <a:rPr lang="en-US" sz="1000" dirty="0">
-                <a:solidFill>
-                  <a:srgbClr val="3D4451"/>
-                </a:solidFill>
-                <a:latin typeface="맑은 고딕" pitchFamily="34" charset="0"/>
-                <a:ea typeface="맑은 고딕" pitchFamily="34" charset="-122"/>
-                <a:cs typeface="맑은 고딕" pitchFamily="34" charset="-120"/>
-              </a:rPr>
-              <a:t>1 : N 브로드캐스트 · 멀티캐스트 가능</a:t>
-            </a:r>
-            <a:endParaRPr lang="en-US" sz="1000" dirty="0"/>
-          </a:p>
-        </p:txBody>
-      </p:sp>
-      <p:sp>
-        <p:nvSpPr>
-          <p:cNvPr id="28" name="Text 26"/>
-          <p:cNvSpPr txBox="1"/>
-          <p:nvPr/>
-        </p:nvSpPr>
-        <p:spPr>
-          <a:xfrm>
-            <a:off x="6473952" y="3694176"/>
-            <a:ext cx="2926080" cy="237744"/>
-          </a:xfrm>
-          <a:prstGeom prst="rect">
-            <a:avLst/>
-          </a:prstGeom>
-          <a:noFill/>
-          <a:ln/>
-        </p:spPr>
-        <p:txBody>
-          <a:bodyPr wrap="square" lIns="0" tIns="0" rIns="0" bIns="0" rtlCol="0" anchor="ctr"/>
-          <a:lstStyle/>
-          <a:p>
-            <a:pPr indent="0" marL="0">
-              <a:buNone/>
-            </a:pPr>
-            <a:r>
-              <a:rPr lang="en-US" sz="1050" b="1" spc="60" kern="0" dirty="0">
-                <a:solidFill>
-                  <a:srgbClr val="8A5E10"/>
-                </a:solidFill>
-                <a:latin typeface="맑은 고딕" pitchFamily="34" charset="0"/>
-                <a:ea typeface="맑은 고딕" pitchFamily="34" charset="-122"/>
-                <a:cs typeface="맑은 고딕" pitchFamily="34" charset="-120"/>
-              </a:rPr>
-              <a:t>어떤 상황에서 쓰는가</a:t>
-            </a:r>
-            <a:endParaRPr lang="en-US" sz="1050" dirty="0"/>
-          </a:p>
-        </p:txBody>
-      </p:sp>
-      <p:sp>
-        <p:nvSpPr>
-          <p:cNvPr id="29" name="Text 27"/>
-          <p:cNvSpPr txBox="1"/>
-          <p:nvPr/>
-        </p:nvSpPr>
-        <p:spPr>
-          <a:xfrm>
-            <a:off x="6473952" y="3950208"/>
-            <a:ext cx="4937760" cy="731520"/>
-          </a:xfrm>
-          <a:prstGeom prst="rect">
-            <a:avLst/>
-          </a:prstGeom>
-          <a:noFill/>
-          <a:ln/>
-        </p:spPr>
-        <p:txBody>
-          <a:bodyPr wrap="square" lIns="0" tIns="0" rIns="0" bIns="0" rtlCol="0" anchor="t"/>
-          <a:lstStyle/>
-          <a:p>
-            <a:pPr marL="342900" indent="-342900">
-              <a:lnSpc>
-                <a:spcPts val="1400"/>
-              </a:lnSpc>
-              <a:spcAft>
-                <a:spcPts val="200"/>
-              </a:spcAft>
-              <a:buSzPct val="100000"/>
-              <a:buChar char="•"/>
-            </a:pPr>
-            <a:r>
-              <a:rPr lang="en-US" sz="1000" dirty="0">
-                <a:solidFill>
-                  <a:srgbClr val="3D4451"/>
-                </a:solidFill>
-                <a:latin typeface="맑은 고딕" pitchFamily="34" charset="0"/>
-                <a:ea typeface="맑은 고딕" pitchFamily="34" charset="-122"/>
-                <a:cs typeface="맑은 고딕" pitchFamily="34" charset="-120"/>
-              </a:rPr>
-              <a:t>최신 값만 의미 있는 주기 데이터</a:t>
-            </a:r>
-            <a:endParaRPr lang="en-US" sz="1000" dirty="0"/>
-          </a:p>
-          <a:p>
-            <a:pPr marL="342900" indent="-342900">
-              <a:lnSpc>
-                <a:spcPts val="1400"/>
-              </a:lnSpc>
-              <a:spcAft>
-                <a:spcPts val="200"/>
-              </a:spcAft>
-              <a:buSzPct val="100000"/>
-              <a:buChar char="•"/>
-            </a:pPr>
-            <a:r>
-              <a:rPr lang="en-US" sz="1000" dirty="0">
-                <a:solidFill>
-                  <a:srgbClr val="3D4451"/>
-                </a:solidFill>
-                <a:latin typeface="맑은 고딕" pitchFamily="34" charset="0"/>
-                <a:ea typeface="맑은 고딕" pitchFamily="34" charset="-122"/>
-                <a:cs typeface="맑은 고딕" pitchFamily="34" charset="-120"/>
-              </a:rPr>
-              <a:t>센서 · 텔레메트리, 음성 / 영상 스트리밍</a:t>
-            </a:r>
-            <a:endParaRPr lang="en-US" sz="1000" dirty="0"/>
-          </a:p>
-          <a:p>
-            <a:pPr marL="342900" indent="-342900">
-              <a:lnSpc>
-                <a:spcPts val="1400"/>
-              </a:lnSpc>
-              <a:spcAft>
-                <a:spcPts val="200"/>
-              </a:spcAft>
-              <a:buSzPct val="100000"/>
-              <a:buChar char="•"/>
-            </a:pPr>
-            <a:r>
-              <a:rPr lang="en-US" sz="1000" dirty="0">
-                <a:solidFill>
-                  <a:srgbClr val="3D4451"/>
-                </a:solidFill>
-                <a:latin typeface="맑은 고딕" pitchFamily="34" charset="0"/>
-                <a:ea typeface="맑은 고딕" pitchFamily="34" charset="-122"/>
-                <a:cs typeface="맑은 고딕" pitchFamily="34" charset="-120"/>
-              </a:rPr>
-              <a:t>여러 노드에 상태를 뿌릴 때</a:t>
-            </a:r>
-            <a:endParaRPr lang="en-US" sz="1000" dirty="0"/>
-          </a:p>
-        </p:txBody>
-      </p:sp>
-      <p:sp>
-        <p:nvSpPr>
-          <p:cNvPr id="30" name="Shape 28"/>
-          <p:cNvSpPr/>
-          <p:nvPr/>
-        </p:nvSpPr>
-        <p:spPr>
-          <a:xfrm>
-            <a:off x="6473952" y="4700016"/>
-            <a:ext cx="2377440" cy="731520"/>
-          </a:xfrm>
-          <a:prstGeom prst="roundRect">
-            <a:avLst>
-              <a:gd name="adj" fmla="val 5000"/>
-            </a:avLst>
-          </a:prstGeom>
-          <a:solidFill>
-            <a:srgbClr val="E4F1F1"/>
-          </a:solidFill>
-          <a:ln w="12700">
-            <a:solidFill>
-              <a:srgbClr val="E4F1F1"/>
-            </a:solidFill>
-            <a:prstDash val="solid"/>
-          </a:ln>
-        </p:spPr>
-      </p:sp>
-      <p:sp>
-        <p:nvSpPr>
-          <p:cNvPr id="31" name="Shape 29"/>
-          <p:cNvSpPr/>
-          <p:nvPr/>
-        </p:nvSpPr>
-        <p:spPr>
-          <a:xfrm>
-            <a:off x="9034272" y="4700016"/>
-            <a:ext cx="2377440" cy="731520"/>
-          </a:xfrm>
-          <a:prstGeom prst="roundRect">
-            <a:avLst>
-              <a:gd name="adj" fmla="val 5000"/>
-            </a:avLst>
-          </a:prstGeom>
-          <a:solidFill>
-            <a:srgbClr val="FBEDE8"/>
-          </a:solidFill>
-          <a:ln w="12700">
-            <a:solidFill>
-              <a:srgbClr val="FBEDE8"/>
-            </a:solidFill>
-            <a:prstDash val="solid"/>
-          </a:ln>
-        </p:spPr>
-      </p:sp>
-      <p:sp>
-        <p:nvSpPr>
-          <p:cNvPr id="32" name="Text 30"/>
-          <p:cNvSpPr txBox="1"/>
-          <p:nvPr/>
-        </p:nvSpPr>
-        <p:spPr>
-          <a:xfrm>
-            <a:off x="6583680" y="4736592"/>
-            <a:ext cx="548640" cy="201168"/>
-          </a:xfrm>
-          <a:prstGeom prst="rect">
-            <a:avLst/>
-          </a:prstGeom>
-          <a:noFill/>
-          <a:ln/>
-        </p:spPr>
-        <p:txBody>
-          <a:bodyPr wrap="square" lIns="0" tIns="0" rIns="0" bIns="0" rtlCol="0" anchor="ctr"/>
-          <a:lstStyle/>
-          <a:p>
-            <a:pPr indent="0" marL="0">
-              <a:buNone/>
-            </a:pPr>
-            <a:r>
-              <a:rPr lang="en-US" sz="950" b="1" dirty="0">
-                <a:solidFill>
-                  <a:srgbClr val="13757A"/>
-                </a:solidFill>
-                <a:latin typeface="맑은 고딕" pitchFamily="34" charset="0"/>
-                <a:ea typeface="맑은 고딕" pitchFamily="34" charset="-122"/>
-                <a:cs typeface="맑은 고딕" pitchFamily="34" charset="-120"/>
-              </a:rPr>
-              <a:t>장점</a:t>
-            </a:r>
-            <a:endParaRPr lang="en-US" sz="950" dirty="0"/>
-          </a:p>
-        </p:txBody>
-      </p:sp>
-      <p:sp>
-        <p:nvSpPr>
-          <p:cNvPr id="33" name="Text 31"/>
-          <p:cNvSpPr txBox="1"/>
-          <p:nvPr/>
-        </p:nvSpPr>
-        <p:spPr>
-          <a:xfrm>
-            <a:off x="9144000" y="4736592"/>
-            <a:ext cx="548640" cy="201168"/>
-          </a:xfrm>
-          <a:prstGeom prst="rect">
-            <a:avLst/>
-          </a:prstGeom>
-          <a:noFill/>
-          <a:ln/>
-        </p:spPr>
-        <p:txBody>
-          <a:bodyPr wrap="square" lIns="0" tIns="0" rIns="0" bIns="0" rtlCol="0" anchor="ctr"/>
-          <a:lstStyle/>
-          <a:p>
-            <a:pPr indent="0" marL="0">
-              <a:buNone/>
-            </a:pPr>
-            <a:r>
-              <a:rPr lang="en-US" sz="950" b="1" dirty="0">
-                <a:solidFill>
-                  <a:srgbClr val="D9532B"/>
-                </a:solidFill>
-                <a:latin typeface="맑은 고딕" pitchFamily="34" charset="0"/>
-                <a:ea typeface="맑은 고딕" pitchFamily="34" charset="-122"/>
-                <a:cs typeface="맑은 고딕" pitchFamily="34" charset="-120"/>
-              </a:rPr>
-              <a:t>단점</a:t>
-            </a:r>
-            <a:endParaRPr lang="en-US" sz="950" dirty="0"/>
-          </a:p>
-        </p:txBody>
-      </p:sp>
-      <p:sp>
-        <p:nvSpPr>
-          <p:cNvPr id="34" name="Text 32"/>
-          <p:cNvSpPr txBox="1"/>
-          <p:nvPr/>
-        </p:nvSpPr>
-        <p:spPr>
-          <a:xfrm>
-            <a:off x="6583680" y="4956048"/>
-            <a:ext cx="2157984" cy="438912"/>
-          </a:xfrm>
-          <a:prstGeom prst="rect">
-            <a:avLst/>
-          </a:prstGeom>
-          <a:noFill/>
-          <a:ln/>
-        </p:spPr>
-        <p:txBody>
-          <a:bodyPr wrap="square" lIns="0" tIns="0" rIns="0" bIns="0" rtlCol="0" anchor="t"/>
-          <a:lstStyle/>
-          <a:p>
-            <a:pPr algn="l" indent="0" marL="0">
-              <a:lnSpc>
-                <a:spcPts val="1250"/>
-              </a:lnSpc>
-              <a:buNone/>
-            </a:pPr>
-            <a:r>
-              <a:rPr lang="en-US" sz="900" dirty="0">
-                <a:solidFill>
-                  <a:srgbClr val="245A5E"/>
-                </a:solidFill>
-                <a:latin typeface="맑은 고딕" pitchFamily="34" charset="0"/>
-                <a:ea typeface="맑은 고딕" pitchFamily="34" charset="-122"/>
-                <a:cs typeface="맑은 고딕" pitchFamily="34" charset="-120"/>
-              </a:rPr>
-              <a:t>헤더 8 byte, 연결 상태가 없어 가볍다</a:t>
-            </a:r>
-            <a:endParaRPr lang="en-US" sz="900" dirty="0"/>
-          </a:p>
-          <a:p>
-            <a:pPr algn="l" indent="0" marL="0">
-              <a:lnSpc>
-                <a:spcPts val="1250"/>
-              </a:lnSpc>
-              <a:buNone/>
-            </a:pPr>
-            <a:r>
-              <a:rPr lang="en-US" sz="900" dirty="0">
-                <a:solidFill>
-                  <a:srgbClr val="245A5E"/>
-                </a:solidFill>
-                <a:latin typeface="맑은 고딕" pitchFamily="34" charset="0"/>
-                <a:ea typeface="맑은 고딕" pitchFamily="34" charset="-122"/>
-                <a:cs typeface="맑은 고딕" pitchFamily="34" charset="-120"/>
-              </a:rPr>
-              <a:t>지연이 낮고 여러 상대에게 보낼 수 있다</a:t>
-            </a:r>
-            <a:endParaRPr lang="en-US" sz="900" dirty="0"/>
-          </a:p>
-        </p:txBody>
-      </p:sp>
-      <p:sp>
-        <p:nvSpPr>
-          <p:cNvPr id="35" name="Text 33"/>
-          <p:cNvSpPr txBox="1"/>
-          <p:nvPr/>
-        </p:nvSpPr>
-        <p:spPr>
-          <a:xfrm>
-            <a:off x="9144000" y="4956048"/>
-            <a:ext cx="2157984" cy="438912"/>
-          </a:xfrm>
-          <a:prstGeom prst="rect">
-            <a:avLst/>
-          </a:prstGeom>
-          <a:noFill/>
-          <a:ln/>
-        </p:spPr>
-        <p:txBody>
-          <a:bodyPr wrap="square" lIns="0" tIns="0" rIns="0" bIns="0" rtlCol="0" anchor="t"/>
-          <a:lstStyle/>
-          <a:p>
-            <a:pPr algn="l" indent="0" marL="0">
-              <a:lnSpc>
-                <a:spcPts val="1250"/>
-              </a:lnSpc>
-              <a:buNone/>
-            </a:pPr>
-            <a:r>
-              <a:rPr lang="en-US" sz="900" dirty="0">
-                <a:solidFill>
-                  <a:srgbClr val="9B3A17"/>
-                </a:solidFill>
-                <a:latin typeface="맑은 고딕" pitchFamily="34" charset="0"/>
-                <a:ea typeface="맑은 고딕" pitchFamily="34" charset="-122"/>
-                <a:cs typeface="맑은 고딕" pitchFamily="34" charset="-120"/>
-              </a:rPr>
-              <a:t>유실 · 순서 뒤바뀜을 앱이 처리해야</a:t>
-            </a:r>
-            <a:endParaRPr lang="en-US" sz="900" dirty="0"/>
-          </a:p>
-          <a:p>
-            <a:pPr algn="l" indent="0" marL="0">
-              <a:lnSpc>
-                <a:spcPts val="1250"/>
-              </a:lnSpc>
-              <a:buNone/>
-            </a:pPr>
-            <a:r>
-              <a:rPr lang="en-US" sz="900" dirty="0">
-                <a:solidFill>
-                  <a:srgbClr val="9B3A17"/>
-                </a:solidFill>
-                <a:latin typeface="맑은 고딕" pitchFamily="34" charset="0"/>
-                <a:ea typeface="맑은 고딕" pitchFamily="34" charset="-122"/>
-                <a:cs typeface="맑은 고딕" pitchFamily="34" charset="-120"/>
-              </a:rPr>
-              <a:t>한 번에 보낼 수 있는 크기 제한 (64KB)</a:t>
-            </a:r>
-            <a:endParaRPr lang="en-US" sz="900" dirty="0"/>
-          </a:p>
-        </p:txBody>
-      </p:sp>
-      <p:sp>
-        <p:nvSpPr>
-          <p:cNvPr id="36" name="Shape 34"/>
-          <p:cNvSpPr/>
-          <p:nvPr/>
-        </p:nvSpPr>
-        <p:spPr>
-          <a:xfrm>
-            <a:off x="548640" y="5614416"/>
-            <a:ext cx="11094415" cy="749808"/>
-          </a:xfrm>
-          <a:prstGeom prst="roundRect">
-            <a:avLst>
-              <a:gd name="adj" fmla="val 7317"/>
+              <a:gd name="adj" fmla="val 3109"/>
             </a:avLst>
           </a:prstGeom>
           <a:solidFill>
@@ -40409,44 +40693,91 @@
             <a:prstDash val="solid"/>
           </a:ln>
         </p:spPr>
-      </p:sp>
-      <p:sp>
-        <p:nvSpPr>
-          <p:cNvPr id="37" name="Shape 35"/>
+        <p:txBody>
+          <a:bodyPr/>
+          <a:p/>
+        </p:txBody>
+      </p:sp>
+      <p:sp>
+        <p:nvSpPr>
+          <p:cNvPr id="8" name="Text 5"/>
+          <p:cNvSpPr txBox="1"/>
+          <p:nvPr/>
+        </p:nvSpPr>
+        <p:spPr>
+          <a:xfrm>
+            <a:off x="841248" y="4700016"/>
+            <a:ext cx="5486400" cy="310896"/>
+          </a:xfrm>
+          <a:prstGeom prst="rect">
+            <a:avLst/>
+          </a:prstGeom>
+          <a:noFill/>
+          <a:ln/>
+        </p:spPr>
+        <p:txBody>
+          <a:bodyPr wrap="square" lIns="0" tIns="0" rIns="0" bIns="0" rtlCol="0" anchor="ctr"/>
+          <a:lstStyle/>
+          <a:p>
+            <a:pPr indent="0" marL="0">
+              <a:buNone/>
+            </a:pPr>
+            <a:r>
+              <a:rPr lang="en-US" sz="1400" b="1" dirty="0">
+                <a:solidFill>
+                  <a:srgbClr val="FFFFFF"/>
+                </a:solidFill>
+                <a:latin typeface="맑은 고딕" pitchFamily="34" charset="0"/>
+                <a:ea typeface="맑은 고딕" pitchFamily="34" charset="-122"/>
+                <a:cs typeface="맑은 고딕" pitchFamily="34" charset="-120"/>
+              </a:rPr>
+              <a:t>구현에서 실제로 걸리는 것 — TCP 는 「경계」가 없다</a:t>
+            </a:r>
+            <a:endParaRPr lang="en-US" sz="1400" dirty="0"/>
+          </a:p>
+        </p:txBody>
+      </p:sp>
+      <p:sp>
+        <p:nvSpPr>
+          <p:cNvPr id="9" name="Shape 6"/>
           <p:cNvSpPr/>
           <p:nvPr/>
         </p:nvSpPr>
         <p:spPr>
           <a:xfrm>
-            <a:off x="768096" y="5797296"/>
-            <a:ext cx="1371600" cy="384048"/>
+            <a:off x="841248" y="5084064"/>
+            <a:ext cx="2231136" cy="950976"/>
           </a:xfrm>
           <a:prstGeom prst="roundRect">
             <a:avLst>
-              <a:gd name="adj" fmla="val 14286"/>
+              <a:gd name="adj" fmla="val 4808"/>
             </a:avLst>
           </a:prstGeom>
           <a:solidFill>
-            <a:srgbClr val="D9532B"/>
+            <a:srgbClr val="2C3444"/>
           </a:solidFill>
           <a:ln w="12700">
             <a:solidFill>
-              <a:srgbClr val="D9532B"/>
+              <a:srgbClr val="2AA5AB"/>
             </a:solidFill>
             <a:prstDash val="solid"/>
           </a:ln>
         </p:spPr>
-      </p:sp>
-      <p:sp>
-        <p:nvSpPr>
-          <p:cNvPr id="38" name="Text 36"/>
-          <p:cNvSpPr txBox="1"/>
-          <p:nvPr/>
-        </p:nvSpPr>
-        <p:spPr>
-          <a:xfrm>
-            <a:off x="768096" y="5797296"/>
-            <a:ext cx="1371600" cy="384048"/>
+        <p:txBody>
+          <a:bodyPr/>
+          <a:p/>
+        </p:txBody>
+      </p:sp>
+      <p:sp>
+        <p:nvSpPr>
+          <p:cNvPr id="10" name="Text 7"/>
+          <p:cNvSpPr txBox="1"/>
+          <p:nvPr/>
+        </p:nvSpPr>
+        <p:spPr>
+          <a:xfrm>
+            <a:off x="841248" y="5148072"/>
+            <a:ext cx="2231136" cy="274320"/>
           </a:xfrm>
           <a:prstGeom prst="rect">
             <a:avLst/>
@@ -40462,30 +40793,92 @@
               <a:buNone/>
             </a:pPr>
             <a:r>
-              <a:rPr lang="en-US" sz="1100" b="1" dirty="0">
-                <a:solidFill>
-                  <a:srgbClr val="FFFFFF"/>
-                </a:solidFill>
-                <a:latin typeface="맑은 고딕" pitchFamily="34" charset="0"/>
-                <a:ea typeface="맑은 고딕" pitchFamily="34" charset="-122"/>
-                <a:cs typeface="맑은 고딕" pitchFamily="34" charset="-120"/>
-              </a:rPr>
-              <a:t>과제 적용</a:t>
-            </a:r>
-            <a:endParaRPr lang="en-US" sz="1100" dirty="0"/>
-          </a:p>
-        </p:txBody>
-      </p:sp>
-      <p:sp>
-        <p:nvSpPr>
-          <p:cNvPr id="39" name="Text 37"/>
-          <p:cNvSpPr txBox="1"/>
-          <p:nvPr/>
-        </p:nvSpPr>
-        <p:spPr>
-          <a:xfrm>
-            <a:off x="2286000" y="5614416"/>
-            <a:ext cx="9082735" cy="749808"/>
+              <a:rPr lang="en-US" sz="1150" b="1" dirty="0">
+                <a:solidFill>
+                  <a:srgbClr val="2AA5AB"/>
+                </a:solidFill>
+                <a:latin typeface="맑은 고딕" pitchFamily="34" charset="0"/>
+                <a:ea typeface="맑은 고딕" pitchFamily="34" charset="-122"/>
+                <a:cs typeface="맑은 고딕" pitchFamily="34" charset="-120"/>
+              </a:rPr>
+              <a:t>송신</a:t>
+            </a:r>
+            <a:endParaRPr lang="en-US" sz="1150" dirty="0"/>
+          </a:p>
+        </p:txBody>
+      </p:sp>
+      <p:sp>
+        <p:nvSpPr>
+          <p:cNvPr id="11" name="Text 8"/>
+          <p:cNvSpPr txBox="1"/>
+          <p:nvPr/>
+        </p:nvSpPr>
+        <p:spPr>
+          <a:xfrm>
+            <a:off x="932688" y="5422392"/>
+            <a:ext cx="2048256" cy="548640"/>
+          </a:xfrm>
+          <a:prstGeom prst="rect">
+            <a:avLst/>
+          </a:prstGeom>
+          <a:noFill/>
+          <a:ln/>
+        </p:spPr>
+        <p:txBody>
+          <a:bodyPr wrap="square" lIns="0" tIns="0" rIns="0" bIns="0" rtlCol="0" anchor="t"/>
+          <a:lstStyle/>
+          <a:p>
+            <a:pPr algn="ctr" indent="0" marL="0">
+              <a:lnSpc>
+                <a:spcPts val="1200"/>
+              </a:lnSpc>
+              <a:buNone/>
+            </a:pPr>
+            <a:r>
+              <a:rPr lang="en-US" sz="920" dirty="0">
+                <a:solidFill>
+                  <a:srgbClr val="AEB9C8"/>
+                </a:solidFill>
+                <a:latin typeface="맑은 고딕" pitchFamily="34" charset="0"/>
+                <a:ea typeface="맑은 고딕" pitchFamily="34" charset="-122"/>
+                <a:cs typeface="맑은 고딕" pitchFamily="34" charset="-120"/>
+              </a:rPr>
+              <a:t>send( ... , 4 )  한 번</a:t>
+            </a:r>
+            <a:endParaRPr lang="en-US" sz="920" dirty="0"/>
+          </a:p>
+          <a:p>
+            <a:pPr algn="ctr" indent="0" marL="0">
+              <a:lnSpc>
+                <a:spcPts val="1200"/>
+              </a:lnSpc>
+              <a:buNone/>
+            </a:pPr>
+            <a:r>
+              <a:rPr lang="en-US" sz="920" dirty="0">
+                <a:solidFill>
+                  <a:srgbClr val="AEB9C8"/>
+                </a:solidFill>
+                <a:latin typeface="맑은 고딕" pitchFamily="34" charset="0"/>
+                <a:ea typeface="맑은 고딕" pitchFamily="34" charset="-122"/>
+                <a:cs typeface="맑은 고딕" pitchFamily="34" charset="-120"/>
+              </a:rPr>
+              <a:t>4 byte 를 한 번에 보낸다</a:t>
+            </a:r>
+            <a:endParaRPr lang="en-US" sz="920" dirty="0"/>
+          </a:p>
+        </p:txBody>
+      </p:sp>
+      <p:sp>
+        <p:nvSpPr>
+          <p:cNvPr id="12" name="Text 9"/>
+          <p:cNvSpPr txBox="1"/>
+          <p:nvPr/>
+        </p:nvSpPr>
+        <p:spPr>
+          <a:xfrm>
+            <a:off x="3072384" y="5084064"/>
+            <a:ext cx="310896" cy="950976"/>
           </a:xfrm>
           <a:prstGeom prst="rect">
             <a:avLst/>
@@ -40497,58 +40890,537 @@
           <a:bodyPr wrap="square" lIns="0" tIns="0" rIns="0" bIns="0" rtlCol="0" anchor="ctr"/>
           <a:lstStyle/>
           <a:p>
-            <a:pPr indent="0" marL="0">
-              <a:lnSpc>
-                <a:spcPts val="1500"/>
-              </a:lnSpc>
-              <a:buNone/>
-            </a:pPr>
-            <a:r>
-              <a:rPr lang="en-US" sz="1150" b="1" dirty="0">
-                <a:solidFill>
-                  <a:srgbClr val="FFFFFF"/>
-                </a:solidFill>
-                <a:latin typeface="맑은 고딕" pitchFamily="34" charset="0"/>
-                <a:ea typeface="맑은 고딕" pitchFamily="34" charset="-122"/>
-                <a:cs typeface="맑은 고딕" pitchFamily="34" charset="-120"/>
-              </a:rPr>
-              <a:t>ToDo#3 은 TCP 를 사용한다. </a:t>
-            </a:r>
-            <a:pPr indent="0" marL="0">
-              <a:lnSpc>
-                <a:spcPts val="1500"/>
-              </a:lnSpc>
-              <a:buNone/>
-            </a:pPr>
-            <a:r>
-              <a:rPr lang="en-US" sz="1150" dirty="0">
-                <a:solidFill>
-                  <a:srgbClr val="C9D2DE"/>
-                </a:solidFill>
-                <a:latin typeface="맑은 고딕" pitchFamily="34" charset="0"/>
-                <a:ea typeface="맑은 고딕" pitchFamily="34" charset="-122"/>
-                <a:cs typeface="맑은 고딕" pitchFamily="34" charset="-120"/>
-              </a:rPr>
-              <a:t>TCP 는 스트림이라 경계가 없다 — 4 byte 를 요청해도 2 byte 만 올라올 수 있으므로, 요청한 크기를 다 채울 때까지 반복 수신해야 한다 </a:t>
-            </a:r>
-            <a:pPr indent="0" marL="0">
-              <a:lnSpc>
-                <a:spcPts val="1500"/>
-              </a:lnSpc>
-              <a:buNone/>
-            </a:pPr>
-            <a:r>
-              <a:rPr lang="en-US" sz="950" dirty="0">
-                <a:solidFill>
-                  <a:srgbClr val="C8891F"/>
+            <a:pPr algn="ctr" indent="0" marL="0">
+              <a:buNone/>
+            </a:pPr>
+            <a:r>
+              <a:rPr lang="en-US" sz="1600" b="1" dirty="0">
+                <a:solidFill>
+                  <a:srgbClr val="6B778A"/>
                 </a:solidFill>
                 <a:latin typeface="Consolas" pitchFamily="34" charset="0"/>
                 <a:ea typeface="Consolas" pitchFamily="34" charset="-122"/>
                 <a:cs typeface="Consolas" pitchFamily="34" charset="-120"/>
               </a:rPr>
-              <a:t>(f_SocketRecvTCP_IPv4)</a:t>
+              <a:t>›</a:t>
+            </a:r>
+            <a:endParaRPr lang="en-US" sz="1600" dirty="0"/>
+          </a:p>
+        </p:txBody>
+      </p:sp>
+      <p:sp>
+        <p:nvSpPr>
+          <p:cNvPr id="13" name="Shape 10"/>
+          <p:cNvSpPr/>
+          <p:nvPr/>
+        </p:nvSpPr>
+        <p:spPr>
+          <a:xfrm>
+            <a:off x="3383280" y="5084064"/>
+            <a:ext cx="2231136" cy="950976"/>
+          </a:xfrm>
+          <a:prstGeom prst="roundRect">
+            <a:avLst>
+              <a:gd name="adj" fmla="val 4808"/>
+            </a:avLst>
+          </a:prstGeom>
+          <a:solidFill>
+            <a:srgbClr val="2C3444"/>
+          </a:solidFill>
+          <a:ln w="12700">
+            <a:solidFill>
+              <a:srgbClr val="2AA5AB"/>
+            </a:solidFill>
+            <a:prstDash val="solid"/>
+          </a:ln>
+        </p:spPr>
+        <p:txBody>
+          <a:bodyPr/>
+          <a:p/>
+        </p:txBody>
+      </p:sp>
+      <p:sp>
+        <p:nvSpPr>
+          <p:cNvPr id="14" name="Text 11"/>
+          <p:cNvSpPr txBox="1"/>
+          <p:nvPr/>
+        </p:nvSpPr>
+        <p:spPr>
+          <a:xfrm>
+            <a:off x="3383280" y="5148072"/>
+            <a:ext cx="2231136" cy="274320"/>
+          </a:xfrm>
+          <a:prstGeom prst="rect">
+            <a:avLst/>
+          </a:prstGeom>
+          <a:noFill/>
+          <a:ln/>
+        </p:spPr>
+        <p:txBody>
+          <a:bodyPr wrap="square" lIns="0" tIns="0" rIns="0" bIns="0" rtlCol="0" anchor="ctr"/>
+          <a:lstStyle/>
+          <a:p>
+            <a:pPr algn="ctr" indent="0" marL="0">
+              <a:buNone/>
+            </a:pPr>
+            <a:r>
+              <a:rPr lang="en-US" sz="1150" b="1" dirty="0">
+                <a:solidFill>
+                  <a:srgbClr val="2AA5AB"/>
+                </a:solidFill>
+                <a:latin typeface="맑은 고딕" pitchFamily="34" charset="0"/>
+                <a:ea typeface="맑은 고딕" pitchFamily="34" charset="-122"/>
+                <a:cs typeface="맑은 고딕" pitchFamily="34" charset="-120"/>
+              </a:rPr>
+              <a:t>커널 TCP 버퍼</a:t>
             </a:r>
             <a:endParaRPr lang="en-US" sz="1150" dirty="0"/>
+          </a:p>
+        </p:txBody>
+      </p:sp>
+      <p:sp>
+        <p:nvSpPr>
+          <p:cNvPr id="15" name="Text 12"/>
+          <p:cNvSpPr txBox="1"/>
+          <p:nvPr/>
+        </p:nvSpPr>
+        <p:spPr>
+          <a:xfrm>
+            <a:off x="3474720" y="5422392"/>
+            <a:ext cx="2048256" cy="548640"/>
+          </a:xfrm>
+          <a:prstGeom prst="rect">
+            <a:avLst/>
+          </a:prstGeom>
+          <a:noFill/>
+          <a:ln/>
+        </p:spPr>
+        <p:txBody>
+          <a:bodyPr wrap="square" lIns="0" tIns="0" rIns="0" bIns="0" rtlCol="0" anchor="t"/>
+          <a:lstStyle/>
+          <a:p>
+            <a:pPr algn="ctr" indent="0" marL="0">
+              <a:lnSpc>
+                <a:spcPts val="1200"/>
+              </a:lnSpc>
+              <a:buNone/>
+            </a:pPr>
+            <a:r>
+              <a:rPr lang="en-US" sz="920" dirty="0">
+                <a:solidFill>
+                  <a:srgbClr val="AEB9C8"/>
+                </a:solidFill>
+                <a:latin typeface="맑은 고딕" pitchFamily="34" charset="0"/>
+                <a:ea typeface="맑은 고딕" pitchFamily="34" charset="-122"/>
+                <a:cs typeface="맑은 고딕" pitchFamily="34" charset="-120"/>
+              </a:rPr>
+              <a:t>바이트로만 쌓인다 —</a:t>
+            </a:r>
+            <a:endParaRPr lang="en-US" sz="920" dirty="0"/>
+          </a:p>
+          <a:p>
+            <a:pPr algn="ctr" indent="0" marL="0">
+              <a:lnSpc>
+                <a:spcPts val="1200"/>
+              </a:lnSpc>
+              <a:buNone/>
+            </a:pPr>
+            <a:r>
+              <a:rPr lang="en-US" sz="920" dirty="0">
+                <a:solidFill>
+                  <a:srgbClr val="AEB9C8"/>
+                </a:solidFill>
+                <a:latin typeface="맑은 고딕" pitchFamily="34" charset="0"/>
+                <a:ea typeface="맑은 고딕" pitchFamily="34" charset="-122"/>
+                <a:cs typeface="맑은 고딕" pitchFamily="34" charset="-120"/>
+              </a:rPr>
+              <a:t>메시지 경계가 사라진다</a:t>
+            </a:r>
+            <a:endParaRPr lang="en-US" sz="920" dirty="0"/>
+          </a:p>
+        </p:txBody>
+      </p:sp>
+      <p:sp>
+        <p:nvSpPr>
+          <p:cNvPr id="16" name="Text 13"/>
+          <p:cNvSpPr txBox="1"/>
+          <p:nvPr/>
+        </p:nvSpPr>
+        <p:spPr>
+          <a:xfrm>
+            <a:off x="5614416" y="5084064"/>
+            <a:ext cx="310896" cy="950976"/>
+          </a:xfrm>
+          <a:prstGeom prst="rect">
+            <a:avLst/>
+          </a:prstGeom>
+          <a:noFill/>
+          <a:ln/>
+        </p:spPr>
+        <p:txBody>
+          <a:bodyPr wrap="square" lIns="0" tIns="0" rIns="0" bIns="0" rtlCol="0" anchor="ctr"/>
+          <a:lstStyle/>
+          <a:p>
+            <a:pPr algn="ctr" indent="0" marL="0">
+              <a:buNone/>
+            </a:pPr>
+            <a:r>
+              <a:rPr lang="en-US" sz="1600" b="1" dirty="0">
+                <a:solidFill>
+                  <a:srgbClr val="6B778A"/>
+                </a:solidFill>
+                <a:latin typeface="Consolas" pitchFamily="34" charset="0"/>
+                <a:ea typeface="Consolas" pitchFamily="34" charset="-122"/>
+                <a:cs typeface="Consolas" pitchFamily="34" charset="-120"/>
+              </a:rPr>
+              <a:t>›</a:t>
+            </a:r>
+            <a:endParaRPr lang="en-US" sz="1600" dirty="0"/>
+          </a:p>
+        </p:txBody>
+      </p:sp>
+      <p:sp>
+        <p:nvSpPr>
+          <p:cNvPr id="17" name="Shape 14"/>
+          <p:cNvSpPr/>
+          <p:nvPr/>
+        </p:nvSpPr>
+        <p:spPr>
+          <a:xfrm>
+            <a:off x="5925312" y="5084064"/>
+            <a:ext cx="2231136" cy="950976"/>
+          </a:xfrm>
+          <a:prstGeom prst="roundRect">
+            <a:avLst>
+              <a:gd name="adj" fmla="val 4808"/>
+            </a:avLst>
+          </a:prstGeom>
+          <a:solidFill>
+            <a:srgbClr val="2C3444"/>
+          </a:solidFill>
+          <a:ln w="12700">
+            <a:solidFill>
+              <a:srgbClr val="2AA5AB"/>
+            </a:solidFill>
+            <a:prstDash val="solid"/>
+          </a:ln>
+        </p:spPr>
+        <p:txBody>
+          <a:bodyPr/>
+          <a:p/>
+        </p:txBody>
+      </p:sp>
+      <p:sp>
+        <p:nvSpPr>
+          <p:cNvPr id="18" name="Text 15"/>
+          <p:cNvSpPr txBox="1"/>
+          <p:nvPr/>
+        </p:nvSpPr>
+        <p:spPr>
+          <a:xfrm>
+            <a:off x="5925312" y="5148072"/>
+            <a:ext cx="2231136" cy="274320"/>
+          </a:xfrm>
+          <a:prstGeom prst="rect">
+            <a:avLst/>
+          </a:prstGeom>
+          <a:noFill/>
+          <a:ln/>
+        </p:spPr>
+        <p:txBody>
+          <a:bodyPr wrap="square" lIns="0" tIns="0" rIns="0" bIns="0" rtlCol="0" anchor="ctr"/>
+          <a:lstStyle/>
+          <a:p>
+            <a:pPr algn="ctr" indent="0" marL="0">
+              <a:buNone/>
+            </a:pPr>
+            <a:r>
+              <a:rPr lang="en-US" sz="1150" b="1" dirty="0">
+                <a:solidFill>
+                  <a:srgbClr val="2AA5AB"/>
+                </a:solidFill>
+                <a:latin typeface="맑은 고딕" pitchFamily="34" charset="0"/>
+                <a:ea typeface="맑은 고딕" pitchFamily="34" charset="-122"/>
+                <a:cs typeface="맑은 고딕" pitchFamily="34" charset="-120"/>
+              </a:rPr>
+              <a:t>수신 ①</a:t>
+            </a:r>
+            <a:endParaRPr lang="en-US" sz="1150" dirty="0"/>
+          </a:p>
+        </p:txBody>
+      </p:sp>
+      <p:sp>
+        <p:nvSpPr>
+          <p:cNvPr id="19" name="Text 16"/>
+          <p:cNvSpPr txBox="1"/>
+          <p:nvPr/>
+        </p:nvSpPr>
+        <p:spPr>
+          <a:xfrm>
+            <a:off x="6016752" y="5422392"/>
+            <a:ext cx="2048256" cy="548640"/>
+          </a:xfrm>
+          <a:prstGeom prst="rect">
+            <a:avLst/>
+          </a:prstGeom>
+          <a:noFill/>
+          <a:ln/>
+        </p:spPr>
+        <p:txBody>
+          <a:bodyPr wrap="square" lIns="0" tIns="0" rIns="0" bIns="0" rtlCol="0" anchor="t"/>
+          <a:lstStyle/>
+          <a:p>
+            <a:pPr algn="ctr" indent="0" marL="0">
+              <a:lnSpc>
+                <a:spcPts val="1200"/>
+              </a:lnSpc>
+              <a:buNone/>
+            </a:pPr>
+            <a:r>
+              <a:rPr lang="en-US" sz="920" dirty="0">
+                <a:solidFill>
+                  <a:srgbClr val="AEB9C8"/>
+                </a:solidFill>
+                <a:latin typeface="맑은 고딕" pitchFamily="34" charset="0"/>
+                <a:ea typeface="맑은 고딕" pitchFamily="34" charset="-122"/>
+                <a:cs typeface="맑은 고딕" pitchFamily="34" charset="-120"/>
+              </a:rPr>
+              <a:t>recv 가 2 byte 만</a:t>
+            </a:r>
+            <a:endParaRPr lang="en-US" sz="920" dirty="0"/>
+          </a:p>
+          <a:p>
+            <a:pPr algn="ctr" indent="0" marL="0">
+              <a:lnSpc>
+                <a:spcPts val="1200"/>
+              </a:lnSpc>
+              <a:buNone/>
+            </a:pPr>
+            <a:r>
+              <a:rPr lang="en-US" sz="920" dirty="0">
+                <a:solidFill>
+                  <a:srgbClr val="AEB9C8"/>
+                </a:solidFill>
+                <a:latin typeface="맑은 고딕" pitchFamily="34" charset="0"/>
+                <a:ea typeface="맑은 고딕" pitchFamily="34" charset="-122"/>
+                <a:cs typeface="맑은 고딕" pitchFamily="34" charset="-120"/>
+              </a:rPr>
+              <a:t>돌려줄 수 있다</a:t>
+            </a:r>
+            <a:endParaRPr lang="en-US" sz="920" dirty="0"/>
+          </a:p>
+        </p:txBody>
+      </p:sp>
+      <p:sp>
+        <p:nvSpPr>
+          <p:cNvPr id="20" name="Text 17"/>
+          <p:cNvSpPr txBox="1"/>
+          <p:nvPr/>
+        </p:nvSpPr>
+        <p:spPr>
+          <a:xfrm>
+            <a:off x="8156448" y="5084064"/>
+            <a:ext cx="310896" cy="950976"/>
+          </a:xfrm>
+          <a:prstGeom prst="rect">
+            <a:avLst/>
+          </a:prstGeom>
+          <a:noFill/>
+          <a:ln/>
+        </p:spPr>
+        <p:txBody>
+          <a:bodyPr wrap="square" lIns="0" tIns="0" rIns="0" bIns="0" rtlCol="0" anchor="ctr"/>
+          <a:lstStyle/>
+          <a:p>
+            <a:pPr algn="ctr" indent="0" marL="0">
+              <a:buNone/>
+            </a:pPr>
+            <a:r>
+              <a:rPr lang="en-US" sz="1600" b="1" dirty="0">
+                <a:solidFill>
+                  <a:srgbClr val="6B778A"/>
+                </a:solidFill>
+                <a:latin typeface="Consolas" pitchFamily="34" charset="0"/>
+                <a:ea typeface="Consolas" pitchFamily="34" charset="-122"/>
+                <a:cs typeface="Consolas" pitchFamily="34" charset="-120"/>
+              </a:rPr>
+              <a:t>›</a:t>
+            </a:r>
+            <a:endParaRPr lang="en-US" sz="1600" dirty="0"/>
+          </a:p>
+        </p:txBody>
+      </p:sp>
+      <p:sp>
+        <p:nvSpPr>
+          <p:cNvPr id="21" name="Shape 18"/>
+          <p:cNvSpPr/>
+          <p:nvPr/>
+        </p:nvSpPr>
+        <p:spPr>
+          <a:xfrm>
+            <a:off x="8467344" y="5084064"/>
+            <a:ext cx="2231136" cy="950976"/>
+          </a:xfrm>
+          <a:prstGeom prst="roundRect">
+            <a:avLst>
+              <a:gd name="adj" fmla="val 4808"/>
+            </a:avLst>
+          </a:prstGeom>
+          <a:solidFill>
+            <a:srgbClr val="2C3444"/>
+          </a:solidFill>
+          <a:ln w="12700">
+            <a:solidFill>
+              <a:srgbClr val="2AA5AB"/>
+            </a:solidFill>
+            <a:prstDash val="solid"/>
+          </a:ln>
+        </p:spPr>
+        <p:txBody>
+          <a:bodyPr/>
+          <a:p/>
+        </p:txBody>
+      </p:sp>
+      <p:sp>
+        <p:nvSpPr>
+          <p:cNvPr id="22" name="Text 19"/>
+          <p:cNvSpPr txBox="1"/>
+          <p:nvPr/>
+        </p:nvSpPr>
+        <p:spPr>
+          <a:xfrm>
+            <a:off x="8467344" y="5148072"/>
+            <a:ext cx="2231136" cy="274320"/>
+          </a:xfrm>
+          <a:prstGeom prst="rect">
+            <a:avLst/>
+          </a:prstGeom>
+          <a:noFill/>
+          <a:ln/>
+        </p:spPr>
+        <p:txBody>
+          <a:bodyPr wrap="square" lIns="0" tIns="0" rIns="0" bIns="0" rtlCol="0" anchor="ctr"/>
+          <a:lstStyle/>
+          <a:p>
+            <a:pPr algn="ctr" indent="0" marL="0">
+              <a:buNone/>
+            </a:pPr>
+            <a:r>
+              <a:rPr lang="en-US" sz="1150" b="1" dirty="0">
+                <a:solidFill>
+                  <a:srgbClr val="2AA5AB"/>
+                </a:solidFill>
+                <a:latin typeface="맑은 고딕" pitchFamily="34" charset="0"/>
+                <a:ea typeface="맑은 고딕" pitchFamily="34" charset="-122"/>
+                <a:cs typeface="맑은 고딕" pitchFamily="34" charset="-120"/>
+              </a:rPr>
+              <a:t>수신 ②</a:t>
+            </a:r>
+            <a:endParaRPr lang="en-US" sz="1150" dirty="0"/>
+          </a:p>
+        </p:txBody>
+      </p:sp>
+      <p:sp>
+        <p:nvSpPr>
+          <p:cNvPr id="23" name="Text 20"/>
+          <p:cNvSpPr txBox="1"/>
+          <p:nvPr/>
+        </p:nvSpPr>
+        <p:spPr>
+          <a:xfrm>
+            <a:off x="8558784" y="5422392"/>
+            <a:ext cx="2048256" cy="548640"/>
+          </a:xfrm>
+          <a:prstGeom prst="rect">
+            <a:avLst/>
+          </a:prstGeom>
+          <a:noFill/>
+          <a:ln/>
+        </p:spPr>
+        <p:txBody>
+          <a:bodyPr wrap="square" lIns="0" tIns="0" rIns="0" bIns="0" rtlCol="0" anchor="t"/>
+          <a:lstStyle/>
+          <a:p>
+            <a:pPr algn="ctr" indent="0" marL="0">
+              <a:lnSpc>
+                <a:spcPts val="1200"/>
+              </a:lnSpc>
+              <a:buNone/>
+            </a:pPr>
+            <a:r>
+              <a:rPr lang="en-US" sz="920" dirty="0">
+                <a:solidFill>
+                  <a:srgbClr val="AEB9C8"/>
+                </a:solidFill>
+                <a:latin typeface="맑은 고딕" pitchFamily="34" charset="0"/>
+                <a:ea typeface="맑은 고딕" pitchFamily="34" charset="-122"/>
+                <a:cs typeface="맑은 고딕" pitchFamily="34" charset="-120"/>
+              </a:rPr>
+              <a:t>남은 2 byte 를 다시 받아</a:t>
+            </a:r>
+            <a:endParaRPr lang="en-US" sz="920" dirty="0"/>
+          </a:p>
+          <a:p>
+            <a:pPr algn="ctr" indent="0" marL="0">
+              <a:lnSpc>
+                <a:spcPts val="1200"/>
+              </a:lnSpc>
+              <a:buNone/>
+            </a:pPr>
+            <a:r>
+              <a:rPr lang="en-US" sz="920" dirty="0">
+                <a:solidFill>
+                  <a:srgbClr val="AEB9C8"/>
+                </a:solidFill>
+                <a:latin typeface="맑은 고딕" pitchFamily="34" charset="0"/>
+                <a:ea typeface="맑은 고딕" pitchFamily="34" charset="-122"/>
+                <a:cs typeface="맑은 고딕" pitchFamily="34" charset="-120"/>
+              </a:rPr>
+              <a:t>4 byte 를 채운다</a:t>
+            </a:r>
+            <a:endParaRPr lang="en-US" sz="920" dirty="0"/>
+          </a:p>
+        </p:txBody>
+      </p:sp>
+      <p:sp>
+        <p:nvSpPr>
+          <p:cNvPr id="24" name="Text 21"/>
+          <p:cNvSpPr txBox="1"/>
+          <p:nvPr/>
+        </p:nvSpPr>
+        <p:spPr>
+          <a:xfrm>
+            <a:off x="841248" y="6089904"/>
+            <a:ext cx="10509199" cy="219456"/>
+          </a:xfrm>
+          <a:prstGeom prst="rect">
+            <a:avLst/>
+          </a:prstGeom>
+          <a:noFill/>
+          <a:ln/>
+        </p:spPr>
+        <p:txBody>
+          <a:bodyPr wrap="square" lIns="0" tIns="0" rIns="0" bIns="0" rtlCol="0" anchor="ctr"/>
+          <a:lstStyle/>
+          <a:p>
+            <a:pPr indent="0" marL="0">
+              <a:buNone/>
+            </a:pPr>
+            <a:r>
+              <a:rPr lang="en-US" sz="1300" b="1" dirty="0">
+                <a:solidFill>
+                  <a:srgbClr val="C8891F"/>
+                </a:solidFill>
+                <a:latin typeface="맑은 고딕" pitchFamily="34" charset="0"/>
+                <a:ea typeface="맑은 고딕" pitchFamily="34" charset="-122"/>
+                <a:cs typeface="맑은 고딕" pitchFamily="34" charset="-120"/>
+              </a:rPr>
+              <a:t>→  요청한 크기를 다 채울 때까지 반복 수신한다   ·   f_SocketRecvTCP_IPv4 가 그 루프다</a:t>
+            </a:r>
+            <a:pPr indent="0" marL="0">
+              <a:buNone/>
+            </a:pPr>
+            <a:endParaRPr lang="en-US" sz="1300" dirty="0"/>
           </a:p>
         </p:txBody>
       </p:sp>

--- a/ref/발표자료/IPC_발표자료.pptx
+++ b/ref/발표자료/IPC_발표자료.pptx
@@ -8746,6 +8746,17 @@
               </a:rPr>
               <a:t>뮤텍스  Mutex</a:t>
             </a:r>
+            <a:r>
+              <a:rPr lang="en-US" sz="1500" b="0" dirty="0">
+                <a:solidFill>
+                  <a:srgbClr val="7A828F"/>
+                </a:solidFill>
+                <a:latin typeface="맑은 고딕" pitchFamily="34" charset="0"/>
+                <a:ea typeface="맑은 고딕" pitchFamily="34" charset="-122"/>
+                <a:cs typeface="맑은 고딕" pitchFamily="34" charset="-120"/>
+              </a:rPr>
+              <a:t>   (MUTual EXclusion)</a:t>
+            </a:r>
             <a:endParaRPr lang="en-US" sz="2900" dirty="0"/>
           </a:p>
         </p:txBody>
@@ -8783,7 +8794,7 @@
                 <a:ea typeface="맑은 고딕" pitchFamily="34" charset="-122"/>
                 <a:cs typeface="맑은 고딕" pitchFamily="34" charset="-120"/>
               </a:rPr>
-              <a:t>상호배제(MUTual EXclusion) — 임계구역에 한 번에 하나만 들어가게 하는 자물쇠</a:t>
+              <a:t>상호배제 — 임계구역에 한 번에 하나만 들어가게 하는 자물쇠</a:t>
             </a:r>
             <a:endParaRPr lang="en-US" sz="1250" dirty="0"/>
           </a:p>
@@ -11834,7 +11845,7 @@
                 <a:ea typeface="맑은 고딕" pitchFamily="34" charset="-122"/>
                 <a:cs typeface="맑은 고딕" pitchFamily="34" charset="-120"/>
               </a:rPr>
-              <a:t>커널이 깨워 주므로 CPU 낭비가 없다</a:t>
+              <a:t>커널이 깨워 주므로 CPU (Central Processing Unit) 낭비가 없다</a:t>
             </a:r>
             <a:endParaRPr lang="en-US" sz="1100" dirty="0"/>
           </a:p>
@@ -15484,7 +15495,7 @@
                 <a:ea typeface="맑은 고딕" pitchFamily="34" charset="-122"/>
                 <a:cs typeface="맑은 고딕" pitchFamily="34" charset="-120"/>
               </a:rPr>
-              <a:t>개발언어 C — IPC 코어는 전부 C DLL, 확인용 UI 만 MFC</a:t>
+              <a:t>개발언어 C — IPC 코어는 전부 C DLL (Dynamic Link Library), 확인용 UI 만 MFC</a:t>
             </a:r>
             <a:endParaRPr lang="en-US" sz="1100" dirty="0"/>
           </a:p>
@@ -16322,7 +16333,7 @@
                 <a:ea typeface="맑은 고딕" pitchFamily="34" charset="-122"/>
                 <a:cs typeface="맑은 고딕" pitchFamily="34" charset="-120"/>
               </a:rPr>
-              <a:t>IPC 로직은 전부 IpcCore.dll 안에 있고, MFC UI 는 버튼으로 코어 함수를 호출하고 로그만 표시한다.</a:t>
+              <a:t>IPC 로직은 전부 IpcCore.dll 안에 있고, MFC (Microsoft Foundation Class) UI (User Interface) 는 버튼으로 코어 함수를 호출하고 로그만 표시한다.</a:t>
             </a:r>
             <a:endParaRPr lang="en-US" sz="1100" dirty="0"/>
           </a:p>
@@ -18380,7 +18391,7 @@
                 <a:ea typeface="맑은 고딕" pitchFamily="34" charset="-122"/>
                 <a:cs typeface="맑은 고딕" pitchFamily="34" charset="-120"/>
               </a:rPr>
-              <a:t>※ CreateThread 대신 _beginthreadex — CRT 자원이 정리되도록</a:t>
+              <a:t>※ CreateThread 대신 _beginthreadex — CRT (C Runtime) 자원이 정리되도록</a:t>
             </a:r>
             <a:endParaRPr lang="en-US" sz="950" dirty="0"/>
           </a:p>
@@ -34887,7 +34898,7 @@
                 <a:ea typeface="맑은 고딕" pitchFamily="34" charset="-122"/>
                 <a:cs typeface="맑은 고딕" pitchFamily="34" charset="-120"/>
               </a:rPr>
-              <a:t>실행 중인 프로그램. 커널이 독립된 가상 주소공간과 자원(PID, 파일 디스크립터)을 붙여준 단위다.</a:t>
+              <a:t>실행 중인 프로그램. 커널이 독립된 가상 주소공간과 자원(PID · Process ID, 파일 디스크립터)을 붙여준 단위다.</a:t>
             </a:r>
             <a:endParaRPr lang="en-US" sz="1150" dirty="0"/>
           </a:p>
@@ -35098,7 +35109,7 @@
                 <a:ea typeface="맑은 고딕" pitchFamily="34" charset="-122"/>
                 <a:cs typeface="맑은 고딕" pitchFamily="34" charset="-120"/>
               </a:rPr>
-              <a:t>프로세스 안의 실행 흐름. Code · Data · Heap 은 공유하고 Stack 과 레지스터만 따로 갖는다.</a:t>
+              <a:t>프로세스 안의 실행 흐름. Code · Data · Heap 은 공유하고 Stack 과 레지스터(PC : Program Counter · SP : Stack Pointer)만 따로 갖는다.</a:t>
             </a:r>
             <a:endParaRPr lang="en-US" sz="1150" dirty="0"/>
           </a:p>
@@ -39090,7 +39101,7 @@
                           <a:ea typeface="맑은 고딕" pitchFamily="34" charset="-122"/>
                           <a:cs typeface="맑은 고딕" pitchFamily="34" charset="-120"/>
                         </a:rPr>
-                        <a:t>   Transmission Control Protocol</a:t>
+                        <a:t>   Transmission Control Protocol / Internet Protocol</a:t>
                       </a:r>
                       <a:endParaRPr lang="en-US" sz="1150" dirty="0">
                         <a:latin typeface="맑은 고딕" charset="0"/>
@@ -42379,7 +42390,7 @@
                 <a:ea typeface="맑은 고딕" pitchFamily="34" charset="-122"/>
                 <a:cs typeface="맑은 고딕" pitchFamily="34" charset="-120"/>
               </a:rPr>
-              <a:t>FIFO · 메시지 경계 유지</a:t>
+              <a:t>FIFO (First In First Out) · 메시지 경계 유지</a:t>
             </a:r>
             <a:endParaRPr lang="en-US" sz="900" dirty="0"/>
           </a:p>
@@ -42532,7 +42543,7 @@
                 <a:ea typeface="맑은 고딕" pitchFamily="34" charset="-122"/>
                 <a:cs typeface="맑은 고딕" pitchFamily="34" charset="-120"/>
               </a:rPr>
-              <a:t>LINUX API</a:t>
+              <a:t>LINUX API (Application Programming Interface)</a:t>
             </a:r>
             <a:endParaRPr lang="en-US" sz="1000" dirty="0"/>
           </a:p>
@@ -42594,7 +42605,7 @@
                 <a:ea typeface="Consolas" pitchFamily="34" charset="-122"/>
                 <a:cs typeface="Consolas" pitchFamily="34" charset="-120"/>
               </a:rPr>
-              <a:t>POSIX : mq_open / mq_send / mq_receive   (우선순위 지원)</a:t>
+              <a:t>POSIX (Portable Operating System Interface) : mq_open / mq_send / mq_receive   (우선순위 지원)</a:t>
             </a:r>
             <a:endParaRPr lang="en-US" sz="860" dirty="0"/>
           </a:p>

--- a/ref/발표자료/IPC_발표자료.pptx
+++ b/ref/발표자료/IPC_발표자료.pptx
@@ -2201,14 +2201,37 @@
           <a:lstStyle/>
           <a:p>
             <a:r>
-              <a:rPr lang="en-US" dirty="0"/>
-              <a:t>[1-2 통신 방법 · 약 2분]
-통신 방법은 "주소공간을 공유하느냐" 하나로 갈립니다.
-왼쪽, 쓰레드 간 통신입니다. 같은 주소공간이니까 전역변수나 공유 자료구조를 그대로 쓰면 됩니다. 메모리 주소를 넘기는 것이라 복사도 없고 커널도 거치지 않아서 가장 빠릅니다. 대신 동기화를 빠뜨리면 데이터가 깨지거나 데드락이 나고, 한 쓰레드가 죽으면 프로세스 전체가 같이 죽습니다. ToDo#1 이 이 방식입니다.
-오른쪽, 프로세스 간 통신입니다. 주소공간이 분리돼 있으니 반드시 커널이 만들어 준 통로를 거쳐야 합니다. 파이프는 단방향 바이트 스트림이고, 메시지 큐는 메시지 단위로 넣고 빼며 커널이 경계와 순서를 지켜 줍니다. 공유메모리는 같은 물리 메모리를 양쪽에 매핑해서 복사가 없어 가장 빠릅니다. 시그널은 데이터 없이 이벤트만 알리고, 소켓은 이 중에서 유일하게 다른 장비까지 확장됩니다.
-아래 선택 기준이 오늘 과제 구조와 그대로 맞습니다. 같은 프로세스 안이면 전역변수에 뮤텍스와 세마포어를 붙이고, 같은 PC 의 다른 프로세스면 메시지 큐나 공유메모리를 쓰고, 다른 PC 나 다른 프로그램이면 소켓을 씁니다. 각각 ToDo#1, #2, #3 입니다.</a:t>
-            </a:r>
-            <a:endParaRPr lang="en-US" dirty="0"/>
+              <a:t>[1-2 통신 방법 · 약 1분 30초]</a:t>
+            </a:r>
+          </a:p>
+          <a:p>
+            <a:r>
+              <a:t>통신 방법은 결국 "얼마나 멀리 보내야 하는가" 하나로 갈립니다. 왼쪽부터 오른쪽으로 한 칸씩 멀어집니다.</a:t>
+            </a:r>
+          </a:p>
+          <a:p/>
+          <a:p>
+            <a:r>
+              <a:t>① 같은 프로세스 안이면 주소공간을 공유하니까 전역변수나 공유 자료구조를 그대로 씁니다. 메모리 주소만 넘기면 되니 복사도 없고 커널도 거치지 않아 가장 빠릅니다. 대신 동기화를 빠뜨리면 데이터가 깨지거나 데드락이 나고, 한 쓰레드가 죽으면 프로세스 전체가 같이 죽습니다. ToDo#1 이 이 칸입니다.</a:t>
+            </a:r>
+          </a:p>
+          <a:p/>
+          <a:p>
+            <a:r>
+              <a:t>② 같은 PC 의 다른 프로세스면 주소공간이 분리돼 있어 반드시 커널이 만든 통로를 거칩니다. 메시지 큐는 커널이 메시지 경계와 순서를 지켜 주고, 공유메모리는 같은 물리 메모리를 양쪽에 매핑해서 복사가 없습니다. 파이프와 시그널도 같은 칸에 있지만 이번 과제에서는 쓰지 않았습니다. ToDo#2 가 이 칸입니다.</a:t>
+            </a:r>
+          </a:p>
+          <a:p/>
+          <a:p>
+            <a:r>
+              <a:t>③ 다른 PC 나 다른 프로그램이면 소켓입니다. 이 중 유일하게 장비를 넘어가고, 대신 연결과 유실, 순서를 직접 처리해야 해서 가장 느립니다. ToDo#3 이 이 칸입니다.</a:t>
+            </a:r>
+          </a:p>
+          <a:p/>
+          <a:p>
+            <a:r>
+              <a:t>한 줄로 정리하면, 가까울수록 빠르지만 커널이 대신 해 주던 경계와 순서, 동기화가 그만큼 제 코드로 넘어옵니다.</a:t>
+            </a:r>
           </a:p>
         </p:txBody>
       </p:sp>
@@ -3952,7 +3975,7 @@
                 <a:ea typeface="맑은 고딕" pitchFamily="34" charset="-122"/>
                 <a:cs typeface="맑은 고딕" pitchFamily="34" charset="-120"/>
               </a:rPr>
-              <a:t>서로 다른 프로세스의 가상 주소공간에 같은 물리 메모리를 매핑한다 — 붙고 나면 그냥 포인터 접근이다</a:t>
+              <a:t>두 프로세스가 각자의 주소공간에 같은 물리 메모리를 붙인다. 붙고 나면 그냥 포인터로 읽고 쓴다</a:t>
             </a:r>
             <a:endParaRPr lang="en-US" sz="1250" dirty="0"/>
           </a:p>
@@ -4162,7 +4185,7 @@
                 <a:ea typeface="Consolas" pitchFamily="34" charset="-122"/>
                 <a:cs typeface="Consolas" pitchFamily="34" charset="-120"/>
               </a:rPr>
-              <a:t>0x7F1A ...</a:t>
+              <a:t>p = 0x7F1A ...</a:t>
             </a:r>
             <a:endParaRPr lang="en-US" sz="950" dirty="0"/>
           </a:p>
@@ -4331,7 +4354,7 @@
                 <a:ea typeface="Consolas" pitchFamily="34" charset="-122"/>
                 <a:cs typeface="Consolas" pitchFamily="34" charset="-120"/>
               </a:rPr>
-              <a:t>0x5C40 ...</a:t>
+              <a:t>p = 0x5C40 ...</a:t>
             </a:r>
             <a:endParaRPr lang="en-US" sz="950" dirty="0"/>
           </a:p>
@@ -4370,8 +4393,8 @@
         </p:nvSpPr>
         <p:spPr>
           <a:xfrm>
-            <a:off x="841248" y="2779776"/>
-            <a:ext cx="4032504" cy="237744"/>
+            <a:off x="2011680" y="2724912"/>
+            <a:ext cx="1691640" cy="384048"/>
           </a:xfrm>
           <a:prstGeom prst="rect">
             <a:avLst/>
@@ -4382,6 +4405,23 @@
         <p:txBody>
           <a:bodyPr wrap="square" lIns="0" tIns="0" rIns="0" bIns="0" rtlCol="0" anchor="ctr"/>
           <a:lstStyle/>
+          <a:p>
+            <a:pPr algn="ctr" indent="0" marL="0">
+              <a:buNone/>
+            </a:pPr>
+            <a:r>
+              <a:rPr lang="en-US" sz="819" dirty="0">
+                <a:solidFill>
+                  <a:srgbClr val="C8891F"/>
+                </a:solidFill>
+                <a:latin typeface="Consolas" pitchFamily="34" charset="0"/>
+                <a:ea typeface="맑은 고딕" pitchFamily="34" charset="-122"/>
+                <a:cs typeface="맑은 고딕" pitchFamily="34" charset="-120"/>
+              </a:rPr>
+              <a:t>② mmap / MapViewOfFile</a:t>
+            </a:r>
+            <a:endParaRPr lang="en-US" sz="880" dirty="0"/>
+          </a:p>
           <a:p>
             <a:pPr algn="ctr" indent="0" marL="0">
               <a:buNone/>
@@ -4395,7 +4435,7 @@
                 <a:ea typeface="맑은 고딕" pitchFamily="34" charset="-122"/>
                 <a:cs typeface="맑은 고딕" pitchFamily="34" charset="-120"/>
               </a:rPr>
-              <a:t>매핑 주소는 서로 다르다</a:t>
+              <a:t>같은 함수인데 주소가 다르다</a:t>
             </a:r>
             <a:endParaRPr lang="en-US" sz="880" dirty="0"/>
           </a:p>
@@ -4500,7 +4540,7 @@
                 <a:ea typeface="맑은 고딕" pitchFamily="34" charset="-122"/>
                 <a:cs typeface="맑은 고딕" pitchFamily="34" charset="-120"/>
               </a:rPr>
-              <a:t>데이터를 그대로 읽고 쓴다  ·  복사 0 회</a:t>
+              <a:t>양쪽이 이 메모리를 직접 읽고 쓴다  ·  옮겨 담지 않는다</a:t>
             </a:r>
             <a:endParaRPr lang="en-US" sz="980" dirty="0"/>
           </a:p>
@@ -4685,7 +4725,7 @@
                 <a:ea typeface="맑은 고딕" pitchFamily="34" charset="-122"/>
                 <a:cs typeface="맑은 고딕" pitchFamily="34" charset="-120"/>
               </a:rPr>
-              <a:t>API</a:t>
+              <a:t>API   —   ① 메모리를 만든다      ② 내 주소공간에 붙인다</a:t>
             </a:r>
             <a:endParaRPr lang="en-US" sz="1000" dirty="0"/>
           </a:p>
@@ -4727,7 +4767,7 @@
                 <a:ea typeface="Consolas" pitchFamily="34" charset="-122"/>
                 <a:cs typeface="Consolas" pitchFamily="34" charset="-120"/>
               </a:rPr>
-              <a:t>Linux   : shmget / shmat / shmdt / shmctl,  shm_open + mmap</a:t>
+              <a:t>Linux     ① shmget / shm_open       ② shmat / mmap</a:t>
             </a:r>
             <a:endParaRPr lang="en-US" sz="860" dirty="0"/>
           </a:p>
@@ -4747,7 +4787,27 @@
                 <a:ea typeface="Consolas" pitchFamily="34" charset="-122"/>
                 <a:cs typeface="Consolas" pitchFamily="34" charset="-120"/>
               </a:rPr>
-              <a:t>Windows : CreateFileMapping + MapViewOfFile</a:t>
+              <a:t>Windows   ① CreateFileMapping       ② MapViewOfFile</a:t>
+            </a:r>
+            <a:endParaRPr lang="en-US" sz="860" dirty="0"/>
+          </a:p>
+          <a:p>
+            <a:pPr indent="0" marL="0">
+              <a:lnSpc>
+                <a:spcPts val="1350"/>
+              </a:lnSpc>
+              <a:buNone/>
+            </a:pPr>
+            <a:r>
+              <a:rPr lang="en-US" sz="860" dirty="0">
+                <a:solidFill>
+                  <a:srgbClr val="D2DAE4"/>
+                </a:solidFill>
+                <a:latin typeface="Consolas" pitchFamily="34" charset="0"/>
+                <a:ea typeface="Consolas" pitchFamily="34" charset="-122"/>
+                <a:cs typeface="Consolas" pitchFamily="34" charset="-120"/>
+              </a:rPr>
+              <a:t>해제 :  shmdt / shmctl        UnmapViewOfFile / CloseHandle</a:t>
             </a:r>
             <a:endParaRPr lang="en-US" sz="860" dirty="0"/>
           </a:p>
@@ -4859,7 +4919,7 @@
                 <a:ea typeface="맑은 고딕" pitchFamily="34" charset="-122"/>
                 <a:cs typeface="맑은 고딕" pitchFamily="34" charset="-120"/>
               </a:rPr>
-              <a:t>커널은 「연결」만 해주고, 이후 읽기 · 쓰기에는 시스템 콜이 개입하지 않는다</a:t>
+              <a:t>붙일 때만 커널을 거치고, 그 뒤 읽고 쓸 때는 시스템 콜이 없다</a:t>
             </a:r>
             <a:endParaRPr lang="en-US" sz="1080" dirty="0"/>
           </a:p>
@@ -4883,7 +4943,7 @@
                 <a:ea typeface="맑은 고딕" pitchFamily="34" charset="-122"/>
                 <a:cs typeface="맑은 고딕" pitchFamily="34" charset="-120"/>
               </a:rPr>
-              <a:t>복사가 0 회 — 모든 IPC 수단 중 가장 빠르다</a:t>
+              <a:t>데이터를 옮겨 담지 않으니 IPC 수단 중 가장 빠르다</a:t>
             </a:r>
             <a:endParaRPr lang="en-US" sz="1080" dirty="0"/>
           </a:p>
@@ -4907,7 +4967,7 @@
                 <a:ea typeface="맑은 고딕" pitchFamily="34" charset="-122"/>
                 <a:cs typeface="맑은 고딕" pitchFamily="34" charset="-120"/>
               </a:rPr>
-              <a:t>프로세스마다 매핑되는 가상 주소가 다르다 → 포인터 대신 오프셋 · 인덱스를 쓴다</a:t>
+              <a:t>붙이면 내 주소공간의 주소가 돌아오는데 프로세스마다 다르다 → 포인터 대신 오프셋을 쓴다</a:t>
             </a:r>
             <a:endParaRPr lang="en-US" sz="1080" dirty="0"/>
           </a:p>
@@ -4931,7 +4991,7 @@
                 <a:ea typeface="맑은 고딕" pitchFamily="34" charset="-122"/>
                 <a:cs typeface="맑은 고딕" pitchFamily="34" charset="-120"/>
               </a:rPr>
-              <a:t>양쪽이 구조체 정렬 · 패딩을 똑같이 맞춰야 한다 (#pragma pack)</a:t>
+              <a:t>컴파일러가 끼워 넣는 빈 공간(패딩)까지 양쪽이 똑같아야 한다 (#pragma pack)</a:t>
             </a:r>
             <a:endParaRPr lang="en-US" sz="1080" dirty="0"/>
           </a:p>
@@ -5043,7 +5103,7 @@
                 <a:ea typeface="맑은 고딕" pitchFamily="34" charset="-122"/>
                 <a:cs typeface="맑은 고딕" pitchFamily="34" charset="-120"/>
               </a:rPr>
-              <a:t>영상 프레임 · 대형 버퍼처럼 크고 자주 오가는 데이터</a:t>
+              <a:t>영상 프레임처럼 크고 자주 오가는 데이터</a:t>
             </a:r>
             <a:endParaRPr lang="en-US" sz="1050" dirty="0"/>
           </a:p>
@@ -5067,7 +5127,7 @@
                 <a:ea typeface="맑은 고딕" pitchFamily="34" charset="-122"/>
                 <a:cs typeface="맑은 고딕" pitchFamily="34" charset="-120"/>
               </a:rPr>
-              <a:t>지연이 중요한 실시간 처리</a:t>
+              <a:t>한 번 오갈 때 지연이 짧아야 하는 처리</a:t>
             </a:r>
             <a:endParaRPr lang="en-US" sz="1050" dirty="0"/>
           </a:p>
@@ -5203,7 +5263,7 @@
                 <a:ea typeface="맑은 고딕" pitchFamily="34" charset="-122"/>
                 <a:cs typeface="맑은 고딕" pitchFamily="34" charset="-120"/>
               </a:rPr>
-              <a:t>가장 빠르다 — 복사 0 회, 시스템 콜 없음</a:t>
+              <a:t>복사도 시스템 콜도 없어서 가장 빠르다</a:t>
             </a:r>
             <a:endParaRPr lang="en-US" sz="1100" dirty="0"/>
           </a:p>
@@ -5227,7 +5287,7 @@
                 <a:ea typeface="맑은 고딕" pitchFamily="34" charset="-122"/>
                 <a:cs typeface="맑은 고딕" pitchFamily="34" charset="-120"/>
               </a:rPr>
-              <a:t>크기 제한이 사실상 없다</a:t>
+              <a:t>주고받는 크기에 제한이 거의 없다</a:t>
             </a:r>
             <a:endParaRPr lang="en-US" sz="1100" dirty="0"/>
           </a:p>
@@ -5387,7 +5447,7 @@
                 <a:ea typeface="맑은 고딕" pitchFamily="34" charset="-122"/>
                 <a:cs typeface="맑은 고딕" pitchFamily="34" charset="-120"/>
               </a:rPr>
-              <a:t>동기화 수단이 전혀 없다 → 반드시 직접 붙여야</a:t>
+              <a:t>동기화 수단이 없어서 직접 붙여야 한다</a:t>
             </a:r>
             <a:endParaRPr lang="en-US" sz="1100" dirty="0"/>
           </a:p>
@@ -5459,7 +5519,7 @@
                 <a:ea typeface="맑은 고딕" pitchFamily="34" charset="-122"/>
                 <a:cs typeface="맑은 고딕" pitchFamily="34" charset="-120"/>
               </a:rPr>
-              <a:t>누가 살아있는지 몰라 수명 관리가 까다롭다</a:t>
+              <a:t>누가 아직 쓰는지 몰라 정리 시점을 잡기 어렵다</a:t>
             </a:r>
             <a:endParaRPr lang="en-US" sz="1100" dirty="0"/>
           </a:p>
@@ -5635,7 +5695,7 @@
                 <a:ea typeface="맑은 고딕" pitchFamily="34" charset="-122"/>
                 <a:cs typeface="맑은 고딕" pitchFamily="34" charset="-120"/>
               </a:rPr>
-              <a:t>메시지 큐는 「기능」, 링버퍼는 「자료구조」, 공유메모리는 「그릇」이다</a:t>
+              <a:t>메시지 큐는 커널이 주는 기능, 링버퍼는 직접 짜는 자료구조, 공유메모리는 그 링버퍼를 올릴 메모리다</a:t>
             </a:r>
             <a:endParaRPr lang="en-US" sz="1250" dirty="0"/>
           </a:p>
@@ -5961,7 +6021,7 @@
                           <a:ea typeface="맑은 고딕" pitchFamily="34" charset="-122"/>
                           <a:cs typeface="맑은 고딕" pitchFamily="34" charset="-120"/>
                         </a:rPr>
-                        <a:t>정체</a:t>
+                        <a:t>무엇인가</a:t>
                       </a:r>
                       <a:endParaRPr lang="en-US" sz="1100" dirty="0">
                         <a:latin typeface="맑은 고딕" charset="0"/>
@@ -6303,7 +6363,7 @@
                           <a:ea typeface="맑은 고딕" pitchFamily="34" charset="-122"/>
                           <a:cs typeface="맑은 고딕" pitchFamily="34" charset="-120"/>
                         </a:rPr>
-                        <a:t>메시지 — 경계 보존</a:t>
+                        <a:t>메시지 1 개 — 넣은 만큼 나온다</a:t>
                       </a:r>
                       <a:endParaRPr lang="en-US" sz="1100" dirty="0">
                         <a:latin typeface="맑은 고딕" charset="0"/>
@@ -6371,7 +6431,7 @@
                           <a:ea typeface="맑은 고딕" pitchFamily="34" charset="-122"/>
                           <a:cs typeface="맑은 고딕" pitchFamily="34" charset="-120"/>
                         </a:rPr>
-                        <a:t>슬롯 1 칸</a:t>
+                        <a:t>슬롯 1 칸 — 크기 고정</a:t>
                       </a:r>
                       <a:endParaRPr lang="en-US" sz="1100" dirty="0">
                         <a:latin typeface="맑은 고딕" charset="0"/>
@@ -6439,7 +6499,7 @@
                           <a:ea typeface="맑은 고딕" pitchFamily="34" charset="-122"/>
                           <a:cs typeface="맑은 고딕" pitchFamily="34" charset="-120"/>
                         </a:rPr>
-                        <a:t>바이트 — 경계 없음</a:t>
+                        <a:t>바이트 — 경계는 내가 만든다</a:t>
                       </a:r>
                       <a:endParaRPr lang="en-US" sz="1100" dirty="0">
                         <a:latin typeface="맑은 고딕" charset="0"/>
@@ -6577,7 +6637,7 @@
                           <a:ea typeface="맑은 고딕" pitchFamily="34" charset="-122"/>
                           <a:cs typeface="맑은 고딕" pitchFamily="34" charset="-120"/>
                         </a:rPr>
-                        <a:t>2 회 (유저 ↔ 커널)</a:t>
+                        <a:t>2 회 — 내 변수 → 커널 → 상대</a:t>
                       </a:r>
                       <a:endParaRPr lang="en-US" sz="1100" dirty="0">
                         <a:latin typeface="맑은 고딕" charset="0"/>
@@ -6645,7 +6705,7 @@
                           <a:ea typeface="맑은 고딕" pitchFamily="34" charset="-122"/>
                           <a:cs typeface="맑은 고딕" pitchFamily="34" charset="-120"/>
                         </a:rPr>
-                        <a:t>1 회 (슬롯 write / read)</a:t>
+                        <a:t>1 회 — 내 변수 → 슬롯</a:t>
                       </a:r>
                       <a:endParaRPr lang="en-US" sz="1100" dirty="0">
                         <a:latin typeface="맑은 고딕" charset="0"/>
@@ -6713,7 +6773,7 @@
                           <a:ea typeface="맑은 고딕" pitchFamily="34" charset="-122"/>
                           <a:cs typeface="맑은 고딕" pitchFamily="34" charset="-120"/>
                         </a:rPr>
-                        <a:t>0 회</a:t>
+                        <a:t>0 회 — 옮겨 담는 일이 없다</a:t>
                       </a:r>
                       <a:endParaRPr lang="en-US" sz="1100" dirty="0">
                         <a:latin typeface="맑은 고딕" charset="0"/>
@@ -7399,7 +7459,7 @@
                           <a:ea typeface="맑은 고딕" pitchFamily="34" charset="-122"/>
                           <a:cs typeface="맑은 고딕" pitchFamily="34" charset="-120"/>
                         </a:rPr>
-                        <a:t>커널 한도 (기본 16KB)</a:t>
+                        <a:t>커널 메모리라 한도가 있다 (16KB)</a:t>
                       </a:r>
                       <a:endParaRPr lang="en-US" sz="1100" dirty="0">
                         <a:latin typeface="맑은 고딕" charset="0"/>
@@ -7467,7 +7527,7 @@
                           <a:ea typeface="맑은 고딕" pitchFamily="34" charset="-122"/>
                           <a:cs typeface="맑은 고딕" pitchFamily="34" charset="-120"/>
                         </a:rPr>
-                        <a:t>고정 (컴파일 시 결정)</a:t>
+                        <a:t>고정 — 배열 크기가 곧 용량</a:t>
                       </a:r>
                       <a:endParaRPr lang="en-US" sz="1100" dirty="0">
                         <a:latin typeface="맑은 고딕" charset="0"/>
@@ -7535,7 +7595,7 @@
                           <a:ea typeface="맑은 고딕" pitchFamily="34" charset="-122"/>
                           <a:cs typeface="맑은 고딕" pitchFamily="34" charset="-120"/>
                         </a:rPr>
-                        <a:t>제한 거의 없음</a:t>
+                        <a:t>물리 메모리가 허용하는 만큼</a:t>
                       </a:r>
                       <a:endParaRPr lang="en-US" sz="1100" dirty="0">
                         <a:latin typeface="맑은 고딕" charset="0"/>
@@ -7741,7 +7801,7 @@
                           <a:ea typeface="맑은 고딕" pitchFamily="34" charset="-122"/>
                           <a:cs typeface="맑은 고딕" pitchFamily="34" charset="-120"/>
                         </a:rPr>
-                        <a:t>스트림 완충</a:t>
+                        <a:t>들어오는 데이터 임시 보관</a:t>
                       </a:r>
                       <a:endParaRPr lang="en-US" sz="1100" dirty="0">
                         <a:latin typeface="맑은 고딕" charset="0"/>
@@ -7925,7 +7985,7 @@
                 <a:ea typeface="맑은 고딕" pitchFamily="34" charset="-122"/>
                 <a:cs typeface="맑은 고딕" pitchFamily="34" charset="-120"/>
               </a:rPr>
-              <a:t>셋을 합치면 메시지 큐가 된다</a:t>
+              <a:t>메시지 큐가 없으면 — 이 넷으로 직접 만든다</a:t>
             </a:r>
             <a:endParaRPr lang="en-US" sz="1400" dirty="0"/>
           </a:p>
@@ -8033,7 +8093,7 @@
                 <a:ea typeface="맑은 고딕" pitchFamily="34" charset="-122"/>
                 <a:cs typeface="맑은 고딕" pitchFamily="34" charset="-120"/>
               </a:rPr>
-              <a:t>그릇 — 두 프로세스가</a:t>
+              <a:t>두 프로세스가 같은</a:t>
             </a:r>
             <a:endParaRPr lang="en-US" sz="920" dirty="0"/>
           </a:p>
@@ -8053,7 +8113,7 @@
                 <a:ea typeface="맑은 고딕" pitchFamily="34" charset="-122"/>
                 <a:cs typeface="맑은 고딕" pitchFamily="34" charset="-120"/>
               </a:rPr>
-              <a:t>같은 메모리를 본다</a:t>
+              <a:t>메모리를 함께 본다</a:t>
             </a:r>
             <a:endParaRPr lang="en-US" sz="920" dirty="0"/>
           </a:p>
@@ -8610,6 +8670,45 @@
               <a:t>→  ToDo#2 가 정확히 이 조합이다</a:t>
             </a:r>
             <a:endParaRPr lang="en-US" sz="1300" dirty="0"/>
+          </a:p>
+        </p:txBody>
+      </p:sp>
+      <p:sp>
+        <p:nvSpPr>
+          <p:cNvPr id="25" name="BandNote"/>
+          <p:cNvSpPr txBox="1"/>
+          <p:nvPr/>
+        </p:nvSpPr>
+        <p:spPr>
+          <a:xfrm>
+            <a:off x="6327648" y="4700016"/>
+            <a:ext cx="5223967" cy="310896"/>
+          </a:xfrm>
+          <a:prstGeom prst="rect">
+            <a:avLst/>
+          </a:prstGeom>
+          <a:noFill/>
+          <a:ln/>
+        </p:spPr>
+        <p:txBody>
+          <a:bodyPr wrap="square" lIns="0" tIns="0" rIns="0" bIns="0" rtlCol="0" anchor="ctr"/>
+          <a:lstStyle/>
+          <a:p>
+            <a:pPr indent="0" marL="0" algn="r">
+              <a:buNone/>
+            </a:pPr>
+            <a:r>
+              <a:rPr lang="en-US" sz="919" b="0" dirty="0">
+                <a:solidFill>
+                  <a:srgbClr val="AEB9C8"/>
+                </a:solidFill>
+                <a:latin typeface="맑은 고딕" pitchFamily="34" charset="0"/>
+                <a:ea typeface="맑은 고딕" pitchFamily="34" charset="-122"/>
+                <a:cs typeface="맑은 고딕" pitchFamily="34" charset="-120"/>
+              </a:rPr>
+              <a:t>세마포어 · 뮤텍스 = 표 동기화 행의 직접 구현  —  다음 장 2-3 에서 설명</a:t>
+            </a:r>
+            <a:endParaRPr lang="en-US" sz="1400" dirty="0"/>
           </a:p>
         </p:txBody>
       </p:sp>
@@ -9357,7 +9456,7 @@
                 <a:ea typeface="Consolas" pitchFamily="34" charset="-122"/>
                 <a:cs typeface="Consolas" pitchFamily="34" charset="-120"/>
               </a:rPr>
-              <a:t>기본 형태</a:t>
+              <a:t>기본 형태 — 실제 함수 이름은 아래 API</a:t>
             </a:r>
             <a:endParaRPr lang="en-US" sz="1000" dirty="0"/>
           </a:p>
@@ -9371,8 +9470,8 @@
         </p:nvSpPr>
         <p:spPr>
           <a:xfrm>
-            <a:off x="987552" y="4370832"/>
-            <a:ext cx="3739896" cy="310896"/>
+            <a:off x="905000" y="4370832"/>
+            <a:ext cx="3900000" cy="310896"/>
           </a:xfrm>
           <a:prstGeom prst="rect">
             <a:avLst/>
@@ -9399,7 +9498,7 @@
                 <a:ea typeface="Consolas" pitchFamily="34" charset="-122"/>
                 <a:cs typeface="Consolas" pitchFamily="34" charset="-120"/>
               </a:rPr>
-              <a:t>lock(m);   /* 공유 데이터 갱신 */   unlock(m);</a:t>
+              <a:t>lock(m);  /* 임계구역 : 공유 데이터 갱신 */  unlock(m);</a:t>
             </a:r>
             <a:endParaRPr lang="en-US" sz="950" dirty="0"/>
           </a:p>
@@ -9465,7 +9564,7 @@
                 <a:ea typeface="맑은 고딕" pitchFamily="34" charset="-122"/>
                 <a:cs typeface="맑은 고딕" pitchFamily="34" charset="-120"/>
               </a:rPr>
-              <a:t>API</a:t>
+              <a:t>API   —   같은 프로세스 안이냐, 프로세스 사이냐로 갈린다</a:t>
             </a:r>
             <a:endParaRPr lang="en-US" sz="1000" dirty="0"/>
           </a:p>
@@ -9479,8 +9578,8 @@
         </p:nvSpPr>
         <p:spPr>
           <a:xfrm>
-            <a:off x="768096" y="5468112"/>
-            <a:ext cx="4206240" cy="786384"/>
+            <a:off x="768096" y="5440000"/>
+            <a:ext cx="4206240" cy="900000"/>
           </a:xfrm>
           <a:prstGeom prst="rect">
             <a:avLst/>
@@ -9494,7 +9593,7 @@
           <a:p>
             <a:pPr indent="0" marL="0">
               <a:lnSpc>
-                <a:spcPts val="1350"/>
+                <a:spcPts val="1280"/>
               </a:lnSpc>
               <a:buNone/>
             </a:pPr>
@@ -9507,14 +9606,14 @@
                 <a:ea typeface="Consolas" pitchFamily="34" charset="-122"/>
                 <a:cs typeface="Consolas" pitchFamily="34" charset="-120"/>
               </a:rPr>
-              <a:t>Linux   : pthread_mutex_lock / pthread_mutex_unlock</a:t>
+              <a:t>Linux    pthread_mutex_init → lock / unlock → destroy</a:t>
             </a:r>
             <a:endParaRPr lang="en-US" sz="860" dirty="0"/>
           </a:p>
           <a:p>
             <a:pPr indent="0" marL="0">
               <a:lnSpc>
-                <a:spcPts val="1350"/>
+                <a:spcPts val="1280"/>
               </a:lnSpc>
               <a:buNone/>
             </a:pPr>
@@ -9527,7 +9626,67 @@
                 <a:ea typeface="Consolas" pitchFamily="34" charset="-122"/>
                 <a:cs typeface="Consolas" pitchFamily="34" charset="-120"/>
               </a:rPr>
-              <a:t>Windows : CRITICAL_SECTION  ·  Named Mutex</a:t>
+              <a:t>Windows  ① CRITICAL_SECTION — 한 프로세스 안, 유저 모드라 빠르다</a:t>
+            </a:r>
+            <a:endParaRPr lang="en-US" sz="860" dirty="0"/>
+          </a:p>
+          <a:p>
+            <a:pPr indent="0" marL="0">
+              <a:lnSpc>
+                <a:spcPts val="1280"/>
+              </a:lnSpc>
+              <a:buNone/>
+            </a:pPr>
+            <a:r>
+              <a:rPr lang="en-US" sz="860" dirty="0">
+                <a:solidFill>
+                  <a:srgbClr val="D2DAE4"/>
+                </a:solidFill>
+                <a:latin typeface="Consolas" pitchFamily="34" charset="0"/>
+                <a:ea typeface="Consolas" pitchFamily="34" charset="-122"/>
+                <a:cs typeface="Consolas" pitchFamily="34" charset="-120"/>
+              </a:rPr>
+              <a:t>    InitializeCriticalSection → EnterCriticalSection / Leave</a:t>
+            </a:r>
+            <a:endParaRPr lang="en-US" sz="860" dirty="0"/>
+          </a:p>
+          <a:p>
+            <a:pPr indent="0" marL="0">
+              <a:lnSpc>
+                <a:spcPts val="1280"/>
+              </a:lnSpc>
+              <a:buNone/>
+            </a:pPr>
+            <a:r>
+              <a:rPr lang="en-US" sz="860" dirty="0">
+                <a:solidFill>
+                  <a:srgbClr val="D2DAE4"/>
+                </a:solidFill>
+                <a:latin typeface="Consolas" pitchFamily="34" charset="0"/>
+                <a:ea typeface="Consolas" pitchFamily="34" charset="-122"/>
+                <a:cs typeface="Consolas" pitchFamily="34" charset="-120"/>
+              </a:rPr>
+              <a:t>Windows  ② Named Mutex — 프로세스 사이, 이름으로 커널이 찾아 준다</a:t>
+            </a:r>
+            <a:endParaRPr lang="en-US" sz="860" dirty="0"/>
+          </a:p>
+          <a:p>
+            <a:pPr indent="0" marL="0">
+              <a:lnSpc>
+                <a:spcPts val="1280"/>
+              </a:lnSpc>
+              <a:buNone/>
+            </a:pPr>
+            <a:r>
+              <a:rPr lang="en-US" sz="860" dirty="0">
+                <a:solidFill>
+                  <a:srgbClr val="D2DAE4"/>
+                </a:solidFill>
+                <a:latin typeface="Consolas" pitchFamily="34" charset="0"/>
+                <a:ea typeface="Consolas" pitchFamily="34" charset="-122"/>
+                <a:cs typeface="Consolas" pitchFamily="34" charset="-120"/>
+              </a:rPr>
+              <a:t>    CreateMutex(이름) → WaitForSingleObject / ReleaseMutex</a:t>
             </a:r>
             <a:endParaRPr lang="en-US" sz="860" dirty="0"/>
           </a:p>
@@ -9617,7 +9776,7 @@
           <a:ln/>
         </p:spPr>
         <p:txBody>
-          <a:bodyPr wrap="square" lIns="0" tIns="0" rIns="0" bIns="0" rtlCol="0" anchor="t"/>
+          <a:bodyPr wrap="square" lIns="0" tIns="0" rIns="0" bIns="0" rtlCol="0" anchor="ctr"/>
           <a:lstStyle/>
           <a:p>
             <a:pPr marL="342900" indent="-342900">
@@ -9639,7 +9798,7 @@
                 <a:ea typeface="맑은 고딕" pitchFamily="34" charset="-122"/>
                 <a:cs typeface="맑은 고딕" pitchFamily="34" charset="-120"/>
               </a:rPr>
-              <a:t>상태는 「잠김 / 풀림」 두 가지뿐이다</a:t>
+              <a:t>상태가 잠김과 풀림 두 가지뿐이다</a:t>
             </a:r>
             <a:endParaRPr lang="en-US" sz="1080" dirty="0"/>
           </a:p>
@@ -9687,7 +9846,7 @@
                 <a:ea typeface="맑은 고딕" pitchFamily="34" charset="-122"/>
                 <a:cs typeface="맑은 고딕" pitchFamily="34" charset="-120"/>
               </a:rPr>
-              <a:t>lock 에서 못 들어가면 커널이 재워 두었다가 unlock 때 깨운다</a:t>
+              <a:t>락을 못 잡으면 커널이 재워 두었다가 풀릴 때 깨운다 (CPU 를 쓰지 않는다)</a:t>
             </a:r>
             <a:endParaRPr lang="en-US" sz="1080" dirty="0"/>
           </a:p>
@@ -9711,7 +9870,7 @@
                 <a:ea typeface="맑은 고딕" pitchFamily="34" charset="-122"/>
                 <a:cs typeface="맑은 고딕" pitchFamily="34" charset="-120"/>
               </a:rPr>
-              <a:t>프로세스 내부는 CRITICAL_SECTION, 프로세스 간은 이름 있는 뮤텍스를 쓴다</a:t>
+              <a:t>한 프로세스 안이면 CRITICAL_SECTION, 프로세스 사이면 이름 붙인 Mutex 를 쓴다</a:t>
             </a:r>
             <a:endParaRPr lang="en-US" sz="1080" dirty="0"/>
           </a:p>
@@ -9801,7 +9960,7 @@
           <a:ln/>
         </p:spPr>
         <p:txBody>
-          <a:bodyPr wrap="square" lIns="0" tIns="0" rIns="0" bIns="0" rtlCol="0" anchor="t"/>
+          <a:bodyPr wrap="square" lIns="0" tIns="0" rIns="0" bIns="0" rtlCol="0" anchor="ctr"/>
           <a:lstStyle/>
           <a:p>
             <a:pPr marL="342900" indent="-342900">
@@ -9823,7 +9982,7 @@
                 <a:ea typeface="맑은 고딕" pitchFamily="34" charset="-122"/>
                 <a:cs typeface="맑은 고딕" pitchFamily="34" charset="-120"/>
               </a:rPr>
-              <a:t>공유 변수 · 자료구조를 읽고 고칠 때</a:t>
+              <a:t>여러 쓰레드가 같은 변수나 자료구조를 고칠 때</a:t>
             </a:r>
             <a:endParaRPr lang="en-US" sz="1050" dirty="0"/>
           </a:p>
@@ -9848,30 +10007,6 @@
                 <a:cs typeface="맑은 고딕" pitchFamily="34" charset="-120"/>
               </a:rPr>
               <a:t>링버퍼의 head · tail 인덱스 갱신, 링크드 리스트 · 해시 테이블</a:t>
-            </a:r>
-            <a:endParaRPr lang="en-US" sz="1050" dirty="0"/>
-          </a:p>
-          <a:p>
-            <a:pPr marL="342900" indent="-342900">
-              <a:lnSpc>
-                <a:spcPts val="1470"/>
-              </a:lnSpc>
-              <a:spcAft>
-                <a:spcPts val="200"/>
-              </a:spcAft>
-              <a:buSzPct val="100000"/>
-              <a:buChar char="•"/>
-            </a:pPr>
-            <a:r>
-              <a:rPr lang="en-US" sz="1050" dirty="0">
-                <a:solidFill>
-                  <a:srgbClr val="6E4B0D"/>
-                </a:solidFill>
-                <a:latin typeface="맑은 고딕" pitchFamily="34" charset="0"/>
-                <a:ea typeface="맑은 고딕" pitchFamily="34" charset="-122"/>
-                <a:cs typeface="맑은 고딕" pitchFamily="34" charset="-120"/>
-              </a:rPr>
-              <a:t>파일 핸들 · 로그 버퍼처럼 한 번에 하나만 써야 하는 자원</a:t>
             </a:r>
             <a:endParaRPr lang="en-US" sz="1050" dirty="0"/>
           </a:p>
@@ -9961,7 +10096,7 @@
           <a:ln/>
         </p:spPr>
         <p:txBody>
-          <a:bodyPr wrap="square" lIns="0" tIns="0" rIns="0" bIns="0" rtlCol="0" anchor="t"/>
+          <a:bodyPr wrap="square" lIns="0" tIns="0" rIns="0" bIns="0" rtlCol="0" anchor="ctr"/>
           <a:lstStyle/>
           <a:p>
             <a:pPr marL="342900" indent="-342900">
@@ -9983,7 +10118,7 @@
                 <a:ea typeface="맑은 고딕" pitchFamily="34" charset="-122"/>
                 <a:cs typeface="맑은 고딕" pitchFamily="34" charset="-120"/>
               </a:rPr>
-              <a:t>의미가 단순해 실수가 적고 디버깅이 쉽다</a:t>
+              <a:t>쓰임이 단순해서 실수가 적고 디버깅이 쉽다</a:t>
             </a:r>
             <a:endParaRPr lang="en-US" sz="1100" dirty="0"/>
           </a:p>
@@ -10007,55 +10142,7 @@
                 <a:ea typeface="맑은 고딕" pitchFamily="34" charset="-122"/>
                 <a:cs typeface="맑은 고딕" pitchFamily="34" charset="-120"/>
               </a:rPr>
-              <a:t>소유자가 분명 → 데드락 추적이 가능</a:t>
-            </a:r>
-            <a:endParaRPr lang="en-US" sz="1100" dirty="0"/>
-          </a:p>
-          <a:p>
-            <a:pPr marL="342900" indent="-342900">
-              <a:lnSpc>
-                <a:spcPts val="1540"/>
-              </a:lnSpc>
-              <a:spcAft>
-                <a:spcPts val="600"/>
-              </a:spcAft>
-              <a:buSzPct val="100000"/>
-              <a:buChar char="•"/>
-            </a:pPr>
-            <a:r>
-              <a:rPr lang="en-US" sz="1100" dirty="0">
-                <a:solidFill>
-                  <a:srgbClr val="245A5E"/>
-                </a:solidFill>
-                <a:latin typeface="맑은 고딕" pitchFamily="34" charset="0"/>
-                <a:ea typeface="맑은 고딕" pitchFamily="34" charset="-122"/>
-                <a:cs typeface="맑은 고딕" pitchFamily="34" charset="-120"/>
-              </a:rPr>
-              <a:t>우선순위 역전을 막는 기법을 쓸 수 있다</a:t>
-            </a:r>
-            <a:endParaRPr lang="en-US" sz="1100" dirty="0"/>
-          </a:p>
-          <a:p>
-            <a:pPr marL="342900" indent="-342900">
-              <a:lnSpc>
-                <a:spcPts val="1540"/>
-              </a:lnSpc>
-              <a:spcAft>
-                <a:spcPts val="600"/>
-              </a:spcAft>
-              <a:buSzPct val="100000"/>
-              <a:buChar char="•"/>
-            </a:pPr>
-            <a:r>
-              <a:rPr lang="en-US" sz="1100" dirty="0">
-                <a:solidFill>
-                  <a:srgbClr val="245A5E"/>
-                </a:solidFill>
-                <a:latin typeface="맑은 고딕" pitchFamily="34" charset="0"/>
-                <a:ea typeface="맑은 고딕" pitchFamily="34" charset="-122"/>
-                <a:cs typeface="맑은 고딕" pitchFamily="34" charset="-120"/>
-              </a:rPr>
-              <a:t>짧게 잡았다 푸는 데 오버헤드가 작다</a:t>
+              <a:t>누가 잡고 있는지 분명해 데드락을 추적할 수 있다</a:t>
             </a:r>
             <a:endParaRPr lang="en-US" sz="1100" dirty="0"/>
           </a:p>
@@ -10145,7 +10232,7 @@
           <a:ln/>
         </p:spPr>
         <p:txBody>
-          <a:bodyPr wrap="square" lIns="0" tIns="0" rIns="0" bIns="0" rtlCol="0" anchor="t"/>
+          <a:bodyPr wrap="square" lIns="0" tIns="0" rIns="0" bIns="0" rtlCol="0" anchor="ctr"/>
           <a:lstStyle/>
           <a:p>
             <a:pPr marL="342900" indent="-342900">
@@ -10167,7 +10254,7 @@
                 <a:ea typeface="맑은 고딕" pitchFamily="34" charset="-122"/>
                 <a:cs typeface="맑은 고딕" pitchFamily="34" charset="-120"/>
               </a:rPr>
-              <a:t>소유자만 풀 수 있어 「신호 전달」엔 못 쓴다</a:t>
+              <a:t>잡은 쪽만 풀 수 있어 신호 전달에는 못 쓴다</a:t>
             </a:r>
             <a:endParaRPr lang="en-US" sz="1100" dirty="0"/>
           </a:p>
@@ -10191,7 +10278,7 @@
                 <a:ea typeface="맑은 고딕" pitchFamily="34" charset="-122"/>
                 <a:cs typeface="맑은 고딕" pitchFamily="34" charset="-120"/>
               </a:rPr>
-              <a:t>락 잡는 순서가 엇갈리면 데드락</a:t>
+              <a:t>락 잡는 순서가 엇갈리면 데드락이 난다</a:t>
             </a:r>
             <a:endParaRPr lang="en-US" sz="1100" dirty="0"/>
           </a:p>
@@ -10215,31 +10302,7 @@
                 <a:ea typeface="맑은 고딕" pitchFamily="34" charset="-122"/>
                 <a:cs typeface="맑은 고딕" pitchFamily="34" charset="-120"/>
               </a:rPr>
-              <a:t>임계구역이 길면 병렬성이 사라진다</a:t>
-            </a:r>
-            <a:endParaRPr lang="en-US" sz="1100" dirty="0"/>
-          </a:p>
-          <a:p>
-            <a:pPr marL="342900" indent="-342900">
-              <a:lnSpc>
-                <a:spcPts val="1540"/>
-              </a:lnSpc>
-              <a:spcAft>
-                <a:spcPts val="600"/>
-              </a:spcAft>
-              <a:buSzPct val="100000"/>
-              <a:buChar char="•"/>
-            </a:pPr>
-            <a:r>
-              <a:rPr lang="en-US" sz="1100" dirty="0">
-                <a:solidFill>
-                  <a:srgbClr val="9B3A17"/>
-                </a:solidFill>
-                <a:latin typeface="맑은 고딕" pitchFamily="34" charset="0"/>
-                <a:ea typeface="맑은 고딕" pitchFamily="34" charset="-122"/>
-                <a:cs typeface="맑은 고딕" pitchFamily="34" charset="-120"/>
-              </a:rPr>
-              <a:t>조건을 기다리는 용도로 쓰면 바쁜 대기가 된다</a:t>
+              <a:t>조건을 기다리는 데 쓰면 잠갔다 풀었다 확인을 반복해 CPU 를 태운다</a:t>
             </a:r>
             <a:endParaRPr lang="en-US" sz="1100" dirty="0"/>
           </a:p>
@@ -10415,7 +10478,7 @@
                 <a:ea typeface="맑은 고딕" pitchFamily="34" charset="-122"/>
                 <a:cs typeface="맑은 고딕" pitchFamily="34" charset="-120"/>
               </a:rPr>
-              <a:t>사용할 수 있는 자원의 「개수」를 세는 카운터 — wait 로 하나 가져가고 post 로 하나 돌려준다</a:t>
+              <a:t>쓸 수 있는 자원이 몇 개 남았는지 세는 카운터. wait 로 하나 가져가고 post 로 하나 돌려준다</a:t>
             </a:r>
             <a:endParaRPr lang="en-US" sz="1250" dirty="0"/>
           </a:p>
@@ -11189,8 +11252,8 @@
         </p:nvSpPr>
         <p:spPr>
           <a:xfrm>
-            <a:off x="987552" y="4261104"/>
-            <a:ext cx="3739896" cy="420624"/>
+            <a:off x="905000" y="4261104"/>
+            <a:ext cx="3900000" cy="420624"/>
           </a:xfrm>
           <a:prstGeom prst="rect">
             <a:avLst/>
@@ -11217,7 +11280,7 @@
                 <a:ea typeface="Consolas" pitchFamily="34" charset="-122"/>
                 <a:cs typeface="Consolas" pitchFamily="34" charset="-120"/>
               </a:rPr>
-              <a:t>sem_wait(&amp;sem);   /* 자원 사용 */   sem_post(&amp;sem);</a:t>
+              <a:t>sem_wait(&amp;sem);  /* 자원 사용 구간 */  sem_post(&amp;sem);</a:t>
             </a:r>
             <a:endParaRPr lang="en-US" sz="920" dirty="0"/>
           </a:p>
@@ -11345,7 +11408,7 @@
                 <a:ea typeface="Consolas" pitchFamily="34" charset="-122"/>
                 <a:cs typeface="Consolas" pitchFamily="34" charset="-120"/>
               </a:rPr>
-              <a:t>          semget / semop                  (System V)</a:t>
+              <a:t>          semget / semop                   (System V)</a:t>
             </a:r>
             <a:endParaRPr lang="en-US" sz="860" dirty="0"/>
           </a:p>
@@ -11365,7 +11428,27 @@
                 <a:ea typeface="Consolas" pitchFamily="34" charset="-122"/>
                 <a:cs typeface="Consolas" pitchFamily="34" charset="-120"/>
               </a:rPr>
-              <a:t>Windows : CreateSemaphore / WaitForSingleObject / ReleaseSemaphore</a:t>
+              <a:t>Windows : CreateSemaphore(이름) 으로 만들고</a:t>
+            </a:r>
+            <a:endParaRPr lang="en-US" sz="860" dirty="0"/>
+          </a:p>
+          <a:p>
+            <a:pPr indent="0" marL="0">
+              <a:lnSpc>
+                <a:spcPts val="1350"/>
+              </a:lnSpc>
+              <a:buNone/>
+            </a:pPr>
+            <a:r>
+              <a:rPr lang="en-US" sz="860" dirty="0">
+                <a:solidFill>
+                  <a:srgbClr val="D2DAE4"/>
+                </a:solidFill>
+                <a:latin typeface="Consolas" pitchFamily="34" charset="0"/>
+                <a:ea typeface="Consolas" pitchFamily="34" charset="-122"/>
+                <a:cs typeface="Consolas" pitchFamily="34" charset="-120"/>
+              </a:rPr>
+              <a:t>          WaitForSingleObject / ReleaseSemaphore</a:t>
             </a:r>
             <a:endParaRPr lang="en-US" sz="860" dirty="0"/>
           </a:p>
@@ -11455,7 +11538,7 @@
           <a:ln/>
         </p:spPr>
         <p:txBody>
-          <a:bodyPr wrap="square" lIns="0" tIns="0" rIns="0" bIns="0" rtlCol="0" anchor="t"/>
+          <a:bodyPr wrap="square" lIns="0" tIns="0" rIns="0" bIns="0" rtlCol="0" anchor="ctr"/>
           <a:lstStyle/>
           <a:p>
             <a:pPr marL="342900" indent="-342900">
@@ -11477,7 +11560,7 @@
                 <a:ea typeface="맑은 고딕" pitchFamily="34" charset="-122"/>
                 <a:cs typeface="맑은 고딕" pitchFamily="34" charset="-120"/>
               </a:rPr>
-              <a:t>0 이상의 정수 카운터.  wait(P) : 1 감소, 0 이면 대기  /  post(V) : 1 증가, 대기자를 깨움</a:t>
+              <a:t>0 이상의 정수 카운터. wait(P) 는 1 감소하고 0 이면 대기, post(V) 는 1 증가하고 대기자를 깨운다 (P · V 는 네덜란드어 검사 · 증가의 첫 글자)</a:t>
             </a:r>
             <a:endParaRPr lang="en-US" sz="1080" dirty="0"/>
           </a:p>
@@ -11501,7 +11584,7 @@
                 <a:ea typeface="맑은 고딕" pitchFamily="34" charset="-122"/>
                 <a:cs typeface="맑은 고딕" pitchFamily="34" charset="-120"/>
               </a:rPr>
-              <a:t>소유권이 없다 → A 가 내리고 B 가 올려도 된다 (그래서 신호 전달이 된다)</a:t>
+              <a:t>소유권이 없어서 A 가 내리고 B 가 올려도 된다</a:t>
             </a:r>
             <a:endParaRPr lang="en-US" sz="1080" dirty="0"/>
           </a:p>
@@ -11525,31 +11608,7 @@
                 <a:ea typeface="맑은 고딕" pitchFamily="34" charset="-122"/>
                 <a:cs typeface="맑은 고딕" pitchFamily="34" charset="-120"/>
               </a:rPr>
-              <a:t>카운팅 세마포어(자원 N 개) 와 바이너리 세마포어(0 · 1) 가 있다</a:t>
-            </a:r>
-            <a:endParaRPr lang="en-US" sz="1080" dirty="0"/>
-          </a:p>
-          <a:p>
-            <a:pPr marL="342900" indent="-342900">
-              <a:lnSpc>
-                <a:spcPts val="1512"/>
-              </a:lnSpc>
-              <a:spcAft>
-                <a:spcPts val="300"/>
-              </a:spcAft>
-              <a:buSzPct val="100000"/>
-              <a:buChar char="•"/>
-            </a:pPr>
-            <a:r>
-              <a:rPr lang="en-US" sz="1080" dirty="0">
-                <a:solidFill>
-                  <a:srgbClr val="3D4451"/>
-                </a:solidFill>
-                <a:latin typeface="맑은 고딕" pitchFamily="34" charset="0"/>
-                <a:ea typeface="맑은 고딕" pitchFamily="34" charset="-122"/>
-                <a:cs typeface="맑은 고딕" pitchFamily="34" charset="-120"/>
-              </a:rPr>
-              <a:t>대기는 커널이 재워 준다 → 바쁜 대기(busy wait) 가 생기지 않는다</a:t>
+              <a:t>0 이면 커널이 재워 두었다가 post 때 깨운다 (기다리는 동안 CPU 를 쓰지 않는다)</a:t>
             </a:r>
             <a:endParaRPr lang="en-US" sz="1080" dirty="0"/>
           </a:p>
@@ -11639,7 +11698,7 @@
           <a:ln/>
         </p:spPr>
         <p:txBody>
-          <a:bodyPr wrap="square" lIns="0" tIns="0" rIns="0" bIns="0" rtlCol="0" anchor="t"/>
+          <a:bodyPr wrap="square" lIns="0" tIns="0" rIns="0" bIns="0" rtlCol="0" anchor="ctr"/>
           <a:lstStyle/>
           <a:p>
             <a:pPr marL="342900" indent="-342900">
@@ -11661,7 +11720,7 @@
                 <a:ea typeface="맑은 고딕" pitchFamily="34" charset="-122"/>
                 <a:cs typeface="맑은 고딕" pitchFamily="34" charset="-120"/>
               </a:rPr>
-              <a:t>개수가 정해진 자원 관리 — 커넥션 풀, 버퍼 슬롯</a:t>
+              <a:t>커넥션 풀이나 버퍼 슬롯처럼 개수가 정해진 자원</a:t>
             </a:r>
             <a:endParaRPr lang="en-US" sz="1050" dirty="0"/>
           </a:p>
@@ -11685,31 +11744,7 @@
                 <a:ea typeface="맑은 고딕" pitchFamily="34" charset="-122"/>
                 <a:cs typeface="맑은 고딕" pitchFamily="34" charset="-120"/>
               </a:rPr>
-              <a:t>생산자 – 소비자에서 「찼다 / 비었다」를 알리는 신호</a:t>
-            </a:r>
-            <a:endParaRPr lang="en-US" sz="1050" dirty="0"/>
-          </a:p>
-          <a:p>
-            <a:pPr marL="342900" indent="-342900">
-              <a:lnSpc>
-                <a:spcPts val="1470"/>
-              </a:lnSpc>
-              <a:spcAft>
-                <a:spcPts val="200"/>
-              </a:spcAft>
-              <a:buSzPct val="100000"/>
-              <a:buChar char="•"/>
-            </a:pPr>
-            <a:r>
-              <a:rPr lang="en-US" sz="1050" dirty="0">
-                <a:solidFill>
-                  <a:srgbClr val="6E4B0D"/>
-                </a:solidFill>
-                <a:latin typeface="맑은 고딕" pitchFamily="34" charset="0"/>
-                <a:ea typeface="맑은 고딕" pitchFamily="34" charset="-122"/>
-                <a:cs typeface="맑은 고딕" pitchFamily="34" charset="-120"/>
-              </a:rPr>
-              <a:t>쓰레드 · 프로세스 간 실행 순서 맞추기</a:t>
+              <a:t>한쪽이 채우고 다른 쪽이 꺼낼 때 찼다 비었다를 알림</a:t>
             </a:r>
             <a:endParaRPr lang="en-US" sz="1050" dirty="0"/>
           </a:p>
@@ -11821,7 +11856,7 @@
                 <a:ea typeface="맑은 고딕" pitchFamily="34" charset="-122"/>
                 <a:cs typeface="맑은 고딕" pitchFamily="34" charset="-120"/>
               </a:rPr>
-              <a:t>개수를 셀 수 있다 (뮤텍스는 불가)</a:t>
+              <a:t>개수를 셀 수 있다 (뮤텍스로는 안 된다)</a:t>
             </a:r>
             <a:endParaRPr lang="en-US" sz="1100" dirty="0"/>
           </a:p>
@@ -11845,7 +11880,7 @@
                 <a:ea typeface="맑은 고딕" pitchFamily="34" charset="-122"/>
                 <a:cs typeface="맑은 고딕" pitchFamily="34" charset="-120"/>
               </a:rPr>
-              <a:t>커널이 깨워 주므로 CPU (Central Processing Unit) 낭비가 없다</a:t>
+              <a:t>조건을 기다리는 일을 확인 반복 없이 할 수 있다</a:t>
             </a:r>
             <a:endParaRPr lang="en-US" sz="1100" dirty="0"/>
           </a:p>
@@ -11983,7 +12018,7 @@
           <a:ln/>
         </p:spPr>
         <p:txBody>
-          <a:bodyPr wrap="square" lIns="0" tIns="0" rIns="0" bIns="0" rtlCol="0" anchor="t"/>
+          <a:bodyPr wrap="square" lIns="0" tIns="0" rIns="0" bIns="0" rtlCol="0" anchor="ctr"/>
           <a:lstStyle/>
           <a:p>
             <a:pPr marL="342900" indent="-342900">
@@ -12029,55 +12064,7 @@
                 <a:ea typeface="맑은 고딕" pitchFamily="34" charset="-122"/>
                 <a:cs typeface="맑은 고딕" pitchFamily="34" charset="-120"/>
               </a:rPr>
-              <a:t>post 를 한 번 빠뜨리면 영원히 대기</a:t>
-            </a:r>
-            <a:endParaRPr lang="en-US" sz="1100" dirty="0"/>
-          </a:p>
-          <a:p>
-            <a:pPr marL="342900" indent="-342900">
-              <a:lnSpc>
-                <a:spcPts val="1540"/>
-              </a:lnSpc>
-              <a:spcAft>
-                <a:spcPts val="600"/>
-              </a:spcAft>
-              <a:buSzPct val="100000"/>
-              <a:buChar char="•"/>
-            </a:pPr>
-            <a:r>
-              <a:rPr lang="en-US" sz="1100" dirty="0">
-                <a:solidFill>
-                  <a:srgbClr val="9B3A17"/>
-                </a:solidFill>
-                <a:latin typeface="맑은 고딕" pitchFamily="34" charset="0"/>
-                <a:ea typeface="맑은 고딕" pitchFamily="34" charset="-122"/>
-                <a:cs typeface="맑은 고딕" pitchFamily="34" charset="-120"/>
-              </a:rPr>
-              <a:t>상호배제 용도로는 뮤텍스보다 안전하지 않다</a:t>
-            </a:r>
-            <a:endParaRPr lang="en-US" sz="1100" dirty="0"/>
-          </a:p>
-          <a:p>
-            <a:pPr marL="342900" indent="-342900">
-              <a:lnSpc>
-                <a:spcPts val="1540"/>
-              </a:lnSpc>
-              <a:spcAft>
-                <a:spcPts val="600"/>
-              </a:spcAft>
-              <a:buSzPct val="100000"/>
-              <a:buChar char="•"/>
-            </a:pPr>
-            <a:r>
-              <a:rPr lang="en-US" sz="1100" dirty="0">
-                <a:solidFill>
-                  <a:srgbClr val="9B3A17"/>
-                </a:solidFill>
-                <a:latin typeface="맑은 고딕" pitchFamily="34" charset="0"/>
-                <a:ea typeface="맑은 고딕" pitchFamily="34" charset="-122"/>
-                <a:cs typeface="맑은 고딕" pitchFamily="34" charset="-120"/>
-              </a:rPr>
-              <a:t>wait 순서를 잘못 짜면 데드락</a:t>
+              <a:t>post 를 한 번 빠뜨리면 영원히 기다린다</a:t>
             </a:r>
             <a:endParaRPr lang="en-US" sz="1100" dirty="0"/>
           </a:p>
@@ -13196,7 +13183,7 @@
                           <a:ea typeface="맑은 고딕" pitchFamily="34" charset="-122"/>
                           <a:cs typeface="맑은 고딕" pitchFamily="34" charset="-120"/>
                         </a:rPr>
-                        <a:t>"지금 나만 만지고 있나?"</a:t>
+                        <a:t>지금 나만 만지고 있나?</a:t>
                       </a:r>
                       <a:endParaRPr lang="en-US" sz="1080" dirty="0">
                         <a:latin typeface="맑은 고딕" charset="0"/>
@@ -13264,7 +13251,7 @@
                           <a:ea typeface="맑은 고딕" pitchFamily="34" charset="-122"/>
                           <a:cs typeface="맑은 고딕" pitchFamily="34" charset="-120"/>
                         </a:rPr>
-                        <a:t>"쓸 수 있는 게 몇 개 남았나?"</a:t>
+                        <a:t>쓸 수 있는 게 몇 개 남았나?</a:t>
                       </a:r>
                       <a:endParaRPr lang="en-US" sz="1080" dirty="0">
                         <a:latin typeface="맑은 고딕" charset="0"/>
@@ -13470,7 +13457,7 @@
                           <a:ea typeface="맑은 고딕" pitchFamily="34" charset="-122"/>
                           <a:cs typeface="맑은 고딕" pitchFamily="34" charset="-120"/>
                         </a:rPr>
-                        <a:t>생산자–소비자, 자원 풀</a:t>
+                        <a:t>송신 – 수신 버퍼, 자원 풀</a:t>
                       </a:r>
                       <a:endParaRPr lang="en-US" sz="1080" dirty="0">
                         <a:latin typeface="맑은 고딕" charset="0"/>
@@ -13692,7 +13679,7 @@
                 <a:ea typeface="맑은 고딕" pitchFamily="34" charset="-122"/>
                 <a:cs typeface="맑은 고딕" pitchFamily="34" charset="-120"/>
               </a:rPr>
-              <a:t>"버퍼가 빌 때까지" 락을 잡았다 풀었다 반복 →  바쁜 대기(busy wait) 로 CPU 를 태운다</a:t>
+              <a:t>버퍼가 빌 때까지 기다리려면 락을 잡았다 풀었다 확인을 반복 →  바쁜 대기로 CPU 를 태운다</a:t>
             </a:r>
             <a:endParaRPr lang="en-US" sz="1050" dirty="0"/>
           </a:p>
@@ -14102,7 +14089,7 @@
                 <a:ea typeface="맑은 고딕" pitchFamily="34" charset="-122"/>
                 <a:cs typeface="맑은 고딕" pitchFamily="34" charset="-120"/>
               </a:rPr>
-              <a:t>생산자 – 소비자 표준 순서</a:t>
+              <a:t>송신 – 수신 표준 순서</a:t>
             </a:r>
             <a:endParaRPr lang="en-US" sz="1350" dirty="0"/>
           </a:p>
@@ -14168,7 +14155,7 @@
                 <a:ea typeface="맑은 고딕" pitchFamily="34" charset="-122"/>
                 <a:cs typeface="맑은 고딕" pitchFamily="34" charset="-120"/>
               </a:rPr>
-              <a:t>송신 (생산자)</a:t>
+              <a:t>송신</a:t>
             </a:r>
             <a:endParaRPr lang="en-US" sz="1050" dirty="0"/>
           </a:p>
@@ -14720,7 +14707,7 @@
                 <a:ea typeface="맑은 고딕" pitchFamily="34" charset="-122"/>
                 <a:cs typeface="맑은 고딕" pitchFamily="34" charset="-120"/>
               </a:rPr>
-              <a:t>수신 (소비자)</a:t>
+              <a:t>수신</a:t>
             </a:r>
             <a:endParaRPr lang="en-US" sz="1050" dirty="0"/>
           </a:p>
@@ -20405,7 +20392,7 @@
                 <a:ea typeface="Consolas" pitchFamily="34" charset="-122"/>
                 <a:cs typeface="Consolas" pitchFamily="34" charset="-120"/>
               </a:rPr>
-              <a:t>rx done (100)</a:t>
+              <a:t>rx done (100, seq err 0)</a:t>
             </a:r>
             <a:endParaRPr lang="en-US" sz="1050" dirty="0"/>
           </a:p>
@@ -21743,7 +21730,7 @@
                 <a:ea typeface="맑은 고딕" pitchFamily="34" charset="-122"/>
                 <a:cs typeface="맑은 고딕" pitchFamily="34" charset="-120"/>
               </a:rPr>
-              <a:t>네임드 공유메모리 + 네임드 뮤텍스 1 개 + 네임드 세마포어 2 개</a:t>
+              <a:t>이름 붙인 공유메모리 + 이름 붙인 뮤텍스 1 개 + 이름 붙인 세마포어 2 개</a:t>
             </a:r>
             <a:endParaRPr lang="en-US" sz="950" dirty="0"/>
           </a:p>
@@ -22068,7 +22055,7 @@
                           <a:ea typeface="맑은 고딕" pitchFamily="34" charset="-122"/>
                           <a:cs typeface="맑은 고딕" pitchFamily="34" charset="-120"/>
                         </a:rPr>
-                        <a:t>CreateFileMapping — 네임드 공유메모리 + 링버퍼 헤더 초기화</a:t>
+                        <a:t>CreateFileMapping — 이름 붙인 공유메모리를 만들고 링버퍼 헤더를 초기화</a:t>
                       </a:r>
                       <a:endParaRPr lang="en-US" sz="1000" dirty="0">
                         <a:latin typeface="맑은 고딕" charset="0"/>
@@ -23570,7 +23557,7 @@
                 <a:ea typeface="맑은 고딕" pitchFamily="34" charset="-122"/>
                 <a:cs typeface="맑은 고딕" pitchFamily="34" charset="-120"/>
               </a:rPr>
-              <a:t>두 프로세스는 「같은 이름」만 알면 같은 큐에 붙는다   ·   기동 순서는 상관없다</a:t>
+              <a:t>두 프로세스는 같은 이름만 알면 같은 큐에 붙는다   ·   기동 순서는 상관없다</a:t>
             </a:r>
             <a:endParaRPr lang="en-US" sz="1250" dirty="0"/>
           </a:p>
@@ -30636,7 +30623,7 @@
                 <a:ea typeface="맑은 고딕" pitchFamily="34" charset="-122"/>
                 <a:cs typeface="맑은 고딕" pitchFamily="34" charset="-120"/>
               </a:rPr>
-              <a:t>상대가 htonl 을 쓰면 UI 의 htonl 체크박스를 켜서 맞춘다</a:t>
+              <a:t>상대가 htonl(호스트 → 네트워크 순서 변환)을 쓰면 UI 체크박스를 켜서 맞춘다</a:t>
             </a:r>
             <a:endParaRPr lang="en-US" sz="1020" dirty="0"/>
           </a:p>
@@ -33604,7 +33591,7 @@
                 <a:ea typeface="맑은 고딕" pitchFamily="34" charset="-122"/>
                 <a:cs typeface="맑은 고딕" pitchFamily="34" charset="-120"/>
               </a:rPr>
-              <a:t>공유메모리(그릇) + 링버퍼(FIFO) + 세마포어 2 개 + 뮤텍스.</a:t>
+              <a:t>공유메모리 + 링버퍼(FIFO) + 세마포어 2 개 + 뮤텍스.</a:t>
             </a:r>
             <a:endParaRPr lang="en-US" sz="1100" dirty="0"/>
           </a:p>
@@ -33754,7 +33741,7 @@
                 <a:ea typeface="맑은 고딕" pitchFamily="34" charset="-122"/>
                 <a:cs typeface="맑은 고딕" pitchFamily="34" charset="-120"/>
               </a:rPr>
-              <a:t>포팅에서 위험한 것은 「타입이 맞는」 차이다</a:t>
+              <a:t>포팅에서 위험한 것은 타입이 맞아떨어지는 차이다</a:t>
             </a:r>
             <a:endParaRPr lang="en-US" sz="1600" dirty="0"/>
           </a:p>
@@ -36329,7 +36316,7 @@
                 <a:ea typeface="맑은 고딕" pitchFamily="34" charset="-122"/>
                 <a:cs typeface="맑은 고딕" pitchFamily="34" charset="-120"/>
               </a:rPr>
-              <a:t>주소공간을 공유하느냐 아니냐에 따라 쓸 수 있는 수단이 완전히 갈린다</a:t>
+              <a:t>주소공간을 공유하느냐, 그리고 얼마나 멀리 보내느냐가 쓸 수 있는 수단을 정한다</a:t>
             </a:r>
             <a:endParaRPr lang="en-US" sz="1250" dirty="0"/>
           </a:p>
@@ -36344,7 +36331,7 @@
         <p:spPr>
           <a:xfrm>
             <a:off x="548640" y="1298448"/>
-            <a:ext cx="4160520" cy="3566160"/>
+            <a:ext cx="3484778" cy="3657600"/>
           </a:xfrm>
           <a:prstGeom prst="roundRect">
             <a:avLst>
@@ -36371,7 +36358,7 @@
         <p:spPr>
           <a:xfrm>
             <a:off x="804672" y="1463040"/>
-            <a:ext cx="3657600" cy="365760"/>
+            <a:ext cx="2972714" cy="365760"/>
           </a:xfrm>
           <a:prstGeom prst="rect">
             <a:avLst/>
@@ -36389,13 +36376,13 @@
             <a:r>
               <a:rPr lang="en-US" sz="1700" b="1" dirty="0">
                 <a:solidFill>
-                  <a:srgbClr val="13757A"/>
+                  <a:srgbClr val="1E232E"/>
                 </a:solidFill>
                 <a:latin typeface="맑은 고딕" pitchFamily="34" charset="0"/>
                 <a:ea typeface="맑은 고딕" pitchFamily="34" charset="-122"/>
                 <a:cs typeface="맑은 고딕" pitchFamily="34" charset="-120"/>
               </a:rPr>
-              <a:t>쓰레드 간 통신</a:t>
+              <a:t>①  같은 프로세스 안</a:t>
             </a:r>
             <a:endParaRPr lang="en-US" sz="1700" dirty="0"/>
           </a:p>
@@ -36410,7 +36397,7 @@
         <p:spPr>
           <a:xfrm>
             <a:off x="804672" y="1810512"/>
-            <a:ext cx="3657600" cy="256032"/>
+            <a:ext cx="2972714" cy="256032"/>
           </a:xfrm>
           <a:prstGeom prst="rect">
             <a:avLst/>
@@ -36428,13 +36415,13 @@
             <a:r>
               <a:rPr lang="en-US" sz="1050" dirty="0">
                 <a:solidFill>
-                  <a:srgbClr val="2A6165"/>
+                  <a:srgbClr val="7A828F"/>
                 </a:solidFill>
                 <a:latin typeface="맑은 고딕" pitchFamily="34" charset="0"/>
                 <a:ea typeface="맑은 고딕" pitchFamily="34" charset="-122"/>
                 <a:cs typeface="맑은 고딕" pitchFamily="34" charset="-120"/>
               </a:rPr>
-              <a:t>같은 주소공간 · 커널을 거치지 않는다</a:t>
+              <a:t>쓰레드 ↔ 쓰레드  ·  주소공간을 공유한다</a:t>
             </a:r>
             <a:endParaRPr lang="en-US" sz="1050" dirty="0"/>
           </a:p>
@@ -36449,7 +36436,7 @@
         <p:spPr>
           <a:xfrm>
             <a:off x="804672" y="2157984"/>
-            <a:ext cx="3648456" cy="896112"/>
+            <a:ext cx="2972714" cy="804672"/>
           </a:xfrm>
           <a:prstGeom prst="roundRect">
             <a:avLst>
@@ -36475,8 +36462,8 @@
         </p:nvSpPr>
         <p:spPr>
           <a:xfrm>
-            <a:off x="804672" y="2231136"/>
-            <a:ext cx="3648456" cy="274320"/>
+            <a:off x="804672" y="2222880"/>
+            <a:ext cx="2972714" cy="274320"/>
           </a:xfrm>
           <a:prstGeom prst="rect">
             <a:avLst/>
@@ -36514,8 +36501,8 @@
         </p:nvSpPr>
         <p:spPr>
           <a:xfrm>
-            <a:off x="804672" y="2505456"/>
-            <a:ext cx="3648456" cy="274320"/>
+            <a:off x="804672" y="2487168"/>
+            <a:ext cx="2972714" cy="274320"/>
           </a:xfrm>
           <a:prstGeom prst="rect">
             <a:avLst/>
@@ -36533,7 +36520,7 @@
             <a:r>
               <a:rPr lang="en-US" sz="1150" b="1" dirty="0">
                 <a:solidFill>
-                  <a:srgbClr val="D9532B"/>
+                  <a:srgbClr val="13757A"/>
                 </a:solidFill>
                 <a:latin typeface="맑은 고딕" pitchFamily="34" charset="0"/>
                 <a:ea typeface="맑은 고딕" pitchFamily="34" charset="-122"/>
@@ -36553,8 +36540,8 @@
         </p:nvSpPr>
         <p:spPr>
           <a:xfrm>
-            <a:off x="804672" y="2761488"/>
-            <a:ext cx="3648456" cy="256032"/>
+            <a:off x="804672" y="2712720"/>
+            <a:ext cx="2972714" cy="228600"/>
           </a:xfrm>
           <a:prstGeom prst="rect">
             <a:avLst/>
@@ -36578,7 +36565,7 @@
                 <a:ea typeface="맑은 고딕" pitchFamily="34" charset="-122"/>
                 <a:cs typeface="맑은 고딕" pitchFamily="34" charset="-120"/>
               </a:rPr>
-              <a:t>메모리 주소를 그대로 넘긴다 (복사 0 회)</a:t>
+              <a:t>주소만 넘기고 데이터는 옮기지 않는다</a:t>
             </a:r>
             <a:endParaRPr lang="en-US" sz="950" dirty="0"/>
           </a:p>
@@ -36592,8 +36579,8 @@
         </p:nvSpPr>
         <p:spPr>
           <a:xfrm>
-            <a:off x="804672" y="3200400"/>
-            <a:ext cx="3648456" cy="1005840"/>
+            <a:off x="804672" y="3108960"/>
+            <a:ext cx="2972714" cy="1005840"/>
           </a:xfrm>
           <a:prstGeom prst="rect">
             <a:avLst/>
@@ -36618,13 +36605,13 @@
             <a:r>
               <a:rPr lang="en-US" sz="1050" dirty="0">
                 <a:solidFill>
-                  <a:srgbClr val="2A5155"/>
+                  <a:srgbClr val="3D4451"/>
                 </a:solidFill>
                 <a:latin typeface="맑은 고딕" pitchFamily="34" charset="0"/>
                 <a:ea typeface="맑은 고딕" pitchFamily="34" charset="-122"/>
                 <a:cs typeface="맑은 고딕" pitchFamily="34" charset="-120"/>
               </a:rPr>
-              <a:t>가장 빠르다 — 커널 개입도 복사도 없다</a:t>
+              <a:t>커널도 안 거치고 복사도 없어 가장 빠르다</a:t>
             </a:r>
             <a:endParaRPr lang="en-US" sz="1050" dirty="0"/>
           </a:p>
@@ -36642,13 +36629,13 @@
             <a:r>
               <a:rPr lang="en-US" sz="1050" dirty="0">
                 <a:solidFill>
-                  <a:srgbClr val="2A5155"/>
+                  <a:srgbClr val="3D4451"/>
                 </a:solidFill>
                 <a:latin typeface="맑은 고딕" pitchFamily="34" charset="0"/>
                 <a:ea typeface="맑은 고딕" pitchFamily="34" charset="-122"/>
                 <a:cs typeface="맑은 고딕" pitchFamily="34" charset="-120"/>
               </a:rPr>
-              <a:t>동기화를 빠뜨리면 데이터가 깨지거나 데드락</a:t>
+              <a:t>동기화를 빠뜨리면 데이터가 깨지거나 데드락이 난다</a:t>
             </a:r>
             <a:endParaRPr lang="en-US" sz="1050" dirty="0"/>
           </a:p>
@@ -36666,7 +36653,7 @@
             <a:r>
               <a:rPr lang="en-US" sz="1050" dirty="0">
                 <a:solidFill>
-                  <a:srgbClr val="2A5155"/>
+                  <a:srgbClr val="3D4451"/>
                 </a:solidFill>
                 <a:latin typeface="맑은 고딕" pitchFamily="34" charset="0"/>
                 <a:ea typeface="맑은 고딕" pitchFamily="34" charset="-122"/>
@@ -36680,14 +36667,53 @@
       </p:sp>
       <p:sp>
         <p:nvSpPr>
-          <p:cNvPr id="14" name="Shape 12"/>
+          <p:cNvPr id="14" name="Text 20"/>
+          <p:cNvSpPr txBox="1"/>
+          <p:nvPr/>
+        </p:nvSpPr>
+        <p:spPr>
+          <a:xfrm>
+            <a:off x="804672" y="4160520"/>
+            <a:ext cx="2972714" cy="228600"/>
+          </a:xfrm>
+          <a:prstGeom prst="rect">
+            <a:avLst/>
+          </a:prstGeom>
+          <a:noFill/>
+          <a:ln/>
+        </p:spPr>
+        <p:txBody>
+          <a:bodyPr wrap="square" lIns="0" tIns="0" rIns="0" bIns="0" rtlCol="0" anchor="ctr"/>
+          <a:lstStyle/>
+          <a:p>
+            <a:pPr algn="r" indent="0" marL="0">
+              <a:buNone/>
+            </a:pPr>
+            <a:r>
+              <a:rPr lang="en-US" sz="820" dirty="0">
+                <a:solidFill>
+                  <a:srgbClr val="7A828F"/>
+                </a:solidFill>
+                <a:latin typeface="Consolas" pitchFamily="34" charset="0"/>
+                <a:ea typeface="Consolas" pitchFamily="34" charset="-122"/>
+                <a:cs typeface="Consolas" pitchFamily="34" charset="-120"/>
+              </a:rPr>
+              <a:t>lock / unlock  ·  sem_wait / sem_post</a:t>
+            </a:r>
+            <a:endParaRPr lang="en-US" sz="820" dirty="0"/>
+          </a:p>
+        </p:txBody>
+      </p:sp>
+      <p:sp>
+        <p:nvSpPr>
+          <p:cNvPr id="15" name="Shape 12"/>
           <p:cNvSpPr/>
           <p:nvPr/>
         </p:nvSpPr>
         <p:spPr>
           <a:xfrm>
-            <a:off x="804672" y="4297680"/>
-            <a:ext cx="3648456" cy="384048"/>
+            <a:off x="804672" y="4471416"/>
+            <a:ext cx="2972714" cy="384048"/>
           </a:xfrm>
           <a:prstGeom prst="roundRect">
             <a:avLst>
@@ -36707,14 +36733,14 @@
       </p:sp>
       <p:sp>
         <p:nvSpPr>
-          <p:cNvPr id="15" name="Text 13"/>
-          <p:cNvSpPr txBox="1"/>
-          <p:nvPr/>
-        </p:nvSpPr>
-        <p:spPr>
-          <a:xfrm>
-            <a:off x="804672" y="4297680"/>
-            <a:ext cx="3648456" cy="384048"/>
+          <p:cNvPr id="16" name="Text 13"/>
+          <p:cNvSpPr txBox="1"/>
+          <p:nvPr/>
+        </p:nvSpPr>
+        <p:spPr>
+          <a:xfrm>
+            <a:off x="804672" y="4471416"/>
+            <a:ext cx="2972714" cy="384048"/>
           </a:xfrm>
           <a:prstGeom prst="rect">
             <a:avLst/>
@@ -36738,7 +36764,7 @@
                 <a:ea typeface="맑은 고딕" pitchFamily="34" charset="-122"/>
                 <a:cs typeface="맑은 고딕" pitchFamily="34" charset="-120"/>
               </a:rPr>
-              <a:t>ToDo#1  이 방식으로 구현</a:t>
+              <a:t>ToDo#1     IpcThread.c</a:t>
             </a:r>
             <a:endParaRPr lang="en-US" sz="1100" dirty="0"/>
           </a:p>
@@ -36746,14 +36772,14 @@
       </p:sp>
       <p:sp>
         <p:nvSpPr>
-          <p:cNvPr id="16" name="Shape 14"/>
+          <p:cNvPr id="17" name="Shape 4"/>
           <p:cNvSpPr/>
           <p:nvPr/>
         </p:nvSpPr>
         <p:spPr>
           <a:xfrm>
-            <a:off x="4983480" y="1298448"/>
-            <a:ext cx="6659575" cy="3566160"/>
+            <a:off x="4353458" y="1298448"/>
+            <a:ext cx="3484778" cy="3657600"/>
           </a:xfrm>
           <a:prstGeom prst="roundRect">
             <a:avLst>
@@ -36761,11 +36787,11 @@
             </a:avLst>
           </a:prstGeom>
           <a:solidFill>
-            <a:srgbClr val="F2F4F7"/>
+            <a:srgbClr val="FBF1DE"/>
           </a:solidFill>
           <a:ln w="12700">
             <a:solidFill>
-              <a:srgbClr val="D5DBE4"/>
+              <a:srgbClr val="C8891F"/>
             </a:solidFill>
             <a:prstDash val="solid"/>
           </a:ln>
@@ -36773,14 +36799,14 @@
       </p:sp>
       <p:sp>
         <p:nvSpPr>
-          <p:cNvPr id="17" name="Text 15"/>
-          <p:cNvSpPr txBox="1"/>
-          <p:nvPr/>
-        </p:nvSpPr>
-        <p:spPr>
-          <a:xfrm>
-            <a:off x="5239512" y="1463040"/>
-            <a:ext cx="4572000" cy="365760"/>
+          <p:cNvPr id="18" name="Text 5"/>
+          <p:cNvSpPr txBox="1"/>
+          <p:nvPr/>
+        </p:nvSpPr>
+        <p:spPr>
+          <a:xfrm>
+            <a:off x="4609490" y="1463040"/>
+            <a:ext cx="2972714" cy="365760"/>
           </a:xfrm>
           <a:prstGeom prst="rect">
             <a:avLst/>
@@ -36804,7 +36830,7 @@
                 <a:ea typeface="맑은 고딕" pitchFamily="34" charset="-122"/>
                 <a:cs typeface="맑은 고딕" pitchFamily="34" charset="-120"/>
               </a:rPr>
-              <a:t>프로세스 간 통신 (IPC)</a:t>
+              <a:t>②  같은 PC, 다른 프로세스</a:t>
             </a:r>
             <a:endParaRPr lang="en-US" sz="1700" dirty="0"/>
           </a:p>
@@ -36812,14 +36838,14 @@
       </p:sp>
       <p:sp>
         <p:nvSpPr>
-          <p:cNvPr id="18" name="Text 16"/>
-          <p:cNvSpPr txBox="1"/>
-          <p:nvPr/>
-        </p:nvSpPr>
-        <p:spPr>
-          <a:xfrm>
-            <a:off x="5239512" y="1810512"/>
-            <a:ext cx="5943600" cy="256032"/>
+          <p:cNvPr id="19" name="Text 6"/>
+          <p:cNvSpPr txBox="1"/>
+          <p:nvPr/>
+        </p:nvSpPr>
+        <p:spPr>
+          <a:xfrm>
+            <a:off x="4609490" y="1810512"/>
+            <a:ext cx="2972714" cy="256032"/>
           </a:xfrm>
           <a:prstGeom prst="rect">
             <a:avLst/>
@@ -36843,7 +36869,7 @@
                 <a:ea typeface="맑은 고딕" pitchFamily="34" charset="-122"/>
                 <a:cs typeface="맑은 고딕" pitchFamily="34" charset="-120"/>
               </a:rPr>
-              <a:t>주소공간이 분리 → 반드시 커널이 만든 통로를 거친다</a:t>
+              <a:t>프로세스 ↔ 프로세스  ·  커널 통로를 거친다</a:t>
             </a:r>
             <a:endParaRPr lang="en-US" sz="1050" dirty="0"/>
           </a:p>
@@ -36851,18 +36877,18 @@
       </p:sp>
       <p:sp>
         <p:nvSpPr>
-          <p:cNvPr id="19" name="Shape 17"/>
+          <p:cNvPr id="20" name="Shape 7"/>
           <p:cNvSpPr/>
           <p:nvPr/>
         </p:nvSpPr>
         <p:spPr>
           <a:xfrm>
-            <a:off x="5239512" y="2139696"/>
-            <a:ext cx="6147511" cy="457200"/>
+            <a:off x="4609490" y="2157984"/>
+            <a:ext cx="2972714" cy="804672"/>
           </a:xfrm>
           <a:prstGeom prst="roundRect">
             <a:avLst>
-              <a:gd name="adj" fmla="val 8000"/>
+              <a:gd name="adj" fmla="val 5102"/>
             </a:avLst>
           </a:prstGeom>
           <a:solidFill>
@@ -36870,936 +36896,6 @@
           </a:solidFill>
           <a:ln w="9525">
             <a:solidFill>
-              <a:srgbClr val="D5DBE4"/>
-            </a:solidFill>
-            <a:prstDash val="solid"/>
-          </a:ln>
-        </p:spPr>
-      </p:sp>
-      <p:sp>
-        <p:nvSpPr>
-          <p:cNvPr id="20" name="Text 18"/>
-          <p:cNvSpPr txBox="1"/>
-          <p:nvPr/>
-        </p:nvSpPr>
-        <p:spPr>
-          <a:xfrm>
-            <a:off x="5367528" y="2139696"/>
-            <a:ext cx="1417320" cy="457200"/>
-          </a:xfrm>
-          <a:prstGeom prst="rect">
-            <a:avLst/>
-          </a:prstGeom>
-          <a:noFill/>
-          <a:ln/>
-        </p:spPr>
-        <p:txBody>
-          <a:bodyPr wrap="square" lIns="0" tIns="0" rIns="0" bIns="0" rtlCol="0" anchor="ctr"/>
-          <a:lstStyle/>
-          <a:p>
-            <a:pPr indent="0" marL="0">
-              <a:buNone/>
-            </a:pPr>
-            <a:r>
-              <a:rPr lang="en-US" sz="1100" b="1" dirty="0">
-                <a:solidFill>
-                  <a:srgbClr val="1E232E"/>
-                </a:solidFill>
-                <a:latin typeface="맑은 고딕" pitchFamily="34" charset="0"/>
-                <a:ea typeface="맑은 고딕" pitchFamily="34" charset="-122"/>
-                <a:cs typeface="맑은 고딕" pitchFamily="34" charset="-120"/>
-              </a:rPr>
-              <a:t>파이프 · FIFO</a:t>
-            </a:r>
-            <a:endParaRPr lang="en-US" sz="1100" dirty="0"/>
-          </a:p>
-        </p:txBody>
-      </p:sp>
-      <p:sp>
-        <p:nvSpPr>
-          <p:cNvPr id="21" name="Text 19"/>
-          <p:cNvSpPr txBox="1"/>
-          <p:nvPr/>
-        </p:nvSpPr>
-        <p:spPr>
-          <a:xfrm>
-            <a:off x="6858000" y="2139696"/>
-            <a:ext cx="2834640" cy="457200"/>
-          </a:xfrm>
-          <a:prstGeom prst="rect">
-            <a:avLst/>
-          </a:prstGeom>
-          <a:noFill/>
-          <a:ln/>
-        </p:spPr>
-        <p:txBody>
-          <a:bodyPr wrap="square" lIns="0" tIns="0" rIns="0" bIns="0" rtlCol="0" anchor="ctr"/>
-          <a:lstStyle/>
-          <a:p>
-            <a:pPr indent="0" marL="0">
-              <a:buNone/>
-            </a:pPr>
-            <a:r>
-              <a:rPr lang="en-US" sz="980" dirty="0">
-                <a:solidFill>
-                  <a:srgbClr val="3D4451"/>
-                </a:solidFill>
-                <a:latin typeface="맑은 고딕" pitchFamily="34" charset="0"/>
-                <a:ea typeface="맑은 고딕" pitchFamily="34" charset="-122"/>
-                <a:cs typeface="맑은 고딕" pitchFamily="34" charset="-120"/>
-              </a:rPr>
-              <a:t>단방향 바이트 스트림 (부모–자식 · 이름)</a:t>
-            </a:r>
-            <a:endParaRPr lang="en-US" sz="980" dirty="0"/>
-          </a:p>
-        </p:txBody>
-      </p:sp>
-      <p:sp>
-        <p:nvSpPr>
-          <p:cNvPr id="22" name="Text 20"/>
-          <p:cNvSpPr txBox="1"/>
-          <p:nvPr/>
-        </p:nvSpPr>
-        <p:spPr>
-          <a:xfrm>
-            <a:off x="9784080" y="2139696"/>
-            <a:ext cx="1463040" cy="457200"/>
-          </a:xfrm>
-          <a:prstGeom prst="rect">
-            <a:avLst/>
-          </a:prstGeom>
-          <a:noFill/>
-          <a:ln/>
-        </p:spPr>
-        <p:txBody>
-          <a:bodyPr wrap="square" lIns="0" tIns="0" rIns="0" bIns="0" rtlCol="0" anchor="ctr"/>
-          <a:lstStyle/>
-          <a:p>
-            <a:pPr algn="r" indent="0" marL="0">
-              <a:buNone/>
-            </a:pPr>
-            <a:r>
-              <a:rPr lang="en-US" sz="820" dirty="0">
-                <a:solidFill>
-                  <a:srgbClr val="7A828F"/>
-                </a:solidFill>
-                <a:latin typeface="Consolas" pitchFamily="34" charset="0"/>
-                <a:ea typeface="Consolas" pitchFamily="34" charset="-122"/>
-                <a:cs typeface="Consolas" pitchFamily="34" charset="-120"/>
-              </a:rPr>
-              <a:t>pipe() · mkfifo()</a:t>
-            </a:r>
-            <a:endParaRPr lang="en-US" sz="820" dirty="0"/>
-          </a:p>
-        </p:txBody>
-      </p:sp>
-      <p:sp>
-        <p:nvSpPr>
-          <p:cNvPr id="23" name="Shape 21"/>
-          <p:cNvSpPr/>
-          <p:nvPr/>
-        </p:nvSpPr>
-        <p:spPr>
-          <a:xfrm>
-            <a:off x="5239512" y="2670048"/>
-            <a:ext cx="6147511" cy="457200"/>
-          </a:xfrm>
-          <a:prstGeom prst="roundRect">
-            <a:avLst>
-              <a:gd name="adj" fmla="val 8000"/>
-            </a:avLst>
-          </a:prstGeom>
-          <a:solidFill>
-            <a:srgbClr val="FFFFFF"/>
-          </a:solidFill>
-          <a:ln w="9525">
-            <a:solidFill>
-              <a:srgbClr val="D5DBE4"/>
-            </a:solidFill>
-            <a:prstDash val="solid"/>
-          </a:ln>
-        </p:spPr>
-      </p:sp>
-      <p:sp>
-        <p:nvSpPr>
-          <p:cNvPr id="24" name="Text 22"/>
-          <p:cNvSpPr txBox="1"/>
-          <p:nvPr/>
-        </p:nvSpPr>
-        <p:spPr>
-          <a:xfrm>
-            <a:off x="5367528" y="2670048"/>
-            <a:ext cx="1417320" cy="457200"/>
-          </a:xfrm>
-          <a:prstGeom prst="rect">
-            <a:avLst/>
-          </a:prstGeom>
-          <a:noFill/>
-          <a:ln/>
-        </p:spPr>
-        <p:txBody>
-          <a:bodyPr wrap="square" lIns="0" tIns="0" rIns="0" bIns="0" rtlCol="0" anchor="ctr"/>
-          <a:lstStyle/>
-          <a:p>
-            <a:pPr indent="0" marL="0">
-              <a:buNone/>
-            </a:pPr>
-            <a:r>
-              <a:rPr lang="en-US" sz="1100" b="1" dirty="0">
-                <a:solidFill>
-                  <a:srgbClr val="1E232E"/>
-                </a:solidFill>
-                <a:latin typeface="맑은 고딕" pitchFamily="34" charset="0"/>
-                <a:ea typeface="맑은 고딕" pitchFamily="34" charset="-122"/>
-                <a:cs typeface="맑은 고딕" pitchFamily="34" charset="-120"/>
-              </a:rPr>
-              <a:t>메시지 큐</a:t>
-            </a:r>
-            <a:endParaRPr lang="en-US" sz="1100" dirty="0"/>
-          </a:p>
-        </p:txBody>
-      </p:sp>
-      <p:sp>
-        <p:nvSpPr>
-          <p:cNvPr id="25" name="Text 23"/>
-          <p:cNvSpPr txBox="1"/>
-          <p:nvPr/>
-        </p:nvSpPr>
-        <p:spPr>
-          <a:xfrm>
-            <a:off x="6858000" y="2670048"/>
-            <a:ext cx="2834640" cy="457200"/>
-          </a:xfrm>
-          <a:prstGeom prst="rect">
-            <a:avLst/>
-          </a:prstGeom>
-          <a:noFill/>
-          <a:ln/>
-        </p:spPr>
-        <p:txBody>
-          <a:bodyPr wrap="square" lIns="0" tIns="0" rIns="0" bIns="0" rtlCol="0" anchor="ctr"/>
-          <a:lstStyle/>
-          <a:p>
-            <a:pPr indent="0" marL="0">
-              <a:buNone/>
-            </a:pPr>
-            <a:r>
-              <a:rPr lang="en-US" sz="980" dirty="0">
-                <a:solidFill>
-                  <a:srgbClr val="3D4451"/>
-                </a:solidFill>
-                <a:latin typeface="맑은 고딕" pitchFamily="34" charset="0"/>
-                <a:ea typeface="맑은 고딕" pitchFamily="34" charset="-122"/>
-                <a:cs typeface="맑은 고딕" pitchFamily="34" charset="-120"/>
-              </a:rPr>
-              <a:t>메시지 단위로 넣고 뺀다 · 경계 보존</a:t>
-            </a:r>
-            <a:endParaRPr lang="en-US" sz="980" dirty="0"/>
-          </a:p>
-        </p:txBody>
-      </p:sp>
-      <p:sp>
-        <p:nvSpPr>
-          <p:cNvPr id="26" name="Text 24"/>
-          <p:cNvSpPr txBox="1"/>
-          <p:nvPr/>
-        </p:nvSpPr>
-        <p:spPr>
-          <a:xfrm>
-            <a:off x="9784080" y="2670048"/>
-            <a:ext cx="1463040" cy="457200"/>
-          </a:xfrm>
-          <a:prstGeom prst="rect">
-            <a:avLst/>
-          </a:prstGeom>
-          <a:noFill/>
-          <a:ln/>
-        </p:spPr>
-        <p:txBody>
-          <a:bodyPr wrap="square" lIns="0" tIns="0" rIns="0" bIns="0" rtlCol="0" anchor="ctr"/>
-          <a:lstStyle/>
-          <a:p>
-            <a:pPr algn="r" indent="0" marL="0">
-              <a:buNone/>
-            </a:pPr>
-            <a:r>
-              <a:rPr lang="en-US" sz="820" dirty="0">
-                <a:solidFill>
-                  <a:srgbClr val="7A828F"/>
-                </a:solidFill>
-                <a:latin typeface="Consolas" pitchFamily="34" charset="0"/>
-                <a:ea typeface="Consolas" pitchFamily="34" charset="-122"/>
-                <a:cs typeface="Consolas" pitchFamily="34" charset="-120"/>
-              </a:rPr>
-              <a:t>msgsnd / msgrcv</a:t>
-            </a:r>
-            <a:endParaRPr lang="en-US" sz="820" dirty="0"/>
-          </a:p>
-        </p:txBody>
-      </p:sp>
-      <p:sp>
-        <p:nvSpPr>
-          <p:cNvPr id="27" name="Shape 25"/>
-          <p:cNvSpPr/>
-          <p:nvPr/>
-        </p:nvSpPr>
-        <p:spPr>
-          <a:xfrm>
-            <a:off x="5239512" y="3200400"/>
-            <a:ext cx="6147511" cy="457200"/>
-          </a:xfrm>
-          <a:prstGeom prst="roundRect">
-            <a:avLst>
-              <a:gd name="adj" fmla="val 8000"/>
-            </a:avLst>
-          </a:prstGeom>
-          <a:solidFill>
-            <a:srgbClr val="FFFFFF"/>
-          </a:solidFill>
-          <a:ln w="9525">
-            <a:solidFill>
-              <a:srgbClr val="D5DBE4"/>
-            </a:solidFill>
-            <a:prstDash val="solid"/>
-          </a:ln>
-        </p:spPr>
-      </p:sp>
-      <p:sp>
-        <p:nvSpPr>
-          <p:cNvPr id="28" name="Text 26"/>
-          <p:cNvSpPr txBox="1"/>
-          <p:nvPr/>
-        </p:nvSpPr>
-        <p:spPr>
-          <a:xfrm>
-            <a:off x="5367528" y="3200400"/>
-            <a:ext cx="1417320" cy="457200"/>
-          </a:xfrm>
-          <a:prstGeom prst="rect">
-            <a:avLst/>
-          </a:prstGeom>
-          <a:noFill/>
-          <a:ln/>
-        </p:spPr>
-        <p:txBody>
-          <a:bodyPr wrap="square" lIns="0" tIns="0" rIns="0" bIns="0" rtlCol="0" anchor="ctr"/>
-          <a:lstStyle/>
-          <a:p>
-            <a:pPr indent="0" marL="0">
-              <a:buNone/>
-            </a:pPr>
-            <a:r>
-              <a:rPr lang="en-US" sz="1100" b="1" dirty="0">
-                <a:solidFill>
-                  <a:srgbClr val="1E232E"/>
-                </a:solidFill>
-                <a:latin typeface="맑은 고딕" pitchFamily="34" charset="0"/>
-                <a:ea typeface="맑은 고딕" pitchFamily="34" charset="-122"/>
-                <a:cs typeface="맑은 고딕" pitchFamily="34" charset="-120"/>
-              </a:rPr>
-              <a:t>공유메모리</a:t>
-            </a:r>
-            <a:endParaRPr lang="en-US" sz="1100" dirty="0"/>
-          </a:p>
-        </p:txBody>
-      </p:sp>
-      <p:sp>
-        <p:nvSpPr>
-          <p:cNvPr id="29" name="Text 27"/>
-          <p:cNvSpPr txBox="1"/>
-          <p:nvPr/>
-        </p:nvSpPr>
-        <p:spPr>
-          <a:xfrm>
-            <a:off x="6858000" y="3200400"/>
-            <a:ext cx="2834640" cy="457200"/>
-          </a:xfrm>
-          <a:prstGeom prst="rect">
-            <a:avLst/>
-          </a:prstGeom>
-          <a:noFill/>
-          <a:ln/>
-        </p:spPr>
-        <p:txBody>
-          <a:bodyPr wrap="square" lIns="0" tIns="0" rIns="0" bIns="0" rtlCol="0" anchor="ctr"/>
-          <a:lstStyle/>
-          <a:p>
-            <a:pPr indent="0" marL="0">
-              <a:buNone/>
-            </a:pPr>
-            <a:r>
-              <a:rPr lang="en-US" sz="980" dirty="0">
-                <a:solidFill>
-                  <a:srgbClr val="3D4451"/>
-                </a:solidFill>
-                <a:latin typeface="맑은 고딕" pitchFamily="34" charset="0"/>
-                <a:ea typeface="맑은 고딕" pitchFamily="34" charset="-122"/>
-                <a:cs typeface="맑은 고딕" pitchFamily="34" charset="-120"/>
-              </a:rPr>
-              <a:t>같은 물리 메모리를 양쪽에 매핑 (복사 0회)</a:t>
-            </a:r>
-            <a:endParaRPr lang="en-US" sz="980" dirty="0"/>
-          </a:p>
-        </p:txBody>
-      </p:sp>
-      <p:sp>
-        <p:nvSpPr>
-          <p:cNvPr id="30" name="Text 28"/>
-          <p:cNvSpPr txBox="1"/>
-          <p:nvPr/>
-        </p:nvSpPr>
-        <p:spPr>
-          <a:xfrm>
-            <a:off x="9784080" y="3200400"/>
-            <a:ext cx="1463040" cy="457200"/>
-          </a:xfrm>
-          <a:prstGeom prst="rect">
-            <a:avLst/>
-          </a:prstGeom>
-          <a:noFill/>
-          <a:ln/>
-        </p:spPr>
-        <p:txBody>
-          <a:bodyPr wrap="square" lIns="0" tIns="0" rIns="0" bIns="0" rtlCol="0" anchor="ctr"/>
-          <a:lstStyle/>
-          <a:p>
-            <a:pPr algn="r" indent="0" marL="0">
-              <a:buNone/>
-            </a:pPr>
-            <a:r>
-              <a:rPr lang="en-US" sz="820" dirty="0">
-                <a:solidFill>
-                  <a:srgbClr val="7A828F"/>
-                </a:solidFill>
-                <a:latin typeface="Consolas" pitchFamily="34" charset="0"/>
-                <a:ea typeface="Consolas" pitchFamily="34" charset="-122"/>
-                <a:cs typeface="Consolas" pitchFamily="34" charset="-120"/>
-              </a:rPr>
-              <a:t>shmget · mmap</a:t>
-            </a:r>
-            <a:endParaRPr lang="en-US" sz="820" dirty="0"/>
-          </a:p>
-        </p:txBody>
-      </p:sp>
-      <p:sp>
-        <p:nvSpPr>
-          <p:cNvPr id="31" name="Shape 29"/>
-          <p:cNvSpPr/>
-          <p:nvPr/>
-        </p:nvSpPr>
-        <p:spPr>
-          <a:xfrm>
-            <a:off x="5239512" y="3730752"/>
-            <a:ext cx="6147511" cy="457200"/>
-          </a:xfrm>
-          <a:prstGeom prst="roundRect">
-            <a:avLst>
-              <a:gd name="adj" fmla="val 8000"/>
-            </a:avLst>
-          </a:prstGeom>
-          <a:solidFill>
-            <a:srgbClr val="FFFFFF"/>
-          </a:solidFill>
-          <a:ln w="9525">
-            <a:solidFill>
-              <a:srgbClr val="D5DBE4"/>
-            </a:solidFill>
-            <a:prstDash val="solid"/>
-          </a:ln>
-        </p:spPr>
-      </p:sp>
-      <p:sp>
-        <p:nvSpPr>
-          <p:cNvPr id="32" name="Text 30"/>
-          <p:cNvSpPr txBox="1"/>
-          <p:nvPr/>
-        </p:nvSpPr>
-        <p:spPr>
-          <a:xfrm>
-            <a:off x="5367528" y="3730752"/>
-            <a:ext cx="1417320" cy="457200"/>
-          </a:xfrm>
-          <a:prstGeom prst="rect">
-            <a:avLst/>
-          </a:prstGeom>
-          <a:noFill/>
-          <a:ln/>
-        </p:spPr>
-        <p:txBody>
-          <a:bodyPr wrap="square" lIns="0" tIns="0" rIns="0" bIns="0" rtlCol="0" anchor="ctr"/>
-          <a:lstStyle/>
-          <a:p>
-            <a:pPr indent="0" marL="0">
-              <a:buNone/>
-            </a:pPr>
-            <a:r>
-              <a:rPr lang="en-US" sz="1100" b="1" dirty="0">
-                <a:solidFill>
-                  <a:srgbClr val="1E232E"/>
-                </a:solidFill>
-                <a:latin typeface="맑은 고딕" pitchFamily="34" charset="0"/>
-                <a:ea typeface="맑은 고딕" pitchFamily="34" charset="-122"/>
-                <a:cs typeface="맑은 고딕" pitchFamily="34" charset="-120"/>
-              </a:rPr>
-              <a:t>시그널</a:t>
-            </a:r>
-            <a:endParaRPr lang="en-US" sz="1100" dirty="0"/>
-          </a:p>
-        </p:txBody>
-      </p:sp>
-      <p:sp>
-        <p:nvSpPr>
-          <p:cNvPr id="33" name="Text 31"/>
-          <p:cNvSpPr txBox="1"/>
-          <p:nvPr/>
-        </p:nvSpPr>
-        <p:spPr>
-          <a:xfrm>
-            <a:off x="6858000" y="3730752"/>
-            <a:ext cx="2834640" cy="457200"/>
-          </a:xfrm>
-          <a:prstGeom prst="rect">
-            <a:avLst/>
-          </a:prstGeom>
-          <a:noFill/>
-          <a:ln/>
-        </p:spPr>
-        <p:txBody>
-          <a:bodyPr wrap="square" lIns="0" tIns="0" rIns="0" bIns="0" rtlCol="0" anchor="ctr"/>
-          <a:lstStyle/>
-          <a:p>
-            <a:pPr indent="0" marL="0">
-              <a:buNone/>
-            </a:pPr>
-            <a:r>
-              <a:rPr lang="en-US" sz="980" dirty="0">
-                <a:solidFill>
-                  <a:srgbClr val="3D4451"/>
-                </a:solidFill>
-                <a:latin typeface="맑은 고딕" pitchFamily="34" charset="0"/>
-                <a:ea typeface="맑은 고딕" pitchFamily="34" charset="-122"/>
-                <a:cs typeface="맑은 고딕" pitchFamily="34" charset="-120"/>
-              </a:rPr>
-              <a:t>데이터 없이 이벤트 발생만 알린다</a:t>
-            </a:r>
-            <a:endParaRPr lang="en-US" sz="980" dirty="0"/>
-          </a:p>
-        </p:txBody>
-      </p:sp>
-      <p:sp>
-        <p:nvSpPr>
-          <p:cNvPr id="34" name="Text 32"/>
-          <p:cNvSpPr txBox="1"/>
-          <p:nvPr/>
-        </p:nvSpPr>
-        <p:spPr>
-          <a:xfrm>
-            <a:off x="9784080" y="3730752"/>
-            <a:ext cx="1463040" cy="457200"/>
-          </a:xfrm>
-          <a:prstGeom prst="rect">
-            <a:avLst/>
-          </a:prstGeom>
-          <a:noFill/>
-          <a:ln/>
-        </p:spPr>
-        <p:txBody>
-          <a:bodyPr wrap="square" lIns="0" tIns="0" rIns="0" bIns="0" rtlCol="0" anchor="ctr"/>
-          <a:lstStyle/>
-          <a:p>
-            <a:pPr algn="r" indent="0" marL="0">
-              <a:buNone/>
-            </a:pPr>
-            <a:r>
-              <a:rPr lang="en-US" sz="820" dirty="0">
-                <a:solidFill>
-                  <a:srgbClr val="7A828F"/>
-                </a:solidFill>
-                <a:latin typeface="Consolas" pitchFamily="34" charset="0"/>
-                <a:ea typeface="Consolas" pitchFamily="34" charset="-122"/>
-                <a:cs typeface="Consolas" pitchFamily="34" charset="-120"/>
-              </a:rPr>
-              <a:t>kill() · signal()</a:t>
-            </a:r>
-            <a:endParaRPr lang="en-US" sz="820" dirty="0"/>
-          </a:p>
-        </p:txBody>
-      </p:sp>
-      <p:sp>
-        <p:nvSpPr>
-          <p:cNvPr id="35" name="Shape 33"/>
-          <p:cNvSpPr/>
-          <p:nvPr/>
-        </p:nvSpPr>
-        <p:spPr>
-          <a:xfrm>
-            <a:off x="5239512" y="4261104"/>
-            <a:ext cx="6147511" cy="457200"/>
-          </a:xfrm>
-          <a:prstGeom prst="roundRect">
-            <a:avLst>
-              <a:gd name="adj" fmla="val 8000"/>
-            </a:avLst>
-          </a:prstGeom>
-          <a:solidFill>
-            <a:srgbClr val="FFFFFF"/>
-          </a:solidFill>
-          <a:ln w="9525">
-            <a:solidFill>
-              <a:srgbClr val="D5DBE4"/>
-            </a:solidFill>
-            <a:prstDash val="solid"/>
-          </a:ln>
-        </p:spPr>
-      </p:sp>
-      <p:sp>
-        <p:nvSpPr>
-          <p:cNvPr id="36" name="Text 34"/>
-          <p:cNvSpPr txBox="1"/>
-          <p:nvPr/>
-        </p:nvSpPr>
-        <p:spPr>
-          <a:xfrm>
-            <a:off x="5367528" y="4261104"/>
-            <a:ext cx="1417320" cy="457200"/>
-          </a:xfrm>
-          <a:prstGeom prst="rect">
-            <a:avLst/>
-          </a:prstGeom>
-          <a:noFill/>
-          <a:ln/>
-        </p:spPr>
-        <p:txBody>
-          <a:bodyPr wrap="square" lIns="0" tIns="0" rIns="0" bIns="0" rtlCol="0" anchor="ctr"/>
-          <a:lstStyle/>
-          <a:p>
-            <a:pPr indent="0" marL="0">
-              <a:buNone/>
-            </a:pPr>
-            <a:r>
-              <a:rPr lang="en-US" sz="1100" b="1" dirty="0">
-                <a:solidFill>
-                  <a:srgbClr val="1E232E"/>
-                </a:solidFill>
-                <a:latin typeface="맑은 고딕" pitchFamily="34" charset="0"/>
-                <a:ea typeface="맑은 고딕" pitchFamily="34" charset="-122"/>
-                <a:cs typeface="맑은 고딕" pitchFamily="34" charset="-120"/>
-              </a:rPr>
-              <a:t>소켓</a:t>
-            </a:r>
-            <a:endParaRPr lang="en-US" sz="1100" dirty="0"/>
-          </a:p>
-        </p:txBody>
-      </p:sp>
-      <p:sp>
-        <p:nvSpPr>
-          <p:cNvPr id="37" name="Text 35"/>
-          <p:cNvSpPr txBox="1"/>
-          <p:nvPr/>
-        </p:nvSpPr>
-        <p:spPr>
-          <a:xfrm>
-            <a:off x="6858000" y="4261104"/>
-            <a:ext cx="2834640" cy="457200"/>
-          </a:xfrm>
-          <a:prstGeom prst="rect">
-            <a:avLst/>
-          </a:prstGeom>
-          <a:noFill/>
-          <a:ln/>
-        </p:spPr>
-        <p:txBody>
-          <a:bodyPr wrap="square" lIns="0" tIns="0" rIns="0" bIns="0" rtlCol="0" anchor="ctr"/>
-          <a:lstStyle/>
-          <a:p>
-            <a:pPr indent="0" marL="0">
-              <a:buNone/>
-            </a:pPr>
-            <a:r>
-              <a:rPr lang="en-US" sz="980" dirty="0">
-                <a:solidFill>
-                  <a:srgbClr val="3D4451"/>
-                </a:solidFill>
-                <a:latin typeface="맑은 고딕" pitchFamily="34" charset="0"/>
-                <a:ea typeface="맑은 고딕" pitchFamily="34" charset="-122"/>
-                <a:cs typeface="맑은 고딕" pitchFamily="34" charset="-120"/>
-              </a:rPr>
-              <a:t>유일하게 다른 장비까지 확장된다</a:t>
-            </a:r>
-            <a:endParaRPr lang="en-US" sz="980" dirty="0"/>
-          </a:p>
-        </p:txBody>
-      </p:sp>
-      <p:sp>
-        <p:nvSpPr>
-          <p:cNvPr id="38" name="Text 36"/>
-          <p:cNvSpPr txBox="1"/>
-          <p:nvPr/>
-        </p:nvSpPr>
-        <p:spPr>
-          <a:xfrm>
-            <a:off x="9784080" y="4261104"/>
-            <a:ext cx="1463040" cy="457200"/>
-          </a:xfrm>
-          <a:prstGeom prst="rect">
-            <a:avLst/>
-          </a:prstGeom>
-          <a:noFill/>
-          <a:ln/>
-        </p:spPr>
-        <p:txBody>
-          <a:bodyPr wrap="square" lIns="0" tIns="0" rIns="0" bIns="0" rtlCol="0" anchor="ctr"/>
-          <a:lstStyle/>
-          <a:p>
-            <a:pPr algn="r" indent="0" marL="0">
-              <a:buNone/>
-            </a:pPr>
-            <a:r>
-              <a:rPr lang="en-US" sz="820" dirty="0">
-                <a:solidFill>
-                  <a:srgbClr val="7A828F"/>
-                </a:solidFill>
-                <a:latin typeface="Consolas" pitchFamily="34" charset="0"/>
-                <a:ea typeface="Consolas" pitchFamily="34" charset="-122"/>
-                <a:cs typeface="Consolas" pitchFamily="34" charset="-120"/>
-              </a:rPr>
-              <a:t>socket / connect</a:t>
-            </a:r>
-            <a:endParaRPr lang="en-US" sz="820" dirty="0"/>
-          </a:p>
-        </p:txBody>
-      </p:sp>
-      <p:sp>
-        <p:nvSpPr>
-          <p:cNvPr id="39" name="Text 37"/>
-          <p:cNvSpPr txBox="1"/>
-          <p:nvPr/>
-        </p:nvSpPr>
-        <p:spPr>
-          <a:xfrm>
-            <a:off x="548640" y="5047488"/>
-            <a:ext cx="1828800" cy="274320"/>
-          </a:xfrm>
-          <a:prstGeom prst="rect">
-            <a:avLst/>
-          </a:prstGeom>
-          <a:noFill/>
-          <a:ln/>
-        </p:spPr>
-        <p:txBody>
-          <a:bodyPr wrap="square" lIns="0" tIns="0" rIns="0" bIns="0" rtlCol="0" anchor="ctr"/>
-          <a:lstStyle/>
-          <a:p>
-            <a:pPr indent="0" marL="0">
-              <a:buNone/>
-            </a:pPr>
-            <a:r>
-              <a:rPr lang="en-US" sz="1250" b="1" dirty="0">
-                <a:solidFill>
-                  <a:srgbClr val="1E232E"/>
-                </a:solidFill>
-                <a:latin typeface="맑은 고딕" pitchFamily="34" charset="0"/>
-                <a:ea typeface="맑은 고딕" pitchFamily="34" charset="-122"/>
-                <a:cs typeface="맑은 고딕" pitchFamily="34" charset="-120"/>
-              </a:rPr>
-              <a:t>선택 기준</a:t>
-            </a:r>
-            <a:endParaRPr lang="en-US" sz="1250" dirty="0"/>
-          </a:p>
-        </p:txBody>
-      </p:sp>
-      <p:sp>
-        <p:nvSpPr>
-          <p:cNvPr id="40" name="Shape 38"/>
-          <p:cNvSpPr/>
-          <p:nvPr/>
-        </p:nvSpPr>
-        <p:spPr>
-          <a:xfrm>
-            <a:off x="548640" y="5376672"/>
-            <a:ext cx="3575304" cy="932688"/>
-          </a:xfrm>
-          <a:prstGeom prst="roundRect">
-            <a:avLst>
-              <a:gd name="adj" fmla="val 5882"/>
-            </a:avLst>
-          </a:prstGeom>
-          <a:solidFill>
-            <a:srgbClr val="FFFFFF"/>
-          </a:solidFill>
-          <a:ln w="15875">
-            <a:solidFill>
-              <a:srgbClr val="13757A"/>
-            </a:solidFill>
-            <a:prstDash val="solid"/>
-          </a:ln>
-        </p:spPr>
-      </p:sp>
-      <p:sp>
-        <p:nvSpPr>
-          <p:cNvPr id="41" name="Text 39"/>
-          <p:cNvSpPr txBox="1"/>
-          <p:nvPr/>
-        </p:nvSpPr>
-        <p:spPr>
-          <a:xfrm>
-            <a:off x="731520" y="5449824"/>
-            <a:ext cx="3209544" cy="274320"/>
-          </a:xfrm>
-          <a:prstGeom prst="rect">
-            <a:avLst/>
-          </a:prstGeom>
-          <a:noFill/>
-          <a:ln/>
-        </p:spPr>
-        <p:txBody>
-          <a:bodyPr wrap="square" lIns="0" tIns="0" rIns="0" bIns="0" rtlCol="0" anchor="ctr"/>
-          <a:lstStyle/>
-          <a:p>
-            <a:pPr indent="0" marL="0">
-              <a:buNone/>
-            </a:pPr>
-            <a:r>
-              <a:rPr lang="en-US" sz="1050" dirty="0">
-                <a:solidFill>
-                  <a:srgbClr val="7A828F"/>
-                </a:solidFill>
-                <a:latin typeface="맑은 고딕" pitchFamily="34" charset="0"/>
-                <a:ea typeface="맑은 고딕" pitchFamily="34" charset="-122"/>
-                <a:cs typeface="맑은 고딕" pitchFamily="34" charset="-120"/>
-              </a:rPr>
-              <a:t>같은 프로세스 안인가?</a:t>
-            </a:r>
-            <a:endParaRPr lang="en-US" sz="1050" dirty="0"/>
-          </a:p>
-        </p:txBody>
-      </p:sp>
-      <p:sp>
-        <p:nvSpPr>
-          <p:cNvPr id="42" name="Text 40"/>
-          <p:cNvSpPr txBox="1"/>
-          <p:nvPr/>
-        </p:nvSpPr>
-        <p:spPr>
-          <a:xfrm>
-            <a:off x="731520" y="5724144"/>
-            <a:ext cx="2523744" cy="310896"/>
-          </a:xfrm>
-          <a:prstGeom prst="rect">
-            <a:avLst/>
-          </a:prstGeom>
-          <a:noFill/>
-          <a:ln/>
-        </p:spPr>
-        <p:txBody>
-          <a:bodyPr wrap="square" lIns="0" tIns="0" rIns="0" bIns="0" rtlCol="0" anchor="ctr"/>
-          <a:lstStyle/>
-          <a:p>
-            <a:pPr indent="0" marL="0">
-              <a:buNone/>
-            </a:pPr>
-            <a:r>
-              <a:rPr lang="en-US" sz="1200" b="1" dirty="0">
-                <a:solidFill>
-                  <a:srgbClr val="1E232E"/>
-                </a:solidFill>
-                <a:latin typeface="맑은 고딕" pitchFamily="34" charset="0"/>
-                <a:ea typeface="맑은 고딕" pitchFamily="34" charset="-122"/>
-                <a:cs typeface="맑은 고딕" pitchFamily="34" charset="-120"/>
-              </a:rPr>
-              <a:t>전역변수 + 뮤텍스 / 세마포어</a:t>
-            </a:r>
-            <a:endParaRPr lang="en-US" sz="1200" dirty="0"/>
-          </a:p>
-        </p:txBody>
-      </p:sp>
-      <p:sp>
-        <p:nvSpPr>
-          <p:cNvPr id="43" name="Shape 41"/>
-          <p:cNvSpPr/>
-          <p:nvPr/>
-        </p:nvSpPr>
-        <p:spPr>
-          <a:xfrm>
-            <a:off x="3209544" y="5943600"/>
-            <a:ext cx="768096" cy="256032"/>
-          </a:xfrm>
-          <a:prstGeom prst="roundRect">
-            <a:avLst>
-              <a:gd name="adj" fmla="val 50000"/>
-            </a:avLst>
-          </a:prstGeom>
-          <a:solidFill>
-            <a:srgbClr val="13757A"/>
-          </a:solidFill>
-          <a:ln w="12700">
-            <a:solidFill>
-              <a:srgbClr val="13757A"/>
-            </a:solidFill>
-            <a:prstDash val="solid"/>
-          </a:ln>
-        </p:spPr>
-      </p:sp>
-      <p:sp>
-        <p:nvSpPr>
-          <p:cNvPr id="44" name="Text 42"/>
-          <p:cNvSpPr txBox="1"/>
-          <p:nvPr/>
-        </p:nvSpPr>
-        <p:spPr>
-          <a:xfrm>
-            <a:off x="3209544" y="5943600"/>
-            <a:ext cx="768096" cy="256032"/>
-          </a:xfrm>
-          <a:prstGeom prst="rect">
-            <a:avLst/>
-          </a:prstGeom>
-          <a:noFill/>
-          <a:ln/>
-        </p:spPr>
-        <p:txBody>
-          <a:bodyPr wrap="square" lIns="0" tIns="0" rIns="0" bIns="0" rtlCol="0" anchor="ctr"/>
-          <a:lstStyle/>
-          <a:p>
-            <a:pPr algn="ctr" indent="0" marL="0">
-              <a:buNone/>
-            </a:pPr>
-            <a:r>
-              <a:rPr lang="en-US" sz="950" b="1" dirty="0">
-                <a:solidFill>
-                  <a:srgbClr val="FFFFFF"/>
-                </a:solidFill>
-                <a:latin typeface="맑은 고딕" pitchFamily="34" charset="0"/>
-                <a:ea typeface="맑은 고딕" pitchFamily="34" charset="-122"/>
-                <a:cs typeface="맑은 고딕" pitchFamily="34" charset="-120"/>
-              </a:rPr>
-              <a:t>ToDo#1</a:t>
-            </a:r>
-            <a:endParaRPr lang="en-US" sz="950" dirty="0"/>
-          </a:p>
-        </p:txBody>
-      </p:sp>
-      <p:sp>
-        <p:nvSpPr>
-          <p:cNvPr id="45" name="Shape 43"/>
-          <p:cNvSpPr/>
-          <p:nvPr/>
-        </p:nvSpPr>
-        <p:spPr>
-          <a:xfrm>
-            <a:off x="4306824" y="5376672"/>
-            <a:ext cx="3575304" cy="932688"/>
-          </a:xfrm>
-          <a:prstGeom prst="roundRect">
-            <a:avLst>
-              <a:gd name="adj" fmla="val 5882"/>
-            </a:avLst>
-          </a:prstGeom>
-          <a:solidFill>
-            <a:srgbClr val="FFFFFF"/>
-          </a:solidFill>
-          <a:ln w="15875">
-            <a:solidFill>
               <a:srgbClr val="C8891F"/>
             </a:solidFill>
             <a:prstDash val="solid"/>
@@ -37808,14 +36904,14 @@
       </p:sp>
       <p:sp>
         <p:nvSpPr>
-          <p:cNvPr id="46" name="Text 44"/>
-          <p:cNvSpPr txBox="1"/>
-          <p:nvPr/>
-        </p:nvSpPr>
-        <p:spPr>
-          <a:xfrm>
-            <a:off x="4489704" y="5449824"/>
-            <a:ext cx="3209544" cy="274320"/>
+          <p:cNvPr id="21" name="Text 8"/>
+          <p:cNvSpPr txBox="1"/>
+          <p:nvPr/>
+        </p:nvSpPr>
+        <p:spPr>
+          <a:xfrm>
+            <a:off x="4609490" y="2222880"/>
+            <a:ext cx="2972714" cy="274320"/>
           </a:xfrm>
           <a:prstGeom prst="rect">
             <a:avLst/>
@@ -37827,34 +36923,34 @@
           <a:bodyPr wrap="square" lIns="0" tIns="0" rIns="0" bIns="0" rtlCol="0" anchor="ctr"/>
           <a:lstStyle/>
           <a:p>
-            <a:pPr indent="0" marL="0">
-              <a:buNone/>
-            </a:pPr>
-            <a:r>
-              <a:rPr lang="en-US" sz="1050" dirty="0">
-                <a:solidFill>
-                  <a:srgbClr val="7A828F"/>
+            <a:pPr algn="ctr" indent="0" marL="0">
+              <a:buNone/>
+            </a:pPr>
+            <a:r>
+              <a:rPr lang="en-US" sz="1250" b="1" dirty="0">
+                <a:solidFill>
+                  <a:srgbClr val="1E232E"/>
                 </a:solidFill>
                 <a:latin typeface="맑은 고딕" pitchFamily="34" charset="0"/>
                 <a:ea typeface="맑은 고딕" pitchFamily="34" charset="-122"/>
                 <a:cs typeface="맑은 고딕" pitchFamily="34" charset="-120"/>
               </a:rPr>
-              <a:t>같은 PC 의 다른 프로세스인가?</a:t>
-            </a:r>
-            <a:endParaRPr lang="en-US" sz="1050" dirty="0"/>
-          </a:p>
-        </p:txBody>
-      </p:sp>
-      <p:sp>
-        <p:nvSpPr>
-          <p:cNvPr id="47" name="Text 45"/>
-          <p:cNvSpPr txBox="1"/>
-          <p:nvPr/>
-        </p:nvSpPr>
-        <p:spPr>
-          <a:xfrm>
-            <a:off x="4489704" y="5724144"/>
-            <a:ext cx="2523744" cy="310896"/>
+              <a:t>메시지 큐 · 공유메모리</a:t>
+            </a:r>
+            <a:endParaRPr lang="en-US" sz="1250" dirty="0"/>
+          </a:p>
+        </p:txBody>
+      </p:sp>
+      <p:sp>
+        <p:nvSpPr>
+          <p:cNvPr id="22" name="Text 9"/>
+          <p:cNvSpPr txBox="1"/>
+          <p:nvPr/>
+        </p:nvSpPr>
+        <p:spPr>
+          <a:xfrm>
+            <a:off x="4609490" y="2487168"/>
+            <a:ext cx="2972714" cy="274320"/>
           </a:xfrm>
           <a:prstGeom prst="rect">
             <a:avLst/>
@@ -37866,38 +36962,210 @@
           <a:bodyPr wrap="square" lIns="0" tIns="0" rIns="0" bIns="0" rtlCol="0" anchor="ctr"/>
           <a:lstStyle/>
           <a:p>
-            <a:pPr indent="0" marL="0">
-              <a:buNone/>
-            </a:pPr>
-            <a:r>
-              <a:rPr lang="en-US" sz="1200" b="1" dirty="0">
-                <a:solidFill>
-                  <a:srgbClr val="1E232E"/>
+            <a:pPr algn="ctr" indent="0" marL="0">
+              <a:buNone/>
+            </a:pPr>
+            <a:r>
+              <a:rPr lang="en-US" sz="1150" b="1" dirty="0">
+                <a:solidFill>
+                  <a:srgbClr val="C8891F"/>
                 </a:solidFill>
                 <a:latin typeface="맑은 고딕" pitchFamily="34" charset="0"/>
                 <a:ea typeface="맑은 고딕" pitchFamily="34" charset="-122"/>
                 <a:cs typeface="맑은 고딕" pitchFamily="34" charset="-120"/>
               </a:rPr>
-              <a:t>메시지 큐 · 공유메모리</a:t>
-            </a:r>
-            <a:endParaRPr lang="en-US" sz="1200" dirty="0"/>
-          </a:p>
-        </p:txBody>
-      </p:sp>
-      <p:sp>
-        <p:nvSpPr>
-          <p:cNvPr id="48" name="Shape 46"/>
+              <a:t>+  뮤텍스 · 세마포어 (직접 구현)</a:t>
+            </a:r>
+            <a:endParaRPr lang="en-US" sz="1150" dirty="0"/>
+          </a:p>
+        </p:txBody>
+      </p:sp>
+      <p:sp>
+        <p:nvSpPr>
+          <p:cNvPr id="23" name="Text 10"/>
+          <p:cNvSpPr txBox="1"/>
+          <p:nvPr/>
+        </p:nvSpPr>
+        <p:spPr>
+          <a:xfrm>
+            <a:off x="4609490" y="2712720"/>
+            <a:ext cx="2972714" cy="228600"/>
+          </a:xfrm>
+          <a:prstGeom prst="rect">
+            <a:avLst/>
+          </a:prstGeom>
+          <a:noFill/>
+          <a:ln/>
+        </p:spPr>
+        <p:txBody>
+          <a:bodyPr wrap="square" lIns="0" tIns="0" rIns="0" bIns="0" rtlCol="0" anchor="ctr"/>
+          <a:lstStyle/>
+          <a:p>
+            <a:pPr algn="ctr" indent="0" marL="0">
+              <a:buNone/>
+            </a:pPr>
+            <a:r>
+              <a:rPr lang="en-US" sz="950" dirty="0">
+                <a:solidFill>
+                  <a:srgbClr val="7A828F"/>
+                </a:solidFill>
+                <a:latin typeface="맑은 고딕" pitchFamily="34" charset="0"/>
+                <a:ea typeface="맑은 고딕" pitchFamily="34" charset="-122"/>
+                <a:cs typeface="맑은 고딕" pitchFamily="34" charset="-120"/>
+              </a:rPr>
+              <a:t>참고 : 파이프 · FIFO · 시그널</a:t>
+            </a:r>
+            <a:endParaRPr lang="en-US" sz="950" dirty="0"/>
+          </a:p>
+        </p:txBody>
+      </p:sp>
+      <p:sp>
+        <p:nvSpPr>
+          <p:cNvPr id="24" name="Text 11"/>
+          <p:cNvSpPr txBox="1"/>
+          <p:nvPr/>
+        </p:nvSpPr>
+        <p:spPr>
+          <a:xfrm>
+            <a:off x="4609490" y="3108960"/>
+            <a:ext cx="2972714" cy="1005840"/>
+          </a:xfrm>
+          <a:prstGeom prst="rect">
+            <a:avLst/>
+          </a:prstGeom>
+          <a:noFill/>
+          <a:ln/>
+        </p:spPr>
+        <p:txBody>
+          <a:bodyPr wrap="square" lIns="0" tIns="0" rIns="0" bIns="0" rtlCol="0" anchor="t"/>
+          <a:lstStyle/>
+          <a:p>
+            <a:pPr marL="342900" indent="-342900">
+              <a:lnSpc>
+                <a:spcPts val="1470"/>
+              </a:lnSpc>
+              <a:spcAft>
+                <a:spcPts val="400"/>
+              </a:spcAft>
+              <a:buSzPct val="100000"/>
+              <a:buChar char="•"/>
+            </a:pPr>
+            <a:r>
+              <a:rPr lang="en-US" sz="1050" dirty="0">
+                <a:solidFill>
+                  <a:srgbClr val="3D4451"/>
+                </a:solidFill>
+                <a:latin typeface="맑은 고딕" pitchFamily="34" charset="0"/>
+                <a:ea typeface="맑은 고딕" pitchFamily="34" charset="-122"/>
+                <a:cs typeface="맑은 고딕" pitchFamily="34" charset="-120"/>
+              </a:rPr>
+              <a:t>커널이 메시지 경계와 순서를 지켜 준다</a:t>
+            </a:r>
+            <a:endParaRPr lang="en-US" sz="1050" dirty="0"/>
+          </a:p>
+          <a:p>
+            <a:pPr marL="342900" indent="-342900">
+              <a:lnSpc>
+                <a:spcPts val="1470"/>
+              </a:lnSpc>
+              <a:spcAft>
+                <a:spcPts val="400"/>
+              </a:spcAft>
+              <a:buSzPct val="100000"/>
+              <a:buChar char="•"/>
+            </a:pPr>
+            <a:r>
+              <a:rPr lang="en-US" sz="1050" dirty="0">
+                <a:solidFill>
+                  <a:srgbClr val="3D4451"/>
+                </a:solidFill>
+                <a:latin typeface="맑은 고딕" pitchFamily="34" charset="0"/>
+                <a:ea typeface="맑은 고딕" pitchFamily="34" charset="-122"/>
+                <a:cs typeface="맑은 고딕" pitchFamily="34" charset="-120"/>
+              </a:rPr>
+              <a:t>공유메모리는 복사가 없고, 메시지 큐는 두 번 복사한다</a:t>
+            </a:r>
+            <a:endParaRPr lang="en-US" sz="1050" dirty="0"/>
+          </a:p>
+          <a:p>
+            <a:pPr marL="342900" indent="-342900">
+              <a:lnSpc>
+                <a:spcPts val="1470"/>
+              </a:lnSpc>
+              <a:spcAft>
+                <a:spcPts val="400"/>
+              </a:spcAft>
+              <a:buSzPct val="100000"/>
+              <a:buChar char="•"/>
+            </a:pPr>
+            <a:r>
+              <a:rPr lang="en-US" sz="1050" dirty="0">
+                <a:solidFill>
+                  <a:srgbClr val="3D4451"/>
+                </a:solidFill>
+                <a:latin typeface="맑은 고딕" pitchFamily="34" charset="0"/>
+                <a:ea typeface="맑은 고딕" pitchFamily="34" charset="-122"/>
+                <a:cs typeface="맑은 고딕" pitchFamily="34" charset="-120"/>
+              </a:rPr>
+              <a:t>이름만 같으면 기동 순서는 상관없다</a:t>
+            </a:r>
+            <a:endParaRPr lang="en-US" sz="1050" dirty="0"/>
+          </a:p>
+        </p:txBody>
+      </p:sp>
+      <p:sp>
+        <p:nvSpPr>
+          <p:cNvPr id="25" name="Text 20"/>
+          <p:cNvSpPr txBox="1"/>
+          <p:nvPr/>
+        </p:nvSpPr>
+        <p:spPr>
+          <a:xfrm>
+            <a:off x="4609490" y="4160520"/>
+            <a:ext cx="2972714" cy="228600"/>
+          </a:xfrm>
+          <a:prstGeom prst="rect">
+            <a:avLst/>
+          </a:prstGeom>
+          <a:noFill/>
+          <a:ln/>
+        </p:spPr>
+        <p:txBody>
+          <a:bodyPr wrap="square" lIns="0" tIns="0" rIns="0" bIns="0" rtlCol="0" anchor="ctr"/>
+          <a:lstStyle/>
+          <a:p>
+            <a:pPr algn="r" indent="0" marL="0">
+              <a:buNone/>
+            </a:pPr>
+            <a:r>
+              <a:rPr lang="en-US" sz="820" dirty="0">
+                <a:solidFill>
+                  <a:srgbClr val="7A828F"/>
+                </a:solidFill>
+                <a:latin typeface="Consolas" pitchFamily="34" charset="0"/>
+                <a:ea typeface="Consolas" pitchFamily="34" charset="-122"/>
+                <a:cs typeface="Consolas" pitchFamily="34" charset="-120"/>
+              </a:rPr>
+              <a:t>msgsnd / msgrcv  ·  shmget · mmap</a:t>
+            </a:r>
+            <a:endParaRPr lang="en-US" sz="820" dirty="0"/>
+          </a:p>
+        </p:txBody>
+      </p:sp>
+      <p:sp>
+        <p:nvSpPr>
+          <p:cNvPr id="26" name="Shape 12"/>
           <p:cNvSpPr/>
           <p:nvPr/>
         </p:nvSpPr>
         <p:spPr>
           <a:xfrm>
-            <a:off x="6967728" y="5943600"/>
-            <a:ext cx="768096" cy="256032"/>
+            <a:off x="4609490" y="4471416"/>
+            <a:ext cx="2972714" cy="384048"/>
           </a:xfrm>
           <a:prstGeom prst="roundRect">
             <a:avLst>
-              <a:gd name="adj" fmla="val 50000"/>
+              <a:gd name="adj" fmla="val 11905"/>
             </a:avLst>
           </a:prstGeom>
           <a:solidFill>
@@ -37913,14 +37181,14 @@
       </p:sp>
       <p:sp>
         <p:nvSpPr>
-          <p:cNvPr id="49" name="Text 47"/>
-          <p:cNvSpPr txBox="1"/>
-          <p:nvPr/>
-        </p:nvSpPr>
-        <p:spPr>
-          <a:xfrm>
-            <a:off x="6967728" y="5943600"/>
-            <a:ext cx="768096" cy="256032"/>
+          <p:cNvPr id="27" name="Text 13"/>
+          <p:cNvSpPr txBox="1"/>
+          <p:nvPr/>
+        </p:nvSpPr>
+        <p:spPr>
+          <a:xfrm>
+            <a:off x="4609490" y="4471416"/>
+            <a:ext cx="2972714" cy="384048"/>
           </a:xfrm>
           <a:prstGeom prst="rect">
             <a:avLst/>
@@ -37936,7 +37204,7 @@
               <a:buNone/>
             </a:pPr>
             <a:r>
-              <a:rPr lang="en-US" sz="950" b="1" dirty="0">
+              <a:rPr lang="en-US" sz="1100" b="1" dirty="0">
                 <a:solidFill>
                   <a:srgbClr val="FFFFFF"/>
                 </a:solidFill>
@@ -37944,32 +37212,32 @@
                 <a:ea typeface="맑은 고딕" pitchFamily="34" charset="-122"/>
                 <a:cs typeface="맑은 고딕" pitchFamily="34" charset="-120"/>
               </a:rPr>
-              <a:t>ToDo#2</a:t>
-            </a:r>
-            <a:endParaRPr lang="en-US" sz="950" dirty="0"/>
-          </a:p>
-        </p:txBody>
-      </p:sp>
-      <p:sp>
-        <p:nvSpPr>
-          <p:cNvPr id="50" name="Shape 48"/>
+              <a:t>ToDo#2     IpcMsgQ.c</a:t>
+            </a:r>
+            <a:endParaRPr lang="en-US" sz="1100" dirty="0"/>
+          </a:p>
+        </p:txBody>
+      </p:sp>
+      <p:sp>
+        <p:nvSpPr>
+          <p:cNvPr id="28" name="Shape 4"/>
           <p:cNvSpPr/>
           <p:nvPr/>
         </p:nvSpPr>
         <p:spPr>
           <a:xfrm>
-            <a:off x="8065008" y="5376672"/>
-            <a:ext cx="3575304" cy="932688"/>
+            <a:off x="8158276" y="1298448"/>
+            <a:ext cx="3484779" cy="3657600"/>
           </a:xfrm>
           <a:prstGeom prst="roundRect">
             <a:avLst>
-              <a:gd name="adj" fmla="val 5882"/>
+              <a:gd name="adj" fmla="val 1538"/>
             </a:avLst>
           </a:prstGeom>
           <a:solidFill>
-            <a:srgbClr val="FFFFFF"/>
+            <a:srgbClr val="FBEDE8"/>
           </a:solidFill>
-          <a:ln w="15875">
+          <a:ln w="12700">
             <a:solidFill>
               <a:srgbClr val="D9532B"/>
             </a:solidFill>
@@ -37979,14 +37247,14 @@
       </p:sp>
       <p:sp>
         <p:nvSpPr>
-          <p:cNvPr id="51" name="Text 49"/>
-          <p:cNvSpPr txBox="1"/>
-          <p:nvPr/>
-        </p:nvSpPr>
-        <p:spPr>
-          <a:xfrm>
-            <a:off x="8247888" y="5449824"/>
-            <a:ext cx="3209544" cy="274320"/>
+          <p:cNvPr id="29" name="Text 5"/>
+          <p:cNvSpPr txBox="1"/>
+          <p:nvPr/>
+        </p:nvSpPr>
+        <p:spPr>
+          <a:xfrm>
+            <a:off x="8414308" y="1463040"/>
+            <a:ext cx="2972715" cy="365760"/>
           </a:xfrm>
           <a:prstGeom prst="rect">
             <a:avLst/>
@@ -38002,30 +37270,30 @@
               <a:buNone/>
             </a:pPr>
             <a:r>
-              <a:rPr lang="en-US" sz="1050" dirty="0">
-                <a:solidFill>
-                  <a:srgbClr val="7A828F"/>
+              <a:rPr lang="en-US" sz="1700" b="1" dirty="0">
+                <a:solidFill>
+                  <a:srgbClr val="1E232E"/>
                 </a:solidFill>
                 <a:latin typeface="맑은 고딕" pitchFamily="34" charset="0"/>
                 <a:ea typeface="맑은 고딕" pitchFamily="34" charset="-122"/>
                 <a:cs typeface="맑은 고딕" pitchFamily="34" charset="-120"/>
               </a:rPr>
-              <a:t>다른 PC · 다른 프로그램인가?</a:t>
-            </a:r>
-            <a:endParaRPr lang="en-US" sz="1050" dirty="0"/>
-          </a:p>
-        </p:txBody>
-      </p:sp>
-      <p:sp>
-        <p:nvSpPr>
-          <p:cNvPr id="52" name="Text 50"/>
-          <p:cNvSpPr txBox="1"/>
-          <p:nvPr/>
-        </p:nvSpPr>
-        <p:spPr>
-          <a:xfrm>
-            <a:off x="8247888" y="5724144"/>
-            <a:ext cx="2523744" cy="310896"/>
+              <a:t>③  다른 PC · 다른 프로그램</a:t>
+            </a:r>
+            <a:endParaRPr lang="en-US" sz="1700" dirty="0"/>
+          </a:p>
+        </p:txBody>
+      </p:sp>
+      <p:sp>
+        <p:nvSpPr>
+          <p:cNvPr id="30" name="Text 6"/>
+          <p:cNvSpPr txBox="1"/>
+          <p:nvPr/>
+        </p:nvSpPr>
+        <p:spPr>
+          <a:xfrm>
+            <a:off x="8414308" y="1810512"/>
+            <a:ext cx="2972715" cy="256032"/>
           </a:xfrm>
           <a:prstGeom prst="rect">
             <a:avLst/>
@@ -38041,34 +37309,311 @@
               <a:buNone/>
             </a:pPr>
             <a:r>
-              <a:rPr lang="en-US" sz="1200" b="1" dirty="0">
-                <a:solidFill>
-                  <a:srgbClr val="1E232E"/>
+              <a:rPr lang="en-US" sz="1050" dirty="0">
+                <a:solidFill>
+                  <a:srgbClr val="7A828F"/>
                 </a:solidFill>
                 <a:latin typeface="맑은 고딕" pitchFamily="34" charset="0"/>
                 <a:ea typeface="맑은 고딕" pitchFamily="34" charset="-122"/>
                 <a:cs typeface="맑은 고딕" pitchFamily="34" charset="-120"/>
               </a:rPr>
-              <a:t>소켓 (TCP / UDP)</a:t>
-            </a:r>
-            <a:endParaRPr lang="en-US" sz="1200" dirty="0"/>
-          </a:p>
-        </p:txBody>
-      </p:sp>
-      <p:sp>
-        <p:nvSpPr>
-          <p:cNvPr id="53" name="Shape 51"/>
+              <a:t>장비 ↔ 장비  ·  네트워크를 건넌다</a:t>
+            </a:r>
+            <a:endParaRPr lang="en-US" sz="1050" dirty="0"/>
+          </a:p>
+        </p:txBody>
+      </p:sp>
+      <p:sp>
+        <p:nvSpPr>
+          <p:cNvPr id="31" name="Shape 7"/>
           <p:cNvSpPr/>
           <p:nvPr/>
         </p:nvSpPr>
         <p:spPr>
           <a:xfrm>
-            <a:off x="10725912" y="5943600"/>
-            <a:ext cx="768096" cy="256032"/>
+            <a:off x="8414308" y="2157984"/>
+            <a:ext cx="2972715" cy="804672"/>
           </a:xfrm>
           <a:prstGeom prst="roundRect">
             <a:avLst>
-              <a:gd name="adj" fmla="val 50000"/>
+              <a:gd name="adj" fmla="val 5102"/>
+            </a:avLst>
+          </a:prstGeom>
+          <a:solidFill>
+            <a:srgbClr val="FFFFFF"/>
+          </a:solidFill>
+          <a:ln w="9525">
+            <a:solidFill>
+              <a:srgbClr val="D9532B"/>
+            </a:solidFill>
+            <a:prstDash val="solid"/>
+          </a:ln>
+        </p:spPr>
+      </p:sp>
+      <p:sp>
+        <p:nvSpPr>
+          <p:cNvPr id="32" name="Text 8"/>
+          <p:cNvSpPr txBox="1"/>
+          <p:nvPr/>
+        </p:nvSpPr>
+        <p:spPr>
+          <a:xfrm>
+            <a:off x="8414308" y="2222880"/>
+            <a:ext cx="2972715" cy="274320"/>
+          </a:xfrm>
+          <a:prstGeom prst="rect">
+            <a:avLst/>
+          </a:prstGeom>
+          <a:noFill/>
+          <a:ln/>
+        </p:spPr>
+        <p:txBody>
+          <a:bodyPr wrap="square" lIns="0" tIns="0" rIns="0" bIns="0" rtlCol="0" anchor="ctr"/>
+          <a:lstStyle/>
+          <a:p>
+            <a:pPr algn="ctr" indent="0" marL="0">
+              <a:buNone/>
+            </a:pPr>
+            <a:r>
+              <a:rPr lang="en-US" sz="1250" b="1" dirty="0">
+                <a:solidFill>
+                  <a:srgbClr val="1E232E"/>
+                </a:solidFill>
+                <a:latin typeface="맑은 고딕" pitchFamily="34" charset="0"/>
+                <a:ea typeface="맑은 고딕" pitchFamily="34" charset="-122"/>
+                <a:cs typeface="맑은 고딕" pitchFamily="34" charset="-120"/>
+              </a:rPr>
+              <a:t>소켓 (TCP / UDP)</a:t>
+            </a:r>
+            <a:endParaRPr lang="en-US" sz="1250" dirty="0"/>
+          </a:p>
+        </p:txBody>
+      </p:sp>
+      <p:sp>
+        <p:nvSpPr>
+          <p:cNvPr id="33" name="Text 9"/>
+          <p:cNvSpPr txBox="1"/>
+          <p:nvPr/>
+        </p:nvSpPr>
+        <p:spPr>
+          <a:xfrm>
+            <a:off x="8414308" y="2487168"/>
+            <a:ext cx="2972715" cy="274320"/>
+          </a:xfrm>
+          <a:prstGeom prst="rect">
+            <a:avLst/>
+          </a:prstGeom>
+          <a:noFill/>
+          <a:ln/>
+        </p:spPr>
+        <p:txBody>
+          <a:bodyPr wrap="square" lIns="0" tIns="0" rIns="0" bIns="0" rtlCol="0" anchor="ctr"/>
+          <a:lstStyle/>
+          <a:p>
+            <a:pPr algn="ctr" indent="0" marL="0">
+              <a:buNone/>
+            </a:pPr>
+            <a:r>
+              <a:rPr lang="en-US" sz="1150" b="1" dirty="0">
+                <a:solidFill>
+                  <a:srgbClr val="D9532B"/>
+                </a:solidFill>
+                <a:latin typeface="맑은 고딕" pitchFamily="34" charset="0"/>
+                <a:ea typeface="맑은 고딕" pitchFamily="34" charset="-122"/>
+                <a:cs typeface="맑은 고딕" pitchFamily="34" charset="-120"/>
+              </a:rPr>
+              <a:t>+  연결 · 유실 · 순서를 직접 처리</a:t>
+            </a:r>
+            <a:endParaRPr lang="en-US" sz="1150" dirty="0"/>
+          </a:p>
+        </p:txBody>
+      </p:sp>
+      <p:sp>
+        <p:nvSpPr>
+          <p:cNvPr id="34" name="Text 10"/>
+          <p:cNvSpPr txBox="1"/>
+          <p:nvPr/>
+        </p:nvSpPr>
+        <p:spPr>
+          <a:xfrm>
+            <a:off x="8414308" y="2712720"/>
+            <a:ext cx="2972715" cy="228600"/>
+          </a:xfrm>
+          <a:prstGeom prst="rect">
+            <a:avLst/>
+          </a:prstGeom>
+          <a:noFill/>
+          <a:ln/>
+        </p:spPr>
+        <p:txBody>
+          <a:bodyPr wrap="square" lIns="0" tIns="0" rIns="0" bIns="0" rtlCol="0" anchor="ctr"/>
+          <a:lstStyle/>
+          <a:p>
+            <a:pPr algn="ctr" indent="0" marL="0">
+              <a:buNone/>
+            </a:pPr>
+            <a:r>
+              <a:rPr lang="en-US" sz="950" dirty="0">
+                <a:solidFill>
+                  <a:srgbClr val="7A828F"/>
+                </a:solidFill>
+                <a:latin typeface="맑은 고딕" pitchFamily="34" charset="0"/>
+                <a:ea typeface="맑은 고딕" pitchFamily="34" charset="-122"/>
+                <a:cs typeface="맑은 고딕" pitchFamily="34" charset="-120"/>
+              </a:rPr>
+              <a:t>IP 와 포트만 알면 붙는다</a:t>
+            </a:r>
+            <a:endParaRPr lang="en-US" sz="950" dirty="0"/>
+          </a:p>
+        </p:txBody>
+      </p:sp>
+      <p:sp>
+        <p:nvSpPr>
+          <p:cNvPr id="35" name="Text 11"/>
+          <p:cNvSpPr txBox="1"/>
+          <p:nvPr/>
+        </p:nvSpPr>
+        <p:spPr>
+          <a:xfrm>
+            <a:off x="8414308" y="3108960"/>
+            <a:ext cx="2972715" cy="1005840"/>
+          </a:xfrm>
+          <a:prstGeom prst="rect">
+            <a:avLst/>
+          </a:prstGeom>
+          <a:noFill/>
+          <a:ln/>
+        </p:spPr>
+        <p:txBody>
+          <a:bodyPr wrap="square" lIns="0" tIns="0" rIns="0" bIns="0" rtlCol="0" anchor="t"/>
+          <a:lstStyle/>
+          <a:p>
+            <a:pPr marL="342900" indent="-342900">
+              <a:lnSpc>
+                <a:spcPts val="1470"/>
+              </a:lnSpc>
+              <a:spcAft>
+                <a:spcPts val="400"/>
+              </a:spcAft>
+              <a:buSzPct val="100000"/>
+              <a:buChar char="•"/>
+            </a:pPr>
+            <a:r>
+              <a:rPr lang="en-US" sz="1050" dirty="0">
+                <a:solidFill>
+                  <a:srgbClr val="3D4451"/>
+                </a:solidFill>
+                <a:latin typeface="맑은 고딕" pitchFamily="34" charset="0"/>
+                <a:ea typeface="맑은 고딕" pitchFamily="34" charset="-122"/>
+                <a:cs typeface="맑은 고딕" pitchFamily="34" charset="-120"/>
+              </a:rPr>
+              <a:t>유일하게 다른 장비까지 확장된다</a:t>
+            </a:r>
+            <a:endParaRPr lang="en-US" sz="1050" dirty="0"/>
+          </a:p>
+          <a:p>
+            <a:pPr marL="342900" indent="-342900">
+              <a:lnSpc>
+                <a:spcPts val="1470"/>
+              </a:lnSpc>
+              <a:spcAft>
+                <a:spcPts val="400"/>
+              </a:spcAft>
+              <a:buSzPct val="100000"/>
+              <a:buChar char="•"/>
+            </a:pPr>
+            <a:r>
+              <a:rPr lang="en-US" sz="1050" dirty="0">
+                <a:solidFill>
+                  <a:srgbClr val="3D4451"/>
+                </a:solidFill>
+                <a:latin typeface="맑은 고딕" pitchFamily="34" charset="0"/>
+                <a:ea typeface="맑은 고딕" pitchFamily="34" charset="-122"/>
+                <a:cs typeface="맑은 고딕" pitchFamily="34" charset="-120"/>
+              </a:rPr>
+              <a:t>헤더와 왕복 지연이 붙어 가장 느리다</a:t>
+            </a:r>
+            <a:endParaRPr lang="en-US" sz="1050" dirty="0"/>
+          </a:p>
+          <a:p>
+            <a:pPr marL="342900" indent="-342900">
+              <a:lnSpc>
+                <a:spcPts val="1470"/>
+              </a:lnSpc>
+              <a:spcAft>
+                <a:spcPts val="400"/>
+              </a:spcAft>
+              <a:buSzPct val="100000"/>
+              <a:buChar char="•"/>
+            </a:pPr>
+            <a:r>
+              <a:rPr lang="en-US" sz="1050" dirty="0">
+                <a:solidFill>
+                  <a:srgbClr val="3D4451"/>
+                </a:solidFill>
+                <a:latin typeface="맑은 고딕" pitchFamily="34" charset="0"/>
+                <a:ea typeface="맑은 고딕" pitchFamily="34" charset="-122"/>
+                <a:cs typeface="맑은 고딕" pitchFamily="34" charset="-120"/>
+              </a:rPr>
+              <a:t>상대가 리눅스여도 같은 방식으로 붙는다</a:t>
+            </a:r>
+            <a:endParaRPr lang="en-US" sz="1050" dirty="0"/>
+          </a:p>
+        </p:txBody>
+      </p:sp>
+      <p:sp>
+        <p:nvSpPr>
+          <p:cNvPr id="36" name="Text 20"/>
+          <p:cNvSpPr txBox="1"/>
+          <p:nvPr/>
+        </p:nvSpPr>
+        <p:spPr>
+          <a:xfrm>
+            <a:off x="8414308" y="4160520"/>
+            <a:ext cx="2972715" cy="228600"/>
+          </a:xfrm>
+          <a:prstGeom prst="rect">
+            <a:avLst/>
+          </a:prstGeom>
+          <a:noFill/>
+          <a:ln/>
+        </p:spPr>
+        <p:txBody>
+          <a:bodyPr wrap="square" lIns="0" tIns="0" rIns="0" bIns="0" rtlCol="0" anchor="ctr"/>
+          <a:lstStyle/>
+          <a:p>
+            <a:pPr algn="r" indent="0" marL="0">
+              <a:buNone/>
+            </a:pPr>
+            <a:r>
+              <a:rPr lang="en-US" sz="820" dirty="0">
+                <a:solidFill>
+                  <a:srgbClr val="7A828F"/>
+                </a:solidFill>
+                <a:latin typeface="Consolas" pitchFamily="34" charset="0"/>
+                <a:ea typeface="Consolas" pitchFamily="34" charset="-122"/>
+                <a:cs typeface="Consolas" pitchFamily="34" charset="-120"/>
+              </a:rPr>
+              <a:t>socket / connect  ·  send / recv</a:t>
+            </a:r>
+            <a:endParaRPr lang="en-US" sz="820" dirty="0"/>
+          </a:p>
+        </p:txBody>
+      </p:sp>
+      <p:sp>
+        <p:nvSpPr>
+          <p:cNvPr id="37" name="Shape 12"/>
+          <p:cNvSpPr/>
+          <p:nvPr/>
+        </p:nvSpPr>
+        <p:spPr>
+          <a:xfrm>
+            <a:off x="8414308" y="4471416"/>
+            <a:ext cx="2972715" cy="384048"/>
+          </a:xfrm>
+          <a:prstGeom prst="roundRect">
+            <a:avLst>
+              <a:gd name="adj" fmla="val 11905"/>
             </a:avLst>
           </a:prstGeom>
           <a:solidFill>
@@ -38084,14 +37629,14 @@
       </p:sp>
       <p:sp>
         <p:nvSpPr>
-          <p:cNvPr id="54" name="Text 52"/>
-          <p:cNvSpPr txBox="1"/>
-          <p:nvPr/>
-        </p:nvSpPr>
-        <p:spPr>
-          <a:xfrm>
-            <a:off x="10725912" y="5943600"/>
-            <a:ext cx="768096" cy="256032"/>
+          <p:cNvPr id="38" name="Text 13"/>
+          <p:cNvSpPr txBox="1"/>
+          <p:nvPr/>
+        </p:nvSpPr>
+        <p:spPr>
+          <a:xfrm>
+            <a:off x="8414308" y="4471416"/>
+            <a:ext cx="2972715" cy="384048"/>
           </a:xfrm>
           <a:prstGeom prst="rect">
             <a:avLst/>
@@ -38107,7 +37652,7 @@
               <a:buNone/>
             </a:pPr>
             <a:r>
-              <a:rPr lang="en-US" sz="950" b="1" dirty="0">
+              <a:rPr lang="en-US" sz="1100" b="1" dirty="0">
                 <a:solidFill>
                   <a:srgbClr val="FFFFFF"/>
                 </a:solidFill>
@@ -38115,9 +37660,231 @@
                 <a:ea typeface="맑은 고딕" pitchFamily="34" charset="-122"/>
                 <a:cs typeface="맑은 고딕" pitchFamily="34" charset="-120"/>
               </a:rPr>
-              <a:t>ToDo#3</a:t>
+              <a:t>ToDo#3     IpcSocket.c</a:t>
+            </a:r>
+            <a:endParaRPr lang="en-US" sz="1100" dirty="0"/>
+          </a:p>
+        </p:txBody>
+      </p:sp>
+      <p:sp>
+        <p:nvSpPr>
+          <p:cNvPr id="39" name="Text 10"/>
+          <p:cNvSpPr txBox="1"/>
+          <p:nvPr/>
+        </p:nvSpPr>
+        <p:spPr>
+          <a:xfrm>
+            <a:off x="4033418" y="2898648"/>
+            <a:ext cx="320040" cy="457200"/>
+          </a:xfrm>
+          <a:prstGeom prst="rect">
+            <a:avLst/>
+          </a:prstGeom>
+          <a:noFill/>
+          <a:ln/>
+        </p:spPr>
+        <p:txBody>
+          <a:bodyPr wrap="square" lIns="0" tIns="0" rIns="0" bIns="0" rtlCol="0" anchor="ctr"/>
+          <a:lstStyle/>
+          <a:p>
+            <a:pPr algn="ctr" indent="0" marL="0">
+              <a:buNone/>
+            </a:pPr>
+            <a:r>
+              <a:rPr lang="en-US" sz="2400" dirty="0" b="1">
+                <a:solidFill>
+                  <a:srgbClr val="6B778A"/>
+                </a:solidFill>
+                <a:latin typeface="맑은 고딕" pitchFamily="34" charset="0"/>
+                <a:ea typeface="맑은 고딕" pitchFamily="34" charset="-122"/>
+                <a:cs typeface="맑은 고딕" pitchFamily="34" charset="-120"/>
+              </a:rPr>
+              <a:t>›</a:t>
             </a:r>
             <a:endParaRPr lang="en-US" sz="950" dirty="0"/>
+          </a:p>
+        </p:txBody>
+      </p:sp>
+      <p:sp>
+        <p:nvSpPr>
+          <p:cNvPr id="40" name="Text 10"/>
+          <p:cNvSpPr txBox="1"/>
+          <p:nvPr/>
+        </p:nvSpPr>
+        <p:spPr>
+          <a:xfrm>
+            <a:off x="7838236" y="2898648"/>
+            <a:ext cx="320040" cy="457200"/>
+          </a:xfrm>
+          <a:prstGeom prst="rect">
+            <a:avLst/>
+          </a:prstGeom>
+          <a:noFill/>
+          <a:ln/>
+        </p:spPr>
+        <p:txBody>
+          <a:bodyPr wrap="square" lIns="0" tIns="0" rIns="0" bIns="0" rtlCol="0" anchor="ctr"/>
+          <a:lstStyle/>
+          <a:p>
+            <a:pPr algn="ctr" indent="0" marL="0">
+              <a:buNone/>
+            </a:pPr>
+            <a:r>
+              <a:rPr lang="en-US" sz="2400" dirty="0" b="1">
+                <a:solidFill>
+                  <a:srgbClr val="6B778A"/>
+                </a:solidFill>
+                <a:latin typeface="맑은 고딕" pitchFamily="34" charset="0"/>
+                <a:ea typeface="맑은 고딕" pitchFamily="34" charset="-122"/>
+                <a:cs typeface="맑은 고딕" pitchFamily="34" charset="-120"/>
+              </a:rPr>
+              <a:t>›</a:t>
+            </a:r>
+            <a:endParaRPr lang="en-US" sz="950" dirty="0"/>
+          </a:p>
+        </p:txBody>
+      </p:sp>
+      <p:sp>
+        <p:nvSpPr>
+          <p:cNvPr id="41" name="Shape 4"/>
+          <p:cNvSpPr/>
+          <p:nvPr/>
+        </p:nvSpPr>
+        <p:spPr>
+          <a:xfrm>
+            <a:off x="548640" y="5212080"/>
+            <a:ext cx="11094415" cy="1143000"/>
+          </a:xfrm>
+          <a:prstGeom prst="roundRect">
+            <a:avLst>
+              <a:gd name="adj" fmla="val 1538"/>
+            </a:avLst>
+          </a:prstGeom>
+          <a:solidFill>
+            <a:srgbClr val="1E232E"/>
+          </a:solidFill>
+          <a:ln w="12700">
+            <a:solidFill>
+              <a:srgbClr val="1E232E"/>
+            </a:solidFill>
+            <a:prstDash val="solid"/>
+          </a:ln>
+        </p:spPr>
+      </p:sp>
+      <p:sp>
+        <p:nvSpPr>
+          <p:cNvPr id="42" name="Text 5"/>
+          <p:cNvSpPr txBox="1"/>
+          <p:nvPr/>
+        </p:nvSpPr>
+        <p:spPr>
+          <a:xfrm>
+            <a:off x="841248" y="5321808"/>
+            <a:ext cx="6000000" cy="292608"/>
+          </a:xfrm>
+          <a:prstGeom prst="rect">
+            <a:avLst/>
+          </a:prstGeom>
+          <a:noFill/>
+          <a:ln/>
+        </p:spPr>
+        <p:txBody>
+          <a:bodyPr wrap="square" lIns="0" tIns="0" rIns="0" bIns="0" rtlCol="0" anchor="ctr"/>
+          <a:lstStyle/>
+          <a:p>
+            <a:pPr indent="0" marL="0">
+              <a:buNone/>
+            </a:pPr>
+            <a:r>
+              <a:rPr lang="en-US" sz="1350" b="1" dirty="0">
+                <a:solidFill>
+                  <a:srgbClr val="FFFFFF"/>
+                </a:solidFill>
+                <a:latin typeface="맑은 고딕" pitchFamily="34" charset="0"/>
+                <a:ea typeface="맑은 고딕" pitchFamily="34" charset="-122"/>
+                <a:cs typeface="맑은 고딕" pitchFamily="34" charset="-120"/>
+              </a:rPr>
+              <a:t>고르는 기준은 하나 — 얼마나 멀리 보내야 하는가</a:t>
+            </a:r>
+            <a:endParaRPr lang="en-US" sz="1700" dirty="0"/>
+          </a:p>
+        </p:txBody>
+      </p:sp>
+      <p:sp>
+        <p:nvSpPr>
+          <p:cNvPr id="43" name="Text 6"/>
+          <p:cNvSpPr txBox="1"/>
+          <p:nvPr/>
+        </p:nvSpPr>
+        <p:spPr>
+          <a:xfrm>
+            <a:off x="841248" y="5614416"/>
+            <a:ext cx="10509199" cy="274320"/>
+          </a:xfrm>
+          <a:prstGeom prst="rect">
+            <a:avLst/>
+          </a:prstGeom>
+          <a:noFill/>
+          <a:ln/>
+        </p:spPr>
+        <p:txBody>
+          <a:bodyPr wrap="square" lIns="0" tIns="0" rIns="0" bIns="0" rtlCol="0" anchor="ctr"/>
+          <a:lstStyle/>
+          <a:p>
+            <a:pPr indent="0" marL="0">
+              <a:buNone/>
+            </a:pPr>
+            <a:r>
+              <a:rPr lang="en-US" sz="1100" dirty="0">
+                <a:solidFill>
+                  <a:srgbClr val="C9D2DE"/>
+                </a:solidFill>
+                <a:latin typeface="맑은 고딕" pitchFamily="34" charset="0"/>
+                <a:ea typeface="맑은 고딕" pitchFamily="34" charset="-122"/>
+                <a:cs typeface="맑은 고딕" pitchFamily="34" charset="-120"/>
+              </a:rPr>
+              <a:t>가까울수록 빠르다. 그만큼 커널이 해 주던 경계와 순서, 동기화가 내 코드로 넘어온다.</a:t>
+            </a:r>
+            <a:endParaRPr lang="en-US" sz="1050" dirty="0"/>
+          </a:p>
+        </p:txBody>
+      </p:sp>
+      <p:sp>
+        <p:nvSpPr>
+          <p:cNvPr id="44" name="Text 6"/>
+          <p:cNvSpPr txBox="1"/>
+          <p:nvPr/>
+        </p:nvSpPr>
+        <p:spPr>
+          <a:xfrm>
+            <a:off x="841248" y="5888736"/>
+            <a:ext cx="10509199" cy="274320"/>
+          </a:xfrm>
+          <a:prstGeom prst="rect">
+            <a:avLst/>
+          </a:prstGeom>
+          <a:noFill/>
+          <a:ln/>
+        </p:spPr>
+        <p:txBody>
+          <a:bodyPr wrap="square" lIns="0" tIns="0" rIns="0" bIns="0" rtlCol="0" anchor="ctr"/>
+          <a:lstStyle/>
+          <a:p>
+            <a:pPr indent="0" marL="0">
+              <a:buNone/>
+            </a:pPr>
+            <a:r>
+              <a:rPr lang="en-US" sz="1150" dirty="0" b="1">
+                <a:solidFill>
+                  <a:srgbClr val="C8891F"/>
+                </a:solidFill>
+                <a:latin typeface="맑은 고딕" pitchFamily="34" charset="0"/>
+                <a:ea typeface="맑은 고딕" pitchFamily="34" charset="-122"/>
+                <a:cs typeface="맑은 고딕" pitchFamily="34" charset="-120"/>
+              </a:rPr>
+              <a:t>본 과제는 이 세 칸을 그대로 ToDo#1 · ToDo#2 · ToDo#3 으로 구현했다</a:t>
+            </a:r>
+            <a:endParaRPr lang="en-US" sz="1050" dirty="0"/>
           </a:p>
         </p:txBody>
       </p:sp>
@@ -40742,7 +40509,7 @@
                 <a:ea typeface="맑은 고딕" pitchFamily="34" charset="-122"/>
                 <a:cs typeface="맑은 고딕" pitchFamily="34" charset="-120"/>
               </a:rPr>
-              <a:t>구현에서 실제로 걸리는 것 — TCP 는 「경계」가 없다</a:t>
+              <a:t>send 한 번이 recv 한 번으로 오지 않는다</a:t>
             </a:r>
             <a:endParaRPr lang="en-US" sz="1400" dirty="0"/>
           </a:p>
@@ -40846,15 +40613,15 @@
               <a:buNone/>
             </a:pPr>
             <a:r>
-              <a:rPr lang="en-US" sz="920" dirty="0">
-                <a:solidFill>
-                  <a:srgbClr val="AEB9C8"/>
-                </a:solidFill>
-                <a:latin typeface="맑은 고딕" pitchFamily="34" charset="0"/>
+              <a:rPr lang="en-US" sz="840" dirty="0">
+                <a:solidFill>
+                  <a:srgbClr val="C8891F"/>
+                </a:solidFill>
+                <a:latin typeface="Consolas" pitchFamily="34" charset="0"/>
                 <a:ea typeface="맑은 고딕" pitchFamily="34" charset="-122"/>
                 <a:cs typeface="맑은 고딕" pitchFamily="34" charset="-120"/>
               </a:rPr>
-              <a:t>send( ... , 4 )  한 번</a:t>
+              <a:t>send(sock, buf, 4, 0)</a:t>
             </a:r>
             <a:endParaRPr lang="en-US" sz="920" dirty="0"/>
           </a:p>
@@ -41188,6 +40955,26 @@
               <a:buNone/>
             </a:pPr>
             <a:r>
+              <a:rPr lang="en-US" sz="840" dirty="0">
+                <a:solidFill>
+                  <a:srgbClr val="C8891F"/>
+                </a:solidFill>
+                <a:latin typeface="Consolas" pitchFamily="34" charset="0"/>
+                <a:ea typeface="맑은 고딕" pitchFamily="34" charset="-122"/>
+                <a:cs typeface="맑은 고딕" pitchFamily="34" charset="-120"/>
+              </a:rPr>
+              <a:t>recv(sock, buf, 4, 0)</a:t>
+            </a:r>
+            <a:endParaRPr lang="en-US" sz="920" dirty="0"/>
+          </a:p>
+          <a:p>
+            <a:pPr algn="ctr" indent="0" marL="0">
+              <a:lnSpc>
+                <a:spcPts val="1200"/>
+              </a:lnSpc>
+              <a:buNone/>
+            </a:pPr>
+            <a:r>
               <a:rPr lang="en-US" sz="920" dirty="0">
                 <a:solidFill>
                   <a:srgbClr val="AEB9C8"/>
@@ -41196,27 +40983,7 @@
                 <a:ea typeface="맑은 고딕" pitchFamily="34" charset="-122"/>
                 <a:cs typeface="맑은 고딕" pitchFamily="34" charset="-120"/>
               </a:rPr>
-              <a:t>recv 가 2 byte 만</a:t>
-            </a:r>
-            <a:endParaRPr lang="en-US" sz="920" dirty="0"/>
-          </a:p>
-          <a:p>
-            <a:pPr algn="ctr" indent="0" marL="0">
-              <a:lnSpc>
-                <a:spcPts val="1200"/>
-              </a:lnSpc>
-              <a:buNone/>
-            </a:pPr>
-            <a:r>
-              <a:rPr lang="en-US" sz="920" dirty="0">
-                <a:solidFill>
-                  <a:srgbClr val="AEB9C8"/>
-                </a:solidFill>
-                <a:latin typeface="맑은 고딕" pitchFamily="34" charset="0"/>
-                <a:ea typeface="맑은 고딕" pitchFamily="34" charset="-122"/>
-                <a:cs typeface="맑은 고딕" pitchFamily="34" charset="-120"/>
-              </a:rPr>
-              <a:t>돌려줄 수 있다</a:t>
+              <a:t>이렇게 불러도 2 byte 만 올 수 있다</a:t>
             </a:r>
             <a:endParaRPr lang="en-US" sz="920" dirty="0"/>
           </a:p>
@@ -41359,6 +41126,26 @@
               <a:buNone/>
             </a:pPr>
             <a:r>
+              <a:rPr lang="en-US" sz="840" dirty="0">
+                <a:solidFill>
+                  <a:srgbClr val="C8891F"/>
+                </a:solidFill>
+                <a:latin typeface="Consolas" pitchFamily="34" charset="0"/>
+                <a:ea typeface="맑은 고딕" pitchFamily="34" charset="-122"/>
+                <a:cs typeface="맑은 고딕" pitchFamily="34" charset="-120"/>
+              </a:rPr>
+              <a:t>recv(sock, buf+2, 2, 0)</a:t>
+            </a:r>
+            <a:endParaRPr lang="en-US" sz="920" dirty="0"/>
+          </a:p>
+          <a:p>
+            <a:pPr algn="ctr" indent="0" marL="0">
+              <a:lnSpc>
+                <a:spcPts val="1200"/>
+              </a:lnSpc>
+              <a:buNone/>
+            </a:pPr>
+            <a:r>
               <a:rPr lang="en-US" sz="920" dirty="0">
                 <a:solidFill>
                   <a:srgbClr val="AEB9C8"/>
@@ -41367,27 +41154,7 @@
                 <a:ea typeface="맑은 고딕" pitchFamily="34" charset="-122"/>
                 <a:cs typeface="맑은 고딕" pitchFamily="34" charset="-120"/>
               </a:rPr>
-              <a:t>남은 2 byte 를 다시 받아</a:t>
-            </a:r>
-            <a:endParaRPr lang="en-US" sz="920" dirty="0"/>
-          </a:p>
-          <a:p>
-            <a:pPr algn="ctr" indent="0" marL="0">
-              <a:lnSpc>
-                <a:spcPts val="1200"/>
-              </a:lnSpc>
-              <a:buNone/>
-            </a:pPr>
-            <a:r>
-              <a:rPr lang="en-US" sz="920" dirty="0">
-                <a:solidFill>
-                  <a:srgbClr val="AEB9C8"/>
-                </a:solidFill>
-                <a:latin typeface="맑은 고딕" pitchFamily="34" charset="0"/>
-                <a:ea typeface="맑은 고딕" pitchFamily="34" charset="-122"/>
-                <a:cs typeface="맑은 고딕" pitchFamily="34" charset="-120"/>
-              </a:rPr>
-              <a:t>4 byte 를 채운다</a:t>
+              <a:t>남은 2 byte 를 마저 받는다</a:t>
             </a:r>
             <a:endParaRPr lang="en-US" sz="920" dirty="0"/>
           </a:p>
@@ -41605,7 +41372,7 @@
                 <a:ea typeface="맑은 고딕" pitchFamily="34" charset="-122"/>
                 <a:cs typeface="맑은 고딕" pitchFamily="34" charset="-120"/>
               </a:rPr>
-              <a:t>커널이 관리하는 「메시지 단위」의 큐 — 보내는 쪽과 받는 쪽이 동시에 살아 있지 않아도 된다</a:t>
+              <a:t>커널이 메시지 단위로 보관해 주는 큐. 보내는 쪽과 받는 쪽이 동시에 떠 있지 않아도 된다</a:t>
             </a:r>
             <a:endParaRPr lang="en-US" sz="1250" dirty="0"/>
           </a:p>
@@ -42585,7 +42352,27 @@
                 <a:ea typeface="Consolas" pitchFamily="34" charset="-122"/>
                 <a:cs typeface="Consolas" pitchFamily="34" charset="-120"/>
               </a:rPr>
-              <a:t>msgget()  msgsnd()  msgrcv()  msgctl(IPC_RMID)</a:t>
+              <a:t>msgget(key, IPC_CREAT)   ·   msgsnd(qid, &amp;msg, size, 0)</a:t>
+            </a:r>
+            <a:endParaRPr lang="en-US" sz="860" dirty="0"/>
+          </a:p>
+          <a:p>
+            <a:pPr indent="0" marL="0">
+              <a:lnSpc>
+                <a:spcPts val="1350"/>
+              </a:lnSpc>
+              <a:buNone/>
+            </a:pPr>
+            <a:r>
+              <a:rPr lang="en-US" sz="860" dirty="0">
+                <a:solidFill>
+                  <a:srgbClr val="D2DAE4"/>
+                </a:solidFill>
+                <a:latin typeface="Consolas" pitchFamily="34" charset="0"/>
+                <a:ea typeface="Consolas" pitchFamily="34" charset="-122"/>
+                <a:cs typeface="Consolas" pitchFamily="34" charset="-120"/>
+              </a:rPr>
+              <a:t>msgrcv(qid, &amp;msg, size, mtype, 0)   ·   msgctl(IPC_RMID)</a:t>
             </a:r>
             <a:endParaRPr lang="en-US" sz="860" dirty="0"/>
           </a:p>
@@ -42741,7 +42528,7 @@
                 <a:ea typeface="맑은 고딕" pitchFamily="34" charset="-122"/>
                 <a:cs typeface="맑은 고딕" pitchFamily="34" charset="-120"/>
               </a:rPr>
-              <a:t>바이트가 아니라 메시지 단위 — 보낸 크기 그대로 받는다 (경계 보존)</a:t>
+              <a:t>바이트가 아니라 메시지 단위라서 보낸 크기 그대로 받는다</a:t>
             </a:r>
             <a:endParaRPr lang="en-US" sz="1080" dirty="0"/>
           </a:p>
@@ -42789,7 +42576,7 @@
                 <a:ea typeface="맑은 고딕" pitchFamily="34" charset="-122"/>
                 <a:cs typeface="맑은 고딕" pitchFamily="34" charset="-120"/>
               </a:rPr>
-              <a:t>비면 받는 쪽이, 가득 차면 보내는 쪽이 커널에서 대기한다 (동기화 내장)</a:t>
+              <a:t>큐가 비면 받는 쪽이, 가득 차면 보내는 쪽이 커널에서 대기한다</a:t>
             </a:r>
             <a:endParaRPr lang="en-US" sz="1080" dirty="0"/>
           </a:p>
@@ -42901,7 +42688,7 @@
                 <a:ea typeface="맑은 고딕" pitchFamily="34" charset="-122"/>
                 <a:cs typeface="맑은 고딕" pitchFamily="34" charset="-120"/>
               </a:rPr>
-              <a:t>명령 · 이벤트 · 상태 보고처럼 「건」 단위로 오가는 데이터</a:t>
+              <a:t>명령이나 이벤트처럼 한 건씩 주고받는 데이터</a:t>
             </a:r>
             <a:endParaRPr lang="en-US" sz="1050" dirty="0"/>
           </a:p>
@@ -42925,7 +42712,7 @@
                 <a:ea typeface="맑은 고딕" pitchFamily="34" charset="-122"/>
                 <a:cs typeface="맑은 고딕" pitchFamily="34" charset="-120"/>
               </a:rPr>
-              <a:t>송신과 수신 속도가 다를 때, 그 차이를 큐가 흡수해 준다</a:t>
+              <a:t>보내는 쪽과 받는 쪽 속도가 달라 중간에 쌓아둬야 할 때</a:t>
             </a:r>
             <a:endParaRPr lang="en-US" sz="1050" dirty="0"/>
           </a:p>
@@ -42949,7 +42736,7 @@
                 <a:ea typeface="맑은 고딕" pitchFamily="34" charset="-122"/>
                 <a:cs typeface="맑은 고딕" pitchFamily="34" charset="-120"/>
               </a:rPr>
-              <a:t>두 프로세스의 기동 순서를 맞추기 어려울 때</a:t>
+              <a:t>어느 쪽이 먼저 떠도 상관없어야 할 때</a:t>
             </a:r>
             <a:endParaRPr lang="en-US" sz="1050" dirty="0"/>
           </a:p>
@@ -43061,7 +42848,7 @@
                 <a:ea typeface="맑은 고딕" pitchFamily="34" charset="-122"/>
                 <a:cs typeface="맑은 고딕" pitchFamily="34" charset="-120"/>
               </a:rPr>
-              <a:t>동기화가 커널에 내장 — 별도 락이 필요 없다</a:t>
+              <a:t>커널이 대기까지 해 줘서 따로 락이 필요 없다</a:t>
             </a:r>
             <a:endParaRPr lang="en-US" sz="1100" dirty="0"/>
           </a:p>
@@ -43109,7 +42896,7 @@
                 <a:ea typeface="맑은 고딕" pitchFamily="34" charset="-122"/>
                 <a:cs typeface="맑은 고딕" pitchFamily="34" charset="-120"/>
               </a:rPr>
-              <a:t>비동기 — 상대가 아직 없어도 넣어둘 수 있다</a:t>
+              <a:t>상대가 아직 안 떠 있어도 미리 넣어둘 수 있다</a:t>
             </a:r>
             <a:endParaRPr lang="en-US" sz="1100" dirty="0"/>
           </a:p>
@@ -43133,7 +42920,7 @@
                 <a:ea typeface="맑은 고딕" pitchFamily="34" charset="-122"/>
                 <a:cs typeface="맑은 고딕" pitchFamily="34" charset="-120"/>
               </a:rPr>
-              <a:t>타입별 선택 수신이 가능하다</a:t>
+              <a:t>원하는 타입만 골라서 받을 수 있다</a:t>
             </a:r>
             <a:endParaRPr lang="en-US" sz="1100" dirty="0"/>
           </a:p>
@@ -43245,7 +43032,7 @@
                 <a:ea typeface="맑은 고딕" pitchFamily="34" charset="-122"/>
                 <a:cs typeface="맑은 고딕" pitchFamily="34" charset="-120"/>
               </a:rPr>
-              <a:t>유저 ↔ 커널 복사 2회 — 대용량엔 불리</a:t>
+              <a:t>유저와 커널 사이를 두 번 복사해 대용량에 불리하다</a:t>
             </a:r>
             <a:endParaRPr lang="en-US" sz="1100" dirty="0"/>
           </a:p>
@@ -43269,7 +43056,7 @@
                 <a:ea typeface="맑은 고딕" pitchFamily="34" charset="-122"/>
                 <a:cs typeface="맑은 고딕" pitchFamily="34" charset="-120"/>
               </a:rPr>
-              <a:t>큐 용량 제한 (기본 msgmnb 16KB)</a:t>
+              <a:t>큐에 담기는 양이 정해져 있다 (기본 16KB)</a:t>
             </a:r>
             <a:endParaRPr lang="en-US" sz="1100" dirty="0"/>
           </a:p>
@@ -43493,7 +43280,7 @@
                 <a:ea typeface="맑은 고딕" pitchFamily="34" charset="-122"/>
                 <a:cs typeface="맑은 고딕" pitchFamily="34" charset="-120"/>
               </a:rPr>
-              <a:t>고정 크기 배열을 원형으로 돌려 쓰는 자료구조 — 그 자체가 IPC 수단은 아니고, 데이터를 담는 「그릇」이다</a:t>
+              <a:t>고정 크기 배열을 원형으로 돌려 쓰는 자료구조. IPC 수단이 아니라 데이터를 쌓아 두는 방법이다</a:t>
             </a:r>
             <a:endParaRPr lang="en-US" sz="1250" dirty="0"/>
           </a:p>
@@ -44629,7 +44416,7 @@
                 <a:ea typeface="맑은 고딕" pitchFamily="34" charset="-122"/>
                 <a:cs typeface="맑은 고딕" pitchFamily="34" charset="-120"/>
               </a:rPr>
-              <a:t>소비자가 여기서 꺼낸다</a:t>
+              <a:t>수신 쪽이 여기서 꺼낸다</a:t>
             </a:r>
             <a:endParaRPr lang="en-US" sz="880" dirty="0"/>
           </a:p>
@@ -44718,7 +44505,7 @@
                 <a:ea typeface="맑은 고딕" pitchFamily="34" charset="-122"/>
                 <a:cs typeface="맑은 고딕" pitchFamily="34" charset="-120"/>
               </a:rPr>
-              <a:t>생산자가 여기에 넣는다</a:t>
+              <a:t>송신 쪽이 여기에 넣는다</a:t>
             </a:r>
             <a:endParaRPr lang="en-US" sz="880" dirty="0"/>
           </a:p>
@@ -44791,6 +44578,26 @@
             </a:r>
             <a:endParaRPr lang="en-US" sz="900" dirty="0"/>
           </a:p>
+          <a:p>
+            <a:pPr indent="0" marL="0">
+              <a:lnSpc>
+                <a:spcPts val="1350"/>
+              </a:lnSpc>
+              <a:buNone/>
+            </a:pPr>
+            <a:r>
+              <a:rPr lang="en-US" sz="900" dirty="0">
+                <a:solidFill>
+                  <a:srgbClr val="A8E6D2"/>
+                </a:solidFill>
+                <a:latin typeface="Consolas" pitchFamily="34" charset="0"/>
+                <a:ea typeface="Consolas" pitchFamily="34" charset="-122"/>
+                <a:cs typeface="Consolas" pitchFamily="34" charset="-120"/>
+              </a:rPr>
+              <a:t>msg = ring[head];  head = (head+1) % N;  count--;</a:t>
+            </a:r>
+            <a:endParaRPr lang="en-US" sz="900" dirty="0"/>
+          </a:p>
         </p:txBody>
       </p:sp>
       <p:sp>
@@ -45075,7 +44882,7 @@
                 <a:ea typeface="맑은 고딕" pitchFamily="34" charset="-122"/>
                 <a:cs typeface="맑은 고딕" pitchFamily="34" charset="-120"/>
               </a:rPr>
-              <a:t>넣고 빼는 데 O(1), 실행 중 동적 할당이 전혀 없다</a:t>
+              <a:t>개수가 늘어도 넣고 빼는 시간이 그대로다 (O(1)), 실행 중 동적 할당도 없다</a:t>
             </a:r>
             <a:endParaRPr lang="en-US" sz="1080" dirty="0"/>
           </a:p>
@@ -45099,7 +44906,7 @@
                 <a:ea typeface="맑은 고딕" pitchFamily="34" charset="-122"/>
                 <a:cs typeface="맑은 고딕" pitchFamily="34" charset="-120"/>
               </a:rPr>
-              <a:t>「빔」과 「참」을 구별하려면 개수를 따로 세거나 한 칸을 비워 둔다</a:t>
+              <a:t>비었는지 찼는지 구별하려면 개수를 세거나 한 칸을 비워 둔다</a:t>
             </a:r>
             <a:endParaRPr lang="en-US" sz="1080" dirty="0"/>
           </a:p>
@@ -45211,7 +45018,7 @@
                 <a:ea typeface="맑은 고딕" pitchFamily="34" charset="-122"/>
                 <a:cs typeface="맑은 고딕" pitchFamily="34" charset="-120"/>
               </a:rPr>
-              <a:t>생산자와 소비자의 속도가 다를 때 완충 장치로</a:t>
+              <a:t>넣는 쪽과 꺼내는 쪽 속도가 다를 때 사이에 두고</a:t>
             </a:r>
             <a:endParaRPr lang="en-US" sz="1050" dirty="0"/>
           </a:p>
@@ -45259,7 +45066,7 @@
                 <a:ea typeface="맑은 고딕" pitchFamily="34" charset="-122"/>
                 <a:cs typeface="맑은 고딕" pitchFamily="34" charset="-120"/>
               </a:rPr>
-              <a:t>할당 지연이 허용되지 않는 실시간 코드</a:t>
+              <a:t>실행 중에 메모리를 할당하면 안 되는 실시간 코드</a:t>
             </a:r>
             <a:endParaRPr lang="en-US" sz="1050" dirty="0"/>
           </a:p>
@@ -45371,7 +45178,7 @@
                 <a:ea typeface="맑은 고딕" pitchFamily="34" charset="-122"/>
                 <a:cs typeface="맑은 고딕" pitchFamily="34" charset="-120"/>
               </a:rPr>
-              <a:t>넣기 / 빼기 모두 O(1) 로 일정하다</a:t>
+              <a:t>넣기 / 빼기 시간이 개수와 무관하게 일정 (O(1))</a:t>
             </a:r>
             <a:endParaRPr lang="en-US" sz="1100" dirty="0"/>
           </a:p>
@@ -45555,7 +45362,7 @@
                 <a:ea typeface="맑은 고딕" pitchFamily="34" charset="-122"/>
                 <a:cs typeface="맑은 고딕" pitchFamily="34" charset="-120"/>
               </a:rPr>
-              <a:t>크기 고정 — 가득 차면 대기하거나 버려야</a:t>
+              <a:t>크기가 고정이라 가득 차면 기다리거나 버려야 한다</a:t>
             </a:r>
             <a:endParaRPr lang="en-US" sz="1100" dirty="0"/>
           </a:p>

--- a/ref/발표자료/IPC_발표자료.pptx
+++ b/ref/발표자료/IPC_발표자료.pptx
@@ -15,10 +15,8 @@
     <p:sldId id="263" r:id="rId9"/>
     <p:sldId id="264" r:id="rId10"/>
     <p:sldId id="265" r:id="rId11"/>
-    <p:sldId id="266" r:id="rId12"/>
     <p:sldId id="267" r:id="rId13"/>
     <p:sldId id="268" r:id="rId14"/>
-    <p:sldId id="269" r:id="rId15"/>
     <p:sldId id="270" r:id="rId16"/>
     <p:sldId id="271" r:id="rId17"/>
     <p:sldId id="272" r:id="rId18"/>
@@ -661,99 +659,6 @@
 </p:notes>
 </file>
 
-<file path=ppt/notesSlides/notesSlide11.xml><?xml version="1.0" encoding="utf-8"?>
-<p:notes xmlns:a="http://schemas.openxmlformats.org/drawingml/2006/main" xmlns:r="http://schemas.openxmlformats.org/officeDocument/2006/relationships" xmlns:p="http://schemas.openxmlformats.org/presentationml/2006/main">
-  <p:cSld>
-    <p:spTree>
-      <p:nvGrpSpPr>
-        <p:cNvPr id="1" name=""/>
-        <p:cNvGrpSpPr/>
-        <p:nvPr/>
-      </p:nvGrpSpPr>
-      <p:grpSpPr>
-        <a:xfrm>
-          <a:off x="0" y="0"/>
-          <a:ext cx="0" cy="0"/>
-          <a:chOff x="0" y="0"/>
-          <a:chExt cx="0" cy="0"/>
-        </a:xfrm>
-      </p:grpSpPr>
-      <p:sp>
-        <p:nvSpPr>
-          <p:cNvPr id="2" name="Slide Image Placeholder 1"/>
-          <p:cNvSpPr>
-            <a:spLocks noGrp="1" noRot="1" noChangeAspect="1"/>
-          </p:cNvSpPr>
-          <p:nvPr>
-            <p:ph type="sldImg"/>
-          </p:nvPr>
-        </p:nvSpPr>
-        <p:spPr/>
-      </p:sp>
-      <p:sp>
-        <p:nvSpPr>
-          <p:cNvPr id="3" name="Notes Placeholder 2"/>
-          <p:cNvSpPr>
-            <a:spLocks noGrp="1"/>
-          </p:cNvSpPr>
-          <p:nvPr>
-            <p:ph type="body" idx="1"/>
-          </p:nvPr>
-        </p:nvSpPr>
-        <p:spPr/>
-        <p:txBody>
-          <a:bodyPr/>
-          <a:lstStyle/>
-          <a:p>
-            <a:r>
-              <a:rPr lang="en-US" dirty="0"/>
-              <a:t>[2-2 ④ 비교와 조합 · 약 1분 30초]
-셋을 한 표로 정리하면 이렇습니다.
-메시지 큐는 커널이 관리하는 IPC 객체이고, 링버퍼는 자료구조이고, 공유메모리는 커널이 연결해 주는 메모리입니다. 성격이 애초에 다릅니다.
-복사 횟수를 보시면 메시지 큐가 유저와 커널 사이를 두 번 오가고, 공유메모리는 0회입니다. 그래서 속도는 공유메모리가 가장 빠릅니다. 대신 동기화는 메시지 큐만 커널이 해 주고, 나머지 둘은 직접 구현해야 합니다.
-그런데 아래를 보시면, 이 세 가지는 대체 관계가 아니라 조합할 수 있는 관계입니다. 공유메모리로 두 프로세스가 같은 메모리를 보게 하고, 그 위에 링버퍼를 올려서 넣은 순서대로 꺼내지게 만들고, 세마포어 두 개로 비었을 때와 찼을 때 대기시키고, 뮤텍스로 head 와 tail 을 보호하면 — 이것이 곧 메시지 큐입니다.
-ToDo#2 가 정확히 이 조합입니다. Windows 에 메시지 큐가 없어서 이렇게 만들었고, 뒤에서 코드로 보여드리겠습니다.</a:t>
-            </a:r>
-            <a:endParaRPr lang="en-US" dirty="0"/>
-          </a:p>
-        </p:txBody>
-      </p:sp>
-      <p:sp>
-        <p:nvSpPr>
-          <p:cNvPr id="4" name="Slide Number Placeholder 3"/>
-          <p:cNvSpPr>
-            <a:spLocks noGrp="1"/>
-          </p:cNvSpPr>
-          <p:nvPr>
-            <p:ph type="sldNum" sz="quarter" idx="10"/>
-          </p:nvPr>
-        </p:nvSpPr>
-        <p:spPr/>
-        <p:txBody>
-          <a:bodyPr/>
-          <a:lstStyle/>
-          <a:p>
-            <a:fld id="{F7021451-1387-4CA6-816F-3879F97B5CBC}" type="slidenum">
-              <a:rPr lang="en-US"/>
-              <a:t>11</a:t>
-            </a:fld>
-            <a:endParaRPr lang="en-US"/>
-          </a:p>
-        </p:txBody>
-      </p:sp>
-    </p:spTree>
-    <p:extLst>
-      <p:ext uri="{BB962C8B-B14F-4D97-AF65-F5344CB8AC3E}">
-        <p14:creationId xmlns:p14="http://schemas.microsoft.com/office/powerpoint/2010/main" val="1024086991"/>
-      </p:ext>
-    </p:extLst>
-  </p:cSld>
-  <p:clrMapOvr>
-    <a:masterClrMapping/>
-  </p:clrMapOvr>
-</p:notes>
-</file>
-
 <file path=ppt/notesSlides/notesSlide12.xml><?xml version="1.0" encoding="utf-8"?>
 <p:notes xmlns:a="http://schemas.openxmlformats.org/drawingml/2006/main" xmlns:r="http://schemas.openxmlformats.org/officeDocument/2006/relationships" xmlns:p="http://schemas.openxmlformats.org/presentationml/2006/main">
   <p:cSld>
@@ -923,103 +828,6 @@
             <a:fld id="{F7021451-1387-4CA6-816F-3879F97B5CBC}" type="slidenum">
               <a:rPr lang="en-US"/>
               <a:t>13</a:t>
-            </a:fld>
-            <a:endParaRPr lang="en-US"/>
-          </a:p>
-        </p:txBody>
-      </p:sp>
-    </p:spTree>
-    <p:extLst>
-      <p:ext uri="{BB962C8B-B14F-4D97-AF65-F5344CB8AC3E}">
-        <p14:creationId xmlns:p14="http://schemas.microsoft.com/office/powerpoint/2010/main" val="1024086991"/>
-      </p:ext>
-    </p:extLst>
-  </p:cSld>
-  <p:clrMapOvr>
-    <a:masterClrMapping/>
-  </p:clrMapOvr>
-</p:notes>
-</file>
-
-<file path=ppt/notesSlides/notesSlide14.xml><?xml version="1.0" encoding="utf-8"?>
-<p:notes xmlns:a="http://schemas.openxmlformats.org/drawingml/2006/main" xmlns:r="http://schemas.openxmlformats.org/officeDocument/2006/relationships" xmlns:p="http://schemas.openxmlformats.org/presentationml/2006/main">
-  <p:cSld>
-    <p:spTree>
-      <p:nvGrpSpPr>
-        <p:cNvPr id="1" name=""/>
-        <p:cNvGrpSpPr/>
-        <p:nvPr/>
-      </p:nvGrpSpPr>
-      <p:grpSpPr>
-        <a:xfrm>
-          <a:off x="0" y="0"/>
-          <a:ext cx="0" cy="0"/>
-          <a:chOff x="0" y="0"/>
-          <a:chExt cx="0" cy="0"/>
-        </a:xfrm>
-      </p:grpSpPr>
-      <p:sp>
-        <p:nvSpPr>
-          <p:cNvPr id="2" name="Slide Image Placeholder 1"/>
-          <p:cNvSpPr>
-            <a:spLocks noGrp="1" noRot="1" noChangeAspect="1"/>
-          </p:cNvSpPr>
-          <p:nvPr>
-            <p:ph type="sldImg"/>
-          </p:nvPr>
-        </p:nvSpPr>
-        <p:spPr/>
-      </p:sp>
-      <p:sp>
-        <p:nvSpPr>
-          <p:cNvPr id="3" name="Notes Placeholder 2"/>
-          <p:cNvSpPr>
-            <a:spLocks noGrp="1"/>
-          </p:cNvSpPr>
-          <p:nvPr>
-            <p:ph type="body" idx="1"/>
-          </p:nvPr>
-        </p:nvSpPr>
-        <p:spPr/>
-        <p:txBody>
-          <a:bodyPr/>
-          <a:lstStyle/>
-          <a:p>
-            <a:r>
-              <a:rPr lang="en-US" dirty="0"/>
-              <a:t>[2-3 ③ 뮤텍스 vs 세마포어 · 약 2분]
-둘을 비교하면 핵심은 표 가운데 두 줄입니다. 소유권과 목적입니다.
-뮤텍스는 소유권이 있고 목적이 상호배제, 즉 데이터 보호입니다. 던지는 질문은 "지금 나만 이 데이터를 만지고 있나?" 입니다.
-세마포어는 소유권이 없고 목적이 신호와 개수 관리입니다. 질문은 "쓸 수 있는 게 몇 개 남았나?" 입니다.
-오른쪽이 왜 둘 다 필요한지에 대한 답입니다.
-뮤텍스만 쓰면, "버퍼가 빌 때까지 기다린다"를 락을 잡았다 풀었다 반복하는 방식으로밖에 못 합니다. 바쁜 대기가 되어 CPU 를 태웁니다.
-세마포어만 쓰면, 개수는 맞지만 두 쓰레드가 head 와 tail 을 동시에 고쳐서 데이터가 깨집니다.
-그래서 둘을 같이 씁니다. 세마포어로 기다리고, 뮤텍스로 보호합니다.
-아래가 생산자–소비자의 표준 순서입니다. 송신은 빈 슬롯 세마포어를 기다리고, 뮤텍스를 잡고, 쓰고, 풀고, 찬 슬롯 세마포어를 올립니다. 수신은 정확히 반대입니다.
-마지막 줄이 중요합니다. 이 순서를 뒤집으면 데드락이 납니다. 뮤텍스를 먼저 잡은 상태에서 세마포어를 기다리면, 상대는 그 락을 영원히 잡지 못하고 세마포어를 올려 줄 수 없습니다. 그래서 반드시 세마포어가 먼저, 뮤텍스가 나중입니다.</a:t>
-            </a:r>
-            <a:endParaRPr lang="en-US" dirty="0"/>
-          </a:p>
-        </p:txBody>
-      </p:sp>
-      <p:sp>
-        <p:nvSpPr>
-          <p:cNvPr id="4" name="Slide Number Placeholder 3"/>
-          <p:cNvSpPr>
-            <a:spLocks noGrp="1"/>
-          </p:cNvSpPr>
-          <p:nvPr>
-            <p:ph type="sldNum" sz="quarter" idx="10"/>
-          </p:nvPr>
-        </p:nvSpPr>
-        <p:spPr/>
-        <p:txBody>
-          <a:bodyPr/>
-          <a:lstStyle/>
-          <a:p>
-            <a:fld id="{F7021451-1387-4CA6-816F-3879F97B5CBC}" type="slidenum">
-              <a:rPr lang="en-US"/>
-              <a:t>14</a:t>
             </a:fld>
             <a:endParaRPr lang="en-US"/>
           </a:p>
@@ -5436,3193 +5244,6 @@
 </p:sld>
 </file>
 
-<file path=ppt/slides/slide11.xml><?xml version="1.0" encoding="utf-8"?>
-<p:sld xmlns:a="http://schemas.openxmlformats.org/drawingml/2006/main" xmlns:r="http://schemas.openxmlformats.org/officeDocument/2006/relationships" xmlns:p="http://schemas.openxmlformats.org/presentationml/2006/main">
-  <p:cSld name="Slide 11">
-    <p:bg>
-      <p:bgPr>
-        <a:solidFill>
-          <a:srgbClr val="FFFFFF"/>
-        </a:solidFill>
-      </p:bgPr>
-    </p:bg>
-    <p:spTree>
-      <p:nvGrpSpPr>
-        <p:cNvPr id="1" name=""/>
-        <p:cNvGrpSpPr/>
-        <p:nvPr/>
-      </p:nvGrpSpPr>
-      <p:grpSpPr>
-        <a:xfrm>
-          <a:off x="0" y="0"/>
-          <a:ext cx="0" cy="0"/>
-          <a:chOff x="0" y="0"/>
-          <a:chExt cx="0" cy="0"/>
-        </a:xfrm>
-      </p:grpSpPr>
-      <p:sp>
-        <p:nvSpPr>
-          <p:cNvPr id="2" name="Shape 0"/>
-          <p:cNvSpPr/>
-          <p:nvPr/>
-        </p:nvSpPr>
-        <p:spPr>
-          <a:xfrm>
-            <a:off x="548640" y="365760"/>
-            <a:ext cx="658368" cy="347472"/>
-          </a:xfrm>
-          <a:prstGeom prst="roundRect">
-            <a:avLst>
-              <a:gd name="adj" fmla="val 21053"/>
-            </a:avLst>
-          </a:prstGeom>
-          <a:solidFill>
-            <a:srgbClr val="C8891F"/>
-          </a:solidFill>
-          <a:ln w="12700">
-            <a:solidFill>
-              <a:srgbClr val="C8891F"/>
-            </a:solidFill>
-            <a:prstDash val="solid"/>
-          </a:ln>
-        </p:spPr>
-      </p:sp>
-      <p:sp>
-        <p:nvSpPr>
-          <p:cNvPr id="3" name="Text 1"/>
-          <p:cNvSpPr txBox="1"/>
-          <p:nvPr/>
-        </p:nvSpPr>
-        <p:spPr>
-          <a:xfrm>
-            <a:off x="548640" y="365760"/>
-            <a:ext cx="658368" cy="347472"/>
-          </a:xfrm>
-          <a:prstGeom prst="rect">
-            <a:avLst/>
-          </a:prstGeom>
-          <a:noFill/>
-          <a:ln/>
-        </p:spPr>
-        <p:txBody>
-          <a:bodyPr wrap="square" lIns="0" tIns="0" rIns="0" bIns="0" rtlCol="0" anchor="ctr"/>
-          <a:lstStyle/>
-          <a:p>
-            <a:pPr algn="ctr" indent="0" marL="0">
-              <a:buNone/>
-            </a:pPr>
-            <a:r>
-              <a:rPr lang="en-US" sz="1300" b="1" dirty="0">
-                <a:solidFill>
-                  <a:srgbClr val="FFFFFF"/>
-                </a:solidFill>
-                <a:latin typeface="맑은 고딕" pitchFamily="34" charset="0"/>
-                <a:ea typeface="맑은 고딕" pitchFamily="34" charset="-122"/>
-                <a:cs typeface="맑은 고딕" pitchFamily="34" charset="-120"/>
-              </a:rPr>
-              <a:t>2-2</a:t>
-            </a:r>
-            <a:endParaRPr lang="en-US" sz="1300" dirty="0"/>
-          </a:p>
-        </p:txBody>
-      </p:sp>
-      <p:sp>
-        <p:nvSpPr>
-          <p:cNvPr id="4" name="Text 2"/>
-          <p:cNvSpPr txBox="1"/>
-          <p:nvPr/>
-        </p:nvSpPr>
-        <p:spPr>
-          <a:xfrm>
-            <a:off x="1371600" y="274320"/>
-            <a:ext cx="10271455" cy="512064"/>
-          </a:xfrm>
-          <a:prstGeom prst="rect">
-            <a:avLst/>
-          </a:prstGeom>
-          <a:noFill/>
-          <a:ln/>
-        </p:spPr>
-        <p:txBody>
-          <a:bodyPr wrap="square" lIns="0" tIns="0" rIns="0" bIns="0" rtlCol="0" anchor="ctr"/>
-          <a:lstStyle/>
-          <a:p>
-            <a:pPr indent="0" marL="0">
-              <a:buNone/>
-            </a:pPr>
-            <a:r>
-              <a:rPr lang="en-US" sz="2900" b="1" dirty="0">
-                <a:solidFill>
-                  <a:srgbClr val="1E232E"/>
-                </a:solidFill>
-                <a:latin typeface="맑은 고딕" pitchFamily="34" charset="0"/>
-                <a:ea typeface="맑은 고딕" pitchFamily="34" charset="-122"/>
-                <a:cs typeface="맑은 고딕" pitchFamily="34" charset="-120"/>
-              </a:rPr>
-              <a:t>세 가지 비교 — 그리고 조합</a:t>
-            </a:r>
-            <a:endParaRPr lang="en-US" sz="2900" dirty="0"/>
-          </a:p>
-        </p:txBody>
-      </p:sp>
-      <p:sp>
-        <p:nvSpPr>
-          <p:cNvPr id="5" name="Text 3"/>
-          <p:cNvSpPr txBox="1"/>
-          <p:nvPr/>
-        </p:nvSpPr>
-        <p:spPr>
-          <a:xfrm>
-            <a:off x="1371600" y="804672"/>
-            <a:ext cx="10271455" cy="310896"/>
-          </a:xfrm>
-          <a:prstGeom prst="rect">
-            <a:avLst/>
-          </a:prstGeom>
-          <a:noFill/>
-          <a:ln/>
-        </p:spPr>
-        <p:txBody>
-          <a:bodyPr wrap="square" lIns="0" tIns="0" rIns="0" bIns="0" rtlCol="0" anchor="ctr"/>
-          <a:lstStyle/>
-          <a:p>
-            <a:pPr indent="0" marL="0">
-              <a:buNone/>
-            </a:pPr>
-            <a:r>
-              <a:rPr lang="en-US" sz="1250" dirty="0">
-                <a:solidFill>
-                  <a:srgbClr val="7A828F"/>
-                </a:solidFill>
-                <a:latin typeface="맑은 고딕" pitchFamily="34" charset="0"/>
-                <a:ea typeface="맑은 고딕" pitchFamily="34" charset="-122"/>
-                <a:cs typeface="맑은 고딕" pitchFamily="34" charset="-120"/>
-              </a:rPr>
-              <a:t>메시지 큐는 커널이 주는 기능, 링버퍼는 직접 짜는 자료구조, 공유메모리는 그 링버퍼를 올릴 메모리다</a:t>
-            </a:r>
-            <a:endParaRPr lang="en-US" sz="1250" dirty="0"/>
-          </a:p>
-        </p:txBody>
-      </p:sp>
-      <p:graphicFrame>
-        <p:nvGraphicFramePr>
-          <p:cNvPr id="12" name="Table 0"/>
-          <p:cNvGraphicFramePr>
-            <a:graphicFrameLocks noGrp="1"/>
-          </p:cNvGraphicFramePr>
-          <p:nvPr>
-            <p:extLst>
-              <p:ext uri="{D42A27DB-BD31-4B8C-83A1-F6EECF244321}">
-                <p14:modId xmlns:p14="http://schemas.microsoft.com/office/powerpoint/2010/main" val="1579011935"/>
-              </p:ext>
-            </p:extLst>
-          </p:nvPr>
-        </p:nvGraphicFramePr>
-        <p:xfrm>
-          <a:off x="548640" y="1298448"/>
-          <a:ext cx="11094415" cy="914400"/>
-        </p:xfrm>
-        <a:graphic>
-          <a:graphicData uri="http://schemas.openxmlformats.org/drawingml/2006/table">
-            <a:tbl>
-              <a:tblPr/>
-              <a:tblGrid>
-                <a:gridCol w="1737360"/>
-                <a:gridCol w="3118104"/>
-                <a:gridCol w="3118104"/>
-                <a:gridCol w="3118104"/>
-              </a:tblGrid>
-              <a:tr h="384048">
-                <a:tc>
-                  <a:txBody>
-                    <a:bodyPr/>
-                    <a:lstStyle/>
-                    <a:p>
-                      <a:pPr algn="l" indent="0" marL="0">
-                        <a:buNone/>
-                      </a:pPr>
-                      <a:r>
-                        <a:rPr lang="en-US" sz="1150" b="1" dirty="0">
-                          <a:solidFill>
-                            <a:srgbClr val="FFFFFF"/>
-                          </a:solidFill>
-                          <a:latin typeface="맑은 고딕" pitchFamily="34" charset="0"/>
-                          <a:ea typeface="맑은 고딕" pitchFamily="34" charset="-122"/>
-                          <a:cs typeface="맑은 고딕" pitchFamily="34" charset="-120"/>
-                        </a:rPr>
-                        <a:t>구분</a:t>
-                      </a:r>
-                      <a:endParaRPr lang="en-US" sz="1150" dirty="0">
-                        <a:latin typeface="맑은 고딕" charset="0"/>
-                        <a:ea typeface="맑은 고딕" charset="0"/>
-                        <a:cs typeface="맑은 고딕" charset="0"/>
-                      </a:endParaRPr>
-                    </a:p>
-                  </a:txBody>
-                  <a:tcPr marL="76200" marR="76200" marT="25400" marB="25400" anchor="ctr">
-                    <a:lnL w="9525" cap="flat" cmpd="sng" algn="ctr">
-                      <a:solidFill>
-                        <a:srgbClr val="D5DBE4"/>
-                      </a:solidFill>
-                      <a:prstDash val="solid"/>
-                      <a:round/>
-                      <a:headEnd type="none" w="med" len="med"/>
-                      <a:tailEnd type="none" w="med" len="med"/>
-                    </a:lnL>
-                    <a:lnR w="9525" cap="flat" cmpd="sng" algn="ctr">
-                      <a:solidFill>
-                        <a:srgbClr val="D5DBE4"/>
-                      </a:solidFill>
-                      <a:prstDash val="solid"/>
-                      <a:round/>
-                      <a:headEnd type="none" w="med" len="med"/>
-                      <a:tailEnd type="none" w="med" len="med"/>
-                    </a:lnR>
-                    <a:lnT w="9525" cap="flat" cmpd="sng" algn="ctr">
-                      <a:solidFill>
-                        <a:srgbClr val="D5DBE4"/>
-                      </a:solidFill>
-                      <a:prstDash val="solid"/>
-                      <a:round/>
-                      <a:headEnd type="none" w="med" len="med"/>
-                      <a:tailEnd type="none" w="med" len="med"/>
-                    </a:lnT>
-                    <a:lnB w="9525" cap="flat" cmpd="sng" algn="ctr">
-                      <a:solidFill>
-                        <a:srgbClr val="D5DBE4"/>
-                      </a:solidFill>
-                      <a:prstDash val="solid"/>
-                      <a:round/>
-                      <a:headEnd type="none" w="med" len="med"/>
-                      <a:tailEnd type="none" w="med" len="med"/>
-                    </a:lnB>
-                    <a:solidFill>
-                      <a:srgbClr val="1E232E"/>
-                    </a:solidFill>
-                  </a:tcPr>
-                </a:tc>
-                <a:tc>
-                  <a:txBody>
-                    <a:bodyPr/>
-                    <a:lstStyle/>
-                    <a:p>
-                      <a:pPr algn="ctr" indent="0" marL="0">
-                        <a:buNone/>
-                      </a:pPr>
-                      <a:r>
-                        <a:rPr lang="en-US" sz="1150" b="1" dirty="0">
-                          <a:solidFill>
-                            <a:srgbClr val="FFFFFF"/>
-                          </a:solidFill>
-                          <a:latin typeface="맑은 고딕" pitchFamily="34" charset="0"/>
-                          <a:ea typeface="맑은 고딕" pitchFamily="34" charset="-122"/>
-                          <a:cs typeface="맑은 고딕" pitchFamily="34" charset="-120"/>
-                        </a:rPr>
-                        <a:t>메시지 큐</a:t>
-                      </a:r>
-                      <a:endParaRPr lang="en-US" sz="1150" dirty="0">
-                        <a:latin typeface="맑은 고딕" charset="0"/>
-                        <a:ea typeface="맑은 고딕" charset="0"/>
-                        <a:cs typeface="맑은 고딕" charset="0"/>
-                      </a:endParaRPr>
-                    </a:p>
-                  </a:txBody>
-                  <a:tcPr marL="76200" marR="76200" marT="25400" marB="25400" anchor="ctr">
-                    <a:lnL w="9525" cap="flat" cmpd="sng" algn="ctr">
-                      <a:solidFill>
-                        <a:srgbClr val="D5DBE4"/>
-                      </a:solidFill>
-                      <a:prstDash val="solid"/>
-                      <a:round/>
-                      <a:headEnd type="none" w="med" len="med"/>
-                      <a:tailEnd type="none" w="med" len="med"/>
-                    </a:lnL>
-                    <a:lnR w="9525" cap="flat" cmpd="sng" algn="ctr">
-                      <a:solidFill>
-                        <a:srgbClr val="D5DBE4"/>
-                      </a:solidFill>
-                      <a:prstDash val="solid"/>
-                      <a:round/>
-                      <a:headEnd type="none" w="med" len="med"/>
-                      <a:tailEnd type="none" w="med" len="med"/>
-                    </a:lnR>
-                    <a:lnT w="9525" cap="flat" cmpd="sng" algn="ctr">
-                      <a:solidFill>
-                        <a:srgbClr val="D5DBE4"/>
-                      </a:solidFill>
-                      <a:prstDash val="solid"/>
-                      <a:round/>
-                      <a:headEnd type="none" w="med" len="med"/>
-                      <a:tailEnd type="none" w="med" len="med"/>
-                    </a:lnT>
-                    <a:lnB w="9525" cap="flat" cmpd="sng" algn="ctr">
-                      <a:solidFill>
-                        <a:srgbClr val="D5DBE4"/>
-                      </a:solidFill>
-                      <a:prstDash val="solid"/>
-                      <a:round/>
-                      <a:headEnd type="none" w="med" len="med"/>
-                      <a:tailEnd type="none" w="med" len="med"/>
-                    </a:lnB>
-                    <a:solidFill>
-                      <a:srgbClr val="1E232E"/>
-                    </a:solidFill>
-                  </a:tcPr>
-                </a:tc>
-                <a:tc>
-                  <a:txBody>
-                    <a:bodyPr/>
-                    <a:lstStyle/>
-                    <a:p>
-                      <a:pPr algn="ctr" indent="0" marL="0">
-                        <a:buNone/>
-                      </a:pPr>
-                      <a:r>
-                        <a:rPr lang="en-US" sz="1150" b="1" dirty="0">
-                          <a:solidFill>
-                            <a:srgbClr val="FFFFFF"/>
-                          </a:solidFill>
-                          <a:latin typeface="맑은 고딕" pitchFamily="34" charset="0"/>
-                          <a:ea typeface="맑은 고딕" pitchFamily="34" charset="-122"/>
-                          <a:cs typeface="맑은 고딕" pitchFamily="34" charset="-120"/>
-                        </a:rPr>
-                        <a:t>링버퍼</a:t>
-                      </a:r>
-                      <a:endParaRPr lang="en-US" sz="1150" dirty="0">
-                        <a:latin typeface="맑은 고딕" charset="0"/>
-                        <a:ea typeface="맑은 고딕" charset="0"/>
-                        <a:cs typeface="맑은 고딕" charset="0"/>
-                      </a:endParaRPr>
-                    </a:p>
-                  </a:txBody>
-                  <a:tcPr marL="76200" marR="76200" marT="25400" marB="25400" anchor="ctr">
-                    <a:lnL w="9525" cap="flat" cmpd="sng" algn="ctr">
-                      <a:solidFill>
-                        <a:srgbClr val="D5DBE4"/>
-                      </a:solidFill>
-                      <a:prstDash val="solid"/>
-                      <a:round/>
-                      <a:headEnd type="none" w="med" len="med"/>
-                      <a:tailEnd type="none" w="med" len="med"/>
-                    </a:lnL>
-                    <a:lnR w="9525" cap="flat" cmpd="sng" algn="ctr">
-                      <a:solidFill>
-                        <a:srgbClr val="D5DBE4"/>
-                      </a:solidFill>
-                      <a:prstDash val="solid"/>
-                      <a:round/>
-                      <a:headEnd type="none" w="med" len="med"/>
-                      <a:tailEnd type="none" w="med" len="med"/>
-                    </a:lnR>
-                    <a:lnT w="9525" cap="flat" cmpd="sng" algn="ctr">
-                      <a:solidFill>
-                        <a:srgbClr val="D5DBE4"/>
-                      </a:solidFill>
-                      <a:prstDash val="solid"/>
-                      <a:round/>
-                      <a:headEnd type="none" w="med" len="med"/>
-                      <a:tailEnd type="none" w="med" len="med"/>
-                    </a:lnT>
-                    <a:lnB w="9525" cap="flat" cmpd="sng" algn="ctr">
-                      <a:solidFill>
-                        <a:srgbClr val="D5DBE4"/>
-                      </a:solidFill>
-                      <a:prstDash val="solid"/>
-                      <a:round/>
-                      <a:headEnd type="none" w="med" len="med"/>
-                      <a:tailEnd type="none" w="med" len="med"/>
-                    </a:lnB>
-                    <a:solidFill>
-                      <a:srgbClr val="1E232E"/>
-                    </a:solidFill>
-                  </a:tcPr>
-                </a:tc>
-                <a:tc>
-                  <a:txBody>
-                    <a:bodyPr/>
-                    <a:lstStyle/>
-                    <a:p>
-                      <a:pPr algn="ctr" indent="0" marL="0">
-                        <a:buNone/>
-                      </a:pPr>
-                      <a:r>
-                        <a:rPr lang="en-US" sz="1150" b="1" dirty="0">
-                          <a:solidFill>
-                            <a:srgbClr val="FFFFFF"/>
-                          </a:solidFill>
-                          <a:latin typeface="맑은 고딕" pitchFamily="34" charset="0"/>
-                          <a:ea typeface="맑은 고딕" pitchFamily="34" charset="-122"/>
-                          <a:cs typeface="맑은 고딕" pitchFamily="34" charset="-120"/>
-                        </a:rPr>
-                        <a:t>공유메모리</a:t>
-                      </a:r>
-                      <a:endParaRPr lang="en-US" sz="1150" dirty="0">
-                        <a:latin typeface="맑은 고딕" charset="0"/>
-                        <a:ea typeface="맑은 고딕" charset="0"/>
-                        <a:cs typeface="맑은 고딕" charset="0"/>
-                      </a:endParaRPr>
-                    </a:p>
-                  </a:txBody>
-                  <a:tcPr marL="76200" marR="76200" marT="25400" marB="25400" anchor="ctr">
-                    <a:lnL w="9525" cap="flat" cmpd="sng" algn="ctr">
-                      <a:solidFill>
-                        <a:srgbClr val="D5DBE4"/>
-                      </a:solidFill>
-                      <a:prstDash val="solid"/>
-                      <a:round/>
-                      <a:headEnd type="none" w="med" len="med"/>
-                      <a:tailEnd type="none" w="med" len="med"/>
-                    </a:lnL>
-                    <a:lnR w="9525" cap="flat" cmpd="sng" algn="ctr">
-                      <a:solidFill>
-                        <a:srgbClr val="D5DBE4"/>
-                      </a:solidFill>
-                      <a:prstDash val="solid"/>
-                      <a:round/>
-                      <a:headEnd type="none" w="med" len="med"/>
-                      <a:tailEnd type="none" w="med" len="med"/>
-                    </a:lnR>
-                    <a:lnT w="9525" cap="flat" cmpd="sng" algn="ctr">
-                      <a:solidFill>
-                        <a:srgbClr val="D5DBE4"/>
-                      </a:solidFill>
-                      <a:prstDash val="solid"/>
-                      <a:round/>
-                      <a:headEnd type="none" w="med" len="med"/>
-                      <a:tailEnd type="none" w="med" len="med"/>
-                    </a:lnT>
-                    <a:lnB w="9525" cap="flat" cmpd="sng" algn="ctr">
-                      <a:solidFill>
-                        <a:srgbClr val="D5DBE4"/>
-                      </a:solidFill>
-                      <a:prstDash val="solid"/>
-                      <a:round/>
-                      <a:headEnd type="none" w="med" len="med"/>
-                      <a:tailEnd type="none" w="med" len="med"/>
-                    </a:lnB>
-                    <a:solidFill>
-                      <a:srgbClr val="1E232E"/>
-                    </a:solidFill>
-                  </a:tcPr>
-                </a:tc>
-              </a:tr>
-              <a:tr h="384048">
-                <a:tc>
-                  <a:txBody>
-                    <a:bodyPr/>
-                    <a:lstStyle/>
-                    <a:p>
-                      <a:pPr algn="l" indent="0" marL="0">
-                        <a:buNone/>
-                      </a:pPr>
-                      <a:r>
-                        <a:rPr lang="en-US" sz="1100" b="1" dirty="0">
-                          <a:solidFill>
-                            <a:srgbClr val="1E232E"/>
-                          </a:solidFill>
-                          <a:latin typeface="맑은 고딕" pitchFamily="34" charset="0"/>
-                          <a:ea typeface="맑은 고딕" pitchFamily="34" charset="-122"/>
-                          <a:cs typeface="맑은 고딕" pitchFamily="34" charset="-120"/>
-                        </a:rPr>
-                        <a:t>무엇인가</a:t>
-                      </a:r>
-                      <a:endParaRPr lang="en-US" sz="1100" dirty="0">
-                        <a:latin typeface="맑은 고딕" charset="0"/>
-                        <a:ea typeface="맑은 고딕" charset="0"/>
-                        <a:cs typeface="맑은 고딕" charset="0"/>
-                      </a:endParaRPr>
-                    </a:p>
-                  </a:txBody>
-                  <a:tcPr marL="76200" marR="76200" marT="25400" marB="25400" anchor="ctr">
-                    <a:lnL w="9525" cap="flat" cmpd="sng" algn="ctr">
-                      <a:solidFill>
-                        <a:srgbClr val="D5DBE4"/>
-                      </a:solidFill>
-                      <a:prstDash val="solid"/>
-                      <a:round/>
-                      <a:headEnd type="none" w="med" len="med"/>
-                      <a:tailEnd type="none" w="med" len="med"/>
-                    </a:lnL>
-                    <a:lnR w="9525" cap="flat" cmpd="sng" algn="ctr">
-                      <a:solidFill>
-                        <a:srgbClr val="D5DBE4"/>
-                      </a:solidFill>
-                      <a:prstDash val="solid"/>
-                      <a:round/>
-                      <a:headEnd type="none" w="med" len="med"/>
-                      <a:tailEnd type="none" w="med" len="med"/>
-                    </a:lnR>
-                    <a:lnT w="9525" cap="flat" cmpd="sng" algn="ctr">
-                      <a:solidFill>
-                        <a:srgbClr val="D5DBE4"/>
-                      </a:solidFill>
-                      <a:prstDash val="solid"/>
-                      <a:round/>
-                      <a:headEnd type="none" w="med" len="med"/>
-                      <a:tailEnd type="none" w="med" len="med"/>
-                    </a:lnT>
-                    <a:lnB w="9525" cap="flat" cmpd="sng" algn="ctr">
-                      <a:solidFill>
-                        <a:srgbClr val="D5DBE4"/>
-                      </a:solidFill>
-                      <a:prstDash val="solid"/>
-                      <a:round/>
-                      <a:headEnd type="none" w="med" len="med"/>
-                      <a:tailEnd type="none" w="med" len="med"/>
-                    </a:lnB>
-                    <a:solidFill>
-                      <a:srgbClr val="FFFFFF"/>
-                    </a:solidFill>
-                  </a:tcPr>
-                </a:tc>
-                <a:tc>
-                  <a:txBody>
-                    <a:bodyPr/>
-                    <a:lstStyle/>
-                    <a:p>
-                      <a:pPr algn="ctr" indent="0" marL="0">
-                        <a:buNone/>
-                      </a:pPr>
-                      <a:r>
-                        <a:rPr lang="en-US" sz="1100" dirty="0">
-                          <a:solidFill>
-                            <a:srgbClr val="3D4451"/>
-                          </a:solidFill>
-                          <a:latin typeface="맑은 고딕" pitchFamily="34" charset="0"/>
-                          <a:ea typeface="맑은 고딕" pitchFamily="34" charset="-122"/>
-                          <a:cs typeface="맑은 고딕" pitchFamily="34" charset="-120"/>
-                        </a:rPr>
-                        <a:t>커널이 관리하는 IPC 객체</a:t>
-                      </a:r>
-                      <a:endParaRPr lang="en-US" sz="1100" dirty="0">
-                        <a:latin typeface="맑은 고딕" charset="0"/>
-                        <a:ea typeface="맑은 고딕" charset="0"/>
-                        <a:cs typeface="맑은 고딕" charset="0"/>
-                      </a:endParaRPr>
-                    </a:p>
-                  </a:txBody>
-                  <a:tcPr marL="76200" marR="76200" marT="25400" marB="25400" anchor="ctr">
-                    <a:lnL w="9525" cap="flat" cmpd="sng" algn="ctr">
-                      <a:solidFill>
-                        <a:srgbClr val="D5DBE4"/>
-                      </a:solidFill>
-                      <a:prstDash val="solid"/>
-                      <a:round/>
-                      <a:headEnd type="none" w="med" len="med"/>
-                      <a:tailEnd type="none" w="med" len="med"/>
-                    </a:lnL>
-                    <a:lnR w="9525" cap="flat" cmpd="sng" algn="ctr">
-                      <a:solidFill>
-                        <a:srgbClr val="D5DBE4"/>
-                      </a:solidFill>
-                      <a:prstDash val="solid"/>
-                      <a:round/>
-                      <a:headEnd type="none" w="med" len="med"/>
-                      <a:tailEnd type="none" w="med" len="med"/>
-                    </a:lnR>
-                    <a:lnT w="9525" cap="flat" cmpd="sng" algn="ctr">
-                      <a:solidFill>
-                        <a:srgbClr val="D5DBE4"/>
-                      </a:solidFill>
-                      <a:prstDash val="solid"/>
-                      <a:round/>
-                      <a:headEnd type="none" w="med" len="med"/>
-                      <a:tailEnd type="none" w="med" len="med"/>
-                    </a:lnT>
-                    <a:lnB w="9525" cap="flat" cmpd="sng" algn="ctr">
-                      <a:solidFill>
-                        <a:srgbClr val="D5DBE4"/>
-                      </a:solidFill>
-                      <a:prstDash val="solid"/>
-                      <a:round/>
-                      <a:headEnd type="none" w="med" len="med"/>
-                      <a:tailEnd type="none" w="med" len="med"/>
-                    </a:lnB>
-                    <a:solidFill>
-                      <a:srgbClr val="FFFFFF"/>
-                    </a:solidFill>
-                  </a:tcPr>
-                </a:tc>
-                <a:tc>
-                  <a:txBody>
-                    <a:bodyPr/>
-                    <a:lstStyle/>
-                    <a:p>
-                      <a:pPr algn="ctr" indent="0" marL="0">
-                        <a:buNone/>
-                      </a:pPr>
-                      <a:r>
-                        <a:rPr lang="en-US" sz="1100" dirty="0">
-                          <a:solidFill>
-                            <a:srgbClr val="3D4451"/>
-                          </a:solidFill>
-                          <a:latin typeface="맑은 고딕" pitchFamily="34" charset="0"/>
-                          <a:ea typeface="맑은 고딕" pitchFamily="34" charset="-122"/>
-                          <a:cs typeface="맑은 고딕" pitchFamily="34" charset="-120"/>
-                        </a:rPr>
-                        <a:t>자료구조 (IPC 수단 아님)</a:t>
-                      </a:r>
-                      <a:endParaRPr lang="en-US" sz="1100" dirty="0">
-                        <a:latin typeface="맑은 고딕" charset="0"/>
-                        <a:ea typeface="맑은 고딕" charset="0"/>
-                        <a:cs typeface="맑은 고딕" charset="0"/>
-                      </a:endParaRPr>
-                    </a:p>
-                  </a:txBody>
-                  <a:tcPr marL="76200" marR="76200" marT="25400" marB="25400" anchor="ctr">
-                    <a:lnL w="9525" cap="flat" cmpd="sng" algn="ctr">
-                      <a:solidFill>
-                        <a:srgbClr val="D5DBE4"/>
-                      </a:solidFill>
-                      <a:prstDash val="solid"/>
-                      <a:round/>
-                      <a:headEnd type="none" w="med" len="med"/>
-                      <a:tailEnd type="none" w="med" len="med"/>
-                    </a:lnL>
-                    <a:lnR w="9525" cap="flat" cmpd="sng" algn="ctr">
-                      <a:solidFill>
-                        <a:srgbClr val="D5DBE4"/>
-                      </a:solidFill>
-                      <a:prstDash val="solid"/>
-                      <a:round/>
-                      <a:headEnd type="none" w="med" len="med"/>
-                      <a:tailEnd type="none" w="med" len="med"/>
-                    </a:lnR>
-                    <a:lnT w="9525" cap="flat" cmpd="sng" algn="ctr">
-                      <a:solidFill>
-                        <a:srgbClr val="D5DBE4"/>
-                      </a:solidFill>
-                      <a:prstDash val="solid"/>
-                      <a:round/>
-                      <a:headEnd type="none" w="med" len="med"/>
-                      <a:tailEnd type="none" w="med" len="med"/>
-                    </a:lnT>
-                    <a:lnB w="9525" cap="flat" cmpd="sng" algn="ctr">
-                      <a:solidFill>
-                        <a:srgbClr val="D5DBE4"/>
-                      </a:solidFill>
-                      <a:prstDash val="solid"/>
-                      <a:round/>
-                      <a:headEnd type="none" w="med" len="med"/>
-                      <a:tailEnd type="none" w="med" len="med"/>
-                    </a:lnB>
-                    <a:solidFill>
-                      <a:srgbClr val="FFFFFF"/>
-                    </a:solidFill>
-                  </a:tcPr>
-                </a:tc>
-                <a:tc>
-                  <a:txBody>
-                    <a:bodyPr/>
-                    <a:lstStyle/>
-                    <a:p>
-                      <a:pPr algn="ctr" indent="0" marL="0">
-                        <a:buNone/>
-                      </a:pPr>
-                      <a:r>
-                        <a:rPr lang="en-US" sz="1100" dirty="0">
-                          <a:solidFill>
-                            <a:srgbClr val="3D4451"/>
-                          </a:solidFill>
-                          <a:latin typeface="맑은 고딕" pitchFamily="34" charset="0"/>
-                          <a:ea typeface="맑은 고딕" pitchFamily="34" charset="-122"/>
-                          <a:cs typeface="맑은 고딕" pitchFamily="34" charset="-120"/>
-                        </a:rPr>
-                        <a:t>커널이 연결해 주는 메모리</a:t>
-                      </a:r>
-                      <a:endParaRPr lang="en-US" sz="1100" dirty="0">
-                        <a:latin typeface="맑은 고딕" charset="0"/>
-                        <a:ea typeface="맑은 고딕" charset="0"/>
-                        <a:cs typeface="맑은 고딕" charset="0"/>
-                      </a:endParaRPr>
-                    </a:p>
-                  </a:txBody>
-                  <a:tcPr marL="76200" marR="76200" marT="25400" marB="25400" anchor="ctr">
-                    <a:lnL w="9525" cap="flat" cmpd="sng" algn="ctr">
-                      <a:solidFill>
-                        <a:srgbClr val="D5DBE4"/>
-                      </a:solidFill>
-                      <a:prstDash val="solid"/>
-                      <a:round/>
-                      <a:headEnd type="none" w="med" len="med"/>
-                      <a:tailEnd type="none" w="med" len="med"/>
-                    </a:lnL>
-                    <a:lnR w="9525" cap="flat" cmpd="sng" algn="ctr">
-                      <a:solidFill>
-                        <a:srgbClr val="D5DBE4"/>
-                      </a:solidFill>
-                      <a:prstDash val="solid"/>
-                      <a:round/>
-                      <a:headEnd type="none" w="med" len="med"/>
-                      <a:tailEnd type="none" w="med" len="med"/>
-                    </a:lnR>
-                    <a:lnT w="9525" cap="flat" cmpd="sng" algn="ctr">
-                      <a:solidFill>
-                        <a:srgbClr val="D5DBE4"/>
-                      </a:solidFill>
-                      <a:prstDash val="solid"/>
-                      <a:round/>
-                      <a:headEnd type="none" w="med" len="med"/>
-                      <a:tailEnd type="none" w="med" len="med"/>
-                    </a:lnT>
-                    <a:lnB w="9525" cap="flat" cmpd="sng" algn="ctr">
-                      <a:solidFill>
-                        <a:srgbClr val="D5DBE4"/>
-                      </a:solidFill>
-                      <a:prstDash val="solid"/>
-                      <a:round/>
-                      <a:headEnd type="none" w="med" len="med"/>
-                      <a:tailEnd type="none" w="med" len="med"/>
-                    </a:lnB>
-                    <a:solidFill>
-                      <a:srgbClr val="FFFFFF"/>
-                    </a:solidFill>
-                  </a:tcPr>
-                </a:tc>
-              </a:tr>
-              <a:tr h="384048">
-                <a:tc>
-                  <a:txBody>
-                    <a:bodyPr/>
-                    <a:lstStyle/>
-                    <a:p>
-                      <a:pPr algn="l" indent="0" marL="0">
-                        <a:buNone/>
-                      </a:pPr>
-                      <a:r>
-                        <a:rPr lang="en-US" sz="1100" b="1" dirty="0">
-                          <a:solidFill>
-                            <a:srgbClr val="1E232E"/>
-                          </a:solidFill>
-                          <a:latin typeface="맑은 고딕" pitchFamily="34" charset="0"/>
-                          <a:ea typeface="맑은 고딕" pitchFamily="34" charset="-122"/>
-                          <a:cs typeface="맑은 고딕" pitchFamily="34" charset="-120"/>
-                        </a:rPr>
-                        <a:t>데이터 단위</a:t>
-                      </a:r>
-                      <a:endParaRPr lang="en-US" sz="1100" dirty="0">
-                        <a:latin typeface="맑은 고딕" charset="0"/>
-                        <a:ea typeface="맑은 고딕" charset="0"/>
-                        <a:cs typeface="맑은 고딕" charset="0"/>
-                      </a:endParaRPr>
-                    </a:p>
-                  </a:txBody>
-                  <a:tcPr marL="76200" marR="76200" marT="25400" marB="25400" anchor="ctr">
-                    <a:lnL w="9525" cap="flat" cmpd="sng" algn="ctr">
-                      <a:solidFill>
-                        <a:srgbClr val="D5DBE4"/>
-                      </a:solidFill>
-                      <a:prstDash val="solid"/>
-                      <a:round/>
-                      <a:headEnd type="none" w="med" len="med"/>
-                      <a:tailEnd type="none" w="med" len="med"/>
-                    </a:lnL>
-                    <a:lnR w="9525" cap="flat" cmpd="sng" algn="ctr">
-                      <a:solidFill>
-                        <a:srgbClr val="D5DBE4"/>
-                      </a:solidFill>
-                      <a:prstDash val="solid"/>
-                      <a:round/>
-                      <a:headEnd type="none" w="med" len="med"/>
-                      <a:tailEnd type="none" w="med" len="med"/>
-                    </a:lnR>
-                    <a:lnT w="9525" cap="flat" cmpd="sng" algn="ctr">
-                      <a:solidFill>
-                        <a:srgbClr val="D5DBE4"/>
-                      </a:solidFill>
-                      <a:prstDash val="solid"/>
-                      <a:round/>
-                      <a:headEnd type="none" w="med" len="med"/>
-                      <a:tailEnd type="none" w="med" len="med"/>
-                    </a:lnT>
-                    <a:lnB w="9525" cap="flat" cmpd="sng" algn="ctr">
-                      <a:solidFill>
-                        <a:srgbClr val="D5DBE4"/>
-                      </a:solidFill>
-                      <a:prstDash val="solid"/>
-                      <a:round/>
-                      <a:headEnd type="none" w="med" len="med"/>
-                      <a:tailEnd type="none" w="med" len="med"/>
-                    </a:lnB>
-                    <a:solidFill>
-                      <a:srgbClr val="F2F4F7"/>
-                    </a:solidFill>
-                  </a:tcPr>
-                </a:tc>
-                <a:tc>
-                  <a:txBody>
-                    <a:bodyPr/>
-                    <a:lstStyle/>
-                    <a:p>
-                      <a:pPr algn="ctr" indent="0" marL="0">
-                        <a:buNone/>
-                      </a:pPr>
-                      <a:r>
-                        <a:rPr lang="en-US" sz="1100" dirty="0">
-                          <a:solidFill>
-                            <a:srgbClr val="3D4451"/>
-                          </a:solidFill>
-                          <a:latin typeface="맑은 고딕" pitchFamily="34" charset="0"/>
-                          <a:ea typeface="맑은 고딕" pitchFamily="34" charset="-122"/>
-                          <a:cs typeface="맑은 고딕" pitchFamily="34" charset="-120"/>
-                        </a:rPr>
-                        <a:t>메시지 1 개 — 넣은 만큼 나온다</a:t>
-                      </a:r>
-                      <a:endParaRPr lang="en-US" sz="1100" dirty="0">
-                        <a:latin typeface="맑은 고딕" charset="0"/>
-                        <a:ea typeface="맑은 고딕" charset="0"/>
-                        <a:cs typeface="맑은 고딕" charset="0"/>
-                      </a:endParaRPr>
-                    </a:p>
-                  </a:txBody>
-                  <a:tcPr marL="76200" marR="76200" marT="25400" marB="25400" anchor="ctr">
-                    <a:lnL w="9525" cap="flat" cmpd="sng" algn="ctr">
-                      <a:solidFill>
-                        <a:srgbClr val="D5DBE4"/>
-                      </a:solidFill>
-                      <a:prstDash val="solid"/>
-                      <a:round/>
-                      <a:headEnd type="none" w="med" len="med"/>
-                      <a:tailEnd type="none" w="med" len="med"/>
-                    </a:lnL>
-                    <a:lnR w="9525" cap="flat" cmpd="sng" algn="ctr">
-                      <a:solidFill>
-                        <a:srgbClr val="D5DBE4"/>
-                      </a:solidFill>
-                      <a:prstDash val="solid"/>
-                      <a:round/>
-                      <a:headEnd type="none" w="med" len="med"/>
-                      <a:tailEnd type="none" w="med" len="med"/>
-                    </a:lnR>
-                    <a:lnT w="9525" cap="flat" cmpd="sng" algn="ctr">
-                      <a:solidFill>
-                        <a:srgbClr val="D5DBE4"/>
-                      </a:solidFill>
-                      <a:prstDash val="solid"/>
-                      <a:round/>
-                      <a:headEnd type="none" w="med" len="med"/>
-                      <a:tailEnd type="none" w="med" len="med"/>
-                    </a:lnT>
-                    <a:lnB w="9525" cap="flat" cmpd="sng" algn="ctr">
-                      <a:solidFill>
-                        <a:srgbClr val="D5DBE4"/>
-                      </a:solidFill>
-                      <a:prstDash val="solid"/>
-                      <a:round/>
-                      <a:headEnd type="none" w="med" len="med"/>
-                      <a:tailEnd type="none" w="med" len="med"/>
-                    </a:lnB>
-                    <a:solidFill>
-                      <a:srgbClr val="F2F4F7"/>
-                    </a:solidFill>
-                  </a:tcPr>
-                </a:tc>
-                <a:tc>
-                  <a:txBody>
-                    <a:bodyPr/>
-                    <a:lstStyle/>
-                    <a:p>
-                      <a:pPr algn="ctr" indent="0" marL="0">
-                        <a:buNone/>
-                      </a:pPr>
-                      <a:r>
-                        <a:rPr lang="en-US" sz="1100" dirty="0">
-                          <a:solidFill>
-                            <a:srgbClr val="3D4451"/>
-                          </a:solidFill>
-                          <a:latin typeface="맑은 고딕" pitchFamily="34" charset="0"/>
-                          <a:ea typeface="맑은 고딕" pitchFamily="34" charset="-122"/>
-                          <a:cs typeface="맑은 고딕" pitchFamily="34" charset="-120"/>
-                        </a:rPr>
-                        <a:t>슬롯 1 칸 — 크기 고정</a:t>
-                      </a:r>
-                      <a:endParaRPr lang="en-US" sz="1100" dirty="0">
-                        <a:latin typeface="맑은 고딕" charset="0"/>
-                        <a:ea typeface="맑은 고딕" charset="0"/>
-                        <a:cs typeface="맑은 고딕" charset="0"/>
-                      </a:endParaRPr>
-                    </a:p>
-                  </a:txBody>
-                  <a:tcPr marL="76200" marR="76200" marT="25400" marB="25400" anchor="ctr">
-                    <a:lnL w="9525" cap="flat" cmpd="sng" algn="ctr">
-                      <a:solidFill>
-                        <a:srgbClr val="D5DBE4"/>
-                      </a:solidFill>
-                      <a:prstDash val="solid"/>
-                      <a:round/>
-                      <a:headEnd type="none" w="med" len="med"/>
-                      <a:tailEnd type="none" w="med" len="med"/>
-                    </a:lnL>
-                    <a:lnR w="9525" cap="flat" cmpd="sng" algn="ctr">
-                      <a:solidFill>
-                        <a:srgbClr val="D5DBE4"/>
-                      </a:solidFill>
-                      <a:prstDash val="solid"/>
-                      <a:round/>
-                      <a:headEnd type="none" w="med" len="med"/>
-                      <a:tailEnd type="none" w="med" len="med"/>
-                    </a:lnR>
-                    <a:lnT w="9525" cap="flat" cmpd="sng" algn="ctr">
-                      <a:solidFill>
-                        <a:srgbClr val="D5DBE4"/>
-                      </a:solidFill>
-                      <a:prstDash val="solid"/>
-                      <a:round/>
-                      <a:headEnd type="none" w="med" len="med"/>
-                      <a:tailEnd type="none" w="med" len="med"/>
-                    </a:lnT>
-                    <a:lnB w="9525" cap="flat" cmpd="sng" algn="ctr">
-                      <a:solidFill>
-                        <a:srgbClr val="D5DBE4"/>
-                      </a:solidFill>
-                      <a:prstDash val="solid"/>
-                      <a:round/>
-                      <a:headEnd type="none" w="med" len="med"/>
-                      <a:tailEnd type="none" w="med" len="med"/>
-                    </a:lnB>
-                    <a:solidFill>
-                      <a:srgbClr val="F2F4F7"/>
-                    </a:solidFill>
-                  </a:tcPr>
-                </a:tc>
-                <a:tc>
-                  <a:txBody>
-                    <a:bodyPr/>
-                    <a:lstStyle/>
-                    <a:p>
-                      <a:pPr algn="ctr" indent="0" marL="0">
-                        <a:buNone/>
-                      </a:pPr>
-                      <a:r>
-                        <a:rPr lang="en-US" sz="1100" dirty="0">
-                          <a:solidFill>
-                            <a:srgbClr val="3D4451"/>
-                          </a:solidFill>
-                          <a:latin typeface="맑은 고딕" pitchFamily="34" charset="0"/>
-                          <a:ea typeface="맑은 고딕" pitchFamily="34" charset="-122"/>
-                          <a:cs typeface="맑은 고딕" pitchFamily="34" charset="-120"/>
-                        </a:rPr>
-                        <a:t>바이트 — 경계는 내가 만든다</a:t>
-                      </a:r>
-                      <a:endParaRPr lang="en-US" sz="1100" dirty="0">
-                        <a:latin typeface="맑은 고딕" charset="0"/>
-                        <a:ea typeface="맑은 고딕" charset="0"/>
-                        <a:cs typeface="맑은 고딕" charset="0"/>
-                      </a:endParaRPr>
-                    </a:p>
-                  </a:txBody>
-                  <a:tcPr marL="76200" marR="76200" marT="25400" marB="25400" anchor="ctr">
-                    <a:lnL w="9525" cap="flat" cmpd="sng" algn="ctr">
-                      <a:solidFill>
-                        <a:srgbClr val="D5DBE4"/>
-                      </a:solidFill>
-                      <a:prstDash val="solid"/>
-                      <a:round/>
-                      <a:headEnd type="none" w="med" len="med"/>
-                      <a:tailEnd type="none" w="med" len="med"/>
-                    </a:lnL>
-                    <a:lnR w="9525" cap="flat" cmpd="sng" algn="ctr">
-                      <a:solidFill>
-                        <a:srgbClr val="D5DBE4"/>
-                      </a:solidFill>
-                      <a:prstDash val="solid"/>
-                      <a:round/>
-                      <a:headEnd type="none" w="med" len="med"/>
-                      <a:tailEnd type="none" w="med" len="med"/>
-                    </a:lnR>
-                    <a:lnT w="9525" cap="flat" cmpd="sng" algn="ctr">
-                      <a:solidFill>
-                        <a:srgbClr val="D5DBE4"/>
-                      </a:solidFill>
-                      <a:prstDash val="solid"/>
-                      <a:round/>
-                      <a:headEnd type="none" w="med" len="med"/>
-                      <a:tailEnd type="none" w="med" len="med"/>
-                    </a:lnT>
-                    <a:lnB w="9525" cap="flat" cmpd="sng" algn="ctr">
-                      <a:solidFill>
-                        <a:srgbClr val="D5DBE4"/>
-                      </a:solidFill>
-                      <a:prstDash val="solid"/>
-                      <a:round/>
-                      <a:headEnd type="none" w="med" len="med"/>
-                      <a:tailEnd type="none" w="med" len="med"/>
-                    </a:lnB>
-                    <a:solidFill>
-                      <a:srgbClr val="F2F4F7"/>
-                    </a:solidFill>
-                  </a:tcPr>
-                </a:tc>
-              </a:tr>
-              <a:tr h="384048">
-                <a:tc>
-                  <a:txBody>
-                    <a:bodyPr/>
-                    <a:lstStyle/>
-                    <a:p>
-                      <a:pPr algn="l" indent="0" marL="0">
-                        <a:buNone/>
-                      </a:pPr>
-                      <a:r>
-                        <a:rPr lang="en-US" sz="1100" b="1" dirty="0">
-                          <a:solidFill>
-                            <a:srgbClr val="1E232E"/>
-                          </a:solidFill>
-                          <a:latin typeface="맑은 고딕" pitchFamily="34" charset="0"/>
-                          <a:ea typeface="맑은 고딕" pitchFamily="34" charset="-122"/>
-                          <a:cs typeface="맑은 고딕" pitchFamily="34" charset="-120"/>
-                        </a:rPr>
-                        <a:t>복사 횟수</a:t>
-                      </a:r>
-                      <a:endParaRPr lang="en-US" sz="1100" dirty="0">
-                        <a:latin typeface="맑은 고딕" charset="0"/>
-                        <a:ea typeface="맑은 고딕" charset="0"/>
-                        <a:cs typeface="맑은 고딕" charset="0"/>
-                      </a:endParaRPr>
-                    </a:p>
-                  </a:txBody>
-                  <a:tcPr marL="76200" marR="76200" marT="25400" marB="25400" anchor="ctr">
-                    <a:lnL w="9525" cap="flat" cmpd="sng" algn="ctr">
-                      <a:solidFill>
-                        <a:srgbClr val="D5DBE4"/>
-                      </a:solidFill>
-                      <a:prstDash val="solid"/>
-                      <a:round/>
-                      <a:headEnd type="none" w="med" len="med"/>
-                      <a:tailEnd type="none" w="med" len="med"/>
-                    </a:lnL>
-                    <a:lnR w="9525" cap="flat" cmpd="sng" algn="ctr">
-                      <a:solidFill>
-                        <a:srgbClr val="D5DBE4"/>
-                      </a:solidFill>
-                      <a:prstDash val="solid"/>
-                      <a:round/>
-                      <a:headEnd type="none" w="med" len="med"/>
-                      <a:tailEnd type="none" w="med" len="med"/>
-                    </a:lnR>
-                    <a:lnT w="9525" cap="flat" cmpd="sng" algn="ctr">
-                      <a:solidFill>
-                        <a:srgbClr val="D5DBE4"/>
-                      </a:solidFill>
-                      <a:prstDash val="solid"/>
-                      <a:round/>
-                      <a:headEnd type="none" w="med" len="med"/>
-                      <a:tailEnd type="none" w="med" len="med"/>
-                    </a:lnT>
-                    <a:lnB w="9525" cap="flat" cmpd="sng" algn="ctr">
-                      <a:solidFill>
-                        <a:srgbClr val="D5DBE4"/>
-                      </a:solidFill>
-                      <a:prstDash val="solid"/>
-                      <a:round/>
-                      <a:headEnd type="none" w="med" len="med"/>
-                      <a:tailEnd type="none" w="med" len="med"/>
-                    </a:lnB>
-                    <a:solidFill>
-                      <a:srgbClr val="FFFFFF"/>
-                    </a:solidFill>
-                  </a:tcPr>
-                </a:tc>
-                <a:tc>
-                  <a:txBody>
-                    <a:bodyPr/>
-                    <a:lstStyle/>
-                    <a:p>
-                      <a:pPr algn="ctr" indent="0" marL="0">
-                        <a:buNone/>
-                      </a:pPr>
-                      <a:r>
-                        <a:rPr lang="en-US" sz="1100" dirty="0">
-                          <a:solidFill>
-                            <a:srgbClr val="3D4451"/>
-                          </a:solidFill>
-                          <a:latin typeface="맑은 고딕" pitchFamily="34" charset="0"/>
-                          <a:ea typeface="맑은 고딕" pitchFamily="34" charset="-122"/>
-                          <a:cs typeface="맑은 고딕" pitchFamily="34" charset="-120"/>
-                        </a:rPr>
-                        <a:t>2 회 — 내 변수 → 커널 → 상대</a:t>
-                      </a:r>
-                      <a:endParaRPr lang="en-US" sz="1100" dirty="0">
-                        <a:latin typeface="맑은 고딕" charset="0"/>
-                        <a:ea typeface="맑은 고딕" charset="0"/>
-                        <a:cs typeface="맑은 고딕" charset="0"/>
-                      </a:endParaRPr>
-                    </a:p>
-                  </a:txBody>
-                  <a:tcPr marL="76200" marR="76200" marT="25400" marB="25400" anchor="ctr">
-                    <a:lnL w="9525" cap="flat" cmpd="sng" algn="ctr">
-                      <a:solidFill>
-                        <a:srgbClr val="D5DBE4"/>
-                      </a:solidFill>
-                      <a:prstDash val="solid"/>
-                      <a:round/>
-                      <a:headEnd type="none" w="med" len="med"/>
-                      <a:tailEnd type="none" w="med" len="med"/>
-                    </a:lnL>
-                    <a:lnR w="9525" cap="flat" cmpd="sng" algn="ctr">
-                      <a:solidFill>
-                        <a:srgbClr val="D5DBE4"/>
-                      </a:solidFill>
-                      <a:prstDash val="solid"/>
-                      <a:round/>
-                      <a:headEnd type="none" w="med" len="med"/>
-                      <a:tailEnd type="none" w="med" len="med"/>
-                    </a:lnR>
-                    <a:lnT w="9525" cap="flat" cmpd="sng" algn="ctr">
-                      <a:solidFill>
-                        <a:srgbClr val="D5DBE4"/>
-                      </a:solidFill>
-                      <a:prstDash val="solid"/>
-                      <a:round/>
-                      <a:headEnd type="none" w="med" len="med"/>
-                      <a:tailEnd type="none" w="med" len="med"/>
-                    </a:lnT>
-                    <a:lnB w="9525" cap="flat" cmpd="sng" algn="ctr">
-                      <a:solidFill>
-                        <a:srgbClr val="D5DBE4"/>
-                      </a:solidFill>
-                      <a:prstDash val="solid"/>
-                      <a:round/>
-                      <a:headEnd type="none" w="med" len="med"/>
-                      <a:tailEnd type="none" w="med" len="med"/>
-                    </a:lnB>
-                    <a:solidFill>
-                      <a:srgbClr val="FFFFFF"/>
-                    </a:solidFill>
-                  </a:tcPr>
-                </a:tc>
-                <a:tc>
-                  <a:txBody>
-                    <a:bodyPr/>
-                    <a:lstStyle/>
-                    <a:p>
-                      <a:pPr algn="ctr" indent="0" marL="0">
-                        <a:buNone/>
-                      </a:pPr>
-                      <a:r>
-                        <a:rPr lang="en-US" sz="1100" dirty="0">
-                          <a:solidFill>
-                            <a:srgbClr val="3D4451"/>
-                          </a:solidFill>
-                          <a:latin typeface="맑은 고딕" pitchFamily="34" charset="0"/>
-                          <a:ea typeface="맑은 고딕" pitchFamily="34" charset="-122"/>
-                          <a:cs typeface="맑은 고딕" pitchFamily="34" charset="-120"/>
-                        </a:rPr>
-                        <a:t>1 회 — 내 변수 → 슬롯</a:t>
-                      </a:r>
-                      <a:endParaRPr lang="en-US" sz="1100" dirty="0">
-                        <a:latin typeface="맑은 고딕" charset="0"/>
-                        <a:ea typeface="맑은 고딕" charset="0"/>
-                        <a:cs typeface="맑은 고딕" charset="0"/>
-                      </a:endParaRPr>
-                    </a:p>
-                  </a:txBody>
-                  <a:tcPr marL="76200" marR="76200" marT="25400" marB="25400" anchor="ctr">
-                    <a:lnL w="9525" cap="flat" cmpd="sng" algn="ctr">
-                      <a:solidFill>
-                        <a:srgbClr val="D5DBE4"/>
-                      </a:solidFill>
-                      <a:prstDash val="solid"/>
-                      <a:round/>
-                      <a:headEnd type="none" w="med" len="med"/>
-                      <a:tailEnd type="none" w="med" len="med"/>
-                    </a:lnL>
-                    <a:lnR w="9525" cap="flat" cmpd="sng" algn="ctr">
-                      <a:solidFill>
-                        <a:srgbClr val="D5DBE4"/>
-                      </a:solidFill>
-                      <a:prstDash val="solid"/>
-                      <a:round/>
-                      <a:headEnd type="none" w="med" len="med"/>
-                      <a:tailEnd type="none" w="med" len="med"/>
-                    </a:lnR>
-                    <a:lnT w="9525" cap="flat" cmpd="sng" algn="ctr">
-                      <a:solidFill>
-                        <a:srgbClr val="D5DBE4"/>
-                      </a:solidFill>
-                      <a:prstDash val="solid"/>
-                      <a:round/>
-                      <a:headEnd type="none" w="med" len="med"/>
-                      <a:tailEnd type="none" w="med" len="med"/>
-                    </a:lnT>
-                    <a:lnB w="9525" cap="flat" cmpd="sng" algn="ctr">
-                      <a:solidFill>
-                        <a:srgbClr val="D5DBE4"/>
-                      </a:solidFill>
-                      <a:prstDash val="solid"/>
-                      <a:round/>
-                      <a:headEnd type="none" w="med" len="med"/>
-                      <a:tailEnd type="none" w="med" len="med"/>
-                    </a:lnB>
-                    <a:solidFill>
-                      <a:srgbClr val="FFFFFF"/>
-                    </a:solidFill>
-                  </a:tcPr>
-                </a:tc>
-                <a:tc>
-                  <a:txBody>
-                    <a:bodyPr/>
-                    <a:lstStyle/>
-                    <a:p>
-                      <a:pPr algn="ctr" indent="0" marL="0">
-                        <a:buNone/>
-                      </a:pPr>
-                      <a:r>
-                        <a:rPr lang="en-US" sz="1100" dirty="0">
-                          <a:solidFill>
-                            <a:srgbClr val="3D4451"/>
-                          </a:solidFill>
-                          <a:latin typeface="맑은 고딕" pitchFamily="34" charset="0"/>
-                          <a:ea typeface="맑은 고딕" pitchFamily="34" charset="-122"/>
-                          <a:cs typeface="맑은 고딕" pitchFamily="34" charset="-120"/>
-                        </a:rPr>
-                        <a:t>0 회 — 옮겨 담는 일이 없다</a:t>
-                      </a:r>
-                      <a:endParaRPr lang="en-US" sz="1100" dirty="0">
-                        <a:latin typeface="맑은 고딕" charset="0"/>
-                        <a:ea typeface="맑은 고딕" charset="0"/>
-                        <a:cs typeface="맑은 고딕" charset="0"/>
-                      </a:endParaRPr>
-                    </a:p>
-                  </a:txBody>
-                  <a:tcPr marL="76200" marR="76200" marT="25400" marB="25400" anchor="ctr">
-                    <a:lnL w="9525" cap="flat" cmpd="sng" algn="ctr">
-                      <a:solidFill>
-                        <a:srgbClr val="D5DBE4"/>
-                      </a:solidFill>
-                      <a:prstDash val="solid"/>
-                      <a:round/>
-                      <a:headEnd type="none" w="med" len="med"/>
-                      <a:tailEnd type="none" w="med" len="med"/>
-                    </a:lnL>
-                    <a:lnR w="9525" cap="flat" cmpd="sng" algn="ctr">
-                      <a:solidFill>
-                        <a:srgbClr val="D5DBE4"/>
-                      </a:solidFill>
-                      <a:prstDash val="solid"/>
-                      <a:round/>
-                      <a:headEnd type="none" w="med" len="med"/>
-                      <a:tailEnd type="none" w="med" len="med"/>
-                    </a:lnR>
-                    <a:lnT w="9525" cap="flat" cmpd="sng" algn="ctr">
-                      <a:solidFill>
-                        <a:srgbClr val="D5DBE4"/>
-                      </a:solidFill>
-                      <a:prstDash val="solid"/>
-                      <a:round/>
-                      <a:headEnd type="none" w="med" len="med"/>
-                      <a:tailEnd type="none" w="med" len="med"/>
-                    </a:lnT>
-                    <a:lnB w="9525" cap="flat" cmpd="sng" algn="ctr">
-                      <a:solidFill>
-                        <a:srgbClr val="D5DBE4"/>
-                      </a:solidFill>
-                      <a:prstDash val="solid"/>
-                      <a:round/>
-                      <a:headEnd type="none" w="med" len="med"/>
-                      <a:tailEnd type="none" w="med" len="med"/>
-                    </a:lnB>
-                    <a:solidFill>
-                      <a:srgbClr val="FFFFFF"/>
-                    </a:solidFill>
-                  </a:tcPr>
-                </a:tc>
-              </a:tr>
-              <a:tr h="384048">
-                <a:tc>
-                  <a:txBody>
-                    <a:bodyPr/>
-                    <a:lstStyle/>
-                    <a:p>
-                      <a:pPr algn="l" indent="0" marL="0">
-                        <a:buNone/>
-                      </a:pPr>
-                      <a:r>
-                        <a:rPr lang="en-US" sz="1100" b="1" dirty="0">
-                          <a:solidFill>
-                            <a:srgbClr val="1E232E"/>
-                          </a:solidFill>
-                          <a:latin typeface="맑은 고딕" pitchFamily="34" charset="0"/>
-                          <a:ea typeface="맑은 고딕" pitchFamily="34" charset="-122"/>
-                          <a:cs typeface="맑은 고딕" pitchFamily="34" charset="-120"/>
-                        </a:rPr>
-                        <a:t>동기화</a:t>
-                      </a:r>
-                      <a:endParaRPr lang="en-US" sz="1100" dirty="0">
-                        <a:latin typeface="맑은 고딕" charset="0"/>
-                        <a:ea typeface="맑은 고딕" charset="0"/>
-                        <a:cs typeface="맑은 고딕" charset="0"/>
-                      </a:endParaRPr>
-                    </a:p>
-                  </a:txBody>
-                  <a:tcPr marL="76200" marR="76200" marT="25400" marB="25400" anchor="ctr">
-                    <a:lnL w="9525" cap="flat" cmpd="sng" algn="ctr">
-                      <a:solidFill>
-                        <a:srgbClr val="D5DBE4"/>
-                      </a:solidFill>
-                      <a:prstDash val="solid"/>
-                      <a:round/>
-                      <a:headEnd type="none" w="med" len="med"/>
-                      <a:tailEnd type="none" w="med" len="med"/>
-                    </a:lnL>
-                    <a:lnR w="9525" cap="flat" cmpd="sng" algn="ctr">
-                      <a:solidFill>
-                        <a:srgbClr val="D5DBE4"/>
-                      </a:solidFill>
-                      <a:prstDash val="solid"/>
-                      <a:round/>
-                      <a:headEnd type="none" w="med" len="med"/>
-                      <a:tailEnd type="none" w="med" len="med"/>
-                    </a:lnR>
-                    <a:lnT w="9525" cap="flat" cmpd="sng" algn="ctr">
-                      <a:solidFill>
-                        <a:srgbClr val="D5DBE4"/>
-                      </a:solidFill>
-                      <a:prstDash val="solid"/>
-                      <a:round/>
-                      <a:headEnd type="none" w="med" len="med"/>
-                      <a:tailEnd type="none" w="med" len="med"/>
-                    </a:lnT>
-                    <a:lnB w="9525" cap="flat" cmpd="sng" algn="ctr">
-                      <a:solidFill>
-                        <a:srgbClr val="D5DBE4"/>
-                      </a:solidFill>
-                      <a:prstDash val="solid"/>
-                      <a:round/>
-                      <a:headEnd type="none" w="med" len="med"/>
-                      <a:tailEnd type="none" w="med" len="med"/>
-                    </a:lnB>
-                    <a:solidFill>
-                      <a:srgbClr val="F2F4F7"/>
-                    </a:solidFill>
-                  </a:tcPr>
-                </a:tc>
-                <a:tc>
-                  <a:txBody>
-                    <a:bodyPr/>
-                    <a:lstStyle/>
-                    <a:p>
-                      <a:pPr algn="ctr" indent="0" marL="0">
-                        <a:buNone/>
-                      </a:pPr>
-                      <a:r>
-                        <a:rPr lang="en-US" sz="1100" dirty="0">
-                          <a:solidFill>
-                            <a:srgbClr val="3D4451"/>
-                          </a:solidFill>
-                          <a:latin typeface="맑은 고딕" pitchFamily="34" charset="0"/>
-                          <a:ea typeface="맑은 고딕" pitchFamily="34" charset="-122"/>
-                          <a:cs typeface="맑은 고딕" pitchFamily="34" charset="-120"/>
-                        </a:rPr>
-                        <a:t>커널이 내장</a:t>
-                      </a:r>
-                      <a:endParaRPr lang="en-US" sz="1100" dirty="0">
-                        <a:latin typeface="맑은 고딕" charset="0"/>
-                        <a:ea typeface="맑은 고딕" charset="0"/>
-                        <a:cs typeface="맑은 고딕" charset="0"/>
-                      </a:endParaRPr>
-                    </a:p>
-                  </a:txBody>
-                  <a:tcPr marL="76200" marR="76200" marT="25400" marB="25400" anchor="ctr">
-                    <a:lnL w="9525" cap="flat" cmpd="sng" algn="ctr">
-                      <a:solidFill>
-                        <a:srgbClr val="D5DBE4"/>
-                      </a:solidFill>
-                      <a:prstDash val="solid"/>
-                      <a:round/>
-                      <a:headEnd type="none" w="med" len="med"/>
-                      <a:tailEnd type="none" w="med" len="med"/>
-                    </a:lnL>
-                    <a:lnR w="9525" cap="flat" cmpd="sng" algn="ctr">
-                      <a:solidFill>
-                        <a:srgbClr val="D5DBE4"/>
-                      </a:solidFill>
-                      <a:prstDash val="solid"/>
-                      <a:round/>
-                      <a:headEnd type="none" w="med" len="med"/>
-                      <a:tailEnd type="none" w="med" len="med"/>
-                    </a:lnR>
-                    <a:lnT w="9525" cap="flat" cmpd="sng" algn="ctr">
-                      <a:solidFill>
-                        <a:srgbClr val="D5DBE4"/>
-                      </a:solidFill>
-                      <a:prstDash val="solid"/>
-                      <a:round/>
-                      <a:headEnd type="none" w="med" len="med"/>
-                      <a:tailEnd type="none" w="med" len="med"/>
-                    </a:lnT>
-                    <a:lnB w="9525" cap="flat" cmpd="sng" algn="ctr">
-                      <a:solidFill>
-                        <a:srgbClr val="D5DBE4"/>
-                      </a:solidFill>
-                      <a:prstDash val="solid"/>
-                      <a:round/>
-                      <a:headEnd type="none" w="med" len="med"/>
-                      <a:tailEnd type="none" w="med" len="med"/>
-                    </a:lnB>
-                    <a:solidFill>
-                      <a:srgbClr val="F2F4F7"/>
-                    </a:solidFill>
-                  </a:tcPr>
-                </a:tc>
-                <a:tc>
-                  <a:txBody>
-                    <a:bodyPr/>
-                    <a:lstStyle/>
-                    <a:p>
-                      <a:pPr algn="ctr" indent="0" marL="0">
-                        <a:buNone/>
-                      </a:pPr>
-                      <a:r>
-                        <a:rPr lang="en-US" sz="1100" dirty="0">
-                          <a:solidFill>
-                            <a:srgbClr val="3D4451"/>
-                          </a:solidFill>
-                          <a:latin typeface="맑은 고딕" pitchFamily="34" charset="0"/>
-                          <a:ea typeface="맑은 고딕" pitchFamily="34" charset="-122"/>
-                          <a:cs typeface="맑은 고딕" pitchFamily="34" charset="-120"/>
-                        </a:rPr>
-                        <a:t>직접 구현</a:t>
-                      </a:r>
-                      <a:endParaRPr lang="en-US" sz="1100" dirty="0">
-                        <a:latin typeface="맑은 고딕" charset="0"/>
-                        <a:ea typeface="맑은 고딕" charset="0"/>
-                        <a:cs typeface="맑은 고딕" charset="0"/>
-                      </a:endParaRPr>
-                    </a:p>
-                  </a:txBody>
-                  <a:tcPr marL="76200" marR="76200" marT="25400" marB="25400" anchor="ctr">
-                    <a:lnL w="9525" cap="flat" cmpd="sng" algn="ctr">
-                      <a:solidFill>
-                        <a:srgbClr val="D5DBE4"/>
-                      </a:solidFill>
-                      <a:prstDash val="solid"/>
-                      <a:round/>
-                      <a:headEnd type="none" w="med" len="med"/>
-                      <a:tailEnd type="none" w="med" len="med"/>
-                    </a:lnL>
-                    <a:lnR w="9525" cap="flat" cmpd="sng" algn="ctr">
-                      <a:solidFill>
-                        <a:srgbClr val="D5DBE4"/>
-                      </a:solidFill>
-                      <a:prstDash val="solid"/>
-                      <a:round/>
-                      <a:headEnd type="none" w="med" len="med"/>
-                      <a:tailEnd type="none" w="med" len="med"/>
-                    </a:lnR>
-                    <a:lnT w="9525" cap="flat" cmpd="sng" algn="ctr">
-                      <a:solidFill>
-                        <a:srgbClr val="D5DBE4"/>
-                      </a:solidFill>
-                      <a:prstDash val="solid"/>
-                      <a:round/>
-                      <a:headEnd type="none" w="med" len="med"/>
-                      <a:tailEnd type="none" w="med" len="med"/>
-                    </a:lnT>
-                    <a:lnB w="9525" cap="flat" cmpd="sng" algn="ctr">
-                      <a:solidFill>
-                        <a:srgbClr val="D5DBE4"/>
-                      </a:solidFill>
-                      <a:prstDash val="solid"/>
-                      <a:round/>
-                      <a:headEnd type="none" w="med" len="med"/>
-                      <a:tailEnd type="none" w="med" len="med"/>
-                    </a:lnB>
-                    <a:solidFill>
-                      <a:srgbClr val="F2F4F7"/>
-                    </a:solidFill>
-                  </a:tcPr>
-                </a:tc>
-                <a:tc>
-                  <a:txBody>
-                    <a:bodyPr/>
-                    <a:lstStyle/>
-                    <a:p>
-                      <a:pPr algn="ctr" indent="0" marL="0">
-                        <a:buNone/>
-                      </a:pPr>
-                      <a:r>
-                        <a:rPr lang="en-US" sz="1100" dirty="0">
-                          <a:solidFill>
-                            <a:srgbClr val="3D4451"/>
-                          </a:solidFill>
-                          <a:latin typeface="맑은 고딕" pitchFamily="34" charset="0"/>
-                          <a:ea typeface="맑은 고딕" pitchFamily="34" charset="-122"/>
-                          <a:cs typeface="맑은 고딕" pitchFamily="34" charset="-120"/>
-                        </a:rPr>
-                        <a:t>직접 구현 (필수)</a:t>
-                      </a:r>
-                      <a:endParaRPr lang="en-US" sz="1100" dirty="0">
-                        <a:latin typeface="맑은 고딕" charset="0"/>
-                        <a:ea typeface="맑은 고딕" charset="0"/>
-                        <a:cs typeface="맑은 고딕" charset="0"/>
-                      </a:endParaRPr>
-                    </a:p>
-                  </a:txBody>
-                  <a:tcPr marL="76200" marR="76200" marT="25400" marB="25400" anchor="ctr">
-                    <a:lnL w="9525" cap="flat" cmpd="sng" algn="ctr">
-                      <a:solidFill>
-                        <a:srgbClr val="D5DBE4"/>
-                      </a:solidFill>
-                      <a:prstDash val="solid"/>
-                      <a:round/>
-                      <a:headEnd type="none" w="med" len="med"/>
-                      <a:tailEnd type="none" w="med" len="med"/>
-                    </a:lnL>
-                    <a:lnR w="9525" cap="flat" cmpd="sng" algn="ctr">
-                      <a:solidFill>
-                        <a:srgbClr val="D5DBE4"/>
-                      </a:solidFill>
-                      <a:prstDash val="solid"/>
-                      <a:round/>
-                      <a:headEnd type="none" w="med" len="med"/>
-                      <a:tailEnd type="none" w="med" len="med"/>
-                    </a:lnR>
-                    <a:lnT w="9525" cap="flat" cmpd="sng" algn="ctr">
-                      <a:solidFill>
-                        <a:srgbClr val="D5DBE4"/>
-                      </a:solidFill>
-                      <a:prstDash val="solid"/>
-                      <a:round/>
-                      <a:headEnd type="none" w="med" len="med"/>
-                      <a:tailEnd type="none" w="med" len="med"/>
-                    </a:lnT>
-                    <a:lnB w="9525" cap="flat" cmpd="sng" algn="ctr">
-                      <a:solidFill>
-                        <a:srgbClr val="D5DBE4"/>
-                      </a:solidFill>
-                      <a:prstDash val="solid"/>
-                      <a:round/>
-                      <a:headEnd type="none" w="med" len="med"/>
-                      <a:tailEnd type="none" w="med" len="med"/>
-                    </a:lnB>
-                    <a:solidFill>
-                      <a:srgbClr val="F2F4F7"/>
-                    </a:solidFill>
-                  </a:tcPr>
-                </a:tc>
-              </a:tr>
-              <a:tr h="384048">
-                <a:tc>
-                  <a:txBody>
-                    <a:bodyPr/>
-                    <a:lstStyle/>
-                    <a:p>
-                      <a:pPr algn="l" indent="0" marL="0">
-                        <a:buNone/>
-                      </a:pPr>
-                      <a:r>
-                        <a:rPr lang="en-US" sz="1100" b="1" dirty="0">
-                          <a:solidFill>
-                            <a:srgbClr val="1E232E"/>
-                          </a:solidFill>
-                          <a:latin typeface="맑은 고딕" pitchFamily="34" charset="0"/>
-                          <a:ea typeface="맑은 고딕" pitchFamily="34" charset="-122"/>
-                          <a:cs typeface="맑은 고딕" pitchFamily="34" charset="-120"/>
-                        </a:rPr>
-                        <a:t>속도</a:t>
-                      </a:r>
-                      <a:endParaRPr lang="en-US" sz="1100" dirty="0">
-                        <a:latin typeface="맑은 고딕" charset="0"/>
-                        <a:ea typeface="맑은 고딕" charset="0"/>
-                        <a:cs typeface="맑은 고딕" charset="0"/>
-                      </a:endParaRPr>
-                    </a:p>
-                  </a:txBody>
-                  <a:tcPr marL="76200" marR="76200" marT="25400" marB="25400" anchor="ctr">
-                    <a:lnL w="9525" cap="flat" cmpd="sng" algn="ctr">
-                      <a:solidFill>
-                        <a:srgbClr val="D5DBE4"/>
-                      </a:solidFill>
-                      <a:prstDash val="solid"/>
-                      <a:round/>
-                      <a:headEnd type="none" w="med" len="med"/>
-                      <a:tailEnd type="none" w="med" len="med"/>
-                    </a:lnL>
-                    <a:lnR w="9525" cap="flat" cmpd="sng" algn="ctr">
-                      <a:solidFill>
-                        <a:srgbClr val="D5DBE4"/>
-                      </a:solidFill>
-                      <a:prstDash val="solid"/>
-                      <a:round/>
-                      <a:headEnd type="none" w="med" len="med"/>
-                      <a:tailEnd type="none" w="med" len="med"/>
-                    </a:lnR>
-                    <a:lnT w="9525" cap="flat" cmpd="sng" algn="ctr">
-                      <a:solidFill>
-                        <a:srgbClr val="D5DBE4"/>
-                      </a:solidFill>
-                      <a:prstDash val="solid"/>
-                      <a:round/>
-                      <a:headEnd type="none" w="med" len="med"/>
-                      <a:tailEnd type="none" w="med" len="med"/>
-                    </a:lnT>
-                    <a:lnB w="9525" cap="flat" cmpd="sng" algn="ctr">
-                      <a:solidFill>
-                        <a:srgbClr val="D5DBE4"/>
-                      </a:solidFill>
-                      <a:prstDash val="solid"/>
-                      <a:round/>
-                      <a:headEnd type="none" w="med" len="med"/>
-                      <a:tailEnd type="none" w="med" len="med"/>
-                    </a:lnB>
-                    <a:solidFill>
-                      <a:srgbClr val="FFFFFF"/>
-                    </a:solidFill>
-                  </a:tcPr>
-                </a:tc>
-                <a:tc>
-                  <a:txBody>
-                    <a:bodyPr/>
-                    <a:lstStyle/>
-                    <a:p>
-                      <a:pPr algn="ctr" indent="0" marL="0">
-                        <a:buNone/>
-                      </a:pPr>
-                      <a:r>
-                        <a:rPr lang="en-US" sz="1100" dirty="0">
-                          <a:solidFill>
-                            <a:srgbClr val="3D4451"/>
-                          </a:solidFill>
-                          <a:latin typeface="맑은 고딕" pitchFamily="34" charset="0"/>
-                          <a:ea typeface="맑은 고딕" pitchFamily="34" charset="-122"/>
-                          <a:cs typeface="맑은 고딕" pitchFamily="34" charset="-120"/>
-                        </a:rPr>
-                        <a:t>보통</a:t>
-                      </a:r>
-                      <a:endParaRPr lang="en-US" sz="1100" dirty="0">
-                        <a:latin typeface="맑은 고딕" charset="0"/>
-                        <a:ea typeface="맑은 고딕" charset="0"/>
-                        <a:cs typeface="맑은 고딕" charset="0"/>
-                      </a:endParaRPr>
-                    </a:p>
-                  </a:txBody>
-                  <a:tcPr marL="76200" marR="76200" marT="25400" marB="25400" anchor="ctr">
-                    <a:lnL w="9525" cap="flat" cmpd="sng" algn="ctr">
-                      <a:solidFill>
-                        <a:srgbClr val="D5DBE4"/>
-                      </a:solidFill>
-                      <a:prstDash val="solid"/>
-                      <a:round/>
-                      <a:headEnd type="none" w="med" len="med"/>
-                      <a:tailEnd type="none" w="med" len="med"/>
-                    </a:lnL>
-                    <a:lnR w="9525" cap="flat" cmpd="sng" algn="ctr">
-                      <a:solidFill>
-                        <a:srgbClr val="D5DBE4"/>
-                      </a:solidFill>
-                      <a:prstDash val="solid"/>
-                      <a:round/>
-                      <a:headEnd type="none" w="med" len="med"/>
-                      <a:tailEnd type="none" w="med" len="med"/>
-                    </a:lnR>
-                    <a:lnT w="9525" cap="flat" cmpd="sng" algn="ctr">
-                      <a:solidFill>
-                        <a:srgbClr val="D5DBE4"/>
-                      </a:solidFill>
-                      <a:prstDash val="solid"/>
-                      <a:round/>
-                      <a:headEnd type="none" w="med" len="med"/>
-                      <a:tailEnd type="none" w="med" len="med"/>
-                    </a:lnT>
-                    <a:lnB w="9525" cap="flat" cmpd="sng" algn="ctr">
-                      <a:solidFill>
-                        <a:srgbClr val="D5DBE4"/>
-                      </a:solidFill>
-                      <a:prstDash val="solid"/>
-                      <a:round/>
-                      <a:headEnd type="none" w="med" len="med"/>
-                      <a:tailEnd type="none" w="med" len="med"/>
-                    </a:lnB>
-                    <a:solidFill>
-                      <a:srgbClr val="FFFFFF"/>
-                    </a:solidFill>
-                  </a:tcPr>
-                </a:tc>
-                <a:tc>
-                  <a:txBody>
-                    <a:bodyPr/>
-                    <a:lstStyle/>
-                    <a:p>
-                      <a:pPr algn="ctr" indent="0" marL="0">
-                        <a:buNone/>
-                      </a:pPr>
-                      <a:r>
-                        <a:rPr lang="en-US" sz="1100" dirty="0">
-                          <a:solidFill>
-                            <a:srgbClr val="3D4451"/>
-                          </a:solidFill>
-                          <a:latin typeface="맑은 고딕" pitchFamily="34" charset="0"/>
-                          <a:ea typeface="맑은 고딕" pitchFamily="34" charset="-122"/>
-                          <a:cs typeface="맑은 고딕" pitchFamily="34" charset="-120"/>
-                        </a:rPr>
-                        <a:t>빠름</a:t>
-                      </a:r>
-                      <a:endParaRPr lang="en-US" sz="1100" dirty="0">
-                        <a:latin typeface="맑은 고딕" charset="0"/>
-                        <a:ea typeface="맑은 고딕" charset="0"/>
-                        <a:cs typeface="맑은 고딕" charset="0"/>
-                      </a:endParaRPr>
-                    </a:p>
-                  </a:txBody>
-                  <a:tcPr marL="76200" marR="76200" marT="25400" marB="25400" anchor="ctr">
-                    <a:lnL w="9525" cap="flat" cmpd="sng" algn="ctr">
-                      <a:solidFill>
-                        <a:srgbClr val="D5DBE4"/>
-                      </a:solidFill>
-                      <a:prstDash val="solid"/>
-                      <a:round/>
-                      <a:headEnd type="none" w="med" len="med"/>
-                      <a:tailEnd type="none" w="med" len="med"/>
-                    </a:lnL>
-                    <a:lnR w="9525" cap="flat" cmpd="sng" algn="ctr">
-                      <a:solidFill>
-                        <a:srgbClr val="D5DBE4"/>
-                      </a:solidFill>
-                      <a:prstDash val="solid"/>
-                      <a:round/>
-                      <a:headEnd type="none" w="med" len="med"/>
-                      <a:tailEnd type="none" w="med" len="med"/>
-                    </a:lnR>
-                    <a:lnT w="9525" cap="flat" cmpd="sng" algn="ctr">
-                      <a:solidFill>
-                        <a:srgbClr val="D5DBE4"/>
-                      </a:solidFill>
-                      <a:prstDash val="solid"/>
-                      <a:round/>
-                      <a:headEnd type="none" w="med" len="med"/>
-                      <a:tailEnd type="none" w="med" len="med"/>
-                    </a:lnT>
-                    <a:lnB w="9525" cap="flat" cmpd="sng" algn="ctr">
-                      <a:solidFill>
-                        <a:srgbClr val="D5DBE4"/>
-                      </a:solidFill>
-                      <a:prstDash val="solid"/>
-                      <a:round/>
-                      <a:headEnd type="none" w="med" len="med"/>
-                      <a:tailEnd type="none" w="med" len="med"/>
-                    </a:lnB>
-                    <a:solidFill>
-                      <a:srgbClr val="FFFFFF"/>
-                    </a:solidFill>
-                  </a:tcPr>
-                </a:tc>
-                <a:tc>
-                  <a:txBody>
-                    <a:bodyPr/>
-                    <a:lstStyle/>
-                    <a:p>
-                      <a:pPr algn="ctr" indent="0" marL="0">
-                        <a:buNone/>
-                      </a:pPr>
-                      <a:r>
-                        <a:rPr lang="en-US" sz="1100" dirty="0">
-                          <a:solidFill>
-                            <a:srgbClr val="3D4451"/>
-                          </a:solidFill>
-                          <a:latin typeface="맑은 고딕" pitchFamily="34" charset="0"/>
-                          <a:ea typeface="맑은 고딕" pitchFamily="34" charset="-122"/>
-                          <a:cs typeface="맑은 고딕" pitchFamily="34" charset="-120"/>
-                        </a:rPr>
-                        <a:t>가장 빠름</a:t>
-                      </a:r>
-                      <a:endParaRPr lang="en-US" sz="1100" dirty="0">
-                        <a:latin typeface="맑은 고딕" charset="0"/>
-                        <a:ea typeface="맑은 고딕" charset="0"/>
-                        <a:cs typeface="맑은 고딕" charset="0"/>
-                      </a:endParaRPr>
-                    </a:p>
-                  </a:txBody>
-                  <a:tcPr marL="76200" marR="76200" marT="25400" marB="25400" anchor="ctr">
-                    <a:lnL w="9525" cap="flat" cmpd="sng" algn="ctr">
-                      <a:solidFill>
-                        <a:srgbClr val="D5DBE4"/>
-                      </a:solidFill>
-                      <a:prstDash val="solid"/>
-                      <a:round/>
-                      <a:headEnd type="none" w="med" len="med"/>
-                      <a:tailEnd type="none" w="med" len="med"/>
-                    </a:lnL>
-                    <a:lnR w="9525" cap="flat" cmpd="sng" algn="ctr">
-                      <a:solidFill>
-                        <a:srgbClr val="D5DBE4"/>
-                      </a:solidFill>
-                      <a:prstDash val="solid"/>
-                      <a:round/>
-                      <a:headEnd type="none" w="med" len="med"/>
-                      <a:tailEnd type="none" w="med" len="med"/>
-                    </a:lnR>
-                    <a:lnT w="9525" cap="flat" cmpd="sng" algn="ctr">
-                      <a:solidFill>
-                        <a:srgbClr val="D5DBE4"/>
-                      </a:solidFill>
-                      <a:prstDash val="solid"/>
-                      <a:round/>
-                      <a:headEnd type="none" w="med" len="med"/>
-                      <a:tailEnd type="none" w="med" len="med"/>
-                    </a:lnT>
-                    <a:lnB w="9525" cap="flat" cmpd="sng" algn="ctr">
-                      <a:solidFill>
-                        <a:srgbClr val="D5DBE4"/>
-                      </a:solidFill>
-                      <a:prstDash val="solid"/>
-                      <a:round/>
-                      <a:headEnd type="none" w="med" len="med"/>
-                      <a:tailEnd type="none" w="med" len="med"/>
-                    </a:lnB>
-                    <a:solidFill>
-                      <a:srgbClr val="FFFFFF"/>
-                    </a:solidFill>
-                  </a:tcPr>
-                </a:tc>
-              </a:tr>
-              <a:tr h="384048">
-                <a:tc>
-                  <a:txBody>
-                    <a:bodyPr/>
-                    <a:lstStyle/>
-                    <a:p>
-                      <a:pPr algn="l" indent="0" marL="0">
-                        <a:buNone/>
-                      </a:pPr>
-                      <a:r>
-                        <a:rPr lang="en-US" sz="1100" b="1" dirty="0">
-                          <a:solidFill>
-                            <a:srgbClr val="1E232E"/>
-                          </a:solidFill>
-                          <a:latin typeface="맑은 고딕" pitchFamily="34" charset="0"/>
-                          <a:ea typeface="맑은 고딕" pitchFamily="34" charset="-122"/>
-                          <a:cs typeface="맑은 고딕" pitchFamily="34" charset="-120"/>
-                        </a:rPr>
-                        <a:t>용량</a:t>
-                      </a:r>
-                      <a:endParaRPr lang="en-US" sz="1100" dirty="0">
-                        <a:latin typeface="맑은 고딕" charset="0"/>
-                        <a:ea typeface="맑은 고딕" charset="0"/>
-                        <a:cs typeface="맑은 고딕" charset="0"/>
-                      </a:endParaRPr>
-                    </a:p>
-                  </a:txBody>
-                  <a:tcPr marL="76200" marR="76200" marT="25400" marB="25400" anchor="ctr">
-                    <a:lnL w="9525" cap="flat" cmpd="sng" algn="ctr">
-                      <a:solidFill>
-                        <a:srgbClr val="D5DBE4"/>
-                      </a:solidFill>
-                      <a:prstDash val="solid"/>
-                      <a:round/>
-                      <a:headEnd type="none" w="med" len="med"/>
-                      <a:tailEnd type="none" w="med" len="med"/>
-                    </a:lnL>
-                    <a:lnR w="9525" cap="flat" cmpd="sng" algn="ctr">
-                      <a:solidFill>
-                        <a:srgbClr val="D5DBE4"/>
-                      </a:solidFill>
-                      <a:prstDash val="solid"/>
-                      <a:round/>
-                      <a:headEnd type="none" w="med" len="med"/>
-                      <a:tailEnd type="none" w="med" len="med"/>
-                    </a:lnR>
-                    <a:lnT w="9525" cap="flat" cmpd="sng" algn="ctr">
-                      <a:solidFill>
-                        <a:srgbClr val="D5DBE4"/>
-                      </a:solidFill>
-                      <a:prstDash val="solid"/>
-                      <a:round/>
-                      <a:headEnd type="none" w="med" len="med"/>
-                      <a:tailEnd type="none" w="med" len="med"/>
-                    </a:lnT>
-                    <a:lnB w="9525" cap="flat" cmpd="sng" algn="ctr">
-                      <a:solidFill>
-                        <a:srgbClr val="D5DBE4"/>
-                      </a:solidFill>
-                      <a:prstDash val="solid"/>
-                      <a:round/>
-                      <a:headEnd type="none" w="med" len="med"/>
-                      <a:tailEnd type="none" w="med" len="med"/>
-                    </a:lnB>
-                    <a:solidFill>
-                      <a:srgbClr val="F2F4F7"/>
-                    </a:solidFill>
-                  </a:tcPr>
-                </a:tc>
-                <a:tc>
-                  <a:txBody>
-                    <a:bodyPr/>
-                    <a:lstStyle/>
-                    <a:p>
-                      <a:pPr algn="ctr" indent="0" marL="0">
-                        <a:buNone/>
-                      </a:pPr>
-                      <a:r>
-                        <a:rPr lang="en-US" sz="1100" dirty="0">
-                          <a:solidFill>
-                            <a:srgbClr val="3D4451"/>
-                          </a:solidFill>
-                          <a:latin typeface="맑은 고딕" pitchFamily="34" charset="0"/>
-                          <a:ea typeface="맑은 고딕" pitchFamily="34" charset="-122"/>
-                          <a:cs typeface="맑은 고딕" pitchFamily="34" charset="-120"/>
-                        </a:rPr>
-                        <a:t>커널 메모리라 한도가 있다 (16KB)</a:t>
-                      </a:r>
-                      <a:endParaRPr lang="en-US" sz="1100" dirty="0">
-                        <a:latin typeface="맑은 고딕" charset="0"/>
-                        <a:ea typeface="맑은 고딕" charset="0"/>
-                        <a:cs typeface="맑은 고딕" charset="0"/>
-                      </a:endParaRPr>
-                    </a:p>
-                  </a:txBody>
-                  <a:tcPr marL="76200" marR="76200" marT="25400" marB="25400" anchor="ctr">
-                    <a:lnL w="9525" cap="flat" cmpd="sng" algn="ctr">
-                      <a:solidFill>
-                        <a:srgbClr val="D5DBE4"/>
-                      </a:solidFill>
-                      <a:prstDash val="solid"/>
-                      <a:round/>
-                      <a:headEnd type="none" w="med" len="med"/>
-                      <a:tailEnd type="none" w="med" len="med"/>
-                    </a:lnL>
-                    <a:lnR w="9525" cap="flat" cmpd="sng" algn="ctr">
-                      <a:solidFill>
-                        <a:srgbClr val="D5DBE4"/>
-                      </a:solidFill>
-                      <a:prstDash val="solid"/>
-                      <a:round/>
-                      <a:headEnd type="none" w="med" len="med"/>
-                      <a:tailEnd type="none" w="med" len="med"/>
-                    </a:lnR>
-                    <a:lnT w="9525" cap="flat" cmpd="sng" algn="ctr">
-                      <a:solidFill>
-                        <a:srgbClr val="D5DBE4"/>
-                      </a:solidFill>
-                      <a:prstDash val="solid"/>
-                      <a:round/>
-                      <a:headEnd type="none" w="med" len="med"/>
-                      <a:tailEnd type="none" w="med" len="med"/>
-                    </a:lnT>
-                    <a:lnB w="9525" cap="flat" cmpd="sng" algn="ctr">
-                      <a:solidFill>
-                        <a:srgbClr val="D5DBE4"/>
-                      </a:solidFill>
-                      <a:prstDash val="solid"/>
-                      <a:round/>
-                      <a:headEnd type="none" w="med" len="med"/>
-                      <a:tailEnd type="none" w="med" len="med"/>
-                    </a:lnB>
-                    <a:solidFill>
-                      <a:srgbClr val="F2F4F7"/>
-                    </a:solidFill>
-                  </a:tcPr>
-                </a:tc>
-                <a:tc>
-                  <a:txBody>
-                    <a:bodyPr/>
-                    <a:lstStyle/>
-                    <a:p>
-                      <a:pPr algn="ctr" indent="0" marL="0">
-                        <a:buNone/>
-                      </a:pPr>
-                      <a:r>
-                        <a:rPr lang="en-US" sz="1100" dirty="0">
-                          <a:solidFill>
-                            <a:srgbClr val="3D4451"/>
-                          </a:solidFill>
-                          <a:latin typeface="맑은 고딕" pitchFamily="34" charset="0"/>
-                          <a:ea typeface="맑은 고딕" pitchFamily="34" charset="-122"/>
-                          <a:cs typeface="맑은 고딕" pitchFamily="34" charset="-120"/>
-                        </a:rPr>
-                        <a:t>고정 — 배열 크기가 곧 용량</a:t>
-                      </a:r>
-                      <a:endParaRPr lang="en-US" sz="1100" dirty="0">
-                        <a:latin typeface="맑은 고딕" charset="0"/>
-                        <a:ea typeface="맑은 고딕" charset="0"/>
-                        <a:cs typeface="맑은 고딕" charset="0"/>
-                      </a:endParaRPr>
-                    </a:p>
-                  </a:txBody>
-                  <a:tcPr marL="76200" marR="76200" marT="25400" marB="25400" anchor="ctr">
-                    <a:lnL w="9525" cap="flat" cmpd="sng" algn="ctr">
-                      <a:solidFill>
-                        <a:srgbClr val="D5DBE4"/>
-                      </a:solidFill>
-                      <a:prstDash val="solid"/>
-                      <a:round/>
-                      <a:headEnd type="none" w="med" len="med"/>
-                      <a:tailEnd type="none" w="med" len="med"/>
-                    </a:lnL>
-                    <a:lnR w="9525" cap="flat" cmpd="sng" algn="ctr">
-                      <a:solidFill>
-                        <a:srgbClr val="D5DBE4"/>
-                      </a:solidFill>
-                      <a:prstDash val="solid"/>
-                      <a:round/>
-                      <a:headEnd type="none" w="med" len="med"/>
-                      <a:tailEnd type="none" w="med" len="med"/>
-                    </a:lnR>
-                    <a:lnT w="9525" cap="flat" cmpd="sng" algn="ctr">
-                      <a:solidFill>
-                        <a:srgbClr val="D5DBE4"/>
-                      </a:solidFill>
-                      <a:prstDash val="solid"/>
-                      <a:round/>
-                      <a:headEnd type="none" w="med" len="med"/>
-                      <a:tailEnd type="none" w="med" len="med"/>
-                    </a:lnT>
-                    <a:lnB w="9525" cap="flat" cmpd="sng" algn="ctr">
-                      <a:solidFill>
-                        <a:srgbClr val="D5DBE4"/>
-                      </a:solidFill>
-                      <a:prstDash val="solid"/>
-                      <a:round/>
-                      <a:headEnd type="none" w="med" len="med"/>
-                      <a:tailEnd type="none" w="med" len="med"/>
-                    </a:lnB>
-                    <a:solidFill>
-                      <a:srgbClr val="F2F4F7"/>
-                    </a:solidFill>
-                  </a:tcPr>
-                </a:tc>
-                <a:tc>
-                  <a:txBody>
-                    <a:bodyPr/>
-                    <a:lstStyle/>
-                    <a:p>
-                      <a:pPr algn="ctr" indent="0" marL="0">
-                        <a:buNone/>
-                      </a:pPr>
-                      <a:r>
-                        <a:rPr lang="en-US" sz="1100" dirty="0">
-                          <a:solidFill>
-                            <a:srgbClr val="3D4451"/>
-                          </a:solidFill>
-                          <a:latin typeface="맑은 고딕" pitchFamily="34" charset="0"/>
-                          <a:ea typeface="맑은 고딕" pitchFamily="34" charset="-122"/>
-                          <a:cs typeface="맑은 고딕" pitchFamily="34" charset="-120"/>
-                        </a:rPr>
-                        <a:t>물리 메모리가 허용하는 만큼</a:t>
-                      </a:r>
-                      <a:endParaRPr lang="en-US" sz="1100" dirty="0">
-                        <a:latin typeface="맑은 고딕" charset="0"/>
-                        <a:ea typeface="맑은 고딕" charset="0"/>
-                        <a:cs typeface="맑은 고딕" charset="0"/>
-                      </a:endParaRPr>
-                    </a:p>
-                  </a:txBody>
-                  <a:tcPr marL="76200" marR="76200" marT="25400" marB="25400" anchor="ctr">
-                    <a:lnL w="9525" cap="flat" cmpd="sng" algn="ctr">
-                      <a:solidFill>
-                        <a:srgbClr val="D5DBE4"/>
-                      </a:solidFill>
-                      <a:prstDash val="solid"/>
-                      <a:round/>
-                      <a:headEnd type="none" w="med" len="med"/>
-                      <a:tailEnd type="none" w="med" len="med"/>
-                    </a:lnL>
-                    <a:lnR w="9525" cap="flat" cmpd="sng" algn="ctr">
-                      <a:solidFill>
-                        <a:srgbClr val="D5DBE4"/>
-                      </a:solidFill>
-                      <a:prstDash val="solid"/>
-                      <a:round/>
-                      <a:headEnd type="none" w="med" len="med"/>
-                      <a:tailEnd type="none" w="med" len="med"/>
-                    </a:lnR>
-                    <a:lnT w="9525" cap="flat" cmpd="sng" algn="ctr">
-                      <a:solidFill>
-                        <a:srgbClr val="D5DBE4"/>
-                      </a:solidFill>
-                      <a:prstDash val="solid"/>
-                      <a:round/>
-                      <a:headEnd type="none" w="med" len="med"/>
-                      <a:tailEnd type="none" w="med" len="med"/>
-                    </a:lnT>
-                    <a:lnB w="9525" cap="flat" cmpd="sng" algn="ctr">
-                      <a:solidFill>
-                        <a:srgbClr val="D5DBE4"/>
-                      </a:solidFill>
-                      <a:prstDash val="solid"/>
-                      <a:round/>
-                      <a:headEnd type="none" w="med" len="med"/>
-                      <a:tailEnd type="none" w="med" len="med"/>
-                    </a:lnB>
-                    <a:solidFill>
-                      <a:srgbClr val="F2F4F7"/>
-                    </a:solidFill>
-                  </a:tcPr>
-                </a:tc>
-              </a:tr>
-              <a:tr h="384048">
-                <a:tc>
-                  <a:txBody>
-                    <a:bodyPr/>
-                    <a:lstStyle/>
-                    <a:p>
-                      <a:pPr algn="l" indent="0" marL="0">
-                        <a:buNone/>
-                      </a:pPr>
-                      <a:r>
-                        <a:rPr lang="en-US" sz="1100" b="1" dirty="0">
-                          <a:solidFill>
-                            <a:srgbClr val="1E232E"/>
-                          </a:solidFill>
-                          <a:latin typeface="맑은 고딕" pitchFamily="34" charset="0"/>
-                          <a:ea typeface="맑은 고딕" pitchFamily="34" charset="-122"/>
-                          <a:cs typeface="맑은 고딕" pitchFamily="34" charset="-120"/>
-                        </a:rPr>
-                        <a:t>대표 용도</a:t>
-                      </a:r>
-                      <a:endParaRPr lang="en-US" sz="1100" dirty="0">
-                        <a:latin typeface="맑은 고딕" charset="0"/>
-                        <a:ea typeface="맑은 고딕" charset="0"/>
-                        <a:cs typeface="맑은 고딕" charset="0"/>
-                      </a:endParaRPr>
-                    </a:p>
-                  </a:txBody>
-                  <a:tcPr marL="76200" marR="76200" marT="25400" marB="25400" anchor="ctr">
-                    <a:lnL w="9525" cap="flat" cmpd="sng" algn="ctr">
-                      <a:solidFill>
-                        <a:srgbClr val="D5DBE4"/>
-                      </a:solidFill>
-                      <a:prstDash val="solid"/>
-                      <a:round/>
-                      <a:headEnd type="none" w="med" len="med"/>
-                      <a:tailEnd type="none" w="med" len="med"/>
-                    </a:lnL>
-                    <a:lnR w="9525" cap="flat" cmpd="sng" algn="ctr">
-                      <a:solidFill>
-                        <a:srgbClr val="D5DBE4"/>
-                      </a:solidFill>
-                      <a:prstDash val="solid"/>
-                      <a:round/>
-                      <a:headEnd type="none" w="med" len="med"/>
-                      <a:tailEnd type="none" w="med" len="med"/>
-                    </a:lnR>
-                    <a:lnT w="9525" cap="flat" cmpd="sng" algn="ctr">
-                      <a:solidFill>
-                        <a:srgbClr val="D5DBE4"/>
-                      </a:solidFill>
-                      <a:prstDash val="solid"/>
-                      <a:round/>
-                      <a:headEnd type="none" w="med" len="med"/>
-                      <a:tailEnd type="none" w="med" len="med"/>
-                    </a:lnT>
-                    <a:lnB w="9525" cap="flat" cmpd="sng" algn="ctr">
-                      <a:solidFill>
-                        <a:srgbClr val="D5DBE4"/>
-                      </a:solidFill>
-                      <a:prstDash val="solid"/>
-                      <a:round/>
-                      <a:headEnd type="none" w="med" len="med"/>
-                      <a:tailEnd type="none" w="med" len="med"/>
-                    </a:lnB>
-                    <a:solidFill>
-                      <a:srgbClr val="FFFFFF"/>
-                    </a:solidFill>
-                  </a:tcPr>
-                </a:tc>
-                <a:tc>
-                  <a:txBody>
-                    <a:bodyPr/>
-                    <a:lstStyle/>
-                    <a:p>
-                      <a:pPr algn="ctr" indent="0" marL="0">
-                        <a:buNone/>
-                      </a:pPr>
-                      <a:r>
-                        <a:rPr lang="en-US" sz="1100" dirty="0">
-                          <a:solidFill>
-                            <a:srgbClr val="3D4451"/>
-                          </a:solidFill>
-                          <a:latin typeface="맑은 고딕" pitchFamily="34" charset="0"/>
-                          <a:ea typeface="맑은 고딕" pitchFamily="34" charset="-122"/>
-                          <a:cs typeface="맑은 고딕" pitchFamily="34" charset="-120"/>
-                        </a:rPr>
-                        <a:t>명령 · 이벤트 전달</a:t>
-                      </a:r>
-                      <a:endParaRPr lang="en-US" sz="1100" dirty="0">
-                        <a:latin typeface="맑은 고딕" charset="0"/>
-                        <a:ea typeface="맑은 고딕" charset="0"/>
-                        <a:cs typeface="맑은 고딕" charset="0"/>
-                      </a:endParaRPr>
-                    </a:p>
-                  </a:txBody>
-                  <a:tcPr marL="76200" marR="76200" marT="25400" marB="25400" anchor="ctr">
-                    <a:lnL w="9525" cap="flat" cmpd="sng" algn="ctr">
-                      <a:solidFill>
-                        <a:srgbClr val="D5DBE4"/>
-                      </a:solidFill>
-                      <a:prstDash val="solid"/>
-                      <a:round/>
-                      <a:headEnd type="none" w="med" len="med"/>
-                      <a:tailEnd type="none" w="med" len="med"/>
-                    </a:lnL>
-                    <a:lnR w="9525" cap="flat" cmpd="sng" algn="ctr">
-                      <a:solidFill>
-                        <a:srgbClr val="D5DBE4"/>
-                      </a:solidFill>
-                      <a:prstDash val="solid"/>
-                      <a:round/>
-                      <a:headEnd type="none" w="med" len="med"/>
-                      <a:tailEnd type="none" w="med" len="med"/>
-                    </a:lnR>
-                    <a:lnT w="9525" cap="flat" cmpd="sng" algn="ctr">
-                      <a:solidFill>
-                        <a:srgbClr val="D5DBE4"/>
-                      </a:solidFill>
-                      <a:prstDash val="solid"/>
-                      <a:round/>
-                      <a:headEnd type="none" w="med" len="med"/>
-                      <a:tailEnd type="none" w="med" len="med"/>
-                    </a:lnT>
-                    <a:lnB w="9525" cap="flat" cmpd="sng" algn="ctr">
-                      <a:solidFill>
-                        <a:srgbClr val="D5DBE4"/>
-                      </a:solidFill>
-                      <a:prstDash val="solid"/>
-                      <a:round/>
-                      <a:headEnd type="none" w="med" len="med"/>
-                      <a:tailEnd type="none" w="med" len="med"/>
-                    </a:lnB>
-                    <a:solidFill>
-                      <a:srgbClr val="FFFFFF"/>
-                    </a:solidFill>
-                  </a:tcPr>
-                </a:tc>
-                <a:tc>
-                  <a:txBody>
-                    <a:bodyPr/>
-                    <a:lstStyle/>
-                    <a:p>
-                      <a:pPr algn="ctr" indent="0" marL="0">
-                        <a:buNone/>
-                      </a:pPr>
-                      <a:r>
-                        <a:rPr lang="en-US" sz="1100" dirty="0">
-                          <a:solidFill>
-                            <a:srgbClr val="3D4451"/>
-                          </a:solidFill>
-                          <a:latin typeface="맑은 고딕" pitchFamily="34" charset="0"/>
-                          <a:ea typeface="맑은 고딕" pitchFamily="34" charset="-122"/>
-                          <a:cs typeface="맑은 고딕" pitchFamily="34" charset="-120"/>
-                        </a:rPr>
-                        <a:t>들어오는 데이터 임시 보관</a:t>
-                      </a:r>
-                      <a:endParaRPr lang="en-US" sz="1100" dirty="0">
-                        <a:latin typeface="맑은 고딕" charset="0"/>
-                        <a:ea typeface="맑은 고딕" charset="0"/>
-                        <a:cs typeface="맑은 고딕" charset="0"/>
-                      </a:endParaRPr>
-                    </a:p>
-                  </a:txBody>
-                  <a:tcPr marL="76200" marR="76200" marT="25400" marB="25400" anchor="ctr">
-                    <a:lnL w="9525" cap="flat" cmpd="sng" algn="ctr">
-                      <a:solidFill>
-                        <a:srgbClr val="D5DBE4"/>
-                      </a:solidFill>
-                      <a:prstDash val="solid"/>
-                      <a:round/>
-                      <a:headEnd type="none" w="med" len="med"/>
-                      <a:tailEnd type="none" w="med" len="med"/>
-                    </a:lnL>
-                    <a:lnR w="9525" cap="flat" cmpd="sng" algn="ctr">
-                      <a:solidFill>
-                        <a:srgbClr val="D5DBE4"/>
-                      </a:solidFill>
-                      <a:prstDash val="solid"/>
-                      <a:round/>
-                      <a:headEnd type="none" w="med" len="med"/>
-                      <a:tailEnd type="none" w="med" len="med"/>
-                    </a:lnR>
-                    <a:lnT w="9525" cap="flat" cmpd="sng" algn="ctr">
-                      <a:solidFill>
-                        <a:srgbClr val="D5DBE4"/>
-                      </a:solidFill>
-                      <a:prstDash val="solid"/>
-                      <a:round/>
-                      <a:headEnd type="none" w="med" len="med"/>
-                      <a:tailEnd type="none" w="med" len="med"/>
-                    </a:lnT>
-                    <a:lnB w="9525" cap="flat" cmpd="sng" algn="ctr">
-                      <a:solidFill>
-                        <a:srgbClr val="D5DBE4"/>
-                      </a:solidFill>
-                      <a:prstDash val="solid"/>
-                      <a:round/>
-                      <a:headEnd type="none" w="med" len="med"/>
-                      <a:tailEnd type="none" w="med" len="med"/>
-                    </a:lnB>
-                    <a:solidFill>
-                      <a:srgbClr val="FFFFFF"/>
-                    </a:solidFill>
-                  </a:tcPr>
-                </a:tc>
-                <a:tc>
-                  <a:txBody>
-                    <a:bodyPr/>
-                    <a:lstStyle/>
-                    <a:p>
-                      <a:pPr algn="ctr" indent="0" marL="0">
-                        <a:buNone/>
-                      </a:pPr>
-                      <a:r>
-                        <a:rPr lang="en-US" sz="1100" dirty="0">
-                          <a:solidFill>
-                            <a:srgbClr val="3D4451"/>
-                          </a:solidFill>
-                          <a:latin typeface="맑은 고딕" pitchFamily="34" charset="0"/>
-                          <a:ea typeface="맑은 고딕" pitchFamily="34" charset="-122"/>
-                          <a:cs typeface="맑은 고딕" pitchFamily="34" charset="-120"/>
-                        </a:rPr>
-                        <a:t>대용량 데이터 공유</a:t>
-                      </a:r>
-                      <a:endParaRPr lang="en-US" sz="1100" dirty="0">
-                        <a:latin typeface="맑은 고딕" charset="0"/>
-                        <a:ea typeface="맑은 고딕" charset="0"/>
-                        <a:cs typeface="맑은 고딕" charset="0"/>
-                      </a:endParaRPr>
-                    </a:p>
-                  </a:txBody>
-                  <a:tcPr marL="76200" marR="76200" marT="25400" marB="25400" anchor="ctr">
-                    <a:lnL w="9525" cap="flat" cmpd="sng" algn="ctr">
-                      <a:solidFill>
-                        <a:srgbClr val="D5DBE4"/>
-                      </a:solidFill>
-                      <a:prstDash val="solid"/>
-                      <a:round/>
-                      <a:headEnd type="none" w="med" len="med"/>
-                      <a:tailEnd type="none" w="med" len="med"/>
-                    </a:lnL>
-                    <a:lnR w="9525" cap="flat" cmpd="sng" algn="ctr">
-                      <a:solidFill>
-                        <a:srgbClr val="D5DBE4"/>
-                      </a:solidFill>
-                      <a:prstDash val="solid"/>
-                      <a:round/>
-                      <a:headEnd type="none" w="med" len="med"/>
-                      <a:tailEnd type="none" w="med" len="med"/>
-                    </a:lnR>
-                    <a:lnT w="9525" cap="flat" cmpd="sng" algn="ctr">
-                      <a:solidFill>
-                        <a:srgbClr val="D5DBE4"/>
-                      </a:solidFill>
-                      <a:prstDash val="solid"/>
-                      <a:round/>
-                      <a:headEnd type="none" w="med" len="med"/>
-                      <a:tailEnd type="none" w="med" len="med"/>
-                    </a:lnT>
-                    <a:lnB w="9525" cap="flat" cmpd="sng" algn="ctr">
-                      <a:solidFill>
-                        <a:srgbClr val="D5DBE4"/>
-                      </a:solidFill>
-                      <a:prstDash val="solid"/>
-                      <a:round/>
-                      <a:headEnd type="none" w="med" len="med"/>
-                      <a:tailEnd type="none" w="med" len="med"/>
-                    </a:lnB>
-                    <a:solidFill>
-                      <a:srgbClr val="FFFFFF"/>
-                    </a:solidFill>
-                  </a:tcPr>
-                </a:tc>
-              </a:tr>
-            </a:tbl>
-          </a:graphicData>
-        </a:graphic>
-      </p:graphicFrame>
-      <p:sp>
-        <p:nvSpPr>
-          <p:cNvPr id="7" name="Shape 4"/>
-          <p:cNvSpPr/>
-          <p:nvPr/>
-        </p:nvSpPr>
-        <p:spPr>
-          <a:xfrm>
-            <a:off x="548640" y="4590288"/>
-            <a:ext cx="11094415" cy="1764792"/>
-          </a:xfrm>
-          <a:prstGeom prst="roundRect">
-            <a:avLst>
-              <a:gd name="adj" fmla="val 3109"/>
-            </a:avLst>
-          </a:prstGeom>
-          <a:solidFill>
-            <a:srgbClr val="1E232E"/>
-          </a:solidFill>
-          <a:ln w="12700">
-            <a:solidFill>
-              <a:srgbClr val="1E232E"/>
-            </a:solidFill>
-            <a:prstDash val="solid"/>
-          </a:ln>
-        </p:spPr>
-      </p:sp>
-      <p:sp>
-        <p:nvSpPr>
-          <p:cNvPr id="8" name="Text 5"/>
-          <p:cNvSpPr txBox="1"/>
-          <p:nvPr/>
-        </p:nvSpPr>
-        <p:spPr>
-          <a:xfrm>
-            <a:off x="841248" y="4700016"/>
-            <a:ext cx="5486400" cy="310896"/>
-          </a:xfrm>
-          <a:prstGeom prst="rect">
-            <a:avLst/>
-          </a:prstGeom>
-          <a:noFill/>
-          <a:ln/>
-        </p:spPr>
-        <p:txBody>
-          <a:bodyPr wrap="square" lIns="0" tIns="0" rIns="0" bIns="0" rtlCol="0" anchor="ctr"/>
-          <a:lstStyle/>
-          <a:p>
-            <a:pPr indent="0" marL="0">
-              <a:buNone/>
-            </a:pPr>
-            <a:r>
-              <a:rPr lang="en-US" sz="1400" b="1" dirty="0">
-                <a:solidFill>
-                  <a:srgbClr val="FFFFFF"/>
-                </a:solidFill>
-                <a:latin typeface="맑은 고딕" pitchFamily="34" charset="0"/>
-                <a:ea typeface="맑은 고딕" pitchFamily="34" charset="-122"/>
-                <a:cs typeface="맑은 고딕" pitchFamily="34" charset="-120"/>
-              </a:rPr>
-              <a:t>메시지 큐가 없으면 — 이 넷으로 직접 만든다</a:t>
-            </a:r>
-            <a:endParaRPr lang="en-US" sz="1400" dirty="0"/>
-          </a:p>
-        </p:txBody>
-      </p:sp>
-      <p:sp>
-        <p:nvSpPr>
-          <p:cNvPr id="9" name="Shape 6"/>
-          <p:cNvSpPr/>
-          <p:nvPr/>
-        </p:nvSpPr>
-        <p:spPr>
-          <a:xfrm>
-            <a:off x="841248" y="5084064"/>
-            <a:ext cx="2231136" cy="950976"/>
-          </a:xfrm>
-          <a:prstGeom prst="roundRect">
-            <a:avLst>
-              <a:gd name="adj" fmla="val 4808"/>
-            </a:avLst>
-          </a:prstGeom>
-          <a:solidFill>
-            <a:srgbClr val="2C3444"/>
-          </a:solidFill>
-          <a:ln w="12700">
-            <a:solidFill>
-              <a:srgbClr val="C8891F"/>
-            </a:solidFill>
-            <a:prstDash val="solid"/>
-          </a:ln>
-        </p:spPr>
-      </p:sp>
-      <p:sp>
-        <p:nvSpPr>
-          <p:cNvPr id="10" name="Text 7"/>
-          <p:cNvSpPr txBox="1"/>
-          <p:nvPr/>
-        </p:nvSpPr>
-        <p:spPr>
-          <a:xfrm>
-            <a:off x="841248" y="5148072"/>
-            <a:ext cx="2231136" cy="274320"/>
-          </a:xfrm>
-          <a:prstGeom prst="rect">
-            <a:avLst/>
-          </a:prstGeom>
-          <a:noFill/>
-          <a:ln/>
-        </p:spPr>
-        <p:txBody>
-          <a:bodyPr wrap="square" lIns="0" tIns="0" rIns="0" bIns="0" rtlCol="0" anchor="ctr"/>
-          <a:lstStyle/>
-          <a:p>
-            <a:pPr algn="ctr" indent="0" marL="0">
-              <a:buNone/>
-            </a:pPr>
-            <a:r>
-              <a:rPr lang="en-US" sz="1150" b="1" dirty="0">
-                <a:solidFill>
-                  <a:srgbClr val="C8891F"/>
-                </a:solidFill>
-                <a:latin typeface="맑은 고딕" pitchFamily="34" charset="0"/>
-                <a:ea typeface="맑은 고딕" pitchFamily="34" charset="-122"/>
-                <a:cs typeface="맑은 고딕" pitchFamily="34" charset="-120"/>
-              </a:rPr>
-              <a:t>공유메모리</a:t>
-            </a:r>
-            <a:endParaRPr lang="en-US" sz="1150" dirty="0"/>
-          </a:p>
-        </p:txBody>
-      </p:sp>
-      <p:sp>
-        <p:nvSpPr>
-          <p:cNvPr id="11" name="Text 8"/>
-          <p:cNvSpPr txBox="1"/>
-          <p:nvPr/>
-        </p:nvSpPr>
-        <p:spPr>
-          <a:xfrm>
-            <a:off x="932688" y="5422392"/>
-            <a:ext cx="2048256" cy="548640"/>
-          </a:xfrm>
-          <a:prstGeom prst="rect">
-            <a:avLst/>
-          </a:prstGeom>
-          <a:noFill/>
-          <a:ln/>
-        </p:spPr>
-        <p:txBody>
-          <a:bodyPr wrap="square" lIns="0" tIns="0" rIns="0" bIns="0" rtlCol="0" anchor="t"/>
-          <a:lstStyle/>
-          <a:p>
-            <a:pPr algn="ctr" indent="0" marL="0">
-              <a:lnSpc>
-                <a:spcPts val="1200"/>
-              </a:lnSpc>
-              <a:buNone/>
-            </a:pPr>
-            <a:r>
-              <a:rPr lang="en-US" sz="920" dirty="0">
-                <a:solidFill>
-                  <a:srgbClr val="AEB9C8"/>
-                </a:solidFill>
-                <a:latin typeface="맑은 고딕" pitchFamily="34" charset="0"/>
-                <a:ea typeface="맑은 고딕" pitchFamily="34" charset="-122"/>
-                <a:cs typeface="맑은 고딕" pitchFamily="34" charset="-120"/>
-              </a:rPr>
-              <a:t>두 프로세스가 같은</a:t>
-            </a:r>
-            <a:endParaRPr lang="en-US" sz="920" dirty="0"/>
-          </a:p>
-          <a:p>
-            <a:pPr algn="ctr" indent="0" marL="0">
-              <a:lnSpc>
-                <a:spcPts val="1200"/>
-              </a:lnSpc>
-              <a:buNone/>
-            </a:pPr>
-            <a:r>
-              <a:rPr lang="en-US" sz="920" dirty="0">
-                <a:solidFill>
-                  <a:srgbClr val="AEB9C8"/>
-                </a:solidFill>
-                <a:latin typeface="맑은 고딕" pitchFamily="34" charset="0"/>
-                <a:ea typeface="맑은 고딕" pitchFamily="34" charset="-122"/>
-                <a:cs typeface="맑은 고딕" pitchFamily="34" charset="-120"/>
-              </a:rPr>
-              <a:t>메모리를 함께 본다</a:t>
-            </a:r>
-            <a:endParaRPr lang="en-US" sz="920" dirty="0"/>
-          </a:p>
-        </p:txBody>
-      </p:sp>
-      <p:sp>
-        <p:nvSpPr>
-          <p:cNvPr id="12" name="Text 9"/>
-          <p:cNvSpPr txBox="1"/>
-          <p:nvPr/>
-        </p:nvSpPr>
-        <p:spPr>
-          <a:xfrm>
-            <a:off x="3072384" y="5084064"/>
-            <a:ext cx="310896" cy="950976"/>
-          </a:xfrm>
-          <a:prstGeom prst="rect">
-            <a:avLst/>
-          </a:prstGeom>
-          <a:noFill/>
-          <a:ln/>
-        </p:spPr>
-        <p:txBody>
-          <a:bodyPr wrap="square" lIns="0" tIns="0" rIns="0" bIns="0" rtlCol="0" anchor="ctr"/>
-          <a:lstStyle/>
-          <a:p>
-            <a:pPr algn="ctr" indent="0" marL="0">
-              <a:buNone/>
-            </a:pPr>
-            <a:r>
-              <a:rPr lang="en-US" sz="1600" b="1" dirty="0">
-                <a:solidFill>
-                  <a:srgbClr val="6B778A"/>
-                </a:solidFill>
-                <a:latin typeface="Consolas" pitchFamily="34" charset="0"/>
-                <a:ea typeface="Consolas" pitchFamily="34" charset="-122"/>
-                <a:cs typeface="Consolas" pitchFamily="34" charset="-120"/>
-              </a:rPr>
-              <a:t>+</a:t>
-            </a:r>
-            <a:endParaRPr lang="en-US" sz="1600" dirty="0"/>
-          </a:p>
-        </p:txBody>
-      </p:sp>
-      <p:sp>
-        <p:nvSpPr>
-          <p:cNvPr id="13" name="Shape 10"/>
-          <p:cNvSpPr/>
-          <p:nvPr/>
-        </p:nvSpPr>
-        <p:spPr>
-          <a:xfrm>
-            <a:off x="3383280" y="5084064"/>
-            <a:ext cx="2231136" cy="950976"/>
-          </a:xfrm>
-          <a:prstGeom prst="roundRect">
-            <a:avLst>
-              <a:gd name="adj" fmla="val 4808"/>
-            </a:avLst>
-          </a:prstGeom>
-          <a:solidFill>
-            <a:srgbClr val="2C3444"/>
-          </a:solidFill>
-          <a:ln w="12700">
-            <a:solidFill>
-              <a:srgbClr val="C8891F"/>
-            </a:solidFill>
-            <a:prstDash val="solid"/>
-          </a:ln>
-        </p:spPr>
-      </p:sp>
-      <p:sp>
-        <p:nvSpPr>
-          <p:cNvPr id="14" name="Text 11"/>
-          <p:cNvSpPr txBox="1"/>
-          <p:nvPr/>
-        </p:nvSpPr>
-        <p:spPr>
-          <a:xfrm>
-            <a:off x="3383280" y="5148072"/>
-            <a:ext cx="2231136" cy="274320"/>
-          </a:xfrm>
-          <a:prstGeom prst="rect">
-            <a:avLst/>
-          </a:prstGeom>
-          <a:noFill/>
-          <a:ln/>
-        </p:spPr>
-        <p:txBody>
-          <a:bodyPr wrap="square" lIns="0" tIns="0" rIns="0" bIns="0" rtlCol="0" anchor="ctr"/>
-          <a:lstStyle/>
-          <a:p>
-            <a:pPr algn="ctr" indent="0" marL="0">
-              <a:buNone/>
-            </a:pPr>
-            <a:r>
-              <a:rPr lang="en-US" sz="1150" b="1" dirty="0">
-                <a:solidFill>
-                  <a:srgbClr val="C8891F"/>
-                </a:solidFill>
-                <a:latin typeface="맑은 고딕" pitchFamily="34" charset="0"/>
-                <a:ea typeface="맑은 고딕" pitchFamily="34" charset="-122"/>
-                <a:cs typeface="맑은 고딕" pitchFamily="34" charset="-120"/>
-              </a:rPr>
-              <a:t>링버퍼</a:t>
-            </a:r>
-            <a:endParaRPr lang="en-US" sz="1150" dirty="0"/>
-          </a:p>
-        </p:txBody>
-      </p:sp>
-      <p:sp>
-        <p:nvSpPr>
-          <p:cNvPr id="15" name="Text 12"/>
-          <p:cNvSpPr txBox="1"/>
-          <p:nvPr/>
-        </p:nvSpPr>
-        <p:spPr>
-          <a:xfrm>
-            <a:off x="3474720" y="5422392"/>
-            <a:ext cx="2048256" cy="548640"/>
-          </a:xfrm>
-          <a:prstGeom prst="rect">
-            <a:avLst/>
-          </a:prstGeom>
-          <a:noFill/>
-          <a:ln/>
-        </p:spPr>
-        <p:txBody>
-          <a:bodyPr wrap="square" lIns="0" tIns="0" rIns="0" bIns="0" rtlCol="0" anchor="t"/>
-          <a:lstStyle/>
-          <a:p>
-            <a:pPr algn="ctr" indent="0" marL="0">
-              <a:lnSpc>
-                <a:spcPts val="1200"/>
-              </a:lnSpc>
-              <a:buNone/>
-            </a:pPr>
-            <a:r>
-              <a:rPr lang="en-US" sz="920" dirty="0">
-                <a:solidFill>
-                  <a:srgbClr val="AEB9C8"/>
-                </a:solidFill>
-                <a:latin typeface="맑은 고딕" pitchFamily="34" charset="0"/>
-                <a:ea typeface="맑은 고딕" pitchFamily="34" charset="-122"/>
-                <a:cs typeface="맑은 고딕" pitchFamily="34" charset="-120"/>
-              </a:rPr>
-              <a:t>FIFO 규칙 — 넣는 순서대로</a:t>
-            </a:r>
-            <a:endParaRPr lang="en-US" sz="920" dirty="0"/>
-          </a:p>
-          <a:p>
-            <a:pPr algn="ctr" indent="0" marL="0">
-              <a:lnSpc>
-                <a:spcPts val="1200"/>
-              </a:lnSpc>
-              <a:buNone/>
-            </a:pPr>
-            <a:r>
-              <a:rPr lang="en-US" sz="920" dirty="0">
-                <a:solidFill>
-                  <a:srgbClr val="AEB9C8"/>
-                </a:solidFill>
-                <a:latin typeface="맑은 고딕" pitchFamily="34" charset="0"/>
-                <a:ea typeface="맑은 고딕" pitchFamily="34" charset="-122"/>
-                <a:cs typeface="맑은 고딕" pitchFamily="34" charset="-120"/>
-              </a:rPr>
-              <a:t>꺼내지게 만든다</a:t>
-            </a:r>
-            <a:endParaRPr lang="en-US" sz="920" dirty="0"/>
-          </a:p>
-        </p:txBody>
-      </p:sp>
-      <p:sp>
-        <p:nvSpPr>
-          <p:cNvPr id="16" name="Text 13"/>
-          <p:cNvSpPr txBox="1"/>
-          <p:nvPr/>
-        </p:nvSpPr>
-        <p:spPr>
-          <a:xfrm>
-            <a:off x="5614416" y="5084064"/>
-            <a:ext cx="310896" cy="950976"/>
-          </a:xfrm>
-          <a:prstGeom prst="rect">
-            <a:avLst/>
-          </a:prstGeom>
-          <a:noFill/>
-          <a:ln/>
-        </p:spPr>
-        <p:txBody>
-          <a:bodyPr wrap="square" lIns="0" tIns="0" rIns="0" bIns="0" rtlCol="0" anchor="ctr"/>
-          <a:lstStyle/>
-          <a:p>
-            <a:pPr algn="ctr" indent="0" marL="0">
-              <a:buNone/>
-            </a:pPr>
-            <a:r>
-              <a:rPr lang="en-US" sz="1600" b="1" dirty="0">
-                <a:solidFill>
-                  <a:srgbClr val="6B778A"/>
-                </a:solidFill>
-                <a:latin typeface="Consolas" pitchFamily="34" charset="0"/>
-                <a:ea typeface="Consolas" pitchFamily="34" charset="-122"/>
-                <a:cs typeface="Consolas" pitchFamily="34" charset="-120"/>
-              </a:rPr>
-              <a:t>+</a:t>
-            </a:r>
-            <a:endParaRPr lang="en-US" sz="1600" dirty="0"/>
-          </a:p>
-        </p:txBody>
-      </p:sp>
-      <p:sp>
-        <p:nvSpPr>
-          <p:cNvPr id="17" name="Shape 14"/>
-          <p:cNvSpPr/>
-          <p:nvPr/>
-        </p:nvSpPr>
-        <p:spPr>
-          <a:xfrm>
-            <a:off x="5925312" y="5084064"/>
-            <a:ext cx="2231136" cy="950976"/>
-          </a:xfrm>
-          <a:prstGeom prst="roundRect">
-            <a:avLst>
-              <a:gd name="adj" fmla="val 4808"/>
-            </a:avLst>
-          </a:prstGeom>
-          <a:solidFill>
-            <a:srgbClr val="2C3444"/>
-          </a:solidFill>
-          <a:ln w="12700">
-            <a:solidFill>
-              <a:srgbClr val="2AA5AB"/>
-            </a:solidFill>
-            <a:prstDash val="solid"/>
-          </a:ln>
-        </p:spPr>
-      </p:sp>
-      <p:sp>
-        <p:nvSpPr>
-          <p:cNvPr id="18" name="Text 15"/>
-          <p:cNvSpPr txBox="1"/>
-          <p:nvPr/>
-        </p:nvSpPr>
-        <p:spPr>
-          <a:xfrm>
-            <a:off x="5925312" y="5148072"/>
-            <a:ext cx="2231136" cy="274320"/>
-          </a:xfrm>
-          <a:prstGeom prst="rect">
-            <a:avLst/>
-          </a:prstGeom>
-          <a:noFill/>
-          <a:ln/>
-        </p:spPr>
-        <p:txBody>
-          <a:bodyPr wrap="square" lIns="0" tIns="0" rIns="0" bIns="0" rtlCol="0" anchor="ctr"/>
-          <a:lstStyle/>
-          <a:p>
-            <a:pPr algn="ctr" indent="0" marL="0">
-              <a:buNone/>
-            </a:pPr>
-            <a:r>
-              <a:rPr lang="en-US" sz="1150" b="1" dirty="0">
-                <a:solidFill>
-                  <a:srgbClr val="2AA5AB"/>
-                </a:solidFill>
-                <a:latin typeface="맑은 고딕" pitchFamily="34" charset="0"/>
-                <a:ea typeface="맑은 고딕" pitchFamily="34" charset="-122"/>
-                <a:cs typeface="맑은 고딕" pitchFamily="34" charset="-120"/>
-              </a:rPr>
-              <a:t>세마포어 2 개</a:t>
-            </a:r>
-            <a:endParaRPr lang="en-US" sz="1150" dirty="0"/>
-          </a:p>
-        </p:txBody>
-      </p:sp>
-      <p:sp>
-        <p:nvSpPr>
-          <p:cNvPr id="19" name="Text 16"/>
-          <p:cNvSpPr txBox="1"/>
-          <p:nvPr/>
-        </p:nvSpPr>
-        <p:spPr>
-          <a:xfrm>
-            <a:off x="6016752" y="5422392"/>
-            <a:ext cx="2048256" cy="548640"/>
-          </a:xfrm>
-          <a:prstGeom prst="rect">
-            <a:avLst/>
-          </a:prstGeom>
-          <a:noFill/>
-          <a:ln/>
-        </p:spPr>
-        <p:txBody>
-          <a:bodyPr wrap="square" lIns="0" tIns="0" rIns="0" bIns="0" rtlCol="0" anchor="t"/>
-          <a:lstStyle/>
-          <a:p>
-            <a:pPr algn="ctr" indent="0" marL="0">
-              <a:lnSpc>
-                <a:spcPts val="1200"/>
-              </a:lnSpc>
-              <a:buNone/>
-            </a:pPr>
-            <a:r>
-              <a:rPr lang="en-US" sz="920" dirty="0">
-                <a:solidFill>
-                  <a:srgbClr val="AEB9C8"/>
-                </a:solidFill>
-                <a:latin typeface="맑은 고딕" pitchFamily="34" charset="0"/>
-                <a:ea typeface="맑은 고딕" pitchFamily="34" charset="-122"/>
-                <a:cs typeface="맑은 고딕" pitchFamily="34" charset="-120"/>
-              </a:rPr>
-              <a:t>빈 슬롯 · 찬 슬롯 개수</a:t>
-            </a:r>
-            <a:endParaRPr lang="en-US" sz="920" dirty="0"/>
-          </a:p>
-          <a:p>
-            <a:pPr algn="ctr" indent="0" marL="0">
-              <a:lnSpc>
-                <a:spcPts val="1200"/>
-              </a:lnSpc>
-              <a:buNone/>
-            </a:pPr>
-            <a:r>
-              <a:rPr lang="en-US" sz="920" dirty="0">
-                <a:solidFill>
-                  <a:srgbClr val="AEB9C8"/>
-                </a:solidFill>
-                <a:latin typeface="맑은 고딕" pitchFamily="34" charset="0"/>
-                <a:ea typeface="맑은 고딕" pitchFamily="34" charset="-122"/>
-                <a:cs typeface="맑은 고딕" pitchFamily="34" charset="-120"/>
-              </a:rPr>
-              <a:t>비면 · 차면 대기시킨다</a:t>
-            </a:r>
-            <a:endParaRPr lang="en-US" sz="920" dirty="0"/>
-          </a:p>
-        </p:txBody>
-      </p:sp>
-      <p:sp>
-        <p:nvSpPr>
-          <p:cNvPr id="20" name="Text 17"/>
-          <p:cNvSpPr txBox="1"/>
-          <p:nvPr/>
-        </p:nvSpPr>
-        <p:spPr>
-          <a:xfrm>
-            <a:off x="8156448" y="5084064"/>
-            <a:ext cx="310896" cy="950976"/>
-          </a:xfrm>
-          <a:prstGeom prst="rect">
-            <a:avLst/>
-          </a:prstGeom>
-          <a:noFill/>
-          <a:ln/>
-        </p:spPr>
-        <p:txBody>
-          <a:bodyPr wrap="square" lIns="0" tIns="0" rIns="0" bIns="0" rtlCol="0" anchor="ctr"/>
-          <a:lstStyle/>
-          <a:p>
-            <a:pPr algn="ctr" indent="0" marL="0">
-              <a:buNone/>
-            </a:pPr>
-            <a:r>
-              <a:rPr lang="en-US" sz="1600" b="1" dirty="0">
-                <a:solidFill>
-                  <a:srgbClr val="6B778A"/>
-                </a:solidFill>
-                <a:latin typeface="Consolas" pitchFamily="34" charset="0"/>
-                <a:ea typeface="Consolas" pitchFamily="34" charset="-122"/>
-                <a:cs typeface="Consolas" pitchFamily="34" charset="-120"/>
-              </a:rPr>
-              <a:t>+</a:t>
-            </a:r>
-            <a:endParaRPr lang="en-US" sz="1600" dirty="0"/>
-          </a:p>
-        </p:txBody>
-      </p:sp>
-      <p:sp>
-        <p:nvSpPr>
-          <p:cNvPr id="21" name="Shape 18"/>
-          <p:cNvSpPr/>
-          <p:nvPr/>
-        </p:nvSpPr>
-        <p:spPr>
-          <a:xfrm>
-            <a:off x="8467344" y="5084064"/>
-            <a:ext cx="2231136" cy="950976"/>
-          </a:xfrm>
-          <a:prstGeom prst="roundRect">
-            <a:avLst>
-              <a:gd name="adj" fmla="val 4808"/>
-            </a:avLst>
-          </a:prstGeom>
-          <a:solidFill>
-            <a:srgbClr val="2C3444"/>
-          </a:solidFill>
-          <a:ln w="12700">
-            <a:solidFill>
-              <a:srgbClr val="E4855F"/>
-            </a:solidFill>
-            <a:prstDash val="solid"/>
-          </a:ln>
-        </p:spPr>
-      </p:sp>
-      <p:sp>
-        <p:nvSpPr>
-          <p:cNvPr id="22" name="Text 19"/>
-          <p:cNvSpPr txBox="1"/>
-          <p:nvPr/>
-        </p:nvSpPr>
-        <p:spPr>
-          <a:xfrm>
-            <a:off x="8467344" y="5148072"/>
-            <a:ext cx="2231136" cy="274320"/>
-          </a:xfrm>
-          <a:prstGeom prst="rect">
-            <a:avLst/>
-          </a:prstGeom>
-          <a:noFill/>
-          <a:ln/>
-        </p:spPr>
-        <p:txBody>
-          <a:bodyPr wrap="square" lIns="0" tIns="0" rIns="0" bIns="0" rtlCol="0" anchor="ctr"/>
-          <a:lstStyle/>
-          <a:p>
-            <a:pPr algn="ctr" indent="0" marL="0">
-              <a:buNone/>
-            </a:pPr>
-            <a:r>
-              <a:rPr lang="en-US" sz="1150" b="1" dirty="0">
-                <a:solidFill>
-                  <a:srgbClr val="E4855F"/>
-                </a:solidFill>
-                <a:latin typeface="맑은 고딕" pitchFamily="34" charset="0"/>
-                <a:ea typeface="맑은 고딕" pitchFamily="34" charset="-122"/>
-                <a:cs typeface="맑은 고딕" pitchFamily="34" charset="-120"/>
-              </a:rPr>
-              <a:t>뮤텍스</a:t>
-            </a:r>
-            <a:endParaRPr lang="en-US" sz="1150" dirty="0"/>
-          </a:p>
-        </p:txBody>
-      </p:sp>
-      <p:sp>
-        <p:nvSpPr>
-          <p:cNvPr id="23" name="Text 20"/>
-          <p:cNvSpPr txBox="1"/>
-          <p:nvPr/>
-        </p:nvSpPr>
-        <p:spPr>
-          <a:xfrm>
-            <a:off x="8558784" y="5422392"/>
-            <a:ext cx="2048256" cy="548640"/>
-          </a:xfrm>
-          <a:prstGeom prst="rect">
-            <a:avLst/>
-          </a:prstGeom>
-          <a:noFill/>
-          <a:ln/>
-        </p:spPr>
-        <p:txBody>
-          <a:bodyPr wrap="square" lIns="0" tIns="0" rIns="0" bIns="0" rtlCol="0" anchor="t"/>
-          <a:lstStyle/>
-          <a:p>
-            <a:pPr algn="ctr" indent="0" marL="0">
-              <a:lnSpc>
-                <a:spcPts val="1200"/>
-              </a:lnSpc>
-              <a:buNone/>
-            </a:pPr>
-            <a:r>
-              <a:rPr lang="en-US" sz="920" dirty="0">
-                <a:solidFill>
-                  <a:srgbClr val="AEB9C8"/>
-                </a:solidFill>
-                <a:latin typeface="맑은 고딕" pitchFamily="34" charset="0"/>
-                <a:ea typeface="맑은 고딕" pitchFamily="34" charset="-122"/>
-                <a:cs typeface="맑은 고딕" pitchFamily="34" charset="-120"/>
-              </a:rPr>
-              <a:t>head · tail 갱신을</a:t>
-            </a:r>
-            <a:endParaRPr lang="en-US" sz="920" dirty="0"/>
-          </a:p>
-          <a:p>
-            <a:pPr algn="ctr" indent="0" marL="0">
-              <a:lnSpc>
-                <a:spcPts val="1200"/>
-              </a:lnSpc>
-              <a:buNone/>
-            </a:pPr>
-            <a:r>
-              <a:rPr lang="en-US" sz="920" dirty="0">
-                <a:solidFill>
-                  <a:srgbClr val="AEB9C8"/>
-                </a:solidFill>
-                <a:latin typeface="맑은 고딕" pitchFamily="34" charset="0"/>
-                <a:ea typeface="맑은 고딕" pitchFamily="34" charset="-122"/>
-                <a:cs typeface="맑은 고딕" pitchFamily="34" charset="-120"/>
-              </a:rPr>
-              <a:t>한 번에 하나만</a:t>
-            </a:r>
-            <a:endParaRPr lang="en-US" sz="920" dirty="0"/>
-          </a:p>
-        </p:txBody>
-      </p:sp>
-      <p:sp>
-        <p:nvSpPr>
-          <p:cNvPr id="24" name="Text 21"/>
-          <p:cNvSpPr txBox="1"/>
-          <p:nvPr/>
-        </p:nvSpPr>
-        <p:spPr>
-          <a:xfrm>
-            <a:off x="841248" y="6089904"/>
-            <a:ext cx="10509199" cy="219456"/>
-          </a:xfrm>
-          <a:prstGeom prst="rect">
-            <a:avLst/>
-          </a:prstGeom>
-          <a:noFill/>
-          <a:ln/>
-        </p:spPr>
-        <p:txBody>
-          <a:bodyPr wrap="square" lIns="0" tIns="0" rIns="0" bIns="0" rtlCol="0" anchor="ctr"/>
-          <a:lstStyle/>
-          <a:p>
-            <a:pPr indent="0" marL="0">
-              <a:buNone/>
-            </a:pPr>
-            <a:r>
-              <a:rPr lang="en-US" sz="1300" b="1" dirty="0">
-                <a:solidFill>
-                  <a:srgbClr val="C8891F"/>
-                </a:solidFill>
-                <a:latin typeface="맑은 고딕" pitchFamily="34" charset="0"/>
-                <a:ea typeface="맑은 고딕" pitchFamily="34" charset="-122"/>
-                <a:cs typeface="맑은 고딕" pitchFamily="34" charset="-120"/>
-              </a:rPr>
-              <a:t>=  메시지 큐   </a:t>
-            </a:r>
-            <a:pPr indent="0" marL="0">
-              <a:buNone/>
-            </a:pPr>
-            <a:r>
-              <a:rPr lang="en-US" sz="1200" dirty="0">
-                <a:solidFill>
-                  <a:srgbClr val="D2DAE4"/>
-                </a:solidFill>
-                <a:latin typeface="맑은 고딕" pitchFamily="34" charset="0"/>
-                <a:ea typeface="맑은 고딕" pitchFamily="34" charset="-122"/>
-                <a:cs typeface="맑은 고딕" pitchFamily="34" charset="-120"/>
-              </a:rPr>
-              <a:t>→  ToDo#2 가 정확히 이 조합이다</a:t>
-            </a:r>
-            <a:endParaRPr lang="en-US" sz="1300" dirty="0"/>
-          </a:p>
-        </p:txBody>
-      </p:sp>
-      <p:sp>
-        <p:nvSpPr>
-          <p:cNvPr id="25" name="BandNote"/>
-          <p:cNvSpPr txBox="1"/>
-          <p:nvPr/>
-        </p:nvSpPr>
-        <p:spPr>
-          <a:xfrm>
-            <a:off x="6327648" y="4700016"/>
-            <a:ext cx="5223967" cy="310896"/>
-          </a:xfrm>
-          <a:prstGeom prst="rect">
-            <a:avLst/>
-          </a:prstGeom>
-          <a:noFill/>
-          <a:ln/>
-        </p:spPr>
-        <p:txBody>
-          <a:bodyPr wrap="square" lIns="0" tIns="0" rIns="0" bIns="0" rtlCol="0" anchor="ctr"/>
-          <a:lstStyle/>
-          <a:p>
-            <a:pPr indent="0" marL="0" algn="r">
-              <a:buNone/>
-            </a:pPr>
-            <a:r>
-              <a:rPr lang="en-US" sz="919" b="0" dirty="0">
-                <a:solidFill>
-                  <a:srgbClr val="AEB9C8"/>
-                </a:solidFill>
-                <a:latin typeface="맑은 고딕" pitchFamily="34" charset="0"/>
-                <a:ea typeface="맑은 고딕" pitchFamily="34" charset="-122"/>
-                <a:cs typeface="맑은 고딕" pitchFamily="34" charset="-120"/>
-              </a:rPr>
-              <a:t>세마포어 · 뮤텍스 = 표 동기화 행의 직접 구현  —  다음 장 2-3 에서 설명</a:t>
-            </a:r>
-            <a:endParaRPr lang="en-US" sz="1400" dirty="0"/>
-          </a:p>
-        </p:txBody>
-      </p:sp>
-    </p:spTree>
-  </p:cSld>
-  <p:clrMapOvr>
-    <a:masterClrMapping/>
-  </p:clrMapOvr>
-</p:sld>
-</file>
-
 <file path=ppt/slides/slide12.xml><?xml version="1.0" encoding="utf-8"?>
 <p:sld xmlns:a="http://schemas.openxmlformats.org/drawingml/2006/main" xmlns:r="http://schemas.openxmlformats.org/officeDocument/2006/relationships" xmlns:p="http://schemas.openxmlformats.org/presentationml/2006/main">
   <p:cSld name="Slide 12">
@@ -11981,3188 +8602,6 @@
 </p:sld>
 </file>
 
-<file path=ppt/slides/slide14.xml><?xml version="1.0" encoding="utf-8"?>
-<p:sld xmlns:a="http://schemas.openxmlformats.org/drawingml/2006/main" xmlns:r="http://schemas.openxmlformats.org/officeDocument/2006/relationships" xmlns:p="http://schemas.openxmlformats.org/presentationml/2006/main">
-  <p:cSld name="Slide 14">
-    <p:bg>
-      <p:bgPr>
-        <a:solidFill>
-          <a:srgbClr val="FFFFFF"/>
-        </a:solidFill>
-      </p:bgPr>
-    </p:bg>
-    <p:spTree>
-      <p:nvGrpSpPr>
-        <p:cNvPr id="1" name=""/>
-        <p:cNvGrpSpPr/>
-        <p:nvPr/>
-      </p:nvGrpSpPr>
-      <p:grpSpPr>
-        <a:xfrm>
-          <a:off x="0" y="0"/>
-          <a:ext cx="0" cy="0"/>
-          <a:chOff x="0" y="0"/>
-          <a:chExt cx="0" cy="0"/>
-        </a:xfrm>
-      </p:grpSpPr>
-      <p:sp>
-        <p:nvSpPr>
-          <p:cNvPr id="2" name="Shape 0"/>
-          <p:cNvSpPr/>
-          <p:nvPr/>
-        </p:nvSpPr>
-        <p:spPr>
-          <a:xfrm>
-            <a:off x="548640" y="365760"/>
-            <a:ext cx="658368" cy="347472"/>
-          </a:xfrm>
-          <a:prstGeom prst="roundRect">
-            <a:avLst>
-              <a:gd name="adj" fmla="val 21053"/>
-            </a:avLst>
-          </a:prstGeom>
-          <a:solidFill>
-            <a:srgbClr val="D9532B"/>
-          </a:solidFill>
-          <a:ln w="12700">
-            <a:solidFill>
-              <a:srgbClr val="D9532B"/>
-            </a:solidFill>
-            <a:prstDash val="solid"/>
-          </a:ln>
-        </p:spPr>
-      </p:sp>
-      <p:sp>
-        <p:nvSpPr>
-          <p:cNvPr id="3" name="Text 1"/>
-          <p:cNvSpPr txBox="1"/>
-          <p:nvPr/>
-        </p:nvSpPr>
-        <p:spPr>
-          <a:xfrm>
-            <a:off x="548640" y="365760"/>
-            <a:ext cx="658368" cy="347472"/>
-          </a:xfrm>
-          <a:prstGeom prst="rect">
-            <a:avLst/>
-          </a:prstGeom>
-          <a:noFill/>
-          <a:ln/>
-        </p:spPr>
-        <p:txBody>
-          <a:bodyPr wrap="square" lIns="0" tIns="0" rIns="0" bIns="0" rtlCol="0" anchor="ctr"/>
-          <a:lstStyle/>
-          <a:p>
-            <a:pPr algn="ctr" indent="0" marL="0">
-              <a:buNone/>
-            </a:pPr>
-            <a:r>
-              <a:rPr lang="en-US" sz="1300" b="1" dirty="0">
-                <a:solidFill>
-                  <a:srgbClr val="FFFFFF"/>
-                </a:solidFill>
-                <a:latin typeface="맑은 고딕" pitchFamily="34" charset="0"/>
-                <a:ea typeface="맑은 고딕" pitchFamily="34" charset="-122"/>
-                <a:cs typeface="맑은 고딕" pitchFamily="34" charset="-120"/>
-              </a:rPr>
-              <a:t>2-3</a:t>
-            </a:r>
-            <a:endParaRPr lang="en-US" sz="1300" dirty="0"/>
-          </a:p>
-        </p:txBody>
-      </p:sp>
-      <p:sp>
-        <p:nvSpPr>
-          <p:cNvPr id="4" name="Text 2"/>
-          <p:cNvSpPr txBox="1"/>
-          <p:nvPr/>
-        </p:nvSpPr>
-        <p:spPr>
-          <a:xfrm>
-            <a:off x="1371600" y="274320"/>
-            <a:ext cx="10271455" cy="512064"/>
-          </a:xfrm>
-          <a:prstGeom prst="rect">
-            <a:avLst/>
-          </a:prstGeom>
-          <a:noFill/>
-          <a:ln/>
-        </p:spPr>
-        <p:txBody>
-          <a:bodyPr wrap="square" lIns="0" tIns="0" rIns="0" bIns="0" rtlCol="0" anchor="ctr"/>
-          <a:lstStyle/>
-          <a:p>
-            <a:pPr indent="0" marL="0">
-              <a:buNone/>
-            </a:pPr>
-            <a:r>
-              <a:rPr lang="en-US" sz="2900" b="1" dirty="0">
-                <a:solidFill>
-                  <a:srgbClr val="1E232E"/>
-                </a:solidFill>
-                <a:latin typeface="맑은 고딕" pitchFamily="34" charset="0"/>
-                <a:ea typeface="맑은 고딕" pitchFamily="34" charset="-122"/>
-                <a:cs typeface="맑은 고딕" pitchFamily="34" charset="-120"/>
-              </a:rPr>
-              <a:t>뮤텍스 vs 세마포어 — 왜 둘 다 쓰는가</a:t>
-            </a:r>
-            <a:endParaRPr lang="en-US" sz="2900" dirty="0"/>
-          </a:p>
-        </p:txBody>
-      </p:sp>
-      <p:sp>
-        <p:nvSpPr>
-          <p:cNvPr id="5" name="Text 3"/>
-          <p:cNvSpPr txBox="1"/>
-          <p:nvPr/>
-        </p:nvSpPr>
-        <p:spPr>
-          <a:xfrm>
-            <a:off x="1371600" y="804672"/>
-            <a:ext cx="10271455" cy="310896"/>
-          </a:xfrm>
-          <a:prstGeom prst="rect">
-            <a:avLst/>
-          </a:prstGeom>
-          <a:noFill/>
-          <a:ln/>
-        </p:spPr>
-        <p:txBody>
-          <a:bodyPr wrap="square" lIns="0" tIns="0" rIns="0" bIns="0" rtlCol="0" anchor="ctr"/>
-          <a:lstStyle/>
-          <a:p>
-            <a:pPr indent="0" marL="0">
-              <a:buNone/>
-            </a:pPr>
-            <a:r>
-              <a:rPr lang="en-US" sz="1250" dirty="0">
-                <a:solidFill>
-                  <a:srgbClr val="7A828F"/>
-                </a:solidFill>
-                <a:latin typeface="맑은 고딕" pitchFamily="34" charset="0"/>
-                <a:ea typeface="맑은 고딕" pitchFamily="34" charset="-122"/>
-                <a:cs typeface="맑은 고딕" pitchFamily="34" charset="-120"/>
-              </a:rPr>
-              <a:t>상호배제는 뮤텍스, 개수를 세고 기다리는 것은 세마포어. 하나로 다른 하나를 흉내내면 반드시 문제가 생긴다</a:t>
-            </a:r>
-            <a:endParaRPr lang="en-US" sz="1250" dirty="0"/>
-          </a:p>
-        </p:txBody>
-      </p:sp>
-      <p:graphicFrame>
-        <p:nvGraphicFramePr>
-          <p:cNvPr id="15" name="Table 0"/>
-          <p:cNvGraphicFramePr>
-            <a:graphicFrameLocks noGrp="1"/>
-          </p:cNvGraphicFramePr>
-          <p:nvPr>
-            <p:extLst>
-              <p:ext uri="{D42A27DB-BD31-4B8C-83A1-F6EECF244321}">
-                <p14:modId xmlns:p14="http://schemas.microsoft.com/office/powerpoint/2010/main" val="1579011935"/>
-              </p:ext>
-            </p:extLst>
-          </p:nvPr>
-        </p:nvGraphicFramePr>
-        <p:xfrm>
-          <a:off x="548640" y="1298448"/>
-          <a:ext cx="5760720" cy="914400"/>
-        </p:xfrm>
-        <a:graphic>
-          <a:graphicData uri="http://schemas.openxmlformats.org/drawingml/2006/table">
-            <a:tbl>
-              <a:tblPr/>
-              <a:tblGrid>
-                <a:gridCol w="1371600"/>
-                <a:gridCol w="2194560"/>
-                <a:gridCol w="2194560"/>
-              </a:tblGrid>
-              <a:tr h="420624">
-                <a:tc>
-                  <a:txBody>
-                    <a:bodyPr/>
-                    <a:lstStyle/>
-                    <a:p>
-                      <a:pPr algn="l" indent="0" marL="0">
-                        <a:buNone/>
-                      </a:pPr>
-                      <a:r>
-                        <a:rPr lang="en-US" sz="1150" b="1" dirty="0">
-                          <a:solidFill>
-                            <a:srgbClr val="FFFFFF"/>
-                          </a:solidFill>
-                          <a:latin typeface="맑은 고딕" pitchFamily="34" charset="0"/>
-                          <a:ea typeface="맑은 고딕" pitchFamily="34" charset="-122"/>
-                          <a:cs typeface="맑은 고딕" pitchFamily="34" charset="-120"/>
-                        </a:rPr>
-                        <a:t>구분</a:t>
-                      </a:r>
-                      <a:endParaRPr lang="en-US" sz="1150" dirty="0">
-                        <a:latin typeface="맑은 고딕" charset="0"/>
-                        <a:ea typeface="맑은 고딕" charset="0"/>
-                        <a:cs typeface="맑은 고딕" charset="0"/>
-                      </a:endParaRPr>
-                    </a:p>
-                  </a:txBody>
-                  <a:tcPr marL="63500" marR="63500" marT="25400" marB="25400" anchor="ctr">
-                    <a:lnL w="9525" cap="flat" cmpd="sng" algn="ctr">
-                      <a:solidFill>
-                        <a:srgbClr val="D5DBE4"/>
-                      </a:solidFill>
-                      <a:prstDash val="solid"/>
-                      <a:round/>
-                      <a:headEnd type="none" w="med" len="med"/>
-                      <a:tailEnd type="none" w="med" len="med"/>
-                    </a:lnL>
-                    <a:lnR w="9525" cap="flat" cmpd="sng" algn="ctr">
-                      <a:solidFill>
-                        <a:srgbClr val="D5DBE4"/>
-                      </a:solidFill>
-                      <a:prstDash val="solid"/>
-                      <a:round/>
-                      <a:headEnd type="none" w="med" len="med"/>
-                      <a:tailEnd type="none" w="med" len="med"/>
-                    </a:lnR>
-                    <a:lnT w="9525" cap="flat" cmpd="sng" algn="ctr">
-                      <a:solidFill>
-                        <a:srgbClr val="D5DBE4"/>
-                      </a:solidFill>
-                      <a:prstDash val="solid"/>
-                      <a:round/>
-                      <a:headEnd type="none" w="med" len="med"/>
-                      <a:tailEnd type="none" w="med" len="med"/>
-                    </a:lnT>
-                    <a:lnB w="9525" cap="flat" cmpd="sng" algn="ctr">
-                      <a:solidFill>
-                        <a:srgbClr val="D5DBE4"/>
-                      </a:solidFill>
-                      <a:prstDash val="solid"/>
-                      <a:round/>
-                      <a:headEnd type="none" w="med" len="med"/>
-                      <a:tailEnd type="none" w="med" len="med"/>
-                    </a:lnB>
-                    <a:solidFill>
-                      <a:srgbClr val="1E232E"/>
-                    </a:solidFill>
-                  </a:tcPr>
-                </a:tc>
-                <a:tc>
-                  <a:txBody>
-                    <a:bodyPr/>
-                    <a:lstStyle/>
-                    <a:p>
-                      <a:pPr algn="ctr" indent="0" marL="0">
-                        <a:buNone/>
-                      </a:pPr>
-                      <a:r>
-                        <a:rPr lang="en-US" sz="1150" b="1" dirty="0">
-                          <a:solidFill>
-                            <a:srgbClr val="FFFFFF"/>
-                          </a:solidFill>
-                          <a:latin typeface="맑은 고딕" pitchFamily="34" charset="0"/>
-                          <a:ea typeface="맑은 고딕" pitchFamily="34" charset="-122"/>
-                          <a:cs typeface="맑은 고딕" pitchFamily="34" charset="-120"/>
-                        </a:rPr>
-                        <a:t>뮤텍스</a:t>
-                      </a:r>
-                      <a:endParaRPr lang="en-US" sz="1150" dirty="0">
-                        <a:latin typeface="맑은 고딕" charset="0"/>
-                        <a:ea typeface="맑은 고딕" charset="0"/>
-                        <a:cs typeface="맑은 고딕" charset="0"/>
-                      </a:endParaRPr>
-                    </a:p>
-                  </a:txBody>
-                  <a:tcPr marL="63500" marR="63500" marT="25400" marB="25400" anchor="ctr">
-                    <a:lnL w="9525" cap="flat" cmpd="sng" algn="ctr">
-                      <a:solidFill>
-                        <a:srgbClr val="D5DBE4"/>
-                      </a:solidFill>
-                      <a:prstDash val="solid"/>
-                      <a:round/>
-                      <a:headEnd type="none" w="med" len="med"/>
-                      <a:tailEnd type="none" w="med" len="med"/>
-                    </a:lnL>
-                    <a:lnR w="9525" cap="flat" cmpd="sng" algn="ctr">
-                      <a:solidFill>
-                        <a:srgbClr val="D5DBE4"/>
-                      </a:solidFill>
-                      <a:prstDash val="solid"/>
-                      <a:round/>
-                      <a:headEnd type="none" w="med" len="med"/>
-                      <a:tailEnd type="none" w="med" len="med"/>
-                    </a:lnR>
-                    <a:lnT w="9525" cap="flat" cmpd="sng" algn="ctr">
-                      <a:solidFill>
-                        <a:srgbClr val="D5DBE4"/>
-                      </a:solidFill>
-                      <a:prstDash val="solid"/>
-                      <a:round/>
-                      <a:headEnd type="none" w="med" len="med"/>
-                      <a:tailEnd type="none" w="med" len="med"/>
-                    </a:lnT>
-                    <a:lnB w="9525" cap="flat" cmpd="sng" algn="ctr">
-                      <a:solidFill>
-                        <a:srgbClr val="D5DBE4"/>
-                      </a:solidFill>
-                      <a:prstDash val="solid"/>
-                      <a:round/>
-                      <a:headEnd type="none" w="med" len="med"/>
-                      <a:tailEnd type="none" w="med" len="med"/>
-                    </a:lnB>
-                    <a:solidFill>
-                      <a:srgbClr val="1E232E"/>
-                    </a:solidFill>
-                  </a:tcPr>
-                </a:tc>
-                <a:tc>
-                  <a:txBody>
-                    <a:bodyPr/>
-                    <a:lstStyle/>
-                    <a:p>
-                      <a:pPr algn="ctr" indent="0" marL="0">
-                        <a:buNone/>
-                      </a:pPr>
-                      <a:r>
-                        <a:rPr lang="en-US" sz="1150" b="1" dirty="0">
-                          <a:solidFill>
-                            <a:srgbClr val="FFFFFF"/>
-                          </a:solidFill>
-                          <a:latin typeface="맑은 고딕" pitchFamily="34" charset="0"/>
-                          <a:ea typeface="맑은 고딕" pitchFamily="34" charset="-122"/>
-                          <a:cs typeface="맑은 고딕" pitchFamily="34" charset="-120"/>
-                        </a:rPr>
-                        <a:t>세마포어</a:t>
-                      </a:r>
-                      <a:endParaRPr lang="en-US" sz="1150" dirty="0">
-                        <a:latin typeface="맑은 고딕" charset="0"/>
-                        <a:ea typeface="맑은 고딕" charset="0"/>
-                        <a:cs typeface="맑은 고딕" charset="0"/>
-                      </a:endParaRPr>
-                    </a:p>
-                  </a:txBody>
-                  <a:tcPr marL="63500" marR="63500" marT="25400" marB="25400" anchor="ctr">
-                    <a:lnL w="9525" cap="flat" cmpd="sng" algn="ctr">
-                      <a:solidFill>
-                        <a:srgbClr val="D5DBE4"/>
-                      </a:solidFill>
-                      <a:prstDash val="solid"/>
-                      <a:round/>
-                      <a:headEnd type="none" w="med" len="med"/>
-                      <a:tailEnd type="none" w="med" len="med"/>
-                    </a:lnL>
-                    <a:lnR w="9525" cap="flat" cmpd="sng" algn="ctr">
-                      <a:solidFill>
-                        <a:srgbClr val="D5DBE4"/>
-                      </a:solidFill>
-                      <a:prstDash val="solid"/>
-                      <a:round/>
-                      <a:headEnd type="none" w="med" len="med"/>
-                      <a:tailEnd type="none" w="med" len="med"/>
-                    </a:lnR>
-                    <a:lnT w="9525" cap="flat" cmpd="sng" algn="ctr">
-                      <a:solidFill>
-                        <a:srgbClr val="D5DBE4"/>
-                      </a:solidFill>
-                      <a:prstDash val="solid"/>
-                      <a:round/>
-                      <a:headEnd type="none" w="med" len="med"/>
-                      <a:tailEnd type="none" w="med" len="med"/>
-                    </a:lnT>
-                    <a:lnB w="9525" cap="flat" cmpd="sng" algn="ctr">
-                      <a:solidFill>
-                        <a:srgbClr val="D5DBE4"/>
-                      </a:solidFill>
-                      <a:prstDash val="solid"/>
-                      <a:round/>
-                      <a:headEnd type="none" w="med" len="med"/>
-                      <a:tailEnd type="none" w="med" len="med"/>
-                    </a:lnB>
-                    <a:solidFill>
-                      <a:srgbClr val="1E232E"/>
-                    </a:solidFill>
-                  </a:tcPr>
-                </a:tc>
-              </a:tr>
-              <a:tr h="420624">
-                <a:tc>
-                  <a:txBody>
-                    <a:bodyPr/>
-                    <a:lstStyle/>
-                    <a:p>
-                      <a:pPr algn="l" indent="0" marL="0">
-                        <a:buNone/>
-                      </a:pPr>
-                      <a:r>
-                        <a:rPr lang="en-US" sz="1080" b="1" dirty="0">
-                          <a:solidFill>
-                            <a:srgbClr val="1E232E"/>
-                          </a:solidFill>
-                          <a:latin typeface="맑은 고딕" pitchFamily="34" charset="0"/>
-                          <a:ea typeface="맑은 고딕" pitchFamily="34" charset="-122"/>
-                          <a:cs typeface="맑은 고딕" pitchFamily="34" charset="-120"/>
-                        </a:rPr>
-                        <a:t>값</a:t>
-                      </a:r>
-                      <a:endParaRPr lang="en-US" sz="1080" dirty="0">
-                        <a:latin typeface="맑은 고딕" charset="0"/>
-                        <a:ea typeface="맑은 고딕" charset="0"/>
-                        <a:cs typeface="맑은 고딕" charset="0"/>
-                      </a:endParaRPr>
-                    </a:p>
-                  </a:txBody>
-                  <a:tcPr marL="63500" marR="63500" marT="25400" marB="25400" anchor="ctr">
-                    <a:lnL w="9525" cap="flat" cmpd="sng" algn="ctr">
-                      <a:solidFill>
-                        <a:srgbClr val="D5DBE4"/>
-                      </a:solidFill>
-                      <a:prstDash val="solid"/>
-                      <a:round/>
-                      <a:headEnd type="none" w="med" len="med"/>
-                      <a:tailEnd type="none" w="med" len="med"/>
-                    </a:lnL>
-                    <a:lnR w="9525" cap="flat" cmpd="sng" algn="ctr">
-                      <a:solidFill>
-                        <a:srgbClr val="D5DBE4"/>
-                      </a:solidFill>
-                      <a:prstDash val="solid"/>
-                      <a:round/>
-                      <a:headEnd type="none" w="med" len="med"/>
-                      <a:tailEnd type="none" w="med" len="med"/>
-                    </a:lnR>
-                    <a:lnT w="9525" cap="flat" cmpd="sng" algn="ctr">
-                      <a:solidFill>
-                        <a:srgbClr val="D5DBE4"/>
-                      </a:solidFill>
-                      <a:prstDash val="solid"/>
-                      <a:round/>
-                      <a:headEnd type="none" w="med" len="med"/>
-                      <a:tailEnd type="none" w="med" len="med"/>
-                    </a:lnT>
-                    <a:lnB w="9525" cap="flat" cmpd="sng" algn="ctr">
-                      <a:solidFill>
-                        <a:srgbClr val="D5DBE4"/>
-                      </a:solidFill>
-                      <a:prstDash val="solid"/>
-                      <a:round/>
-                      <a:headEnd type="none" w="med" len="med"/>
-                      <a:tailEnd type="none" w="med" len="med"/>
-                    </a:lnB>
-                    <a:solidFill>
-                      <a:srgbClr val="FFFFFF"/>
-                    </a:solidFill>
-                  </a:tcPr>
-                </a:tc>
-                <a:tc>
-                  <a:txBody>
-                    <a:bodyPr/>
-                    <a:lstStyle/>
-                    <a:p>
-                      <a:pPr algn="ctr" indent="0" marL="0">
-                        <a:buNone/>
-                      </a:pPr>
-                      <a:r>
-                        <a:rPr lang="en-US" sz="1080" dirty="0">
-                          <a:solidFill>
-                            <a:srgbClr val="3D4451"/>
-                          </a:solidFill>
-                          <a:latin typeface="맑은 고딕" pitchFamily="34" charset="0"/>
-                          <a:ea typeface="맑은 고딕" pitchFamily="34" charset="-122"/>
-                          <a:cs typeface="맑은 고딕" pitchFamily="34" charset="-120"/>
-                        </a:rPr>
-                        <a:t>잠김 / 풀림 (0 · 1)</a:t>
-                      </a:r>
-                      <a:endParaRPr lang="en-US" sz="1080" dirty="0">
-                        <a:latin typeface="맑은 고딕" charset="0"/>
-                        <a:ea typeface="맑은 고딕" charset="0"/>
-                        <a:cs typeface="맑은 고딕" charset="0"/>
-                      </a:endParaRPr>
-                    </a:p>
-                  </a:txBody>
-                  <a:tcPr marL="63500" marR="63500" marT="25400" marB="25400" anchor="ctr">
-                    <a:lnL w="9525" cap="flat" cmpd="sng" algn="ctr">
-                      <a:solidFill>
-                        <a:srgbClr val="D5DBE4"/>
-                      </a:solidFill>
-                      <a:prstDash val="solid"/>
-                      <a:round/>
-                      <a:headEnd type="none" w="med" len="med"/>
-                      <a:tailEnd type="none" w="med" len="med"/>
-                    </a:lnL>
-                    <a:lnR w="9525" cap="flat" cmpd="sng" algn="ctr">
-                      <a:solidFill>
-                        <a:srgbClr val="D5DBE4"/>
-                      </a:solidFill>
-                      <a:prstDash val="solid"/>
-                      <a:round/>
-                      <a:headEnd type="none" w="med" len="med"/>
-                      <a:tailEnd type="none" w="med" len="med"/>
-                    </a:lnR>
-                    <a:lnT w="9525" cap="flat" cmpd="sng" algn="ctr">
-                      <a:solidFill>
-                        <a:srgbClr val="D5DBE4"/>
-                      </a:solidFill>
-                      <a:prstDash val="solid"/>
-                      <a:round/>
-                      <a:headEnd type="none" w="med" len="med"/>
-                      <a:tailEnd type="none" w="med" len="med"/>
-                    </a:lnT>
-                    <a:lnB w="9525" cap="flat" cmpd="sng" algn="ctr">
-                      <a:solidFill>
-                        <a:srgbClr val="D5DBE4"/>
-                      </a:solidFill>
-                      <a:prstDash val="solid"/>
-                      <a:round/>
-                      <a:headEnd type="none" w="med" len="med"/>
-                      <a:tailEnd type="none" w="med" len="med"/>
-                    </a:lnB>
-                    <a:solidFill>
-                      <a:srgbClr val="FFFFFF"/>
-                    </a:solidFill>
-                  </a:tcPr>
-                </a:tc>
-                <a:tc>
-                  <a:txBody>
-                    <a:bodyPr/>
-                    <a:lstStyle/>
-                    <a:p>
-                      <a:pPr algn="ctr" indent="0" marL="0">
-                        <a:buNone/>
-                      </a:pPr>
-                      <a:r>
-                        <a:rPr lang="en-US" sz="1080" dirty="0">
-                          <a:solidFill>
-                            <a:srgbClr val="3D4451"/>
-                          </a:solidFill>
-                          <a:latin typeface="맑은 고딕" pitchFamily="34" charset="0"/>
-                          <a:ea typeface="맑은 고딕" pitchFamily="34" charset="-122"/>
-                          <a:cs typeface="맑은 고딕" pitchFamily="34" charset="-120"/>
-                        </a:rPr>
-                        <a:t>0 이상의 정수 카운터</a:t>
-                      </a:r>
-                      <a:endParaRPr lang="en-US" sz="1080" dirty="0">
-                        <a:latin typeface="맑은 고딕" charset="0"/>
-                        <a:ea typeface="맑은 고딕" charset="0"/>
-                        <a:cs typeface="맑은 고딕" charset="0"/>
-                      </a:endParaRPr>
-                    </a:p>
-                  </a:txBody>
-                  <a:tcPr marL="63500" marR="63500" marT="25400" marB="25400" anchor="ctr">
-                    <a:lnL w="9525" cap="flat" cmpd="sng" algn="ctr">
-                      <a:solidFill>
-                        <a:srgbClr val="D5DBE4"/>
-                      </a:solidFill>
-                      <a:prstDash val="solid"/>
-                      <a:round/>
-                      <a:headEnd type="none" w="med" len="med"/>
-                      <a:tailEnd type="none" w="med" len="med"/>
-                    </a:lnL>
-                    <a:lnR w="9525" cap="flat" cmpd="sng" algn="ctr">
-                      <a:solidFill>
-                        <a:srgbClr val="D5DBE4"/>
-                      </a:solidFill>
-                      <a:prstDash val="solid"/>
-                      <a:round/>
-                      <a:headEnd type="none" w="med" len="med"/>
-                      <a:tailEnd type="none" w="med" len="med"/>
-                    </a:lnR>
-                    <a:lnT w="9525" cap="flat" cmpd="sng" algn="ctr">
-                      <a:solidFill>
-                        <a:srgbClr val="D5DBE4"/>
-                      </a:solidFill>
-                      <a:prstDash val="solid"/>
-                      <a:round/>
-                      <a:headEnd type="none" w="med" len="med"/>
-                      <a:tailEnd type="none" w="med" len="med"/>
-                    </a:lnT>
-                    <a:lnB w="9525" cap="flat" cmpd="sng" algn="ctr">
-                      <a:solidFill>
-                        <a:srgbClr val="D5DBE4"/>
-                      </a:solidFill>
-                      <a:prstDash val="solid"/>
-                      <a:round/>
-                      <a:headEnd type="none" w="med" len="med"/>
-                      <a:tailEnd type="none" w="med" len="med"/>
-                    </a:lnB>
-                    <a:solidFill>
-                      <a:srgbClr val="FFFFFF"/>
-                    </a:solidFill>
-                  </a:tcPr>
-                </a:tc>
-              </a:tr>
-              <a:tr h="420624">
-                <a:tc>
-                  <a:txBody>
-                    <a:bodyPr/>
-                    <a:lstStyle/>
-                    <a:p>
-                      <a:pPr algn="l" indent="0" marL="0">
-                        <a:buNone/>
-                      </a:pPr>
-                      <a:r>
-                        <a:rPr lang="en-US" sz="1080" b="1" dirty="0">
-                          <a:solidFill>
-                            <a:srgbClr val="1E232E"/>
-                          </a:solidFill>
-                          <a:latin typeface="맑은 고딕" pitchFamily="34" charset="0"/>
-                          <a:ea typeface="맑은 고딕" pitchFamily="34" charset="-122"/>
-                          <a:cs typeface="맑은 고딕" pitchFamily="34" charset="-120"/>
-                        </a:rPr>
-                        <a:t>소유권</a:t>
-                      </a:r>
-                      <a:endParaRPr lang="en-US" sz="1080" dirty="0">
-                        <a:latin typeface="맑은 고딕" charset="0"/>
-                        <a:ea typeface="맑은 고딕" charset="0"/>
-                        <a:cs typeface="맑은 고딕" charset="0"/>
-                      </a:endParaRPr>
-                    </a:p>
-                  </a:txBody>
-                  <a:tcPr marL="63500" marR="63500" marT="25400" marB="25400" anchor="ctr">
-                    <a:lnL w="9525" cap="flat" cmpd="sng" algn="ctr">
-                      <a:solidFill>
-                        <a:srgbClr val="D5DBE4"/>
-                      </a:solidFill>
-                      <a:prstDash val="solid"/>
-                      <a:round/>
-                      <a:headEnd type="none" w="med" len="med"/>
-                      <a:tailEnd type="none" w="med" len="med"/>
-                    </a:lnL>
-                    <a:lnR w="9525" cap="flat" cmpd="sng" algn="ctr">
-                      <a:solidFill>
-                        <a:srgbClr val="D5DBE4"/>
-                      </a:solidFill>
-                      <a:prstDash val="solid"/>
-                      <a:round/>
-                      <a:headEnd type="none" w="med" len="med"/>
-                      <a:tailEnd type="none" w="med" len="med"/>
-                    </a:lnR>
-                    <a:lnT w="9525" cap="flat" cmpd="sng" algn="ctr">
-                      <a:solidFill>
-                        <a:srgbClr val="D5DBE4"/>
-                      </a:solidFill>
-                      <a:prstDash val="solid"/>
-                      <a:round/>
-                      <a:headEnd type="none" w="med" len="med"/>
-                      <a:tailEnd type="none" w="med" len="med"/>
-                    </a:lnT>
-                    <a:lnB w="9525" cap="flat" cmpd="sng" algn="ctr">
-                      <a:solidFill>
-                        <a:srgbClr val="D5DBE4"/>
-                      </a:solidFill>
-                      <a:prstDash val="solid"/>
-                      <a:round/>
-                      <a:headEnd type="none" w="med" len="med"/>
-                      <a:tailEnd type="none" w="med" len="med"/>
-                    </a:lnB>
-                    <a:solidFill>
-                      <a:srgbClr val="F2F4F7"/>
-                    </a:solidFill>
-                  </a:tcPr>
-                </a:tc>
-                <a:tc>
-                  <a:txBody>
-                    <a:bodyPr/>
-                    <a:lstStyle/>
-                    <a:p>
-                      <a:pPr algn="ctr" indent="0" marL="0">
-                        <a:buNone/>
-                      </a:pPr>
-                      <a:r>
-                        <a:rPr lang="en-US" sz="1080" dirty="0">
-                          <a:solidFill>
-                            <a:srgbClr val="3D4451"/>
-                          </a:solidFill>
-                          <a:latin typeface="맑은 고딕" pitchFamily="34" charset="0"/>
-                          <a:ea typeface="맑은 고딕" pitchFamily="34" charset="-122"/>
-                          <a:cs typeface="맑은 고딕" pitchFamily="34" charset="-120"/>
-                        </a:rPr>
-                        <a:t>있다 — 잠근 쪽만 해제</a:t>
-                      </a:r>
-                      <a:endParaRPr lang="en-US" sz="1080" dirty="0">
-                        <a:latin typeface="맑은 고딕" charset="0"/>
-                        <a:ea typeface="맑은 고딕" charset="0"/>
-                        <a:cs typeface="맑은 고딕" charset="0"/>
-                      </a:endParaRPr>
-                    </a:p>
-                  </a:txBody>
-                  <a:tcPr marL="63500" marR="63500" marT="25400" marB="25400" anchor="ctr">
-                    <a:lnL w="9525" cap="flat" cmpd="sng" algn="ctr">
-                      <a:solidFill>
-                        <a:srgbClr val="D5DBE4"/>
-                      </a:solidFill>
-                      <a:prstDash val="solid"/>
-                      <a:round/>
-                      <a:headEnd type="none" w="med" len="med"/>
-                      <a:tailEnd type="none" w="med" len="med"/>
-                    </a:lnL>
-                    <a:lnR w="9525" cap="flat" cmpd="sng" algn="ctr">
-                      <a:solidFill>
-                        <a:srgbClr val="D5DBE4"/>
-                      </a:solidFill>
-                      <a:prstDash val="solid"/>
-                      <a:round/>
-                      <a:headEnd type="none" w="med" len="med"/>
-                      <a:tailEnd type="none" w="med" len="med"/>
-                    </a:lnR>
-                    <a:lnT w="9525" cap="flat" cmpd="sng" algn="ctr">
-                      <a:solidFill>
-                        <a:srgbClr val="D5DBE4"/>
-                      </a:solidFill>
-                      <a:prstDash val="solid"/>
-                      <a:round/>
-                      <a:headEnd type="none" w="med" len="med"/>
-                      <a:tailEnd type="none" w="med" len="med"/>
-                    </a:lnT>
-                    <a:lnB w="9525" cap="flat" cmpd="sng" algn="ctr">
-                      <a:solidFill>
-                        <a:srgbClr val="D5DBE4"/>
-                      </a:solidFill>
-                      <a:prstDash val="solid"/>
-                      <a:round/>
-                      <a:headEnd type="none" w="med" len="med"/>
-                      <a:tailEnd type="none" w="med" len="med"/>
-                    </a:lnB>
-                    <a:solidFill>
-                      <a:srgbClr val="F2F4F7"/>
-                    </a:solidFill>
-                  </a:tcPr>
-                </a:tc>
-                <a:tc>
-                  <a:txBody>
-                    <a:bodyPr/>
-                    <a:lstStyle/>
-                    <a:p>
-                      <a:pPr algn="ctr" indent="0" marL="0">
-                        <a:buNone/>
-                      </a:pPr>
-                      <a:r>
-                        <a:rPr lang="en-US" sz="1080" dirty="0">
-                          <a:solidFill>
-                            <a:srgbClr val="3D4451"/>
-                          </a:solidFill>
-                          <a:latin typeface="맑은 고딕" pitchFamily="34" charset="0"/>
-                          <a:ea typeface="맑은 고딕" pitchFamily="34" charset="-122"/>
-                          <a:cs typeface="맑은 고딕" pitchFamily="34" charset="-120"/>
-                        </a:rPr>
-                        <a:t>없다 — 누구나 post 가능</a:t>
-                      </a:r>
-                      <a:endParaRPr lang="en-US" sz="1080" dirty="0">
-                        <a:latin typeface="맑은 고딕" charset="0"/>
-                        <a:ea typeface="맑은 고딕" charset="0"/>
-                        <a:cs typeface="맑은 고딕" charset="0"/>
-                      </a:endParaRPr>
-                    </a:p>
-                  </a:txBody>
-                  <a:tcPr marL="63500" marR="63500" marT="25400" marB="25400" anchor="ctr">
-                    <a:lnL w="9525" cap="flat" cmpd="sng" algn="ctr">
-                      <a:solidFill>
-                        <a:srgbClr val="D5DBE4"/>
-                      </a:solidFill>
-                      <a:prstDash val="solid"/>
-                      <a:round/>
-                      <a:headEnd type="none" w="med" len="med"/>
-                      <a:tailEnd type="none" w="med" len="med"/>
-                    </a:lnL>
-                    <a:lnR w="9525" cap="flat" cmpd="sng" algn="ctr">
-                      <a:solidFill>
-                        <a:srgbClr val="D5DBE4"/>
-                      </a:solidFill>
-                      <a:prstDash val="solid"/>
-                      <a:round/>
-                      <a:headEnd type="none" w="med" len="med"/>
-                      <a:tailEnd type="none" w="med" len="med"/>
-                    </a:lnR>
-                    <a:lnT w="9525" cap="flat" cmpd="sng" algn="ctr">
-                      <a:solidFill>
-                        <a:srgbClr val="D5DBE4"/>
-                      </a:solidFill>
-                      <a:prstDash val="solid"/>
-                      <a:round/>
-                      <a:headEnd type="none" w="med" len="med"/>
-                      <a:tailEnd type="none" w="med" len="med"/>
-                    </a:lnT>
-                    <a:lnB w="9525" cap="flat" cmpd="sng" algn="ctr">
-                      <a:solidFill>
-                        <a:srgbClr val="D5DBE4"/>
-                      </a:solidFill>
-                      <a:prstDash val="solid"/>
-                      <a:round/>
-                      <a:headEnd type="none" w="med" len="med"/>
-                      <a:tailEnd type="none" w="med" len="med"/>
-                    </a:lnB>
-                    <a:solidFill>
-                      <a:srgbClr val="F2F4F7"/>
-                    </a:solidFill>
-                  </a:tcPr>
-                </a:tc>
-              </a:tr>
-              <a:tr h="420624">
-                <a:tc>
-                  <a:txBody>
-                    <a:bodyPr/>
-                    <a:lstStyle/>
-                    <a:p>
-                      <a:pPr algn="l" indent="0" marL="0">
-                        <a:buNone/>
-                      </a:pPr>
-                      <a:r>
-                        <a:rPr lang="en-US" sz="1080" b="1" dirty="0">
-                          <a:solidFill>
-                            <a:srgbClr val="1E232E"/>
-                          </a:solidFill>
-                          <a:latin typeface="맑은 고딕" pitchFamily="34" charset="0"/>
-                          <a:ea typeface="맑은 고딕" pitchFamily="34" charset="-122"/>
-                          <a:cs typeface="맑은 고딕" pitchFamily="34" charset="-120"/>
-                        </a:rPr>
-                        <a:t>목적</a:t>
-                      </a:r>
-                      <a:endParaRPr lang="en-US" sz="1080" dirty="0">
-                        <a:latin typeface="맑은 고딕" charset="0"/>
-                        <a:ea typeface="맑은 고딕" charset="0"/>
-                        <a:cs typeface="맑은 고딕" charset="0"/>
-                      </a:endParaRPr>
-                    </a:p>
-                  </a:txBody>
-                  <a:tcPr marL="63500" marR="63500" marT="25400" marB="25400" anchor="ctr">
-                    <a:lnL w="9525" cap="flat" cmpd="sng" algn="ctr">
-                      <a:solidFill>
-                        <a:srgbClr val="D5DBE4"/>
-                      </a:solidFill>
-                      <a:prstDash val="solid"/>
-                      <a:round/>
-                      <a:headEnd type="none" w="med" len="med"/>
-                      <a:tailEnd type="none" w="med" len="med"/>
-                    </a:lnL>
-                    <a:lnR w="9525" cap="flat" cmpd="sng" algn="ctr">
-                      <a:solidFill>
-                        <a:srgbClr val="D5DBE4"/>
-                      </a:solidFill>
-                      <a:prstDash val="solid"/>
-                      <a:round/>
-                      <a:headEnd type="none" w="med" len="med"/>
-                      <a:tailEnd type="none" w="med" len="med"/>
-                    </a:lnR>
-                    <a:lnT w="9525" cap="flat" cmpd="sng" algn="ctr">
-                      <a:solidFill>
-                        <a:srgbClr val="D5DBE4"/>
-                      </a:solidFill>
-                      <a:prstDash val="solid"/>
-                      <a:round/>
-                      <a:headEnd type="none" w="med" len="med"/>
-                      <a:tailEnd type="none" w="med" len="med"/>
-                    </a:lnT>
-                    <a:lnB w="9525" cap="flat" cmpd="sng" algn="ctr">
-                      <a:solidFill>
-                        <a:srgbClr val="D5DBE4"/>
-                      </a:solidFill>
-                      <a:prstDash val="solid"/>
-                      <a:round/>
-                      <a:headEnd type="none" w="med" len="med"/>
-                      <a:tailEnd type="none" w="med" len="med"/>
-                    </a:lnB>
-                    <a:solidFill>
-                      <a:srgbClr val="FFFFFF"/>
-                    </a:solidFill>
-                  </a:tcPr>
-                </a:tc>
-                <a:tc>
-                  <a:txBody>
-                    <a:bodyPr/>
-                    <a:lstStyle/>
-                    <a:p>
-                      <a:pPr algn="ctr" indent="0" marL="0">
-                        <a:buNone/>
-                      </a:pPr>
-                      <a:r>
-                        <a:rPr lang="en-US" sz="1080" dirty="0">
-                          <a:solidFill>
-                            <a:srgbClr val="3D4451"/>
-                          </a:solidFill>
-                          <a:latin typeface="맑은 고딕" pitchFamily="34" charset="0"/>
-                          <a:ea typeface="맑은 고딕" pitchFamily="34" charset="-122"/>
-                          <a:cs typeface="맑은 고딕" pitchFamily="34" charset="-120"/>
-                        </a:rPr>
-                        <a:t>상호배제 (데이터 보호)</a:t>
-                      </a:r>
-                      <a:endParaRPr lang="en-US" sz="1080" dirty="0">
-                        <a:latin typeface="맑은 고딕" charset="0"/>
-                        <a:ea typeface="맑은 고딕" charset="0"/>
-                        <a:cs typeface="맑은 고딕" charset="0"/>
-                      </a:endParaRPr>
-                    </a:p>
-                  </a:txBody>
-                  <a:tcPr marL="63500" marR="63500" marT="25400" marB="25400" anchor="ctr">
-                    <a:lnL w="9525" cap="flat" cmpd="sng" algn="ctr">
-                      <a:solidFill>
-                        <a:srgbClr val="D5DBE4"/>
-                      </a:solidFill>
-                      <a:prstDash val="solid"/>
-                      <a:round/>
-                      <a:headEnd type="none" w="med" len="med"/>
-                      <a:tailEnd type="none" w="med" len="med"/>
-                    </a:lnL>
-                    <a:lnR w="9525" cap="flat" cmpd="sng" algn="ctr">
-                      <a:solidFill>
-                        <a:srgbClr val="D5DBE4"/>
-                      </a:solidFill>
-                      <a:prstDash val="solid"/>
-                      <a:round/>
-                      <a:headEnd type="none" w="med" len="med"/>
-                      <a:tailEnd type="none" w="med" len="med"/>
-                    </a:lnR>
-                    <a:lnT w="9525" cap="flat" cmpd="sng" algn="ctr">
-                      <a:solidFill>
-                        <a:srgbClr val="D5DBE4"/>
-                      </a:solidFill>
-                      <a:prstDash val="solid"/>
-                      <a:round/>
-                      <a:headEnd type="none" w="med" len="med"/>
-                      <a:tailEnd type="none" w="med" len="med"/>
-                    </a:lnT>
-                    <a:lnB w="9525" cap="flat" cmpd="sng" algn="ctr">
-                      <a:solidFill>
-                        <a:srgbClr val="D5DBE4"/>
-                      </a:solidFill>
-                      <a:prstDash val="solid"/>
-                      <a:round/>
-                      <a:headEnd type="none" w="med" len="med"/>
-                      <a:tailEnd type="none" w="med" len="med"/>
-                    </a:lnB>
-                    <a:solidFill>
-                      <a:srgbClr val="FFFFFF"/>
-                    </a:solidFill>
-                  </a:tcPr>
-                </a:tc>
-                <a:tc>
-                  <a:txBody>
-                    <a:bodyPr/>
-                    <a:lstStyle/>
-                    <a:p>
-                      <a:pPr algn="ctr" indent="0" marL="0">
-                        <a:buNone/>
-                      </a:pPr>
-                      <a:r>
-                        <a:rPr lang="en-US" sz="1080" dirty="0">
-                          <a:solidFill>
-                            <a:srgbClr val="3D4451"/>
-                          </a:solidFill>
-                          <a:latin typeface="맑은 고딕" pitchFamily="34" charset="0"/>
-                          <a:ea typeface="맑은 고딕" pitchFamily="34" charset="-122"/>
-                          <a:cs typeface="맑은 고딕" pitchFamily="34" charset="-120"/>
-                        </a:rPr>
-                        <a:t>신호 · 개수 관리 (흐름 제어)</a:t>
-                      </a:r>
-                      <a:endParaRPr lang="en-US" sz="1080" dirty="0">
-                        <a:latin typeface="맑은 고딕" charset="0"/>
-                        <a:ea typeface="맑은 고딕" charset="0"/>
-                        <a:cs typeface="맑은 고딕" charset="0"/>
-                      </a:endParaRPr>
-                    </a:p>
-                  </a:txBody>
-                  <a:tcPr marL="63500" marR="63500" marT="25400" marB="25400" anchor="ctr">
-                    <a:lnL w="9525" cap="flat" cmpd="sng" algn="ctr">
-                      <a:solidFill>
-                        <a:srgbClr val="D5DBE4"/>
-                      </a:solidFill>
-                      <a:prstDash val="solid"/>
-                      <a:round/>
-                      <a:headEnd type="none" w="med" len="med"/>
-                      <a:tailEnd type="none" w="med" len="med"/>
-                    </a:lnL>
-                    <a:lnR w="9525" cap="flat" cmpd="sng" algn="ctr">
-                      <a:solidFill>
-                        <a:srgbClr val="D5DBE4"/>
-                      </a:solidFill>
-                      <a:prstDash val="solid"/>
-                      <a:round/>
-                      <a:headEnd type="none" w="med" len="med"/>
-                      <a:tailEnd type="none" w="med" len="med"/>
-                    </a:lnR>
-                    <a:lnT w="9525" cap="flat" cmpd="sng" algn="ctr">
-                      <a:solidFill>
-                        <a:srgbClr val="D5DBE4"/>
-                      </a:solidFill>
-                      <a:prstDash val="solid"/>
-                      <a:round/>
-                      <a:headEnd type="none" w="med" len="med"/>
-                      <a:tailEnd type="none" w="med" len="med"/>
-                    </a:lnT>
-                    <a:lnB w="9525" cap="flat" cmpd="sng" algn="ctr">
-                      <a:solidFill>
-                        <a:srgbClr val="D5DBE4"/>
-                      </a:solidFill>
-                      <a:prstDash val="solid"/>
-                      <a:round/>
-                      <a:headEnd type="none" w="med" len="med"/>
-                      <a:tailEnd type="none" w="med" len="med"/>
-                    </a:lnB>
-                    <a:solidFill>
-                      <a:srgbClr val="FFFFFF"/>
-                    </a:solidFill>
-                  </a:tcPr>
-                </a:tc>
-              </a:tr>
-              <a:tr h="420624">
-                <a:tc>
-                  <a:txBody>
-                    <a:bodyPr/>
-                    <a:lstStyle/>
-                    <a:p>
-                      <a:pPr algn="l" indent="0" marL="0">
-                        <a:buNone/>
-                      </a:pPr>
-                      <a:r>
-                        <a:rPr lang="en-US" sz="1080" b="1" dirty="0">
-                          <a:solidFill>
-                            <a:srgbClr val="1E232E"/>
-                          </a:solidFill>
-                          <a:latin typeface="맑은 고딕" pitchFamily="34" charset="0"/>
-                          <a:ea typeface="맑은 고딕" pitchFamily="34" charset="-122"/>
-                          <a:cs typeface="맑은 고딕" pitchFamily="34" charset="-120"/>
-                        </a:rPr>
-                        <a:t>던지는 질문</a:t>
-                      </a:r>
-                      <a:endParaRPr lang="en-US" sz="1080" dirty="0">
-                        <a:latin typeface="맑은 고딕" charset="0"/>
-                        <a:ea typeface="맑은 고딕" charset="0"/>
-                        <a:cs typeface="맑은 고딕" charset="0"/>
-                      </a:endParaRPr>
-                    </a:p>
-                  </a:txBody>
-                  <a:tcPr marL="63500" marR="63500" marT="25400" marB="25400" anchor="ctr">
-                    <a:lnL w="9525" cap="flat" cmpd="sng" algn="ctr">
-                      <a:solidFill>
-                        <a:srgbClr val="D5DBE4"/>
-                      </a:solidFill>
-                      <a:prstDash val="solid"/>
-                      <a:round/>
-                      <a:headEnd type="none" w="med" len="med"/>
-                      <a:tailEnd type="none" w="med" len="med"/>
-                    </a:lnL>
-                    <a:lnR w="9525" cap="flat" cmpd="sng" algn="ctr">
-                      <a:solidFill>
-                        <a:srgbClr val="D5DBE4"/>
-                      </a:solidFill>
-                      <a:prstDash val="solid"/>
-                      <a:round/>
-                      <a:headEnd type="none" w="med" len="med"/>
-                      <a:tailEnd type="none" w="med" len="med"/>
-                    </a:lnR>
-                    <a:lnT w="9525" cap="flat" cmpd="sng" algn="ctr">
-                      <a:solidFill>
-                        <a:srgbClr val="D5DBE4"/>
-                      </a:solidFill>
-                      <a:prstDash val="solid"/>
-                      <a:round/>
-                      <a:headEnd type="none" w="med" len="med"/>
-                      <a:tailEnd type="none" w="med" len="med"/>
-                    </a:lnT>
-                    <a:lnB w="9525" cap="flat" cmpd="sng" algn="ctr">
-                      <a:solidFill>
-                        <a:srgbClr val="D5DBE4"/>
-                      </a:solidFill>
-                      <a:prstDash val="solid"/>
-                      <a:round/>
-                      <a:headEnd type="none" w="med" len="med"/>
-                      <a:tailEnd type="none" w="med" len="med"/>
-                    </a:lnB>
-                    <a:solidFill>
-                      <a:srgbClr val="F2F4F7"/>
-                    </a:solidFill>
-                  </a:tcPr>
-                </a:tc>
-                <a:tc>
-                  <a:txBody>
-                    <a:bodyPr/>
-                    <a:lstStyle/>
-                    <a:p>
-                      <a:pPr algn="ctr" indent="0" marL="0">
-                        <a:buNone/>
-                      </a:pPr>
-                      <a:r>
-                        <a:rPr lang="en-US" sz="1080" dirty="0">
-                          <a:solidFill>
-                            <a:srgbClr val="3D4451"/>
-                          </a:solidFill>
-                          <a:latin typeface="맑은 고딕" pitchFamily="34" charset="0"/>
-                          <a:ea typeface="맑은 고딕" pitchFamily="34" charset="-122"/>
-                          <a:cs typeface="맑은 고딕" pitchFamily="34" charset="-120"/>
-                        </a:rPr>
-                        <a:t>지금 나만 만지고 있나?</a:t>
-                      </a:r>
-                      <a:endParaRPr lang="en-US" sz="1080" dirty="0">
-                        <a:latin typeface="맑은 고딕" charset="0"/>
-                        <a:ea typeface="맑은 고딕" charset="0"/>
-                        <a:cs typeface="맑은 고딕" charset="0"/>
-                      </a:endParaRPr>
-                    </a:p>
-                  </a:txBody>
-                  <a:tcPr marL="63500" marR="63500" marT="25400" marB="25400" anchor="ctr">
-                    <a:lnL w="9525" cap="flat" cmpd="sng" algn="ctr">
-                      <a:solidFill>
-                        <a:srgbClr val="D5DBE4"/>
-                      </a:solidFill>
-                      <a:prstDash val="solid"/>
-                      <a:round/>
-                      <a:headEnd type="none" w="med" len="med"/>
-                      <a:tailEnd type="none" w="med" len="med"/>
-                    </a:lnL>
-                    <a:lnR w="9525" cap="flat" cmpd="sng" algn="ctr">
-                      <a:solidFill>
-                        <a:srgbClr val="D5DBE4"/>
-                      </a:solidFill>
-                      <a:prstDash val="solid"/>
-                      <a:round/>
-                      <a:headEnd type="none" w="med" len="med"/>
-                      <a:tailEnd type="none" w="med" len="med"/>
-                    </a:lnR>
-                    <a:lnT w="9525" cap="flat" cmpd="sng" algn="ctr">
-                      <a:solidFill>
-                        <a:srgbClr val="D5DBE4"/>
-                      </a:solidFill>
-                      <a:prstDash val="solid"/>
-                      <a:round/>
-                      <a:headEnd type="none" w="med" len="med"/>
-                      <a:tailEnd type="none" w="med" len="med"/>
-                    </a:lnT>
-                    <a:lnB w="9525" cap="flat" cmpd="sng" algn="ctr">
-                      <a:solidFill>
-                        <a:srgbClr val="D5DBE4"/>
-                      </a:solidFill>
-                      <a:prstDash val="solid"/>
-                      <a:round/>
-                      <a:headEnd type="none" w="med" len="med"/>
-                      <a:tailEnd type="none" w="med" len="med"/>
-                    </a:lnB>
-                    <a:solidFill>
-                      <a:srgbClr val="F2F4F7"/>
-                    </a:solidFill>
-                  </a:tcPr>
-                </a:tc>
-                <a:tc>
-                  <a:txBody>
-                    <a:bodyPr/>
-                    <a:lstStyle/>
-                    <a:p>
-                      <a:pPr algn="ctr" indent="0" marL="0">
-                        <a:buNone/>
-                      </a:pPr>
-                      <a:r>
-                        <a:rPr lang="en-US" sz="1080" dirty="0">
-                          <a:solidFill>
-                            <a:srgbClr val="3D4451"/>
-                          </a:solidFill>
-                          <a:latin typeface="맑은 고딕" pitchFamily="34" charset="0"/>
-                          <a:ea typeface="맑은 고딕" pitchFamily="34" charset="-122"/>
-                          <a:cs typeface="맑은 고딕" pitchFamily="34" charset="-120"/>
-                        </a:rPr>
-                        <a:t>쓸 수 있는 게 몇 개 남았나?</a:t>
-                      </a:r>
-                      <a:endParaRPr lang="en-US" sz="1080" dirty="0">
-                        <a:latin typeface="맑은 고딕" charset="0"/>
-                        <a:ea typeface="맑은 고딕" charset="0"/>
-                        <a:cs typeface="맑은 고딕" charset="0"/>
-                      </a:endParaRPr>
-                    </a:p>
-                  </a:txBody>
-                  <a:tcPr marL="63500" marR="63500" marT="25400" marB="25400" anchor="ctr">
-                    <a:lnL w="9525" cap="flat" cmpd="sng" algn="ctr">
-                      <a:solidFill>
-                        <a:srgbClr val="D5DBE4"/>
-                      </a:solidFill>
-                      <a:prstDash val="solid"/>
-                      <a:round/>
-                      <a:headEnd type="none" w="med" len="med"/>
-                      <a:tailEnd type="none" w="med" len="med"/>
-                    </a:lnL>
-                    <a:lnR w="9525" cap="flat" cmpd="sng" algn="ctr">
-                      <a:solidFill>
-                        <a:srgbClr val="D5DBE4"/>
-                      </a:solidFill>
-                      <a:prstDash val="solid"/>
-                      <a:round/>
-                      <a:headEnd type="none" w="med" len="med"/>
-                      <a:tailEnd type="none" w="med" len="med"/>
-                    </a:lnR>
-                    <a:lnT w="9525" cap="flat" cmpd="sng" algn="ctr">
-                      <a:solidFill>
-                        <a:srgbClr val="D5DBE4"/>
-                      </a:solidFill>
-                      <a:prstDash val="solid"/>
-                      <a:round/>
-                      <a:headEnd type="none" w="med" len="med"/>
-                      <a:tailEnd type="none" w="med" len="med"/>
-                    </a:lnT>
-                    <a:lnB w="9525" cap="flat" cmpd="sng" algn="ctr">
-                      <a:solidFill>
-                        <a:srgbClr val="D5DBE4"/>
-                      </a:solidFill>
-                      <a:prstDash val="solid"/>
-                      <a:round/>
-                      <a:headEnd type="none" w="med" len="med"/>
-                      <a:tailEnd type="none" w="med" len="med"/>
-                    </a:lnB>
-                    <a:solidFill>
-                      <a:srgbClr val="F2F4F7"/>
-                    </a:solidFill>
-                  </a:tcPr>
-                </a:tc>
-              </a:tr>
-              <a:tr h="420624">
-                <a:tc>
-                  <a:txBody>
-                    <a:bodyPr/>
-                    <a:lstStyle/>
-                    <a:p>
-                      <a:pPr algn="l" indent="0" marL="0">
-                        <a:buNone/>
-                      </a:pPr>
-                      <a:r>
-                        <a:rPr lang="en-US" sz="1080" b="1" dirty="0">
-                          <a:solidFill>
-                            <a:srgbClr val="1E232E"/>
-                          </a:solidFill>
-                          <a:latin typeface="맑은 고딕" pitchFamily="34" charset="0"/>
-                          <a:ea typeface="맑은 고딕" pitchFamily="34" charset="-122"/>
-                          <a:cs typeface="맑은 고딕" pitchFamily="34" charset="-120"/>
-                        </a:rPr>
-                        <a:t>대표 용도</a:t>
-                      </a:r>
-                      <a:endParaRPr lang="en-US" sz="1080" dirty="0">
-                        <a:latin typeface="맑은 고딕" charset="0"/>
-                        <a:ea typeface="맑은 고딕" charset="0"/>
-                        <a:cs typeface="맑은 고딕" charset="0"/>
-                      </a:endParaRPr>
-                    </a:p>
-                  </a:txBody>
-                  <a:tcPr marL="63500" marR="63500" marT="25400" marB="25400" anchor="ctr">
-                    <a:lnL w="9525" cap="flat" cmpd="sng" algn="ctr">
-                      <a:solidFill>
-                        <a:srgbClr val="D5DBE4"/>
-                      </a:solidFill>
-                      <a:prstDash val="solid"/>
-                      <a:round/>
-                      <a:headEnd type="none" w="med" len="med"/>
-                      <a:tailEnd type="none" w="med" len="med"/>
-                    </a:lnL>
-                    <a:lnR w="9525" cap="flat" cmpd="sng" algn="ctr">
-                      <a:solidFill>
-                        <a:srgbClr val="D5DBE4"/>
-                      </a:solidFill>
-                      <a:prstDash val="solid"/>
-                      <a:round/>
-                      <a:headEnd type="none" w="med" len="med"/>
-                      <a:tailEnd type="none" w="med" len="med"/>
-                    </a:lnR>
-                    <a:lnT w="9525" cap="flat" cmpd="sng" algn="ctr">
-                      <a:solidFill>
-                        <a:srgbClr val="D5DBE4"/>
-                      </a:solidFill>
-                      <a:prstDash val="solid"/>
-                      <a:round/>
-                      <a:headEnd type="none" w="med" len="med"/>
-                      <a:tailEnd type="none" w="med" len="med"/>
-                    </a:lnT>
-                    <a:lnB w="9525" cap="flat" cmpd="sng" algn="ctr">
-                      <a:solidFill>
-                        <a:srgbClr val="D5DBE4"/>
-                      </a:solidFill>
-                      <a:prstDash val="solid"/>
-                      <a:round/>
-                      <a:headEnd type="none" w="med" len="med"/>
-                      <a:tailEnd type="none" w="med" len="med"/>
-                    </a:lnB>
-                    <a:solidFill>
-                      <a:srgbClr val="FFFFFF"/>
-                    </a:solidFill>
-                  </a:tcPr>
-                </a:tc>
-                <a:tc>
-                  <a:txBody>
-                    <a:bodyPr/>
-                    <a:lstStyle/>
-                    <a:p>
-                      <a:pPr algn="ctr" indent="0" marL="0">
-                        <a:buNone/>
-                      </a:pPr>
-                      <a:r>
-                        <a:rPr lang="en-US" sz="1080" dirty="0">
-                          <a:solidFill>
-                            <a:srgbClr val="3D4451"/>
-                          </a:solidFill>
-                          <a:latin typeface="맑은 고딕" pitchFamily="34" charset="0"/>
-                          <a:ea typeface="맑은 고딕" pitchFamily="34" charset="-122"/>
-                          <a:cs typeface="맑은 고딕" pitchFamily="34" charset="-120"/>
-                        </a:rPr>
-                        <a:t>임계구역 보호</a:t>
-                      </a:r>
-                      <a:endParaRPr lang="en-US" sz="1080" dirty="0">
-                        <a:latin typeface="맑은 고딕" charset="0"/>
-                        <a:ea typeface="맑은 고딕" charset="0"/>
-                        <a:cs typeface="맑은 고딕" charset="0"/>
-                      </a:endParaRPr>
-                    </a:p>
-                  </a:txBody>
-                  <a:tcPr marL="63500" marR="63500" marT="25400" marB="25400" anchor="ctr">
-                    <a:lnL w="9525" cap="flat" cmpd="sng" algn="ctr">
-                      <a:solidFill>
-                        <a:srgbClr val="D5DBE4"/>
-                      </a:solidFill>
-                      <a:prstDash val="solid"/>
-                      <a:round/>
-                      <a:headEnd type="none" w="med" len="med"/>
-                      <a:tailEnd type="none" w="med" len="med"/>
-                    </a:lnL>
-                    <a:lnR w="9525" cap="flat" cmpd="sng" algn="ctr">
-                      <a:solidFill>
-                        <a:srgbClr val="D5DBE4"/>
-                      </a:solidFill>
-                      <a:prstDash val="solid"/>
-                      <a:round/>
-                      <a:headEnd type="none" w="med" len="med"/>
-                      <a:tailEnd type="none" w="med" len="med"/>
-                    </a:lnR>
-                    <a:lnT w="9525" cap="flat" cmpd="sng" algn="ctr">
-                      <a:solidFill>
-                        <a:srgbClr val="D5DBE4"/>
-                      </a:solidFill>
-                      <a:prstDash val="solid"/>
-                      <a:round/>
-                      <a:headEnd type="none" w="med" len="med"/>
-                      <a:tailEnd type="none" w="med" len="med"/>
-                    </a:lnT>
-                    <a:lnB w="9525" cap="flat" cmpd="sng" algn="ctr">
-                      <a:solidFill>
-                        <a:srgbClr val="D5DBE4"/>
-                      </a:solidFill>
-                      <a:prstDash val="solid"/>
-                      <a:round/>
-                      <a:headEnd type="none" w="med" len="med"/>
-                      <a:tailEnd type="none" w="med" len="med"/>
-                    </a:lnB>
-                    <a:solidFill>
-                      <a:srgbClr val="FFFFFF"/>
-                    </a:solidFill>
-                  </a:tcPr>
-                </a:tc>
-                <a:tc>
-                  <a:txBody>
-                    <a:bodyPr/>
-                    <a:lstStyle/>
-                    <a:p>
-                      <a:pPr algn="ctr" indent="0" marL="0">
-                        <a:buNone/>
-                      </a:pPr>
-                      <a:r>
-                        <a:rPr lang="en-US" sz="1080" dirty="0">
-                          <a:solidFill>
-                            <a:srgbClr val="3D4451"/>
-                          </a:solidFill>
-                          <a:latin typeface="맑은 고딕" pitchFamily="34" charset="0"/>
-                          <a:ea typeface="맑은 고딕" pitchFamily="34" charset="-122"/>
-                          <a:cs typeface="맑은 고딕" pitchFamily="34" charset="-120"/>
-                        </a:rPr>
-                        <a:t>송신 – 수신 버퍼, 자원 풀</a:t>
-                      </a:r>
-                      <a:endParaRPr lang="en-US" sz="1080" dirty="0">
-                        <a:latin typeface="맑은 고딕" charset="0"/>
-                        <a:ea typeface="맑은 고딕" charset="0"/>
-                        <a:cs typeface="맑은 고딕" charset="0"/>
-                      </a:endParaRPr>
-                    </a:p>
-                  </a:txBody>
-                  <a:tcPr marL="63500" marR="63500" marT="25400" marB="25400" anchor="ctr">
-                    <a:lnL w="9525" cap="flat" cmpd="sng" algn="ctr">
-                      <a:solidFill>
-                        <a:srgbClr val="D5DBE4"/>
-                      </a:solidFill>
-                      <a:prstDash val="solid"/>
-                      <a:round/>
-                      <a:headEnd type="none" w="med" len="med"/>
-                      <a:tailEnd type="none" w="med" len="med"/>
-                    </a:lnL>
-                    <a:lnR w="9525" cap="flat" cmpd="sng" algn="ctr">
-                      <a:solidFill>
-                        <a:srgbClr val="D5DBE4"/>
-                      </a:solidFill>
-                      <a:prstDash val="solid"/>
-                      <a:round/>
-                      <a:headEnd type="none" w="med" len="med"/>
-                      <a:tailEnd type="none" w="med" len="med"/>
-                    </a:lnR>
-                    <a:lnT w="9525" cap="flat" cmpd="sng" algn="ctr">
-                      <a:solidFill>
-                        <a:srgbClr val="D5DBE4"/>
-                      </a:solidFill>
-                      <a:prstDash val="solid"/>
-                      <a:round/>
-                      <a:headEnd type="none" w="med" len="med"/>
-                      <a:tailEnd type="none" w="med" len="med"/>
-                    </a:lnT>
-                    <a:lnB w="9525" cap="flat" cmpd="sng" algn="ctr">
-                      <a:solidFill>
-                        <a:srgbClr val="D5DBE4"/>
-                      </a:solidFill>
-                      <a:prstDash val="solid"/>
-                      <a:round/>
-                      <a:headEnd type="none" w="med" len="med"/>
-                      <a:tailEnd type="none" w="med" len="med"/>
-                    </a:lnB>
-                    <a:solidFill>
-                      <a:srgbClr val="FFFFFF"/>
-                    </a:solidFill>
-                  </a:tcPr>
-                </a:tc>
-              </a:tr>
-            </a:tbl>
-          </a:graphicData>
-        </a:graphic>
-      </p:graphicFrame>
-      <p:sp>
-        <p:nvSpPr>
-          <p:cNvPr id="7" name="Shape 4"/>
-          <p:cNvSpPr/>
-          <p:nvPr/>
-        </p:nvSpPr>
-        <p:spPr>
-          <a:xfrm>
-            <a:off x="6537960" y="1298448"/>
-            <a:ext cx="5105095" cy="859536"/>
-          </a:xfrm>
-          <a:prstGeom prst="roundRect">
-            <a:avLst>
-              <a:gd name="adj" fmla="val 6383"/>
-            </a:avLst>
-          </a:prstGeom>
-          <a:solidFill>
-            <a:srgbClr val="F2F4F7"/>
-          </a:solidFill>
-          <a:ln w="12700">
-            <a:solidFill>
-              <a:srgbClr val="D5DBE4"/>
-            </a:solidFill>
-            <a:prstDash val="solid"/>
-          </a:ln>
-        </p:spPr>
-      </p:sp>
-      <p:sp>
-        <p:nvSpPr>
-          <p:cNvPr id="8" name="Shape 5"/>
-          <p:cNvSpPr/>
-          <p:nvPr/>
-        </p:nvSpPr>
-        <p:spPr>
-          <a:xfrm>
-            <a:off x="6720840" y="1554480"/>
-            <a:ext cx="347472" cy="347472"/>
-          </a:xfrm>
-          <a:prstGeom prst="ellipse">
-            <a:avLst/>
-          </a:prstGeom>
-          <a:solidFill>
-            <a:srgbClr val="D9532B"/>
-          </a:solidFill>
-          <a:ln w="12700">
-            <a:solidFill>
-              <a:srgbClr val="D9532B"/>
-            </a:solidFill>
-            <a:prstDash val="solid"/>
-          </a:ln>
-        </p:spPr>
-      </p:sp>
-      <p:sp>
-        <p:nvSpPr>
-          <p:cNvPr id="9" name="Text 6"/>
-          <p:cNvSpPr txBox="1"/>
-          <p:nvPr/>
-        </p:nvSpPr>
-        <p:spPr>
-          <a:xfrm>
-            <a:off x="6720840" y="1554480"/>
-            <a:ext cx="347472" cy="347472"/>
-          </a:xfrm>
-          <a:prstGeom prst="rect">
-            <a:avLst/>
-          </a:prstGeom>
-          <a:noFill/>
-          <a:ln/>
-        </p:spPr>
-        <p:txBody>
-          <a:bodyPr wrap="square" lIns="0" tIns="0" rIns="0" bIns="0" rtlCol="0" anchor="ctr"/>
-          <a:lstStyle/>
-          <a:p>
-            <a:pPr algn="ctr" indent="0" marL="0">
-              <a:buNone/>
-            </a:pPr>
-            <a:r>
-              <a:rPr lang="en-US" sz="1300" b="1" dirty="0">
-                <a:solidFill>
-                  <a:srgbClr val="FFFFFF"/>
-                </a:solidFill>
-                <a:latin typeface="맑은 고딕" pitchFamily="34" charset="0"/>
-                <a:ea typeface="맑은 고딕" pitchFamily="34" charset="-122"/>
-                <a:cs typeface="맑은 고딕" pitchFamily="34" charset="-120"/>
-              </a:rPr>
-              <a:t>✕</a:t>
-            </a:r>
-            <a:endParaRPr lang="en-US" sz="1300" dirty="0"/>
-          </a:p>
-        </p:txBody>
-      </p:sp>
-      <p:sp>
-        <p:nvSpPr>
-          <p:cNvPr id="10" name="Text 7"/>
-          <p:cNvSpPr txBox="1"/>
-          <p:nvPr/>
-        </p:nvSpPr>
-        <p:spPr>
-          <a:xfrm>
-            <a:off x="7196328" y="1389888"/>
-            <a:ext cx="4263847" cy="274320"/>
-          </a:xfrm>
-          <a:prstGeom prst="rect">
-            <a:avLst/>
-          </a:prstGeom>
-          <a:noFill/>
-          <a:ln/>
-        </p:spPr>
-        <p:txBody>
-          <a:bodyPr wrap="square" lIns="0" tIns="0" rIns="0" bIns="0" rtlCol="0" anchor="ctr"/>
-          <a:lstStyle/>
-          <a:p>
-            <a:pPr indent="0" marL="0">
-              <a:buNone/>
-            </a:pPr>
-            <a:r>
-              <a:rPr lang="en-US" sz="1250" b="1" dirty="0">
-                <a:solidFill>
-                  <a:srgbClr val="1E232E"/>
-                </a:solidFill>
-                <a:latin typeface="맑은 고딕" pitchFamily="34" charset="0"/>
-                <a:ea typeface="맑은 고딕" pitchFamily="34" charset="-122"/>
-                <a:cs typeface="맑은 고딕" pitchFamily="34" charset="-120"/>
-              </a:rPr>
-              <a:t>뮤텍스만 쓰면</a:t>
-            </a:r>
-            <a:endParaRPr lang="en-US" sz="1250" dirty="0"/>
-          </a:p>
-        </p:txBody>
-      </p:sp>
-      <p:sp>
-        <p:nvSpPr>
-          <p:cNvPr id="11" name="Text 8"/>
-          <p:cNvSpPr txBox="1"/>
-          <p:nvPr/>
-        </p:nvSpPr>
-        <p:spPr>
-          <a:xfrm>
-            <a:off x="7196328" y="1682496"/>
-            <a:ext cx="4263847" cy="420624"/>
-          </a:xfrm>
-          <a:prstGeom prst="rect">
-            <a:avLst/>
-          </a:prstGeom>
-          <a:noFill/>
-          <a:ln/>
-        </p:spPr>
-        <p:txBody>
-          <a:bodyPr wrap="square" lIns="0" tIns="0" rIns="0" bIns="0" rtlCol="0" anchor="t"/>
-          <a:lstStyle/>
-          <a:p>
-            <a:pPr algn="l" indent="0" marL="0">
-              <a:lnSpc>
-                <a:spcPts val="1400"/>
-              </a:lnSpc>
-              <a:buNone/>
-            </a:pPr>
-            <a:r>
-              <a:rPr lang="en-US" sz="1050" dirty="0">
-                <a:solidFill>
-                  <a:srgbClr val="3D4451"/>
-                </a:solidFill>
-                <a:latin typeface="맑은 고딕" pitchFamily="34" charset="0"/>
-                <a:ea typeface="맑은 고딕" pitchFamily="34" charset="-122"/>
-                <a:cs typeface="맑은 고딕" pitchFamily="34" charset="-120"/>
-              </a:rPr>
-              <a:t>버퍼가 빌 때까지 기다리려면 락을 잡았다 풀었다 확인을 반복 →  바쁜 대기로 CPU 를 태운다</a:t>
-            </a:r>
-            <a:endParaRPr lang="en-US" sz="1050" dirty="0"/>
-          </a:p>
-        </p:txBody>
-      </p:sp>
-      <p:sp>
-        <p:nvSpPr>
-          <p:cNvPr id="12" name="Shape 9"/>
-          <p:cNvSpPr/>
-          <p:nvPr/>
-        </p:nvSpPr>
-        <p:spPr>
-          <a:xfrm>
-            <a:off x="6537960" y="2267712"/>
-            <a:ext cx="5105095" cy="859536"/>
-          </a:xfrm>
-          <a:prstGeom prst="roundRect">
-            <a:avLst>
-              <a:gd name="adj" fmla="val 6383"/>
-            </a:avLst>
-          </a:prstGeom>
-          <a:solidFill>
-            <a:srgbClr val="F2F4F7"/>
-          </a:solidFill>
-          <a:ln w="12700">
-            <a:solidFill>
-              <a:srgbClr val="D5DBE4"/>
-            </a:solidFill>
-            <a:prstDash val="solid"/>
-          </a:ln>
-        </p:spPr>
-      </p:sp>
-      <p:sp>
-        <p:nvSpPr>
-          <p:cNvPr id="13" name="Shape 10"/>
-          <p:cNvSpPr/>
-          <p:nvPr/>
-        </p:nvSpPr>
-        <p:spPr>
-          <a:xfrm>
-            <a:off x="6720840" y="2523744"/>
-            <a:ext cx="347472" cy="347472"/>
-          </a:xfrm>
-          <a:prstGeom prst="ellipse">
-            <a:avLst/>
-          </a:prstGeom>
-          <a:solidFill>
-            <a:srgbClr val="D9532B"/>
-          </a:solidFill>
-          <a:ln w="12700">
-            <a:solidFill>
-              <a:srgbClr val="D9532B"/>
-            </a:solidFill>
-            <a:prstDash val="solid"/>
-          </a:ln>
-        </p:spPr>
-      </p:sp>
-      <p:sp>
-        <p:nvSpPr>
-          <p:cNvPr id="14" name="Text 11"/>
-          <p:cNvSpPr txBox="1"/>
-          <p:nvPr/>
-        </p:nvSpPr>
-        <p:spPr>
-          <a:xfrm>
-            <a:off x="6720840" y="2523744"/>
-            <a:ext cx="347472" cy="347472"/>
-          </a:xfrm>
-          <a:prstGeom prst="rect">
-            <a:avLst/>
-          </a:prstGeom>
-          <a:noFill/>
-          <a:ln/>
-        </p:spPr>
-        <p:txBody>
-          <a:bodyPr wrap="square" lIns="0" tIns="0" rIns="0" bIns="0" rtlCol="0" anchor="ctr"/>
-          <a:lstStyle/>
-          <a:p>
-            <a:pPr algn="ctr" indent="0" marL="0">
-              <a:buNone/>
-            </a:pPr>
-            <a:r>
-              <a:rPr lang="en-US" sz="1300" b="1" dirty="0">
-                <a:solidFill>
-                  <a:srgbClr val="FFFFFF"/>
-                </a:solidFill>
-                <a:latin typeface="맑은 고딕" pitchFamily="34" charset="0"/>
-                <a:ea typeface="맑은 고딕" pitchFamily="34" charset="-122"/>
-                <a:cs typeface="맑은 고딕" pitchFamily="34" charset="-120"/>
-              </a:rPr>
-              <a:t>✕</a:t>
-            </a:r>
-            <a:endParaRPr lang="en-US" sz="1300" dirty="0"/>
-          </a:p>
-        </p:txBody>
-      </p:sp>
-      <p:sp>
-        <p:nvSpPr>
-          <p:cNvPr id="15" name="Text 12"/>
-          <p:cNvSpPr txBox="1"/>
-          <p:nvPr/>
-        </p:nvSpPr>
-        <p:spPr>
-          <a:xfrm>
-            <a:off x="7196328" y="2359152"/>
-            <a:ext cx="4263847" cy="274320"/>
-          </a:xfrm>
-          <a:prstGeom prst="rect">
-            <a:avLst/>
-          </a:prstGeom>
-          <a:noFill/>
-          <a:ln/>
-        </p:spPr>
-        <p:txBody>
-          <a:bodyPr wrap="square" lIns="0" tIns="0" rIns="0" bIns="0" rtlCol="0" anchor="ctr"/>
-          <a:lstStyle/>
-          <a:p>
-            <a:pPr indent="0" marL="0">
-              <a:buNone/>
-            </a:pPr>
-            <a:r>
-              <a:rPr lang="en-US" sz="1250" b="1" dirty="0">
-                <a:solidFill>
-                  <a:srgbClr val="1E232E"/>
-                </a:solidFill>
-                <a:latin typeface="맑은 고딕" pitchFamily="34" charset="0"/>
-                <a:ea typeface="맑은 고딕" pitchFamily="34" charset="-122"/>
-                <a:cs typeface="맑은 고딕" pitchFamily="34" charset="-120"/>
-              </a:rPr>
-              <a:t>세마포어만 쓰면</a:t>
-            </a:r>
-            <a:endParaRPr lang="en-US" sz="1250" dirty="0"/>
-          </a:p>
-        </p:txBody>
-      </p:sp>
-      <p:sp>
-        <p:nvSpPr>
-          <p:cNvPr id="16" name="Text 13"/>
-          <p:cNvSpPr txBox="1"/>
-          <p:nvPr/>
-        </p:nvSpPr>
-        <p:spPr>
-          <a:xfrm>
-            <a:off x="7196328" y="2651760"/>
-            <a:ext cx="4263847" cy="420624"/>
-          </a:xfrm>
-          <a:prstGeom prst="rect">
-            <a:avLst/>
-          </a:prstGeom>
-          <a:noFill/>
-          <a:ln/>
-        </p:spPr>
-        <p:txBody>
-          <a:bodyPr wrap="square" lIns="0" tIns="0" rIns="0" bIns="0" rtlCol="0" anchor="t"/>
-          <a:lstStyle/>
-          <a:p>
-            <a:pPr algn="l" indent="0" marL="0">
-              <a:lnSpc>
-                <a:spcPts val="1400"/>
-              </a:lnSpc>
-              <a:buNone/>
-            </a:pPr>
-            <a:r>
-              <a:rPr lang="en-US" sz="1050" dirty="0">
-                <a:solidFill>
-                  <a:srgbClr val="3D4451"/>
-                </a:solidFill>
-                <a:latin typeface="맑은 고딕" pitchFamily="34" charset="0"/>
-                <a:ea typeface="맑은 고딕" pitchFamily="34" charset="-122"/>
-                <a:cs typeface="맑은 고딕" pitchFamily="34" charset="-120"/>
-              </a:rPr>
-              <a:t>개수는 맞지만 head · tail 을 두 쓰레드가 동시에 고쳐 데이터가 깨진다</a:t>
-            </a:r>
-            <a:endParaRPr lang="en-US" sz="1050" dirty="0"/>
-          </a:p>
-        </p:txBody>
-      </p:sp>
-      <p:sp>
-        <p:nvSpPr>
-          <p:cNvPr id="17" name="Shape 14"/>
-          <p:cNvSpPr/>
-          <p:nvPr/>
-        </p:nvSpPr>
-        <p:spPr>
-          <a:xfrm>
-            <a:off x="6537960" y="3236976"/>
-            <a:ext cx="5105095" cy="859536"/>
-          </a:xfrm>
-          <a:prstGeom prst="roundRect">
-            <a:avLst>
-              <a:gd name="adj" fmla="val 6383"/>
-            </a:avLst>
-          </a:prstGeom>
-          <a:solidFill>
-            <a:srgbClr val="E6F2EA"/>
-          </a:solidFill>
-          <a:ln w="12700">
-            <a:solidFill>
-              <a:srgbClr val="2F7D4F"/>
-            </a:solidFill>
-            <a:prstDash val="solid"/>
-          </a:ln>
-        </p:spPr>
-      </p:sp>
-      <p:sp>
-        <p:nvSpPr>
-          <p:cNvPr id="18" name="Shape 15"/>
-          <p:cNvSpPr/>
-          <p:nvPr/>
-        </p:nvSpPr>
-        <p:spPr>
-          <a:xfrm>
-            <a:off x="6720840" y="3493008"/>
-            <a:ext cx="347472" cy="347472"/>
-          </a:xfrm>
-          <a:prstGeom prst="ellipse">
-            <a:avLst/>
-          </a:prstGeom>
-          <a:solidFill>
-            <a:srgbClr val="2F7D4F"/>
-          </a:solidFill>
-          <a:ln w="12700">
-            <a:solidFill>
-              <a:srgbClr val="2F7D4F"/>
-            </a:solidFill>
-            <a:prstDash val="solid"/>
-          </a:ln>
-        </p:spPr>
-      </p:sp>
-      <p:sp>
-        <p:nvSpPr>
-          <p:cNvPr id="19" name="Text 16"/>
-          <p:cNvSpPr txBox="1"/>
-          <p:nvPr/>
-        </p:nvSpPr>
-        <p:spPr>
-          <a:xfrm>
-            <a:off x="6720840" y="3493008"/>
-            <a:ext cx="347472" cy="347472"/>
-          </a:xfrm>
-          <a:prstGeom prst="rect">
-            <a:avLst/>
-          </a:prstGeom>
-          <a:noFill/>
-          <a:ln/>
-        </p:spPr>
-        <p:txBody>
-          <a:bodyPr wrap="square" lIns="0" tIns="0" rIns="0" bIns="0" rtlCol="0" anchor="ctr"/>
-          <a:lstStyle/>
-          <a:p>
-            <a:pPr algn="ctr" indent="0" marL="0">
-              <a:buNone/>
-            </a:pPr>
-            <a:r>
-              <a:rPr lang="en-US" sz="1300" b="1" dirty="0">
-                <a:solidFill>
-                  <a:srgbClr val="FFFFFF"/>
-                </a:solidFill>
-                <a:latin typeface="맑은 고딕" pitchFamily="34" charset="0"/>
-                <a:ea typeface="맑은 고딕" pitchFamily="34" charset="-122"/>
-                <a:cs typeface="맑은 고딕" pitchFamily="34" charset="-120"/>
-              </a:rPr>
-              <a:t>✓</a:t>
-            </a:r>
-            <a:endParaRPr lang="en-US" sz="1300" dirty="0"/>
-          </a:p>
-        </p:txBody>
-      </p:sp>
-      <p:sp>
-        <p:nvSpPr>
-          <p:cNvPr id="20" name="Text 17"/>
-          <p:cNvSpPr txBox="1"/>
-          <p:nvPr/>
-        </p:nvSpPr>
-        <p:spPr>
-          <a:xfrm>
-            <a:off x="7196328" y="3328416"/>
-            <a:ext cx="4263847" cy="274320"/>
-          </a:xfrm>
-          <a:prstGeom prst="rect">
-            <a:avLst/>
-          </a:prstGeom>
-          <a:noFill/>
-          <a:ln/>
-        </p:spPr>
-        <p:txBody>
-          <a:bodyPr wrap="square" lIns="0" tIns="0" rIns="0" bIns="0" rtlCol="0" anchor="ctr"/>
-          <a:lstStyle/>
-          <a:p>
-            <a:pPr indent="0" marL="0">
-              <a:buNone/>
-            </a:pPr>
-            <a:r>
-              <a:rPr lang="en-US" sz="1250" b="1" dirty="0">
-                <a:solidFill>
-                  <a:srgbClr val="2F7D4F"/>
-                </a:solidFill>
-                <a:latin typeface="맑은 고딕" pitchFamily="34" charset="0"/>
-                <a:ea typeface="맑은 고딕" pitchFamily="34" charset="-122"/>
-                <a:cs typeface="맑은 고딕" pitchFamily="34" charset="-120"/>
-              </a:rPr>
-              <a:t>둘을 같이 쓰면</a:t>
-            </a:r>
-            <a:endParaRPr lang="en-US" sz="1250" dirty="0"/>
-          </a:p>
-        </p:txBody>
-      </p:sp>
-      <p:sp>
-        <p:nvSpPr>
-          <p:cNvPr id="21" name="Text 18"/>
-          <p:cNvSpPr txBox="1"/>
-          <p:nvPr/>
-        </p:nvSpPr>
-        <p:spPr>
-          <a:xfrm>
-            <a:off x="7196328" y="3621024"/>
-            <a:ext cx="4263847" cy="420624"/>
-          </a:xfrm>
-          <a:prstGeom prst="rect">
-            <a:avLst/>
-          </a:prstGeom>
-          <a:noFill/>
-          <a:ln/>
-        </p:spPr>
-        <p:txBody>
-          <a:bodyPr wrap="square" lIns="0" tIns="0" rIns="0" bIns="0" rtlCol="0" anchor="t"/>
-          <a:lstStyle/>
-          <a:p>
-            <a:pPr algn="l" indent="0" marL="0">
-              <a:lnSpc>
-                <a:spcPts val="1400"/>
-              </a:lnSpc>
-              <a:buNone/>
-            </a:pPr>
-            <a:r>
-              <a:rPr lang="en-US" sz="1050" dirty="0">
-                <a:solidFill>
-                  <a:srgbClr val="3D4451"/>
-                </a:solidFill>
-                <a:latin typeface="맑은 고딕" pitchFamily="34" charset="0"/>
-                <a:ea typeface="맑은 고딕" pitchFamily="34" charset="-122"/>
-                <a:cs typeface="맑은 고딕" pitchFamily="34" charset="-120"/>
-              </a:rPr>
-              <a:t>세마포어로 기다리고, 뮤텍스로 보호한다 →  바쁜 대기도 없고 데이터도 안전하다</a:t>
-            </a:r>
-            <a:endParaRPr lang="en-US" sz="1050" dirty="0"/>
-          </a:p>
-        </p:txBody>
-      </p:sp>
-      <p:sp>
-        <p:nvSpPr>
-          <p:cNvPr id="22" name="Shape 19"/>
-          <p:cNvSpPr/>
-          <p:nvPr/>
-        </p:nvSpPr>
-        <p:spPr>
-          <a:xfrm>
-            <a:off x="548640" y="4279392"/>
-            <a:ext cx="11094415" cy="2075688"/>
-          </a:xfrm>
-          <a:prstGeom prst="roundRect">
-            <a:avLst>
-              <a:gd name="adj" fmla="val 2643"/>
-            </a:avLst>
-          </a:prstGeom>
-          <a:solidFill>
-            <a:srgbClr val="1E232E"/>
-          </a:solidFill>
-          <a:ln w="12700">
-            <a:solidFill>
-              <a:srgbClr val="1E232E"/>
-            </a:solidFill>
-            <a:prstDash val="solid"/>
-          </a:ln>
-        </p:spPr>
-      </p:sp>
-      <p:sp>
-        <p:nvSpPr>
-          <p:cNvPr id="23" name="Text 20"/>
-          <p:cNvSpPr txBox="1"/>
-          <p:nvPr/>
-        </p:nvSpPr>
-        <p:spPr>
-          <a:xfrm>
-            <a:off x="841248" y="4407408"/>
-            <a:ext cx="4572000" cy="292608"/>
-          </a:xfrm>
-          <a:prstGeom prst="rect">
-            <a:avLst/>
-          </a:prstGeom>
-          <a:noFill/>
-          <a:ln/>
-        </p:spPr>
-        <p:txBody>
-          <a:bodyPr wrap="square" lIns="0" tIns="0" rIns="0" bIns="0" rtlCol="0" anchor="ctr"/>
-          <a:lstStyle/>
-          <a:p>
-            <a:pPr indent="0" marL="0">
-              <a:buNone/>
-            </a:pPr>
-            <a:r>
-              <a:rPr lang="en-US" sz="1350" b="1" dirty="0">
-                <a:solidFill>
-                  <a:srgbClr val="FFFFFF"/>
-                </a:solidFill>
-                <a:latin typeface="맑은 고딕" pitchFamily="34" charset="0"/>
-                <a:ea typeface="맑은 고딕" pitchFamily="34" charset="-122"/>
-                <a:cs typeface="맑은 고딕" pitchFamily="34" charset="-120"/>
-              </a:rPr>
-              <a:t>송신 – 수신 표준 순서</a:t>
-            </a:r>
-            <a:endParaRPr lang="en-US" sz="1350" dirty="0"/>
-          </a:p>
-        </p:txBody>
-      </p:sp>
-      <p:sp>
-        <p:nvSpPr>
-          <p:cNvPr id="24" name="Shape 21"/>
-          <p:cNvSpPr/>
-          <p:nvPr/>
-        </p:nvSpPr>
-        <p:spPr>
-          <a:xfrm>
-            <a:off x="841248" y="4791456"/>
-            <a:ext cx="1463040" cy="420624"/>
-          </a:xfrm>
-          <a:prstGeom prst="roundRect">
-            <a:avLst>
-              <a:gd name="adj" fmla="val 10870"/>
-            </a:avLst>
-          </a:prstGeom>
-          <a:solidFill>
-            <a:srgbClr val="D9532B"/>
-          </a:solidFill>
-          <a:ln w="12700">
-            <a:solidFill>
-              <a:srgbClr val="D9532B"/>
-            </a:solidFill>
-            <a:prstDash val="solid"/>
-          </a:ln>
-        </p:spPr>
-      </p:sp>
-      <p:sp>
-        <p:nvSpPr>
-          <p:cNvPr id="25" name="Text 22"/>
-          <p:cNvSpPr txBox="1"/>
-          <p:nvPr/>
-        </p:nvSpPr>
-        <p:spPr>
-          <a:xfrm>
-            <a:off x="841248" y="4791456"/>
-            <a:ext cx="1463040" cy="420624"/>
-          </a:xfrm>
-          <a:prstGeom prst="rect">
-            <a:avLst/>
-          </a:prstGeom>
-          <a:noFill/>
-          <a:ln/>
-        </p:spPr>
-        <p:txBody>
-          <a:bodyPr wrap="square" lIns="0" tIns="0" rIns="0" bIns="0" rtlCol="0" anchor="ctr"/>
-          <a:lstStyle/>
-          <a:p>
-            <a:pPr algn="ctr" indent="0" marL="0">
-              <a:buNone/>
-            </a:pPr>
-            <a:r>
-              <a:rPr lang="en-US" sz="1050" b="1" dirty="0">
-                <a:solidFill>
-                  <a:srgbClr val="FFFFFF"/>
-                </a:solidFill>
-                <a:latin typeface="맑은 고딕" pitchFamily="34" charset="0"/>
-                <a:ea typeface="맑은 고딕" pitchFamily="34" charset="-122"/>
-                <a:cs typeface="맑은 고딕" pitchFamily="34" charset="-120"/>
-              </a:rPr>
-              <a:t>송신</a:t>
-            </a:r>
-            <a:endParaRPr lang="en-US" sz="1050" dirty="0"/>
-          </a:p>
-        </p:txBody>
-      </p:sp>
-      <p:sp>
-        <p:nvSpPr>
-          <p:cNvPr id="26" name="Shape 23"/>
-          <p:cNvSpPr/>
-          <p:nvPr/>
-        </p:nvSpPr>
-        <p:spPr>
-          <a:xfrm>
-            <a:off x="2487168" y="4791456"/>
-            <a:ext cx="1700784" cy="420624"/>
-          </a:xfrm>
-          <a:prstGeom prst="roundRect">
-            <a:avLst>
-              <a:gd name="adj" fmla="val 8696"/>
-            </a:avLst>
-          </a:prstGeom>
-          <a:solidFill>
-            <a:srgbClr val="2C3444"/>
-          </a:solidFill>
-          <a:ln w="9525">
-            <a:solidFill>
-              <a:srgbClr val="4A566C"/>
-            </a:solidFill>
-            <a:prstDash val="solid"/>
-          </a:ln>
-        </p:spPr>
-      </p:sp>
-      <p:sp>
-        <p:nvSpPr>
-          <p:cNvPr id="27" name="Text 24"/>
-          <p:cNvSpPr txBox="1"/>
-          <p:nvPr/>
-        </p:nvSpPr>
-        <p:spPr>
-          <a:xfrm>
-            <a:off x="2487168" y="4791456"/>
-            <a:ext cx="1700784" cy="420624"/>
-          </a:xfrm>
-          <a:prstGeom prst="rect">
-            <a:avLst/>
-          </a:prstGeom>
-          <a:noFill/>
-          <a:ln/>
-        </p:spPr>
-        <p:txBody>
-          <a:bodyPr wrap="square" lIns="0" tIns="0" rIns="0" bIns="0" rtlCol="0" anchor="ctr"/>
-          <a:lstStyle/>
-          <a:p>
-            <a:pPr algn="ctr" indent="0" marL="0">
-              <a:buNone/>
-            </a:pPr>
-            <a:r>
-              <a:rPr lang="en-US" sz="900" dirty="0">
-                <a:solidFill>
-                  <a:srgbClr val="D2DAE4"/>
-                </a:solidFill>
-                <a:latin typeface="Consolas" pitchFamily="34" charset="0"/>
-                <a:ea typeface="Consolas" pitchFamily="34" charset="-122"/>
-                <a:cs typeface="Consolas" pitchFamily="34" charset="-120"/>
-              </a:rPr>
-              <a:t>sem_wait(empty)</a:t>
-            </a:r>
-            <a:endParaRPr lang="en-US" sz="900" dirty="0"/>
-          </a:p>
-        </p:txBody>
-      </p:sp>
-      <p:sp>
-        <p:nvSpPr>
-          <p:cNvPr id="28" name="Text 25"/>
-          <p:cNvSpPr txBox="1"/>
-          <p:nvPr/>
-        </p:nvSpPr>
-        <p:spPr>
-          <a:xfrm>
-            <a:off x="4187952" y="4791456"/>
-            <a:ext cx="146304" cy="420624"/>
-          </a:xfrm>
-          <a:prstGeom prst="rect">
-            <a:avLst/>
-          </a:prstGeom>
-          <a:noFill/>
-          <a:ln/>
-        </p:spPr>
-        <p:txBody>
-          <a:bodyPr wrap="square" lIns="0" tIns="0" rIns="0" bIns="0" rtlCol="0" anchor="ctr"/>
-          <a:lstStyle/>
-          <a:p>
-            <a:pPr algn="ctr" indent="0" marL="0">
-              <a:buNone/>
-            </a:pPr>
-            <a:r>
-              <a:rPr lang="en-US" sz="1200" dirty="0">
-                <a:solidFill>
-                  <a:srgbClr val="6B778A"/>
-                </a:solidFill>
-                <a:latin typeface="Consolas" pitchFamily="34" charset="0"/>
-                <a:ea typeface="Consolas" pitchFamily="34" charset="-122"/>
-                <a:cs typeface="Consolas" pitchFamily="34" charset="-120"/>
-              </a:rPr>
-              <a:t>›</a:t>
-            </a:r>
-            <a:endParaRPr lang="en-US" sz="1200" dirty="0"/>
-          </a:p>
-        </p:txBody>
-      </p:sp>
-      <p:sp>
-        <p:nvSpPr>
-          <p:cNvPr id="29" name="Shape 26"/>
-          <p:cNvSpPr/>
-          <p:nvPr/>
-        </p:nvSpPr>
-        <p:spPr>
-          <a:xfrm>
-            <a:off x="4334256" y="4791456"/>
-            <a:ext cx="1700784" cy="420624"/>
-          </a:xfrm>
-          <a:prstGeom prst="roundRect">
-            <a:avLst>
-              <a:gd name="adj" fmla="val 8696"/>
-            </a:avLst>
-          </a:prstGeom>
-          <a:solidFill>
-            <a:srgbClr val="2C3444"/>
-          </a:solidFill>
-          <a:ln w="9525">
-            <a:solidFill>
-              <a:srgbClr val="4A566C"/>
-            </a:solidFill>
-            <a:prstDash val="solid"/>
-          </a:ln>
-        </p:spPr>
-      </p:sp>
-      <p:sp>
-        <p:nvSpPr>
-          <p:cNvPr id="30" name="Text 27"/>
-          <p:cNvSpPr txBox="1"/>
-          <p:nvPr/>
-        </p:nvSpPr>
-        <p:spPr>
-          <a:xfrm>
-            <a:off x="4334256" y="4791456"/>
-            <a:ext cx="1700784" cy="420624"/>
-          </a:xfrm>
-          <a:prstGeom prst="rect">
-            <a:avLst/>
-          </a:prstGeom>
-          <a:noFill/>
-          <a:ln/>
-        </p:spPr>
-        <p:txBody>
-          <a:bodyPr wrap="square" lIns="0" tIns="0" rIns="0" bIns="0" rtlCol="0" anchor="ctr"/>
-          <a:lstStyle/>
-          <a:p>
-            <a:pPr algn="ctr" indent="0" marL="0">
-              <a:buNone/>
-            </a:pPr>
-            <a:r>
-              <a:rPr lang="en-US" sz="900" dirty="0">
-                <a:solidFill>
-                  <a:srgbClr val="D2DAE4"/>
-                </a:solidFill>
-                <a:latin typeface="Consolas" pitchFamily="34" charset="0"/>
-                <a:ea typeface="Consolas" pitchFamily="34" charset="-122"/>
-                <a:cs typeface="Consolas" pitchFamily="34" charset="-120"/>
-              </a:rPr>
-              <a:t>lock(mutex)</a:t>
-            </a:r>
-            <a:endParaRPr lang="en-US" sz="900" dirty="0"/>
-          </a:p>
-        </p:txBody>
-      </p:sp>
-      <p:sp>
-        <p:nvSpPr>
-          <p:cNvPr id="31" name="Text 28"/>
-          <p:cNvSpPr txBox="1"/>
-          <p:nvPr/>
-        </p:nvSpPr>
-        <p:spPr>
-          <a:xfrm>
-            <a:off x="6035040" y="4791456"/>
-            <a:ext cx="146304" cy="420624"/>
-          </a:xfrm>
-          <a:prstGeom prst="rect">
-            <a:avLst/>
-          </a:prstGeom>
-          <a:noFill/>
-          <a:ln/>
-        </p:spPr>
-        <p:txBody>
-          <a:bodyPr wrap="square" lIns="0" tIns="0" rIns="0" bIns="0" rtlCol="0" anchor="ctr"/>
-          <a:lstStyle/>
-          <a:p>
-            <a:pPr algn="ctr" indent="0" marL="0">
-              <a:buNone/>
-            </a:pPr>
-            <a:r>
-              <a:rPr lang="en-US" sz="1200" dirty="0">
-                <a:solidFill>
-                  <a:srgbClr val="6B778A"/>
-                </a:solidFill>
-                <a:latin typeface="Consolas" pitchFamily="34" charset="0"/>
-                <a:ea typeface="Consolas" pitchFamily="34" charset="-122"/>
-                <a:cs typeface="Consolas" pitchFamily="34" charset="-120"/>
-              </a:rPr>
-              <a:t>›</a:t>
-            </a:r>
-            <a:endParaRPr lang="en-US" sz="1200" dirty="0"/>
-          </a:p>
-        </p:txBody>
-      </p:sp>
-      <p:sp>
-        <p:nvSpPr>
-          <p:cNvPr id="32" name="Shape 29"/>
-          <p:cNvSpPr/>
-          <p:nvPr/>
-        </p:nvSpPr>
-        <p:spPr>
-          <a:xfrm>
-            <a:off x="6181344" y="4791456"/>
-            <a:ext cx="1700784" cy="420624"/>
-          </a:xfrm>
-          <a:prstGeom prst="roundRect">
-            <a:avLst>
-              <a:gd name="adj" fmla="val 8696"/>
-            </a:avLst>
-          </a:prstGeom>
-          <a:solidFill>
-            <a:srgbClr val="2C3444"/>
-          </a:solidFill>
-          <a:ln w="9525">
-            <a:solidFill>
-              <a:srgbClr val="4A566C"/>
-            </a:solidFill>
-            <a:prstDash val="solid"/>
-          </a:ln>
-        </p:spPr>
-      </p:sp>
-      <p:sp>
-        <p:nvSpPr>
-          <p:cNvPr id="33" name="Text 30"/>
-          <p:cNvSpPr txBox="1"/>
-          <p:nvPr/>
-        </p:nvSpPr>
-        <p:spPr>
-          <a:xfrm>
-            <a:off x="6181344" y="4791456"/>
-            <a:ext cx="1700784" cy="420624"/>
-          </a:xfrm>
-          <a:prstGeom prst="rect">
-            <a:avLst/>
-          </a:prstGeom>
-          <a:noFill/>
-          <a:ln/>
-        </p:spPr>
-        <p:txBody>
-          <a:bodyPr wrap="square" lIns="0" tIns="0" rIns="0" bIns="0" rtlCol="0" anchor="ctr"/>
-          <a:lstStyle/>
-          <a:p>
-            <a:pPr algn="ctr" indent="0" marL="0">
-              <a:buNone/>
-            </a:pPr>
-            <a:r>
-              <a:rPr lang="en-US" sz="900" dirty="0">
-                <a:solidFill>
-                  <a:srgbClr val="D2DAE4"/>
-                </a:solidFill>
-                <a:latin typeface="Consolas" pitchFamily="34" charset="0"/>
-                <a:ea typeface="Consolas" pitchFamily="34" charset="-122"/>
-                <a:cs typeface="Consolas" pitchFamily="34" charset="-120"/>
-              </a:rPr>
-              <a:t>버퍼에 write</a:t>
-            </a:r>
-            <a:endParaRPr lang="en-US" sz="900" dirty="0"/>
-          </a:p>
-        </p:txBody>
-      </p:sp>
-      <p:sp>
-        <p:nvSpPr>
-          <p:cNvPr id="34" name="Text 31"/>
-          <p:cNvSpPr txBox="1"/>
-          <p:nvPr/>
-        </p:nvSpPr>
-        <p:spPr>
-          <a:xfrm>
-            <a:off x="7882128" y="4791456"/>
-            <a:ext cx="146304" cy="420624"/>
-          </a:xfrm>
-          <a:prstGeom prst="rect">
-            <a:avLst/>
-          </a:prstGeom>
-          <a:noFill/>
-          <a:ln/>
-        </p:spPr>
-        <p:txBody>
-          <a:bodyPr wrap="square" lIns="0" tIns="0" rIns="0" bIns="0" rtlCol="0" anchor="ctr"/>
-          <a:lstStyle/>
-          <a:p>
-            <a:pPr algn="ctr" indent="0" marL="0">
-              <a:buNone/>
-            </a:pPr>
-            <a:r>
-              <a:rPr lang="en-US" sz="1200" dirty="0">
-                <a:solidFill>
-                  <a:srgbClr val="6B778A"/>
-                </a:solidFill>
-                <a:latin typeface="Consolas" pitchFamily="34" charset="0"/>
-                <a:ea typeface="Consolas" pitchFamily="34" charset="-122"/>
-                <a:cs typeface="Consolas" pitchFamily="34" charset="-120"/>
-              </a:rPr>
-              <a:t>›</a:t>
-            </a:r>
-            <a:endParaRPr lang="en-US" sz="1200" dirty="0"/>
-          </a:p>
-        </p:txBody>
-      </p:sp>
-      <p:sp>
-        <p:nvSpPr>
-          <p:cNvPr id="35" name="Shape 32"/>
-          <p:cNvSpPr/>
-          <p:nvPr/>
-        </p:nvSpPr>
-        <p:spPr>
-          <a:xfrm>
-            <a:off x="8028432" y="4791456"/>
-            <a:ext cx="1700784" cy="420624"/>
-          </a:xfrm>
-          <a:prstGeom prst="roundRect">
-            <a:avLst>
-              <a:gd name="adj" fmla="val 8696"/>
-            </a:avLst>
-          </a:prstGeom>
-          <a:solidFill>
-            <a:srgbClr val="2C3444"/>
-          </a:solidFill>
-          <a:ln w="9525">
-            <a:solidFill>
-              <a:srgbClr val="4A566C"/>
-            </a:solidFill>
-            <a:prstDash val="solid"/>
-          </a:ln>
-        </p:spPr>
-      </p:sp>
-      <p:sp>
-        <p:nvSpPr>
-          <p:cNvPr id="36" name="Text 33"/>
-          <p:cNvSpPr txBox="1"/>
-          <p:nvPr/>
-        </p:nvSpPr>
-        <p:spPr>
-          <a:xfrm>
-            <a:off x="8028432" y="4791456"/>
-            <a:ext cx="1700784" cy="420624"/>
-          </a:xfrm>
-          <a:prstGeom prst="rect">
-            <a:avLst/>
-          </a:prstGeom>
-          <a:noFill/>
-          <a:ln/>
-        </p:spPr>
-        <p:txBody>
-          <a:bodyPr wrap="square" lIns="0" tIns="0" rIns="0" bIns="0" rtlCol="0" anchor="ctr"/>
-          <a:lstStyle/>
-          <a:p>
-            <a:pPr algn="ctr" indent="0" marL="0">
-              <a:buNone/>
-            </a:pPr>
-            <a:r>
-              <a:rPr lang="en-US" sz="900" dirty="0">
-                <a:solidFill>
-                  <a:srgbClr val="D2DAE4"/>
-                </a:solidFill>
-                <a:latin typeface="Consolas" pitchFamily="34" charset="0"/>
-                <a:ea typeface="Consolas" pitchFamily="34" charset="-122"/>
-                <a:cs typeface="Consolas" pitchFamily="34" charset="-120"/>
-              </a:rPr>
-              <a:t>unlock(mutex)</a:t>
-            </a:r>
-            <a:endParaRPr lang="en-US" sz="900" dirty="0"/>
-          </a:p>
-        </p:txBody>
-      </p:sp>
-      <p:sp>
-        <p:nvSpPr>
-          <p:cNvPr id="37" name="Text 34"/>
-          <p:cNvSpPr txBox="1"/>
-          <p:nvPr/>
-        </p:nvSpPr>
-        <p:spPr>
-          <a:xfrm>
-            <a:off x="9729216" y="4791456"/>
-            <a:ext cx="146304" cy="420624"/>
-          </a:xfrm>
-          <a:prstGeom prst="rect">
-            <a:avLst/>
-          </a:prstGeom>
-          <a:noFill/>
-          <a:ln/>
-        </p:spPr>
-        <p:txBody>
-          <a:bodyPr wrap="square" lIns="0" tIns="0" rIns="0" bIns="0" rtlCol="0" anchor="ctr"/>
-          <a:lstStyle/>
-          <a:p>
-            <a:pPr algn="ctr" indent="0" marL="0">
-              <a:buNone/>
-            </a:pPr>
-            <a:r>
-              <a:rPr lang="en-US" sz="1200" dirty="0">
-                <a:solidFill>
-                  <a:srgbClr val="6B778A"/>
-                </a:solidFill>
-                <a:latin typeface="Consolas" pitchFamily="34" charset="0"/>
-                <a:ea typeface="Consolas" pitchFamily="34" charset="-122"/>
-                <a:cs typeface="Consolas" pitchFamily="34" charset="-120"/>
-              </a:rPr>
-              <a:t>›</a:t>
-            </a:r>
-            <a:endParaRPr lang="en-US" sz="1200" dirty="0"/>
-          </a:p>
-        </p:txBody>
-      </p:sp>
-      <p:sp>
-        <p:nvSpPr>
-          <p:cNvPr id="38" name="Shape 35"/>
-          <p:cNvSpPr/>
-          <p:nvPr/>
-        </p:nvSpPr>
-        <p:spPr>
-          <a:xfrm>
-            <a:off x="9875520" y="4791456"/>
-            <a:ext cx="1700784" cy="420624"/>
-          </a:xfrm>
-          <a:prstGeom prst="roundRect">
-            <a:avLst>
-              <a:gd name="adj" fmla="val 8696"/>
-            </a:avLst>
-          </a:prstGeom>
-          <a:solidFill>
-            <a:srgbClr val="2C3444"/>
-          </a:solidFill>
-          <a:ln w="9525">
-            <a:solidFill>
-              <a:srgbClr val="4A566C"/>
-            </a:solidFill>
-            <a:prstDash val="solid"/>
-          </a:ln>
-        </p:spPr>
-      </p:sp>
-      <p:sp>
-        <p:nvSpPr>
-          <p:cNvPr id="39" name="Text 36"/>
-          <p:cNvSpPr txBox="1"/>
-          <p:nvPr/>
-        </p:nvSpPr>
-        <p:spPr>
-          <a:xfrm>
-            <a:off x="9875520" y="4791456"/>
-            <a:ext cx="1700784" cy="420624"/>
-          </a:xfrm>
-          <a:prstGeom prst="rect">
-            <a:avLst/>
-          </a:prstGeom>
-          <a:noFill/>
-          <a:ln/>
-        </p:spPr>
-        <p:txBody>
-          <a:bodyPr wrap="square" lIns="0" tIns="0" rIns="0" bIns="0" rtlCol="0" anchor="ctr"/>
-          <a:lstStyle/>
-          <a:p>
-            <a:pPr algn="ctr" indent="0" marL="0">
-              <a:buNone/>
-            </a:pPr>
-            <a:r>
-              <a:rPr lang="en-US" sz="900" dirty="0">
-                <a:solidFill>
-                  <a:srgbClr val="D2DAE4"/>
-                </a:solidFill>
-                <a:latin typeface="Consolas" pitchFamily="34" charset="0"/>
-                <a:ea typeface="Consolas" pitchFamily="34" charset="-122"/>
-                <a:cs typeface="Consolas" pitchFamily="34" charset="-120"/>
-              </a:rPr>
-              <a:t>sem_post(full)</a:t>
-            </a:r>
-            <a:endParaRPr lang="en-US" sz="900" dirty="0"/>
-          </a:p>
-        </p:txBody>
-      </p:sp>
-      <p:sp>
-        <p:nvSpPr>
-          <p:cNvPr id="40" name="Shape 37"/>
-          <p:cNvSpPr/>
-          <p:nvPr/>
-        </p:nvSpPr>
-        <p:spPr>
-          <a:xfrm>
-            <a:off x="841248" y="5358384"/>
-            <a:ext cx="1463040" cy="420624"/>
-          </a:xfrm>
-          <a:prstGeom prst="roundRect">
-            <a:avLst>
-              <a:gd name="adj" fmla="val 10870"/>
-            </a:avLst>
-          </a:prstGeom>
-          <a:solidFill>
-            <a:srgbClr val="2AA5AB"/>
-          </a:solidFill>
-          <a:ln w="12700">
-            <a:solidFill>
-              <a:srgbClr val="2AA5AB"/>
-            </a:solidFill>
-            <a:prstDash val="solid"/>
-          </a:ln>
-        </p:spPr>
-      </p:sp>
-      <p:sp>
-        <p:nvSpPr>
-          <p:cNvPr id="41" name="Text 38"/>
-          <p:cNvSpPr txBox="1"/>
-          <p:nvPr/>
-        </p:nvSpPr>
-        <p:spPr>
-          <a:xfrm>
-            <a:off x="841248" y="5358384"/>
-            <a:ext cx="1463040" cy="420624"/>
-          </a:xfrm>
-          <a:prstGeom prst="rect">
-            <a:avLst/>
-          </a:prstGeom>
-          <a:noFill/>
-          <a:ln/>
-        </p:spPr>
-        <p:txBody>
-          <a:bodyPr wrap="square" lIns="0" tIns="0" rIns="0" bIns="0" rtlCol="0" anchor="ctr"/>
-          <a:lstStyle/>
-          <a:p>
-            <a:pPr algn="ctr" indent="0" marL="0">
-              <a:buNone/>
-            </a:pPr>
-            <a:r>
-              <a:rPr lang="en-US" sz="1050" b="1" dirty="0">
-                <a:solidFill>
-                  <a:srgbClr val="13161C"/>
-                </a:solidFill>
-                <a:latin typeface="맑은 고딕" pitchFamily="34" charset="0"/>
-                <a:ea typeface="맑은 고딕" pitchFamily="34" charset="-122"/>
-                <a:cs typeface="맑은 고딕" pitchFamily="34" charset="-120"/>
-              </a:rPr>
-              <a:t>수신</a:t>
-            </a:r>
-            <a:endParaRPr lang="en-US" sz="1050" dirty="0"/>
-          </a:p>
-        </p:txBody>
-      </p:sp>
-      <p:sp>
-        <p:nvSpPr>
-          <p:cNvPr id="42" name="Shape 39"/>
-          <p:cNvSpPr/>
-          <p:nvPr/>
-        </p:nvSpPr>
-        <p:spPr>
-          <a:xfrm>
-            <a:off x="2487168" y="5358384"/>
-            <a:ext cx="1700784" cy="420624"/>
-          </a:xfrm>
-          <a:prstGeom prst="roundRect">
-            <a:avLst>
-              <a:gd name="adj" fmla="val 8696"/>
-            </a:avLst>
-          </a:prstGeom>
-          <a:solidFill>
-            <a:srgbClr val="2C3444"/>
-          </a:solidFill>
-          <a:ln w="9525">
-            <a:solidFill>
-              <a:srgbClr val="4A566C"/>
-            </a:solidFill>
-            <a:prstDash val="solid"/>
-          </a:ln>
-        </p:spPr>
-      </p:sp>
-      <p:sp>
-        <p:nvSpPr>
-          <p:cNvPr id="43" name="Text 40"/>
-          <p:cNvSpPr txBox="1"/>
-          <p:nvPr/>
-        </p:nvSpPr>
-        <p:spPr>
-          <a:xfrm>
-            <a:off x="2487168" y="5358384"/>
-            <a:ext cx="1700784" cy="420624"/>
-          </a:xfrm>
-          <a:prstGeom prst="rect">
-            <a:avLst/>
-          </a:prstGeom>
-          <a:noFill/>
-          <a:ln/>
-        </p:spPr>
-        <p:txBody>
-          <a:bodyPr wrap="square" lIns="0" tIns="0" rIns="0" bIns="0" rtlCol="0" anchor="ctr"/>
-          <a:lstStyle/>
-          <a:p>
-            <a:pPr algn="ctr" indent="0" marL="0">
-              <a:buNone/>
-            </a:pPr>
-            <a:r>
-              <a:rPr lang="en-US" sz="900" dirty="0">
-                <a:solidFill>
-                  <a:srgbClr val="D2DAE4"/>
-                </a:solidFill>
-                <a:latin typeface="Consolas" pitchFamily="34" charset="0"/>
-                <a:ea typeface="Consolas" pitchFamily="34" charset="-122"/>
-                <a:cs typeface="Consolas" pitchFamily="34" charset="-120"/>
-              </a:rPr>
-              <a:t>sem_wait(full)</a:t>
-            </a:r>
-            <a:endParaRPr lang="en-US" sz="900" dirty="0"/>
-          </a:p>
-        </p:txBody>
-      </p:sp>
-      <p:sp>
-        <p:nvSpPr>
-          <p:cNvPr id="44" name="Text 41"/>
-          <p:cNvSpPr txBox="1"/>
-          <p:nvPr/>
-        </p:nvSpPr>
-        <p:spPr>
-          <a:xfrm>
-            <a:off x="4187952" y="5358384"/>
-            <a:ext cx="146304" cy="420624"/>
-          </a:xfrm>
-          <a:prstGeom prst="rect">
-            <a:avLst/>
-          </a:prstGeom>
-          <a:noFill/>
-          <a:ln/>
-        </p:spPr>
-        <p:txBody>
-          <a:bodyPr wrap="square" lIns="0" tIns="0" rIns="0" bIns="0" rtlCol="0" anchor="ctr"/>
-          <a:lstStyle/>
-          <a:p>
-            <a:pPr algn="ctr" indent="0" marL="0">
-              <a:buNone/>
-            </a:pPr>
-            <a:r>
-              <a:rPr lang="en-US" sz="1200" dirty="0">
-                <a:solidFill>
-                  <a:srgbClr val="6B778A"/>
-                </a:solidFill>
-                <a:latin typeface="Consolas" pitchFamily="34" charset="0"/>
-                <a:ea typeface="Consolas" pitchFamily="34" charset="-122"/>
-                <a:cs typeface="Consolas" pitchFamily="34" charset="-120"/>
-              </a:rPr>
-              <a:t>›</a:t>
-            </a:r>
-            <a:endParaRPr lang="en-US" sz="1200" dirty="0"/>
-          </a:p>
-        </p:txBody>
-      </p:sp>
-      <p:sp>
-        <p:nvSpPr>
-          <p:cNvPr id="45" name="Shape 42"/>
-          <p:cNvSpPr/>
-          <p:nvPr/>
-        </p:nvSpPr>
-        <p:spPr>
-          <a:xfrm>
-            <a:off x="4334256" y="5358384"/>
-            <a:ext cx="1700784" cy="420624"/>
-          </a:xfrm>
-          <a:prstGeom prst="roundRect">
-            <a:avLst>
-              <a:gd name="adj" fmla="val 8696"/>
-            </a:avLst>
-          </a:prstGeom>
-          <a:solidFill>
-            <a:srgbClr val="2C3444"/>
-          </a:solidFill>
-          <a:ln w="9525">
-            <a:solidFill>
-              <a:srgbClr val="4A566C"/>
-            </a:solidFill>
-            <a:prstDash val="solid"/>
-          </a:ln>
-        </p:spPr>
-      </p:sp>
-      <p:sp>
-        <p:nvSpPr>
-          <p:cNvPr id="46" name="Text 43"/>
-          <p:cNvSpPr txBox="1"/>
-          <p:nvPr/>
-        </p:nvSpPr>
-        <p:spPr>
-          <a:xfrm>
-            <a:off x="4334256" y="5358384"/>
-            <a:ext cx="1700784" cy="420624"/>
-          </a:xfrm>
-          <a:prstGeom prst="rect">
-            <a:avLst/>
-          </a:prstGeom>
-          <a:noFill/>
-          <a:ln/>
-        </p:spPr>
-        <p:txBody>
-          <a:bodyPr wrap="square" lIns="0" tIns="0" rIns="0" bIns="0" rtlCol="0" anchor="ctr"/>
-          <a:lstStyle/>
-          <a:p>
-            <a:pPr algn="ctr" indent="0" marL="0">
-              <a:buNone/>
-            </a:pPr>
-            <a:r>
-              <a:rPr lang="en-US" sz="900" dirty="0">
-                <a:solidFill>
-                  <a:srgbClr val="D2DAE4"/>
-                </a:solidFill>
-                <a:latin typeface="Consolas" pitchFamily="34" charset="0"/>
-                <a:ea typeface="Consolas" pitchFamily="34" charset="-122"/>
-                <a:cs typeface="Consolas" pitchFamily="34" charset="-120"/>
-              </a:rPr>
-              <a:t>lock(mutex)</a:t>
-            </a:r>
-            <a:endParaRPr lang="en-US" sz="900" dirty="0"/>
-          </a:p>
-        </p:txBody>
-      </p:sp>
-      <p:sp>
-        <p:nvSpPr>
-          <p:cNvPr id="47" name="Text 44"/>
-          <p:cNvSpPr txBox="1"/>
-          <p:nvPr/>
-        </p:nvSpPr>
-        <p:spPr>
-          <a:xfrm>
-            <a:off x="6035040" y="5358384"/>
-            <a:ext cx="146304" cy="420624"/>
-          </a:xfrm>
-          <a:prstGeom prst="rect">
-            <a:avLst/>
-          </a:prstGeom>
-          <a:noFill/>
-          <a:ln/>
-        </p:spPr>
-        <p:txBody>
-          <a:bodyPr wrap="square" lIns="0" tIns="0" rIns="0" bIns="0" rtlCol="0" anchor="ctr"/>
-          <a:lstStyle/>
-          <a:p>
-            <a:pPr algn="ctr" indent="0" marL="0">
-              <a:buNone/>
-            </a:pPr>
-            <a:r>
-              <a:rPr lang="en-US" sz="1200" dirty="0">
-                <a:solidFill>
-                  <a:srgbClr val="6B778A"/>
-                </a:solidFill>
-                <a:latin typeface="Consolas" pitchFamily="34" charset="0"/>
-                <a:ea typeface="Consolas" pitchFamily="34" charset="-122"/>
-                <a:cs typeface="Consolas" pitchFamily="34" charset="-120"/>
-              </a:rPr>
-              <a:t>›</a:t>
-            </a:r>
-            <a:endParaRPr lang="en-US" sz="1200" dirty="0"/>
-          </a:p>
-        </p:txBody>
-      </p:sp>
-      <p:sp>
-        <p:nvSpPr>
-          <p:cNvPr id="48" name="Shape 45"/>
-          <p:cNvSpPr/>
-          <p:nvPr/>
-        </p:nvSpPr>
-        <p:spPr>
-          <a:xfrm>
-            <a:off x="6181344" y="5358384"/>
-            <a:ext cx="1700784" cy="420624"/>
-          </a:xfrm>
-          <a:prstGeom prst="roundRect">
-            <a:avLst>
-              <a:gd name="adj" fmla="val 8696"/>
-            </a:avLst>
-          </a:prstGeom>
-          <a:solidFill>
-            <a:srgbClr val="2C3444"/>
-          </a:solidFill>
-          <a:ln w="9525">
-            <a:solidFill>
-              <a:srgbClr val="4A566C"/>
-            </a:solidFill>
-            <a:prstDash val="solid"/>
-          </a:ln>
-        </p:spPr>
-      </p:sp>
-      <p:sp>
-        <p:nvSpPr>
-          <p:cNvPr id="49" name="Text 46"/>
-          <p:cNvSpPr txBox="1"/>
-          <p:nvPr/>
-        </p:nvSpPr>
-        <p:spPr>
-          <a:xfrm>
-            <a:off x="6181344" y="5358384"/>
-            <a:ext cx="1700784" cy="420624"/>
-          </a:xfrm>
-          <a:prstGeom prst="rect">
-            <a:avLst/>
-          </a:prstGeom>
-          <a:noFill/>
-          <a:ln/>
-        </p:spPr>
-        <p:txBody>
-          <a:bodyPr wrap="square" lIns="0" tIns="0" rIns="0" bIns="0" rtlCol="0" anchor="ctr"/>
-          <a:lstStyle/>
-          <a:p>
-            <a:pPr algn="ctr" indent="0" marL="0">
-              <a:buNone/>
-            </a:pPr>
-            <a:r>
-              <a:rPr lang="en-US" sz="900" dirty="0">
-                <a:solidFill>
-                  <a:srgbClr val="D2DAE4"/>
-                </a:solidFill>
-                <a:latin typeface="Consolas" pitchFamily="34" charset="0"/>
-                <a:ea typeface="Consolas" pitchFamily="34" charset="-122"/>
-                <a:cs typeface="Consolas" pitchFamily="34" charset="-120"/>
-              </a:rPr>
-              <a:t>버퍼에서 read</a:t>
-            </a:r>
-            <a:endParaRPr lang="en-US" sz="900" dirty="0"/>
-          </a:p>
-        </p:txBody>
-      </p:sp>
-      <p:sp>
-        <p:nvSpPr>
-          <p:cNvPr id="50" name="Text 47"/>
-          <p:cNvSpPr txBox="1"/>
-          <p:nvPr/>
-        </p:nvSpPr>
-        <p:spPr>
-          <a:xfrm>
-            <a:off x="7882128" y="5358384"/>
-            <a:ext cx="146304" cy="420624"/>
-          </a:xfrm>
-          <a:prstGeom prst="rect">
-            <a:avLst/>
-          </a:prstGeom>
-          <a:noFill/>
-          <a:ln/>
-        </p:spPr>
-        <p:txBody>
-          <a:bodyPr wrap="square" lIns="0" tIns="0" rIns="0" bIns="0" rtlCol="0" anchor="ctr"/>
-          <a:lstStyle/>
-          <a:p>
-            <a:pPr algn="ctr" indent="0" marL="0">
-              <a:buNone/>
-            </a:pPr>
-            <a:r>
-              <a:rPr lang="en-US" sz="1200" dirty="0">
-                <a:solidFill>
-                  <a:srgbClr val="6B778A"/>
-                </a:solidFill>
-                <a:latin typeface="Consolas" pitchFamily="34" charset="0"/>
-                <a:ea typeface="Consolas" pitchFamily="34" charset="-122"/>
-                <a:cs typeface="Consolas" pitchFamily="34" charset="-120"/>
-              </a:rPr>
-              <a:t>›</a:t>
-            </a:r>
-            <a:endParaRPr lang="en-US" sz="1200" dirty="0"/>
-          </a:p>
-        </p:txBody>
-      </p:sp>
-      <p:sp>
-        <p:nvSpPr>
-          <p:cNvPr id="51" name="Shape 48"/>
-          <p:cNvSpPr/>
-          <p:nvPr/>
-        </p:nvSpPr>
-        <p:spPr>
-          <a:xfrm>
-            <a:off x="8028432" y="5358384"/>
-            <a:ext cx="1700784" cy="420624"/>
-          </a:xfrm>
-          <a:prstGeom prst="roundRect">
-            <a:avLst>
-              <a:gd name="adj" fmla="val 8696"/>
-            </a:avLst>
-          </a:prstGeom>
-          <a:solidFill>
-            <a:srgbClr val="2C3444"/>
-          </a:solidFill>
-          <a:ln w="9525">
-            <a:solidFill>
-              <a:srgbClr val="4A566C"/>
-            </a:solidFill>
-            <a:prstDash val="solid"/>
-          </a:ln>
-        </p:spPr>
-      </p:sp>
-      <p:sp>
-        <p:nvSpPr>
-          <p:cNvPr id="52" name="Text 49"/>
-          <p:cNvSpPr txBox="1"/>
-          <p:nvPr/>
-        </p:nvSpPr>
-        <p:spPr>
-          <a:xfrm>
-            <a:off x="8028432" y="5358384"/>
-            <a:ext cx="1700784" cy="420624"/>
-          </a:xfrm>
-          <a:prstGeom prst="rect">
-            <a:avLst/>
-          </a:prstGeom>
-          <a:noFill/>
-          <a:ln/>
-        </p:spPr>
-        <p:txBody>
-          <a:bodyPr wrap="square" lIns="0" tIns="0" rIns="0" bIns="0" rtlCol="0" anchor="ctr"/>
-          <a:lstStyle/>
-          <a:p>
-            <a:pPr algn="ctr" indent="0" marL="0">
-              <a:buNone/>
-            </a:pPr>
-            <a:r>
-              <a:rPr lang="en-US" sz="900" dirty="0">
-                <a:solidFill>
-                  <a:srgbClr val="D2DAE4"/>
-                </a:solidFill>
-                <a:latin typeface="Consolas" pitchFamily="34" charset="0"/>
-                <a:ea typeface="Consolas" pitchFamily="34" charset="-122"/>
-                <a:cs typeface="Consolas" pitchFamily="34" charset="-120"/>
-              </a:rPr>
-              <a:t>unlock(mutex)</a:t>
-            </a:r>
-            <a:endParaRPr lang="en-US" sz="900" dirty="0"/>
-          </a:p>
-        </p:txBody>
-      </p:sp>
-      <p:sp>
-        <p:nvSpPr>
-          <p:cNvPr id="53" name="Text 50"/>
-          <p:cNvSpPr txBox="1"/>
-          <p:nvPr/>
-        </p:nvSpPr>
-        <p:spPr>
-          <a:xfrm>
-            <a:off x="9729216" y="5358384"/>
-            <a:ext cx="146304" cy="420624"/>
-          </a:xfrm>
-          <a:prstGeom prst="rect">
-            <a:avLst/>
-          </a:prstGeom>
-          <a:noFill/>
-          <a:ln/>
-        </p:spPr>
-        <p:txBody>
-          <a:bodyPr wrap="square" lIns="0" tIns="0" rIns="0" bIns="0" rtlCol="0" anchor="ctr"/>
-          <a:lstStyle/>
-          <a:p>
-            <a:pPr algn="ctr" indent="0" marL="0">
-              <a:buNone/>
-            </a:pPr>
-            <a:r>
-              <a:rPr lang="en-US" sz="1200" dirty="0">
-                <a:solidFill>
-                  <a:srgbClr val="6B778A"/>
-                </a:solidFill>
-                <a:latin typeface="Consolas" pitchFamily="34" charset="0"/>
-                <a:ea typeface="Consolas" pitchFamily="34" charset="-122"/>
-                <a:cs typeface="Consolas" pitchFamily="34" charset="-120"/>
-              </a:rPr>
-              <a:t>›</a:t>
-            </a:r>
-            <a:endParaRPr lang="en-US" sz="1200" dirty="0"/>
-          </a:p>
-        </p:txBody>
-      </p:sp>
-      <p:sp>
-        <p:nvSpPr>
-          <p:cNvPr id="54" name="Shape 51"/>
-          <p:cNvSpPr/>
-          <p:nvPr/>
-        </p:nvSpPr>
-        <p:spPr>
-          <a:xfrm>
-            <a:off x="9875520" y="5358384"/>
-            <a:ext cx="1700784" cy="420624"/>
-          </a:xfrm>
-          <a:prstGeom prst="roundRect">
-            <a:avLst>
-              <a:gd name="adj" fmla="val 8696"/>
-            </a:avLst>
-          </a:prstGeom>
-          <a:solidFill>
-            <a:srgbClr val="2C3444"/>
-          </a:solidFill>
-          <a:ln w="9525">
-            <a:solidFill>
-              <a:srgbClr val="4A566C"/>
-            </a:solidFill>
-            <a:prstDash val="solid"/>
-          </a:ln>
-        </p:spPr>
-      </p:sp>
-      <p:sp>
-        <p:nvSpPr>
-          <p:cNvPr id="55" name="Text 52"/>
-          <p:cNvSpPr txBox="1"/>
-          <p:nvPr/>
-        </p:nvSpPr>
-        <p:spPr>
-          <a:xfrm>
-            <a:off x="9875520" y="5358384"/>
-            <a:ext cx="1700784" cy="420624"/>
-          </a:xfrm>
-          <a:prstGeom prst="rect">
-            <a:avLst/>
-          </a:prstGeom>
-          <a:noFill/>
-          <a:ln/>
-        </p:spPr>
-        <p:txBody>
-          <a:bodyPr wrap="square" lIns="0" tIns="0" rIns="0" bIns="0" rtlCol="0" anchor="ctr"/>
-          <a:lstStyle/>
-          <a:p>
-            <a:pPr algn="ctr" indent="0" marL="0">
-              <a:buNone/>
-            </a:pPr>
-            <a:r>
-              <a:rPr lang="en-US" sz="900" dirty="0">
-                <a:solidFill>
-                  <a:srgbClr val="D2DAE4"/>
-                </a:solidFill>
-                <a:latin typeface="Consolas" pitchFamily="34" charset="0"/>
-                <a:ea typeface="Consolas" pitchFamily="34" charset="-122"/>
-                <a:cs typeface="Consolas" pitchFamily="34" charset="-120"/>
-              </a:rPr>
-              <a:t>sem_post(empty)</a:t>
-            </a:r>
-            <a:endParaRPr lang="en-US" sz="900" dirty="0"/>
-          </a:p>
-        </p:txBody>
-      </p:sp>
-      <p:sp>
-        <p:nvSpPr>
-          <p:cNvPr id="56" name="Text 53"/>
-          <p:cNvSpPr txBox="1"/>
-          <p:nvPr/>
-        </p:nvSpPr>
-        <p:spPr>
-          <a:xfrm>
-            <a:off x="841248" y="5943600"/>
-            <a:ext cx="10509199" cy="292608"/>
-          </a:xfrm>
-          <a:prstGeom prst="rect">
-            <a:avLst/>
-          </a:prstGeom>
-          <a:noFill/>
-          <a:ln/>
-        </p:spPr>
-        <p:txBody>
-          <a:bodyPr wrap="square" lIns="0" tIns="0" rIns="0" bIns="0" rtlCol="0" anchor="ctr"/>
-          <a:lstStyle/>
-          <a:p>
-            <a:pPr indent="0" marL="0">
-              <a:buNone/>
-            </a:pPr>
-            <a:r>
-              <a:rPr lang="en-US" sz="1100" b="1" dirty="0">
-                <a:solidFill>
-                  <a:srgbClr val="C8891F"/>
-                </a:solidFill>
-                <a:latin typeface="맑은 고딕" pitchFamily="34" charset="0"/>
-                <a:ea typeface="맑은 고딕" pitchFamily="34" charset="-122"/>
-                <a:cs typeface="맑은 고딕" pitchFamily="34" charset="-120"/>
-              </a:rPr>
-              <a:t>순서를 뒤집으면 데드락 — </a:t>
-            </a:r>
-            <a:pPr indent="0" marL="0">
-              <a:buNone/>
-            </a:pPr>
-            <a:r>
-              <a:rPr lang="en-US" sz="1100" dirty="0">
-                <a:solidFill>
-                  <a:srgbClr val="C9D2DE"/>
-                </a:solidFill>
-                <a:latin typeface="맑은 고딕" pitchFamily="34" charset="0"/>
-                <a:ea typeface="맑은 고딕" pitchFamily="34" charset="-122"/>
-                <a:cs typeface="맑은 고딕" pitchFamily="34" charset="-120"/>
-              </a:rPr>
-              <a:t>뮤텍스를 먼저 잡고 세마포어를 기다리면, 상대는 그 락을 영원히 잡지 못한다.</a:t>
-            </a:r>
-            <a:endParaRPr lang="en-US" sz="1100" dirty="0"/>
-          </a:p>
-        </p:txBody>
-      </p:sp>
-    </p:spTree>
-  </p:cSld>
-  <p:clrMapOvr>
-    <a:masterClrMapping/>
-  </p:clrMapOvr>
-</p:sld>
-</file>
-
 <file path=ppt/slides/slide15.xml><?xml version="1.0" encoding="utf-8"?>
 <p:sld xmlns:a="http://schemas.openxmlformats.org/drawingml/2006/main" xmlns:r="http://schemas.openxmlformats.org/officeDocument/2006/relationships" xmlns:p="http://schemas.openxmlformats.org/presentationml/2006/main">
   <p:cSld name="Slide 15">
@@ -19109,7 +12548,7 @@
                 <a:ea typeface="맑은 고딕" pitchFamily="34" charset="-122"/>
                 <a:cs typeface="맑은 고딕" pitchFamily="34" charset="-120"/>
               </a:rPr>
-              <a:t>한 프로세스 안에서 [Start] — 송신과 수신이 0.1 초 간격으로 교대로 찍힌다</a:t>
+              <a:t>한 프로세스 안에서 [Start] — 교대는 0.1 초 간격 때문이고, 송신은 8 건까지 앞서갈 수 있다</a:t>
             </a:r>
             <a:endParaRPr lang="en-US" sz="1250" dirty="0"/>
           </a:p>
@@ -20696,7 +14135,7 @@
                 <a:ea typeface="맑은 고딕" pitchFamily="34" charset="-122"/>
                 <a:cs typeface="맑은 고딕" pitchFamily="34" charset="-120"/>
               </a:rPr>
-              <a:t>tx 와 rx 가 교대로</a:t>
+              <a:t>교대는 보장이 아니다</a:t>
             </a:r>
             <a:endParaRPr lang="en-US" sz="1200" dirty="0"/>
           </a:p>
@@ -20738,7 +14177,7 @@
                 <a:ea typeface="맑은 고딕" pitchFamily="34" charset="-122"/>
                 <a:cs typeface="맑은 고딕" pitchFamily="34" charset="-120"/>
               </a:rPr>
-              <a:t>링버퍼가 8 칸뿐이라 수신이 밀리면 송신이 세마포어에서 대기한다 — 흐름 제어가 동작한다는 뜻이다.</a:t>
+              <a:t>0.1 초 간격이라 큐가 비어서 교대로 보일 뿐이다. 송신은 빈 슬롯 8 개만큼 앞서갈 수 있고 (9 번째부터 대기 — 흐름 제어), 로그 줄 순서는 두 쓰레드가 각자 찍는 것이라 뒤집힐 수 있다.</a:t>
             </a:r>
             <a:endParaRPr lang="en-US" sz="1020" dirty="0"/>
           </a:p>
@@ -21215,25 +14654,25 @@
                 <a:ea typeface="맑은 고딕" pitchFamily="34" charset="-122"/>
                 <a:cs typeface="맑은 고딕" pitchFamily="34" charset="-120"/>
               </a:rPr>
-              <a:t>리눅스 환경의 메시지 큐가 윈도우 환경에는 없어서 공유메모리 + 링버퍼로 메시지 큐 구현   ·   IpcMsgQ.c</a:t>
-            </a:r>
-          </a:p>
-        </p:txBody>
-      </p:sp>
-      <p:sp>
-        <p:nvSpPr>
-          <p:cNvPr id="6" name="Shape 4"/>
+              <a:t>두 프로세스가 같은 이름으로 커널의 물건 4 개를 찾아 붙는다 — 공유메모리 1 · 뮤텍스 1 · 세마포어 2   ·   IpcMsgQ.c</a:t>
+            </a:r>
+          </a:p>
+        </p:txBody>
+      </p:sp>
+      <p:sp>
+        <p:nvSpPr>
+          <p:cNvPr id="47" name="Shape 4"/>
           <p:cNvSpPr/>
           <p:nvPr/>
         </p:nvSpPr>
         <p:spPr>
           <a:xfrm>
             <a:off x="548640" y="1298448"/>
-            <a:ext cx="5760720" cy="2395728"/>
+            <a:ext cx="5577840" cy="2788920"/>
           </a:xfrm>
           <a:prstGeom prst="roundRect">
             <a:avLst>
-              <a:gd name="adj" fmla="val 2326"/>
+              <a:gd name="adj" fmla="val 1967"/>
             </a:avLst>
           </a:prstGeom>
           <a:solidFill>
@@ -21249,64 +14688,26 @@
       </p:sp>
       <p:sp>
         <p:nvSpPr>
-          <p:cNvPr id="7" name="Text 5"/>
-          <p:cNvSpPr txBox="1"/>
-          <p:nvPr/>
-        </p:nvSpPr>
-        <p:spPr>
-          <a:xfrm>
-            <a:off x="804672" y="1389888"/>
-            <a:ext cx="5248656" cy="237744"/>
-          </a:xfrm>
-          <a:prstGeom prst="rect">
-            <a:avLst/>
-          </a:prstGeom>
-          <a:noFill/>
-          <a:ln/>
-        </p:spPr>
-        <p:txBody>
-          <a:bodyPr wrap="square" lIns="0" tIns="0" rIns="0" bIns="0" rtlCol="0" anchor="ctr"/>
-          <a:lstStyle/>
-          <a:p>
-            <a:pPr indent="0" marL="0">
-              <a:buNone/>
-            </a:pPr>
-            <a:r>
-              <a:rPr lang="en-US" sz="1050" b="1" dirty="0">
-                <a:solidFill>
-                  <a:srgbClr val="1E232E"/>
-                </a:solidFill>
-                <a:latin typeface="맑은 고딕" pitchFamily="34" charset="0"/>
-                <a:ea typeface="맑은 고딕" pitchFamily="34" charset="-122"/>
-                <a:cs typeface="맑은 고딕" pitchFamily="34" charset="-120"/>
-              </a:rPr>
-              <a:t>리눅스 메시지 큐 API ↔ 이 과제의 Windows 구현</a:t>
-            </a:r>
-          </a:p>
-        </p:txBody>
-      </p:sp>
-      <p:sp>
-        <p:nvSpPr>
-          <p:cNvPr id="8" name="Shape 6"/>
+          <p:cNvPr id="48" name="Shape 5"/>
           <p:cNvSpPr/>
           <p:nvPr/>
         </p:nvSpPr>
         <p:spPr>
           <a:xfrm>
-            <a:off x="804672" y="1700784"/>
-            <a:ext cx="5248656" cy="274320"/>
+            <a:off x="804672" y="1463040"/>
+            <a:ext cx="1645920" cy="493776"/>
           </a:xfrm>
           <a:prstGeom prst="roundRect">
             <a:avLst>
-              <a:gd name="adj" fmla="val 9524"/>
+              <a:gd name="adj" fmla="val 9259"/>
             </a:avLst>
           </a:prstGeom>
           <a:solidFill>
-            <a:srgbClr val="1E232E"/>
+            <a:srgbClr val="FBEDE8"/>
           </a:solidFill>
           <a:ln w="12700">
             <a:solidFill>
-              <a:srgbClr val="1E232E"/>
+              <a:srgbClr val="D9532B"/>
             </a:solidFill>
             <a:prstDash val="solid"/>
           </a:ln>
@@ -21314,170 +14715,841 @@
       </p:sp>
       <p:sp>
         <p:nvSpPr>
-          <p:cNvPr id="9" name="Text 7"/>
-          <p:cNvSpPr txBox="1"/>
-          <p:nvPr/>
-        </p:nvSpPr>
-        <p:spPr>
-          <a:xfrm>
-            <a:off x="914400" y="1700784"/>
-            <a:ext cx="1554480" cy="274320"/>
-          </a:xfrm>
-          <a:prstGeom prst="rect">
-            <a:avLst/>
-          </a:prstGeom>
-          <a:noFill/>
-          <a:ln/>
-        </p:spPr>
-        <p:txBody>
-          <a:bodyPr wrap="square" lIns="0" tIns="0" rIns="0" bIns="0" rtlCol="0" anchor="ctr"/>
-          <a:lstStyle/>
-          <a:p>
-            <a:pPr indent="0" marL="0">
-              <a:buNone/>
-            </a:pPr>
-            <a:r>
-              <a:rPr lang="en-US" sz="900" b="1" dirty="0">
-                <a:solidFill>
-                  <a:srgbClr val="FFFFFF"/>
-                </a:solidFill>
-                <a:latin typeface="맑은 고딕" pitchFamily="34" charset="0"/>
-                <a:ea typeface="맑은 고딕" pitchFamily="34" charset="-122"/>
-                <a:cs typeface="맑은 고딕" pitchFamily="34" charset="-120"/>
-              </a:rPr>
-              <a:t>Linux (System V)</a:t>
-            </a:r>
-          </a:p>
-        </p:txBody>
-      </p:sp>
-      <p:sp>
-        <p:nvSpPr>
-          <p:cNvPr id="10" name="Text 8"/>
-          <p:cNvSpPr txBox="1"/>
-          <p:nvPr/>
-        </p:nvSpPr>
-        <p:spPr>
-          <a:xfrm>
-            <a:off x="2560320" y="1700784"/>
-            <a:ext cx="3364992" cy="274320"/>
-          </a:xfrm>
-          <a:prstGeom prst="rect">
-            <a:avLst/>
-          </a:prstGeom>
-          <a:noFill/>
-          <a:ln/>
-        </p:spPr>
-        <p:txBody>
-          <a:bodyPr wrap="square" lIns="0" tIns="0" rIns="0" bIns="0" rtlCol="0" anchor="ctr"/>
-          <a:lstStyle/>
-          <a:p>
-            <a:pPr indent="0" marL="0">
-              <a:buNone/>
-            </a:pPr>
-            <a:r>
-              <a:rPr lang="en-US" sz="900" b="1" dirty="0">
-                <a:solidFill>
-                  <a:srgbClr val="FFFFFF"/>
-                </a:solidFill>
-                <a:latin typeface="맑은 고딕" pitchFamily="34" charset="0"/>
-                <a:ea typeface="맑은 고딕" pitchFamily="34" charset="-122"/>
-                <a:cs typeface="맑은 고딕" pitchFamily="34" charset="-120"/>
-              </a:rPr>
-              <a:t>본 과제의 Windows 구현</a:t>
-            </a:r>
-          </a:p>
-        </p:txBody>
-      </p:sp>
-      <p:sp>
-        <p:nvSpPr>
-          <p:cNvPr id="11" name="Text 9"/>
-          <p:cNvSpPr txBox="1"/>
-          <p:nvPr/>
-        </p:nvSpPr>
-        <p:spPr>
-          <a:xfrm>
-            <a:off x="914400" y="1993392"/>
-            <a:ext cx="1572768" cy="256032"/>
-          </a:xfrm>
-          <a:prstGeom prst="rect">
-            <a:avLst/>
-          </a:prstGeom>
-          <a:noFill/>
-          <a:ln/>
-        </p:spPr>
-        <p:txBody>
-          <a:bodyPr wrap="square" lIns="0" tIns="0" rIns="0" bIns="0" rtlCol="0" anchor="ctr"/>
-          <a:lstStyle/>
-          <a:p>
-            <a:pPr indent="0" marL="0">
-              <a:buNone/>
-            </a:pPr>
-            <a:r>
-              <a:rPr lang="en-US" sz="860" dirty="0">
+          <p:cNvPr id="49" name="Text 6"/>
+          <p:cNvSpPr txBox="1"/>
+          <p:nvPr/>
+        </p:nvSpPr>
+        <p:spPr>
+          <a:xfrm>
+            <a:off x="804672" y="1463040"/>
+            <a:ext cx="1645920" cy="493776"/>
+          </a:xfrm>
+          <a:prstGeom prst="rect">
+            <a:avLst/>
+          </a:prstGeom>
+          <a:noFill/>
+          <a:ln/>
+        </p:spPr>
+        <p:txBody>
+          <a:bodyPr wrap="square" lIns="0" tIns="0" rIns="0" bIns="0" rtlCol="0" anchor="ctr"/>
+          <a:lstStyle/>
+          <a:p>
+            <a:pPr algn="ctr" indent="0" marL="0">
+              <a:buNone/>
+            </a:pPr>
+            <a:r>
+              <a:rPr lang="en-US" sz="1050" b="1" dirty="0">
                 <a:solidFill>
                   <a:srgbClr val="D9532B"/>
                 </a:solidFill>
-                <a:latin typeface="Consolas" pitchFamily="34" charset="0"/>
-                <a:ea typeface="Consolas" pitchFamily="34" charset="-122"/>
-                <a:cs typeface="Consolas" pitchFamily="34" charset="-120"/>
-              </a:rPr>
-              <a:t>msgget(key, IPC_CREAT)</a:t>
-            </a:r>
-          </a:p>
-        </p:txBody>
-      </p:sp>
-      <p:sp>
-        <p:nvSpPr>
-          <p:cNvPr id="12" name="Text 10"/>
-          <p:cNvSpPr txBox="1"/>
-          <p:nvPr/>
-        </p:nvSpPr>
-        <p:spPr>
-          <a:xfrm>
-            <a:off x="2560320" y="1993392"/>
-            <a:ext cx="3364992" cy="256032"/>
-          </a:xfrm>
-          <a:prstGeom prst="rect">
-            <a:avLst/>
-          </a:prstGeom>
-          <a:noFill/>
-          <a:ln/>
-        </p:spPr>
-        <p:txBody>
-          <a:bodyPr wrap="square" lIns="0" tIns="0" rIns="0" bIns="0" rtlCol="0" anchor="ctr"/>
-          <a:lstStyle/>
-          <a:p>
-            <a:pPr indent="0" marL="0">
-              <a:buNone/>
-            </a:pPr>
-            <a:r>
-              <a:rPr lang="en-US" sz="860" dirty="0">
-                <a:solidFill>
-                  <a:srgbClr val="3D4451"/>
-                </a:solidFill>
-                <a:latin typeface="맑은 고딕" pitchFamily="34" charset="0"/>
-                <a:ea typeface="맑은 고딕" pitchFamily="34" charset="-122"/>
-                <a:cs typeface="맑은 고딕" pitchFamily="34" charset="-120"/>
-              </a:rPr>
-              <a:t>CreateFileMapping — 이름 붙인 공유메모리 + 링버퍼 헤더 초기화</a:t>
-            </a:r>
-          </a:p>
-        </p:txBody>
-      </p:sp>
-      <p:sp>
-        <p:nvSpPr>
-          <p:cNvPr id="13" name="Shape 11"/>
+                <a:latin typeface="맑은 고딕" pitchFamily="34" charset="0"/>
+                <a:ea typeface="맑은 고딕" pitchFamily="34" charset="-122"/>
+                <a:cs typeface="맑은 고딕" pitchFamily="34" charset="-120"/>
+              </a:rPr>
+              <a:t>송신 프로세스</a:t>
+            </a:r>
+            <a:endParaRPr lang="en-US" sz="1050" dirty="0"/>
+          </a:p>
+        </p:txBody>
+      </p:sp>
+      <p:sp>
+        <p:nvSpPr>
+          <p:cNvPr id="50" name="Shape 7"/>
           <p:cNvSpPr/>
           <p:nvPr/>
         </p:nvSpPr>
         <p:spPr>
           <a:xfrm>
-            <a:off x="804672" y="2267712"/>
-            <a:ext cx="5248656" cy="274320"/>
+            <a:off x="4224528" y="1463040"/>
+            <a:ext cx="1645920" cy="493776"/>
           </a:xfrm>
           <a:prstGeom prst="roundRect">
             <a:avLst>
-              <a:gd name="adj" fmla="val 9524"/>
+              <a:gd name="adj" fmla="val 9259"/>
+            </a:avLst>
+          </a:prstGeom>
+          <a:solidFill>
+            <a:srgbClr val="E4F1F1"/>
+          </a:solidFill>
+          <a:ln w="12700">
+            <a:solidFill>
+              <a:srgbClr val="13757A"/>
+            </a:solidFill>
+            <a:prstDash val="solid"/>
+          </a:ln>
+        </p:spPr>
+      </p:sp>
+      <p:sp>
+        <p:nvSpPr>
+          <p:cNvPr id="51" name="Text 8"/>
+          <p:cNvSpPr txBox="1"/>
+          <p:nvPr/>
+        </p:nvSpPr>
+        <p:spPr>
+          <a:xfrm>
+            <a:off x="4224528" y="1463040"/>
+            <a:ext cx="1645920" cy="493776"/>
+          </a:xfrm>
+          <a:prstGeom prst="rect">
+            <a:avLst/>
+          </a:prstGeom>
+          <a:noFill/>
+          <a:ln/>
+        </p:spPr>
+        <p:txBody>
+          <a:bodyPr wrap="square" lIns="0" tIns="0" rIns="0" bIns="0" rtlCol="0" anchor="ctr"/>
+          <a:lstStyle/>
+          <a:p>
+            <a:pPr algn="ctr" indent="0" marL="0">
+              <a:buNone/>
+            </a:pPr>
+            <a:r>
+              <a:rPr lang="en-US" sz="1050" b="1" dirty="0">
+                <a:solidFill>
+                  <a:srgbClr val="13757A"/>
+                </a:solidFill>
+                <a:latin typeface="맑은 고딕" pitchFamily="34" charset="0"/>
+                <a:ea typeface="맑은 고딕" pitchFamily="34" charset="-122"/>
+                <a:cs typeface="맑은 고딕" pitchFamily="34" charset="-120"/>
+              </a:rPr>
+              <a:t>수신 프로세스</a:t>
+            </a:r>
+            <a:endParaRPr lang="en-US" sz="1050" dirty="0"/>
+          </a:p>
+        </p:txBody>
+      </p:sp>
+      <p:sp>
+        <p:nvSpPr>
+          <p:cNvPr id="52" name="Shape 9"/>
+          <p:cNvSpPr/>
+          <p:nvPr/>
+        </p:nvSpPr>
+        <p:spPr>
+          <a:xfrm>
+            <a:off x="1481328" y="2029968"/>
+            <a:ext cx="292608" cy="310896"/>
+          </a:xfrm>
+          <a:prstGeom prst="downArrow">
+            <a:avLst/>
+          </a:prstGeom>
+          <a:solidFill>
+            <a:srgbClr val="D9532B"/>
+          </a:solidFill>
+          <a:ln w="12700">
+            <a:solidFill>
+              <a:srgbClr val="D9532B"/>
+            </a:solidFill>
+            <a:prstDash val="solid"/>
+          </a:ln>
+        </p:spPr>
+      </p:sp>
+      <p:sp>
+        <p:nvSpPr>
+          <p:cNvPr id="53" name="Shape 10"/>
+          <p:cNvSpPr/>
+          <p:nvPr/>
+        </p:nvSpPr>
+        <p:spPr>
+          <a:xfrm>
+            <a:off x="4901184" y="2029968"/>
+            <a:ext cx="292608" cy="310896"/>
+          </a:xfrm>
+          <a:prstGeom prst="upArrow">
+            <a:avLst/>
+          </a:prstGeom>
+          <a:solidFill>
+            <a:srgbClr val="13757A"/>
+          </a:solidFill>
+          <a:ln w="12700">
+            <a:solidFill>
+              <a:srgbClr val="13757A"/>
+            </a:solidFill>
+            <a:prstDash val="solid"/>
+          </a:ln>
+        </p:spPr>
+      </p:sp>
+      <p:sp>
+        <p:nvSpPr>
+          <p:cNvPr id="54" name="Text 11"/>
+          <p:cNvSpPr txBox="1"/>
+          <p:nvPr/>
+        </p:nvSpPr>
+        <p:spPr>
+          <a:xfrm>
+            <a:off x="1828800" y="2048256"/>
+            <a:ext cx="1371600" cy="274320"/>
+          </a:xfrm>
+          <a:prstGeom prst="rect">
+            <a:avLst/>
+          </a:prstGeom>
+          <a:noFill/>
+          <a:ln/>
+        </p:spPr>
+        <p:txBody>
+          <a:bodyPr wrap="square" lIns="0" tIns="0" rIns="0" bIns="0" rtlCol="0" anchor="ctr"/>
+          <a:lstStyle/>
+          <a:p>
+            <a:pPr indent="0" marL="0">
+              <a:buNone/>
+            </a:pPr>
+            <a:r>
+              <a:rPr lang="en-US" sz="820" dirty="0">
+                <a:solidFill>
+                  <a:srgbClr val="7A828F"/>
+                </a:solidFill>
+                <a:latin typeface="맑은 고딕" pitchFamily="34" charset="0"/>
+                <a:ea typeface="맑은 고딕" pitchFamily="34" charset="-122"/>
+                <a:cs typeface="맑은 고딕" pitchFamily="34" charset="-120"/>
+              </a:rPr>
+              <a:t>0.1 초 간격으로 write</a:t>
+            </a:r>
+            <a:endParaRPr lang="en-US" sz="820" dirty="0"/>
+          </a:p>
+        </p:txBody>
+      </p:sp>
+      <p:sp>
+        <p:nvSpPr>
+          <p:cNvPr id="55" name="Text 12"/>
+          <p:cNvSpPr txBox="1"/>
+          <p:nvPr/>
+        </p:nvSpPr>
+        <p:spPr>
+          <a:xfrm>
+            <a:off x="3858768" y="2048256"/>
+            <a:ext cx="1005840" cy="274320"/>
+          </a:xfrm>
+          <a:prstGeom prst="rect">
+            <a:avLst/>
+          </a:prstGeom>
+          <a:noFill/>
+          <a:ln/>
+        </p:spPr>
+        <p:txBody>
+          <a:bodyPr wrap="square" lIns="0" tIns="0" rIns="0" bIns="0" rtlCol="0" anchor="ctr"/>
+          <a:lstStyle/>
+          <a:p>
+            <a:pPr algn="r" indent="0" marL="0">
+              <a:buNone/>
+            </a:pPr>
+            <a:r>
+              <a:rPr lang="en-US" sz="820" dirty="0">
+                <a:solidFill>
+                  <a:srgbClr val="7A828F"/>
+                </a:solidFill>
+                <a:latin typeface="맑은 고딕" pitchFamily="34" charset="0"/>
+                <a:ea typeface="맑은 고딕" pitchFamily="34" charset="-122"/>
+                <a:cs typeface="맑은 고딕" pitchFamily="34" charset="-120"/>
+              </a:rPr>
+              <a:t>꺼내서 출력</a:t>
+            </a:r>
+            <a:endParaRPr lang="en-US" sz="820" dirty="0"/>
+          </a:p>
+        </p:txBody>
+      </p:sp>
+      <p:sp>
+        <p:nvSpPr>
+          <p:cNvPr id="56" name="Text 13"/>
+          <p:cNvSpPr txBox="1"/>
+          <p:nvPr/>
+        </p:nvSpPr>
+        <p:spPr>
+          <a:xfrm>
+            <a:off x="804672" y="2377440"/>
+            <a:ext cx="4680000" cy="219456"/>
+          </a:xfrm>
+          <a:prstGeom prst="rect">
+            <a:avLst/>
+          </a:prstGeom>
+          <a:noFill/>
+          <a:ln/>
+        </p:spPr>
+        <p:txBody>
+          <a:bodyPr wrap="square" lIns="0" tIns="0" rIns="0" bIns="0" rtlCol="0" anchor="ctr"/>
+          <a:lstStyle/>
+          <a:p>
+            <a:pPr indent="0" marL="0">
+              <a:buNone/>
+            </a:pPr>
+            <a:r>
+              <a:rPr lang="en-US" sz="920" b="1" dirty="0">
+                <a:solidFill>
+                  <a:srgbClr val="1E232E"/>
+                </a:solidFill>
+                <a:latin typeface="Consolas" pitchFamily="34" charset="0"/>
+                <a:ea typeface="Consolas" pitchFamily="34" charset="-122"/>
+                <a:cs typeface="Consolas" pitchFamily="34" charset="-120"/>
+              </a:rPr>
+              <a:t>공유메모리 위 링버퍼  staSlot[64]   ·   이름  IpcDemoQ.map</a:t>
+            </a:r>
+            <a:endParaRPr lang="en-US" sz="920" dirty="0"/>
+          </a:p>
+        </p:txBody>
+      </p:sp>
+      <p:sp>
+        <p:nvSpPr>
+          <p:cNvPr id="57" name="Shape 14"/>
+          <p:cNvSpPr/>
+          <p:nvPr/>
+        </p:nvSpPr>
+        <p:spPr>
+          <a:xfrm>
+            <a:off x="804672" y="2615184"/>
+            <a:ext cx="548640" cy="420624"/>
+          </a:xfrm>
+          <a:prstGeom prst="roundRect">
+            <a:avLst>
+              <a:gd name="adj" fmla="val 8696"/>
+            </a:avLst>
+          </a:prstGeom>
+          <a:solidFill>
+            <a:srgbClr val="C8891F"/>
+          </a:solidFill>
+          <a:ln w="12700">
+            <a:solidFill>
+              <a:srgbClr val="C8891F"/>
+            </a:solidFill>
+            <a:prstDash val="solid"/>
+          </a:ln>
+        </p:spPr>
+      </p:sp>
+      <p:sp>
+        <p:nvSpPr>
+          <p:cNvPr id="58" name="Text 15"/>
+          <p:cNvSpPr txBox="1"/>
+          <p:nvPr/>
+        </p:nvSpPr>
+        <p:spPr>
+          <a:xfrm>
+            <a:off x="804672" y="2615184"/>
+            <a:ext cx="548640" cy="420624"/>
+          </a:xfrm>
+          <a:prstGeom prst="rect">
+            <a:avLst/>
+          </a:prstGeom>
+          <a:noFill/>
+          <a:ln/>
+        </p:spPr>
+        <p:txBody>
+          <a:bodyPr wrap="square" lIns="0" tIns="0" rIns="0" bIns="0" rtlCol="0" anchor="ctr"/>
+          <a:lstStyle/>
+          <a:p>
+            <a:pPr algn="ctr" indent="0" marL="0">
+              <a:buNone/>
+            </a:pPr>
+            <a:r>
+              <a:rPr lang="en-US" sz="900" b="1" dirty="0">
+                <a:solidFill>
+                  <a:srgbClr val="FFFFFF"/>
+                </a:solidFill>
+                <a:latin typeface="Consolas" pitchFamily="34" charset="0"/>
+                <a:ea typeface="Consolas" pitchFamily="34" charset="-122"/>
+                <a:cs typeface="Consolas" pitchFamily="34" charset="-120"/>
+              </a:rPr>
+              <a:t>1</a:t>
+            </a:r>
+            <a:endParaRPr lang="en-US" sz="900" dirty="0"/>
+          </a:p>
+        </p:txBody>
+      </p:sp>
+      <p:sp>
+        <p:nvSpPr>
+          <p:cNvPr id="59" name="Shape 16"/>
+          <p:cNvSpPr/>
+          <p:nvPr/>
+        </p:nvSpPr>
+        <p:spPr>
+          <a:xfrm>
+            <a:off x="1435608" y="2615184"/>
+            <a:ext cx="548640" cy="420624"/>
+          </a:xfrm>
+          <a:prstGeom prst="roundRect">
+            <a:avLst>
+              <a:gd name="adj" fmla="val 8696"/>
+            </a:avLst>
+          </a:prstGeom>
+          <a:solidFill>
+            <a:srgbClr val="C8891F"/>
+          </a:solidFill>
+          <a:ln w="12700">
+            <a:solidFill>
+              <a:srgbClr val="C8891F"/>
+            </a:solidFill>
+            <a:prstDash val="solid"/>
+          </a:ln>
+        </p:spPr>
+      </p:sp>
+      <p:sp>
+        <p:nvSpPr>
+          <p:cNvPr id="60" name="Text 17"/>
+          <p:cNvSpPr txBox="1"/>
+          <p:nvPr/>
+        </p:nvSpPr>
+        <p:spPr>
+          <a:xfrm>
+            <a:off x="1435608" y="2615184"/>
+            <a:ext cx="548640" cy="420624"/>
+          </a:xfrm>
+          <a:prstGeom prst="rect">
+            <a:avLst/>
+          </a:prstGeom>
+          <a:noFill/>
+          <a:ln/>
+        </p:spPr>
+        <p:txBody>
+          <a:bodyPr wrap="square" lIns="0" tIns="0" rIns="0" bIns="0" rtlCol="0" anchor="ctr"/>
+          <a:lstStyle/>
+          <a:p>
+            <a:pPr algn="ctr" indent="0" marL="0">
+              <a:buNone/>
+            </a:pPr>
+            <a:r>
+              <a:rPr lang="en-US" sz="900" b="1" dirty="0">
+                <a:solidFill>
+                  <a:srgbClr val="FFFFFF"/>
+                </a:solidFill>
+                <a:latin typeface="Consolas" pitchFamily="34" charset="0"/>
+                <a:ea typeface="Consolas" pitchFamily="34" charset="-122"/>
+                <a:cs typeface="Consolas" pitchFamily="34" charset="-120"/>
+              </a:rPr>
+              <a:t>2</a:t>
+            </a:r>
+            <a:endParaRPr lang="en-US" sz="900" dirty="0"/>
+          </a:p>
+        </p:txBody>
+      </p:sp>
+      <p:sp>
+        <p:nvSpPr>
+          <p:cNvPr id="61" name="Shape 18"/>
+          <p:cNvSpPr/>
+          <p:nvPr/>
+        </p:nvSpPr>
+        <p:spPr>
+          <a:xfrm>
+            <a:off x="2066544" y="2615184"/>
+            <a:ext cx="548640" cy="420624"/>
+          </a:xfrm>
+          <a:prstGeom prst="roundRect">
+            <a:avLst>
+              <a:gd name="adj" fmla="val 8696"/>
+            </a:avLst>
+          </a:prstGeom>
+          <a:solidFill>
+            <a:srgbClr val="C8891F"/>
+          </a:solidFill>
+          <a:ln w="12700">
+            <a:solidFill>
+              <a:srgbClr val="C8891F"/>
+            </a:solidFill>
+            <a:prstDash val="solid"/>
+          </a:ln>
+        </p:spPr>
+      </p:sp>
+      <p:sp>
+        <p:nvSpPr>
+          <p:cNvPr id="62" name="Text 19"/>
+          <p:cNvSpPr txBox="1"/>
+          <p:nvPr/>
+        </p:nvSpPr>
+        <p:spPr>
+          <a:xfrm>
+            <a:off x="2066544" y="2615184"/>
+            <a:ext cx="548640" cy="420624"/>
+          </a:xfrm>
+          <a:prstGeom prst="rect">
+            <a:avLst/>
+          </a:prstGeom>
+          <a:noFill/>
+          <a:ln/>
+        </p:spPr>
+        <p:txBody>
+          <a:bodyPr wrap="square" lIns="0" tIns="0" rIns="0" bIns="0" rtlCol="0" anchor="ctr"/>
+          <a:lstStyle/>
+          <a:p>
+            <a:pPr algn="ctr" indent="0" marL="0">
+              <a:buNone/>
+            </a:pPr>
+            <a:r>
+              <a:rPr lang="en-US" sz="900" b="1" dirty="0">
+                <a:solidFill>
+                  <a:srgbClr val="FFFFFF"/>
+                </a:solidFill>
+                <a:latin typeface="Consolas" pitchFamily="34" charset="0"/>
+                <a:ea typeface="Consolas" pitchFamily="34" charset="-122"/>
+                <a:cs typeface="Consolas" pitchFamily="34" charset="-120"/>
+              </a:rPr>
+              <a:t>3</a:t>
+            </a:r>
+            <a:endParaRPr lang="en-US" sz="900" dirty="0"/>
+          </a:p>
+        </p:txBody>
+      </p:sp>
+      <p:sp>
+        <p:nvSpPr>
+          <p:cNvPr id="63" name="Shape 20"/>
+          <p:cNvSpPr/>
+          <p:nvPr/>
+        </p:nvSpPr>
+        <p:spPr>
+          <a:xfrm>
+            <a:off x="2697480" y="2615184"/>
+            <a:ext cx="548640" cy="420624"/>
+          </a:xfrm>
+          <a:prstGeom prst="roundRect">
+            <a:avLst>
+              <a:gd name="adj" fmla="val 8696"/>
+            </a:avLst>
+          </a:prstGeom>
+          <a:solidFill>
+            <a:srgbClr val="FFFFFF"/>
+          </a:solidFill>
+          <a:ln w="12700">
+            <a:solidFill>
+              <a:srgbClr val="D5DBE4"/>
+            </a:solidFill>
+            <a:prstDash val="solid"/>
+          </a:ln>
+        </p:spPr>
+      </p:sp>
+      <p:sp>
+        <p:nvSpPr>
+          <p:cNvPr id="64" name="Text 21"/>
+          <p:cNvSpPr txBox="1"/>
+          <p:nvPr/>
+        </p:nvSpPr>
+        <p:spPr>
+          <a:xfrm>
+            <a:off x="2697480" y="2615184"/>
+            <a:ext cx="548640" cy="420624"/>
+          </a:xfrm>
+          <a:prstGeom prst="rect">
+            <a:avLst/>
+          </a:prstGeom>
+          <a:noFill/>
+          <a:ln/>
+        </p:spPr>
+        <p:txBody>
+          <a:bodyPr wrap="square" lIns="0" tIns="0" rIns="0" bIns="0" rtlCol="0" anchor="ctr"/>
+          <a:lstStyle/>
+          <a:p>
+            <a:pPr algn="ctr" indent="0" marL="0">
+              <a:buNone/>
+            </a:pPr>
+            <a:endParaRPr lang="en-US" sz="900" dirty="0"/>
+          </a:p>
+        </p:txBody>
+      </p:sp>
+      <p:sp>
+        <p:nvSpPr>
+          <p:cNvPr id="65" name="Shape 22"/>
+          <p:cNvSpPr/>
+          <p:nvPr/>
+        </p:nvSpPr>
+        <p:spPr>
+          <a:xfrm>
+            <a:off x="3328416" y="2615184"/>
+            <a:ext cx="548640" cy="420624"/>
+          </a:xfrm>
+          <a:prstGeom prst="roundRect">
+            <a:avLst>
+              <a:gd name="adj" fmla="val 8696"/>
+            </a:avLst>
+          </a:prstGeom>
+          <a:solidFill>
+            <a:srgbClr val="FFFFFF"/>
+          </a:solidFill>
+          <a:ln w="12700">
+            <a:solidFill>
+              <a:srgbClr val="D5DBE4"/>
+            </a:solidFill>
+            <a:prstDash val="solid"/>
+          </a:ln>
+        </p:spPr>
+      </p:sp>
+      <p:sp>
+        <p:nvSpPr>
+          <p:cNvPr id="66" name="Text 23"/>
+          <p:cNvSpPr txBox="1"/>
+          <p:nvPr/>
+        </p:nvSpPr>
+        <p:spPr>
+          <a:xfrm>
+            <a:off x="3328416" y="2615184"/>
+            <a:ext cx="548640" cy="420624"/>
+          </a:xfrm>
+          <a:prstGeom prst="rect">
+            <a:avLst/>
+          </a:prstGeom>
+          <a:noFill/>
+          <a:ln/>
+        </p:spPr>
+        <p:txBody>
+          <a:bodyPr wrap="square" lIns="0" tIns="0" rIns="0" bIns="0" rtlCol="0" anchor="ctr"/>
+          <a:lstStyle/>
+          <a:p>
+            <a:pPr algn="ctr" indent="0" marL="0">
+              <a:buNone/>
+            </a:pPr>
+            <a:endParaRPr lang="en-US" sz="900" dirty="0"/>
+          </a:p>
+        </p:txBody>
+      </p:sp>
+      <p:sp>
+        <p:nvSpPr>
+          <p:cNvPr id="67" name="Shape 24"/>
+          <p:cNvSpPr/>
+          <p:nvPr/>
+        </p:nvSpPr>
+        <p:spPr>
+          <a:xfrm>
+            <a:off x="3959352" y="2615184"/>
+            <a:ext cx="548640" cy="420624"/>
+          </a:xfrm>
+          <a:prstGeom prst="roundRect">
+            <a:avLst>
+              <a:gd name="adj" fmla="val 8696"/>
+            </a:avLst>
+          </a:prstGeom>
+          <a:solidFill>
+            <a:srgbClr val="FFFFFF"/>
+          </a:solidFill>
+          <a:ln w="12700">
+            <a:solidFill>
+              <a:srgbClr val="D5DBE4"/>
+            </a:solidFill>
+            <a:prstDash val="solid"/>
+          </a:ln>
+        </p:spPr>
+      </p:sp>
+      <p:sp>
+        <p:nvSpPr>
+          <p:cNvPr id="68" name="Text 25"/>
+          <p:cNvSpPr txBox="1"/>
+          <p:nvPr/>
+        </p:nvSpPr>
+        <p:spPr>
+          <a:xfrm>
+            <a:off x="3959352" y="2615184"/>
+            <a:ext cx="548640" cy="420624"/>
+          </a:xfrm>
+          <a:prstGeom prst="rect">
+            <a:avLst/>
+          </a:prstGeom>
+          <a:noFill/>
+          <a:ln/>
+        </p:spPr>
+        <p:txBody>
+          <a:bodyPr wrap="square" lIns="0" tIns="0" rIns="0" bIns="0" rtlCol="0" anchor="ctr"/>
+          <a:lstStyle/>
+          <a:p>
+            <a:pPr algn="ctr" indent="0" marL="0">
+              <a:buNone/>
+            </a:pPr>
+            <a:endParaRPr lang="en-US" sz="900" dirty="0"/>
+          </a:p>
+        </p:txBody>
+      </p:sp>
+      <p:sp>
+        <p:nvSpPr>
+          <p:cNvPr id="69" name="Shape 26"/>
+          <p:cNvSpPr/>
+          <p:nvPr/>
+        </p:nvSpPr>
+        <p:spPr>
+          <a:xfrm>
+            <a:off x="4590288" y="2615184"/>
+            <a:ext cx="548640" cy="420624"/>
+          </a:xfrm>
+          <a:prstGeom prst="roundRect">
+            <a:avLst>
+              <a:gd name="adj" fmla="val 8696"/>
+            </a:avLst>
+          </a:prstGeom>
+          <a:solidFill>
+            <a:srgbClr val="FFFFFF"/>
+          </a:solidFill>
+          <a:ln w="12700">
+            <a:solidFill>
+              <a:srgbClr val="D5DBE4"/>
+            </a:solidFill>
+            <a:prstDash val="solid"/>
+          </a:ln>
+        </p:spPr>
+      </p:sp>
+      <p:sp>
+        <p:nvSpPr>
+          <p:cNvPr id="70" name="Text 27"/>
+          <p:cNvSpPr txBox="1"/>
+          <p:nvPr/>
+        </p:nvSpPr>
+        <p:spPr>
+          <a:xfrm>
+            <a:off x="4590288" y="2615184"/>
+            <a:ext cx="548640" cy="420624"/>
+          </a:xfrm>
+          <a:prstGeom prst="rect">
+            <a:avLst/>
+          </a:prstGeom>
+          <a:noFill/>
+          <a:ln/>
+        </p:spPr>
+        <p:txBody>
+          <a:bodyPr wrap="square" lIns="0" tIns="0" rIns="0" bIns="0" rtlCol="0" anchor="ctr"/>
+          <a:lstStyle/>
+          <a:p>
+            <a:pPr algn="ctr" indent="0" marL="0">
+              <a:buNone/>
+            </a:pPr>
+            <a:endParaRPr lang="en-US" sz="900" dirty="0"/>
+          </a:p>
+        </p:txBody>
+      </p:sp>
+      <p:sp>
+        <p:nvSpPr>
+          <p:cNvPr id="71" name="Shape 28"/>
+          <p:cNvSpPr/>
+          <p:nvPr/>
+        </p:nvSpPr>
+        <p:spPr>
+          <a:xfrm>
+            <a:off x="5221224" y="2615184"/>
+            <a:ext cx="548640" cy="420624"/>
+          </a:xfrm>
+          <a:prstGeom prst="roundRect">
+            <a:avLst>
+              <a:gd name="adj" fmla="val 8696"/>
+            </a:avLst>
+          </a:prstGeom>
+          <a:solidFill>
+            <a:srgbClr val="FFFFFF"/>
+          </a:solidFill>
+          <a:ln w="12700">
+            <a:solidFill>
+              <a:srgbClr val="D5DBE4"/>
+            </a:solidFill>
+            <a:prstDash val="solid"/>
+          </a:ln>
+        </p:spPr>
+      </p:sp>
+      <p:sp>
+        <p:nvSpPr>
+          <p:cNvPr id="72" name="Text 29"/>
+          <p:cNvSpPr txBox="1"/>
+          <p:nvPr/>
+        </p:nvSpPr>
+        <p:spPr>
+          <a:xfrm>
+            <a:off x="5221224" y="2615184"/>
+            <a:ext cx="548640" cy="420624"/>
+          </a:xfrm>
+          <a:prstGeom prst="rect">
+            <a:avLst/>
+          </a:prstGeom>
+          <a:noFill/>
+          <a:ln/>
+        </p:spPr>
+        <p:txBody>
+          <a:bodyPr wrap="square" lIns="0" tIns="0" rIns="0" bIns="0" rtlCol="0" anchor="ctr"/>
+          <a:lstStyle/>
+          <a:p>
+            <a:pPr algn="ctr" indent="0" marL="0">
+              <a:buNone/>
+            </a:pPr>
+            <a:endParaRPr lang="en-US" sz="900" dirty="0"/>
+          </a:p>
+        </p:txBody>
+      </p:sp>
+      <p:sp>
+        <p:nvSpPr>
+          <p:cNvPr id="73" name="Text 30"/>
+          <p:cNvSpPr txBox="1"/>
+          <p:nvPr/>
+        </p:nvSpPr>
+        <p:spPr>
+          <a:xfrm>
+            <a:off x="804672" y="3054096"/>
+            <a:ext cx="548640" cy="182880"/>
+          </a:xfrm>
+          <a:prstGeom prst="rect">
+            <a:avLst/>
+          </a:prstGeom>
+          <a:noFill/>
+          <a:ln/>
+        </p:spPr>
+        <p:txBody>
+          <a:bodyPr wrap="square" lIns="0" tIns="0" rIns="0" bIns="0" rtlCol="0" anchor="ctr"/>
+          <a:lstStyle/>
+          <a:p>
+            <a:pPr algn="ctr" indent="0" marL="0">
+              <a:buNone/>
+            </a:pPr>
+            <a:r>
+              <a:rPr lang="en-US" sz="800" b="1" dirty="0">
+                <a:solidFill>
+                  <a:srgbClr val="13757A"/>
+                </a:solidFill>
+                <a:latin typeface="Consolas" pitchFamily="34" charset="0"/>
+                <a:ea typeface="Consolas" pitchFamily="34" charset="-122"/>
+                <a:cs typeface="Consolas" pitchFamily="34" charset="-120"/>
+              </a:rPr>
+              <a:t>head</a:t>
+            </a:r>
+            <a:endParaRPr lang="en-US" sz="800" dirty="0"/>
+          </a:p>
+        </p:txBody>
+      </p:sp>
+      <p:sp>
+        <p:nvSpPr>
+          <p:cNvPr id="74" name="Text 31"/>
+          <p:cNvSpPr txBox="1"/>
+          <p:nvPr/>
+        </p:nvSpPr>
+        <p:spPr>
+          <a:xfrm>
+            <a:off x="2697480" y="3054096"/>
+            <a:ext cx="548640" cy="182880"/>
+          </a:xfrm>
+          <a:prstGeom prst="rect">
+            <a:avLst/>
+          </a:prstGeom>
+          <a:noFill/>
+          <a:ln/>
+        </p:spPr>
+        <p:txBody>
+          <a:bodyPr wrap="square" lIns="0" tIns="0" rIns="0" bIns="0" rtlCol="0" anchor="ctr"/>
+          <a:lstStyle/>
+          <a:p>
+            <a:pPr algn="ctr" indent="0" marL="0">
+              <a:buNone/>
+            </a:pPr>
+            <a:r>
+              <a:rPr lang="en-US" sz="800" b="1" dirty="0">
+                <a:solidFill>
+                  <a:srgbClr val="D9532B"/>
+                </a:solidFill>
+                <a:latin typeface="Consolas" pitchFamily="34" charset="0"/>
+                <a:ea typeface="Consolas" pitchFamily="34" charset="-122"/>
+                <a:cs typeface="Consolas" pitchFamily="34" charset="-120"/>
+              </a:rPr>
+              <a:t>tail</a:t>
+            </a:r>
+            <a:endParaRPr lang="en-US" sz="800" dirty="0"/>
+          </a:p>
+        </p:txBody>
+      </p:sp>
+      <p:sp>
+        <p:nvSpPr>
+          <p:cNvPr id="75" name="Shape 32"/>
+          <p:cNvSpPr/>
+          <p:nvPr/>
+        </p:nvSpPr>
+        <p:spPr>
+          <a:xfrm>
+            <a:off x="804672" y="3291840"/>
+            <a:ext cx="1554480" cy="658368"/>
+          </a:xfrm>
+          <a:prstGeom prst="roundRect">
+            <a:avLst>
+              <a:gd name="adj" fmla="val 5556"/>
             </a:avLst>
           </a:prstGeom>
           <a:solidFill>
@@ -21485,7 +15557,7 @@
           </a:solidFill>
           <a:ln w="12700">
             <a:solidFill>
-              <a:srgbClr val="F2F4F7"/>
+              <a:srgbClr val="D9532B"/>
             </a:solidFill>
             <a:prstDash val="solid"/>
           </a:ln>
@@ -21493,170 +15565,135 @@
       </p:sp>
       <p:sp>
         <p:nvSpPr>
-          <p:cNvPr id="14" name="Text 12"/>
-          <p:cNvSpPr txBox="1"/>
-          <p:nvPr/>
-        </p:nvSpPr>
-        <p:spPr>
-          <a:xfrm>
-            <a:off x="914400" y="2276856"/>
-            <a:ext cx="1572768" cy="256032"/>
-          </a:xfrm>
-          <a:prstGeom prst="rect">
-            <a:avLst/>
-          </a:prstGeom>
-          <a:noFill/>
-          <a:ln/>
-        </p:spPr>
-        <p:txBody>
-          <a:bodyPr wrap="square" lIns="0" tIns="0" rIns="0" bIns="0" rtlCol="0" anchor="ctr"/>
-          <a:lstStyle/>
-          <a:p>
-            <a:pPr indent="0" marL="0">
-              <a:buNone/>
-            </a:pPr>
-            <a:r>
-              <a:rPr lang="en-US" sz="860" dirty="0">
+          <p:cNvPr id="76" name="Text 33"/>
+          <p:cNvSpPr txBox="1"/>
+          <p:nvPr/>
+        </p:nvSpPr>
+        <p:spPr>
+          <a:xfrm>
+            <a:off x="804672" y="3319272"/>
+            <a:ext cx="1554480" cy="219456"/>
+          </a:xfrm>
+          <a:prstGeom prst="rect">
+            <a:avLst/>
+          </a:prstGeom>
+          <a:noFill/>
+          <a:ln/>
+        </p:spPr>
+        <p:txBody>
+          <a:bodyPr wrap="square" lIns="0" tIns="0" rIns="0" bIns="0" rtlCol="0" anchor="ctr"/>
+          <a:lstStyle/>
+          <a:p>
+            <a:pPr algn="ctr" indent="0" marL="0">
+              <a:buNone/>
+            </a:pPr>
+            <a:r>
+              <a:rPr lang="en-US" sz="950" b="1" dirty="0">
                 <a:solidFill>
                   <a:srgbClr val="D9532B"/>
                 </a:solidFill>
-                <a:latin typeface="Consolas" pitchFamily="34" charset="0"/>
-                <a:ea typeface="Consolas" pitchFamily="34" charset="-122"/>
-                <a:cs typeface="Consolas" pitchFamily="34" charset="-120"/>
-              </a:rPr>
-              <a:t>msgsnd()</a:t>
-            </a:r>
-          </a:p>
-        </p:txBody>
-      </p:sp>
-      <p:sp>
-        <p:nvSpPr>
-          <p:cNvPr id="15" name="Text 13"/>
-          <p:cNvSpPr txBox="1"/>
-          <p:nvPr/>
-        </p:nvSpPr>
-        <p:spPr>
-          <a:xfrm>
-            <a:off x="2560320" y="2276856"/>
-            <a:ext cx="3364992" cy="256032"/>
-          </a:xfrm>
-          <a:prstGeom prst="rect">
-            <a:avLst/>
-          </a:prstGeom>
-          <a:noFill/>
-          <a:ln/>
-        </p:spPr>
-        <p:txBody>
-          <a:bodyPr wrap="square" lIns="0" tIns="0" rIns="0" bIns="0" rtlCol="0" anchor="ctr"/>
-          <a:lstStyle/>
-          <a:p>
-            <a:pPr indent="0" marL="0">
-              <a:buNone/>
-            </a:pPr>
-            <a:r>
-              <a:rPr lang="en-US" sz="860" dirty="0">
+                <a:latin typeface="맑은 고딕" pitchFamily="34" charset="0"/>
+                <a:ea typeface="맑은 고딕" pitchFamily="34" charset="-122"/>
+                <a:cs typeface="맑은 고딕" pitchFamily="34" charset="-120"/>
+              </a:rPr>
+              <a:t>뮤텍스</a:t>
+            </a:r>
+            <a:endParaRPr lang="en-US" sz="950" dirty="0"/>
+          </a:p>
+        </p:txBody>
+      </p:sp>
+      <p:sp>
+        <p:nvSpPr>
+          <p:cNvPr id="77" name="Text 34"/>
+          <p:cNvSpPr txBox="1"/>
+          <p:nvPr/>
+        </p:nvSpPr>
+        <p:spPr>
+          <a:xfrm>
+            <a:off x="804672" y="3538728"/>
+            <a:ext cx="1554480" cy="201168"/>
+          </a:xfrm>
+          <a:prstGeom prst="rect">
+            <a:avLst/>
+          </a:prstGeom>
+          <a:noFill/>
+          <a:ln/>
+        </p:spPr>
+        <p:txBody>
+          <a:bodyPr wrap="square" lIns="0" tIns="0" rIns="0" bIns="0" rtlCol="0" anchor="ctr"/>
+          <a:lstStyle/>
+          <a:p>
+            <a:pPr algn="ctr" indent="0" marL="0">
+              <a:buNone/>
+            </a:pPr>
+            <a:r>
+              <a:rPr lang="en-US" sz="780" dirty="0">
                 <a:solidFill>
                   <a:srgbClr val="3D4451"/>
                 </a:solidFill>
-                <a:latin typeface="맑은 고딕" pitchFamily="34" charset="0"/>
-                <a:ea typeface="맑은 고딕" pitchFamily="34" charset="-122"/>
-                <a:cs typeface="맑은 고딕" pitchFamily="34" charset="-120"/>
-              </a:rPr>
-              <a:t>세마포어(빈슬롯) → 뮤텍스 → write → 세마포어(찬슬롯) +1</a:t>
-            </a:r>
-          </a:p>
-        </p:txBody>
-      </p:sp>
-      <p:sp>
-        <p:nvSpPr>
-          <p:cNvPr id="16" name="Text 14"/>
-          <p:cNvSpPr txBox="1"/>
-          <p:nvPr/>
-        </p:nvSpPr>
-        <p:spPr>
-          <a:xfrm>
-            <a:off x="914400" y="2560320"/>
-            <a:ext cx="1572768" cy="256032"/>
-          </a:xfrm>
-          <a:prstGeom prst="rect">
-            <a:avLst/>
-          </a:prstGeom>
-          <a:noFill/>
-          <a:ln/>
-        </p:spPr>
-        <p:txBody>
-          <a:bodyPr wrap="square" lIns="0" tIns="0" rIns="0" bIns="0" rtlCol="0" anchor="ctr"/>
-          <a:lstStyle/>
-          <a:p>
-            <a:pPr indent="0" marL="0">
-              <a:buNone/>
-            </a:pPr>
-            <a:r>
-              <a:rPr lang="en-US" sz="860" dirty="0">
-                <a:solidFill>
-                  <a:srgbClr val="D9532B"/>
-                </a:solidFill>
-                <a:latin typeface="Consolas" pitchFamily="34" charset="0"/>
-                <a:ea typeface="Consolas" pitchFamily="34" charset="-122"/>
-                <a:cs typeface="Consolas" pitchFamily="34" charset="-120"/>
-              </a:rPr>
-              <a:t>msgrcv()</a:t>
-            </a:r>
-          </a:p>
-        </p:txBody>
-      </p:sp>
-      <p:sp>
-        <p:nvSpPr>
-          <p:cNvPr id="17" name="Text 15"/>
-          <p:cNvSpPr txBox="1"/>
-          <p:nvPr/>
-        </p:nvSpPr>
-        <p:spPr>
-          <a:xfrm>
-            <a:off x="2560320" y="2560320"/>
-            <a:ext cx="3364992" cy="256032"/>
-          </a:xfrm>
-          <a:prstGeom prst="rect">
-            <a:avLst/>
-          </a:prstGeom>
-          <a:noFill/>
-          <a:ln/>
-        </p:spPr>
-        <p:txBody>
-          <a:bodyPr wrap="square" lIns="0" tIns="0" rIns="0" bIns="0" rtlCol="0" anchor="ctr"/>
-          <a:lstStyle/>
-          <a:p>
-            <a:pPr indent="0" marL="0">
-              <a:buNone/>
-            </a:pPr>
-            <a:r>
-              <a:rPr lang="en-US" sz="860" dirty="0">
-                <a:solidFill>
-                  <a:srgbClr val="3D4451"/>
-                </a:solidFill>
-                <a:latin typeface="맑은 고딕" pitchFamily="34" charset="0"/>
-                <a:ea typeface="맑은 고딕" pitchFamily="34" charset="-122"/>
-                <a:cs typeface="맑은 고딕" pitchFamily="34" charset="-120"/>
-              </a:rPr>
-              <a:t>세마포어(찬슬롯) → 뮤텍스 → read → 세마포어(빈슬롯) +1</a:t>
-            </a:r>
-          </a:p>
-        </p:txBody>
-      </p:sp>
-      <p:sp>
-        <p:nvSpPr>
-          <p:cNvPr id="18" name="Shape 16"/>
+                <a:latin typeface="Consolas" pitchFamily="34" charset="0"/>
+                <a:ea typeface="Consolas" pitchFamily="34" charset="-122"/>
+                <a:cs typeface="Consolas" pitchFamily="34" charset="-120"/>
+              </a:rPr>
+              <a:t>head · tail 보호</a:t>
+            </a:r>
+            <a:endParaRPr lang="en-US" sz="780" dirty="0"/>
+          </a:p>
+        </p:txBody>
+      </p:sp>
+      <p:sp>
+        <p:nvSpPr>
+          <p:cNvPr id="78" name="Text 35"/>
+          <p:cNvSpPr txBox="1"/>
+          <p:nvPr/>
+        </p:nvSpPr>
+        <p:spPr>
+          <a:xfrm>
+            <a:off x="804672" y="3721608"/>
+            <a:ext cx="1554480" cy="201168"/>
+          </a:xfrm>
+          <a:prstGeom prst="rect">
+            <a:avLst/>
+          </a:prstGeom>
+          <a:noFill/>
+          <a:ln/>
+        </p:spPr>
+        <p:txBody>
+          <a:bodyPr wrap="square" lIns="0" tIns="0" rIns="0" bIns="0" rtlCol="0" anchor="ctr"/>
+          <a:lstStyle/>
+          <a:p>
+            <a:pPr algn="ctr" indent="0" marL="0">
+              <a:buNone/>
+            </a:pPr>
+            <a:r>
+              <a:rPr lang="en-US" sz="850" dirty="0">
+                <a:solidFill>
+                  <a:srgbClr val="7A828F"/>
+                </a:solidFill>
+                <a:latin typeface="맑은 고딕" pitchFamily="34" charset="0"/>
+                <a:ea typeface="맑은 고딕" pitchFamily="34" charset="-122"/>
+                <a:cs typeface="맑은 고딕" pitchFamily="34" charset="-120"/>
+              </a:rPr>
+              <a:t>이름  IpcDemoQ.mtx</a:t>
+            </a:r>
+            <a:endParaRPr lang="en-US" sz="850" dirty="0"/>
+          </a:p>
+        </p:txBody>
+      </p:sp>
+      <p:sp>
+        <p:nvSpPr>
+          <p:cNvPr id="79" name="Shape 36"/>
           <p:cNvSpPr/>
           <p:nvPr/>
         </p:nvSpPr>
         <p:spPr>
           <a:xfrm>
-            <a:off x="804672" y="2834640"/>
-            <a:ext cx="5248656" cy="274320"/>
+            <a:off x="2468880" y="3291840"/>
+            <a:ext cx="1554480" cy="658368"/>
           </a:xfrm>
           <a:prstGeom prst="roundRect">
             <a:avLst>
-              <a:gd name="adj" fmla="val 9524"/>
+              <a:gd name="adj" fmla="val 5556"/>
             </a:avLst>
           </a:prstGeom>
           <a:solidFill>
@@ -21664,7 +15701,7 @@
           </a:solidFill>
           <a:ln w="12700">
             <a:solidFill>
-              <a:srgbClr val="F2F4F7"/>
+              <a:srgbClr val="C8891F"/>
             </a:solidFill>
             <a:prstDash val="solid"/>
           </a:ln>
@@ -21672,182 +15709,108 @@
       </p:sp>
       <p:sp>
         <p:nvSpPr>
-          <p:cNvPr id="19" name="Text 17"/>
-          <p:cNvSpPr txBox="1"/>
-          <p:nvPr/>
-        </p:nvSpPr>
-        <p:spPr>
-          <a:xfrm>
-            <a:off x="914400" y="2843784"/>
-            <a:ext cx="1572768" cy="256032"/>
-          </a:xfrm>
-          <a:prstGeom prst="rect">
-            <a:avLst/>
-          </a:prstGeom>
-          <a:noFill/>
-          <a:ln/>
-        </p:spPr>
-        <p:txBody>
-          <a:bodyPr wrap="square" lIns="0" tIns="0" rIns="0" bIns="0" rtlCol="0" anchor="ctr"/>
-          <a:lstStyle/>
-          <a:p>
-            <a:pPr indent="0" marL="0">
-              <a:buNone/>
-            </a:pPr>
-            <a:r>
-              <a:rPr lang="en-US" sz="860" dirty="0">
-                <a:solidFill>
-                  <a:srgbClr val="D9532B"/>
-                </a:solidFill>
-                <a:latin typeface="Consolas" pitchFamily="34" charset="0"/>
-                <a:ea typeface="Consolas" pitchFamily="34" charset="-122"/>
-                <a:cs typeface="Consolas" pitchFamily="34" charset="-120"/>
-              </a:rPr>
-              <a:t>msgctl(IPC_RMID)</a:t>
-            </a:r>
-          </a:p>
-        </p:txBody>
-      </p:sp>
-      <p:sp>
-        <p:nvSpPr>
-          <p:cNvPr id="20" name="Text 18"/>
-          <p:cNvSpPr txBox="1"/>
-          <p:nvPr/>
-        </p:nvSpPr>
-        <p:spPr>
-          <a:xfrm>
-            <a:off x="2560320" y="2843784"/>
-            <a:ext cx="3364992" cy="256032"/>
-          </a:xfrm>
-          <a:prstGeom prst="rect">
-            <a:avLst/>
-          </a:prstGeom>
-          <a:noFill/>
-          <a:ln/>
-        </p:spPr>
-        <p:txBody>
-          <a:bodyPr wrap="square" lIns="0" tIns="0" rIns="0" bIns="0" rtlCol="0" anchor="ctr"/>
-          <a:lstStyle/>
-          <a:p>
-            <a:pPr indent="0" marL="0">
-              <a:buNone/>
-            </a:pPr>
-            <a:r>
-              <a:rPr lang="en-US" sz="860" dirty="0">
+          <p:cNvPr id="80" name="Text 37"/>
+          <p:cNvSpPr txBox="1"/>
+          <p:nvPr/>
+        </p:nvSpPr>
+        <p:spPr>
+          <a:xfrm>
+            <a:off x="2468880" y="3319272"/>
+            <a:ext cx="1554480" cy="219456"/>
+          </a:xfrm>
+          <a:prstGeom prst="rect">
+            <a:avLst/>
+          </a:prstGeom>
+          <a:noFill/>
+          <a:ln/>
+        </p:spPr>
+        <p:txBody>
+          <a:bodyPr wrap="square" lIns="0" tIns="0" rIns="0" bIns="0" rtlCol="0" anchor="ctr"/>
+          <a:lstStyle/>
+          <a:p>
+            <a:pPr algn="ctr" indent="0" marL="0">
+              <a:buNone/>
+            </a:pPr>
+            <a:r>
+              <a:rPr lang="en-US" sz="950" b="1" dirty="0">
+                <a:solidFill>
+                  <a:srgbClr val="C8891F"/>
+                </a:solidFill>
+                <a:latin typeface="맑은 고딕" pitchFamily="34" charset="0"/>
+                <a:ea typeface="맑은 고딕" pitchFamily="34" charset="-122"/>
+                <a:cs typeface="맑은 고딕" pitchFamily="34" charset="-120"/>
+              </a:rPr>
+              <a:t>세마포어 empty</a:t>
+            </a:r>
+            <a:endParaRPr lang="en-US" sz="950" dirty="0"/>
+          </a:p>
+        </p:txBody>
+      </p:sp>
+      <p:sp>
+        <p:nvSpPr>
+          <p:cNvPr id="81" name="Text 38"/>
+          <p:cNvSpPr txBox="1"/>
+          <p:nvPr/>
+        </p:nvSpPr>
+        <p:spPr>
+          <a:xfrm>
+            <a:off x="2468880" y="3538728"/>
+            <a:ext cx="1554480" cy="201168"/>
+          </a:xfrm>
+          <a:prstGeom prst="rect">
+            <a:avLst/>
+          </a:prstGeom>
+          <a:noFill/>
+          <a:ln/>
+        </p:spPr>
+        <p:txBody>
+          <a:bodyPr wrap="square" lIns="0" tIns="0" rIns="0" bIns="0" rtlCol="0" anchor="ctr"/>
+          <a:lstStyle/>
+          <a:p>
+            <a:pPr algn="ctr" indent="0" marL="0">
+              <a:buNone/>
+            </a:pPr>
+            <a:r>
+              <a:rPr lang="en-US" sz="780" dirty="0">
                 <a:solidFill>
                   <a:srgbClr val="3D4451"/>
                 </a:solidFill>
-                <a:latin typeface="맑은 고딕" pitchFamily="34" charset="0"/>
-                <a:ea typeface="맑은 고딕" pitchFamily="34" charset="-122"/>
-                <a:cs typeface="맑은 고딕" pitchFamily="34" charset="-120"/>
-              </a:rPr>
-              <a:t>모든 핸들 CloseHandle — 마지막 참조가 사라지면 정리된다</a:t>
-            </a:r>
-          </a:p>
-        </p:txBody>
-      </p:sp>
-      <p:sp>
-        <p:nvSpPr>
-          <p:cNvPr id="21" name="Text 19"/>
-          <p:cNvSpPr txBox="1"/>
-          <p:nvPr/>
-        </p:nvSpPr>
-        <p:spPr>
-          <a:xfrm>
-            <a:off x="914400" y="3127248"/>
-            <a:ext cx="1572768" cy="256032"/>
-          </a:xfrm>
-          <a:prstGeom prst="rect">
-            <a:avLst/>
-          </a:prstGeom>
-          <a:noFill/>
-          <a:ln/>
-        </p:spPr>
-        <p:txBody>
-          <a:bodyPr wrap="square" lIns="0" tIns="0" rIns="0" bIns="0" rtlCol="0" anchor="ctr"/>
-          <a:lstStyle/>
-          <a:p>
-            <a:pPr indent="0" marL="0">
-              <a:buNone/>
-            </a:pPr>
-            <a:r>
-              <a:rPr lang="en-US" sz="860" dirty="0">
-                <a:solidFill>
-                  <a:srgbClr val="D9532B"/>
-                </a:solidFill>
-                <a:latin typeface="Consolas" pitchFamily="34" charset="0"/>
-                <a:ea typeface="Consolas" pitchFamily="34" charset="-122"/>
-                <a:cs typeface="Consolas" pitchFamily="34" charset="-120"/>
-              </a:rPr>
-              <a:t>mtype</a:t>
-            </a:r>
-          </a:p>
-        </p:txBody>
-      </p:sp>
-      <p:sp>
-        <p:nvSpPr>
-          <p:cNvPr id="22" name="Text 20"/>
-          <p:cNvSpPr txBox="1"/>
-          <p:nvPr/>
-        </p:nvSpPr>
-        <p:spPr>
-          <a:xfrm>
-            <a:off x="2560320" y="3127248"/>
-            <a:ext cx="3364992" cy="256032"/>
-          </a:xfrm>
-          <a:prstGeom prst="rect">
-            <a:avLst/>
-          </a:prstGeom>
-          <a:noFill/>
-          <a:ln/>
-        </p:spPr>
-        <p:txBody>
-          <a:bodyPr wrap="square" lIns="0" tIns="0" rIns="0" bIns="0" rtlCol="0" anchor="ctr"/>
-          <a:lstStyle/>
-          <a:p>
-            <a:pPr indent="0" marL="0">
-              <a:buNone/>
-            </a:pPr>
-            <a:r>
-              <a:rPr lang="en-US" sz="860" dirty="0">
-                <a:solidFill>
-                  <a:srgbClr val="3D4451"/>
-                </a:solidFill>
-                <a:latin typeface="맑은 고딕" pitchFamily="34" charset="0"/>
-                <a:ea typeface="맑은 고딕" pitchFamily="34" charset="-122"/>
-                <a:cs typeface="맑은 고딕" pitchFamily="34" charset="-120"/>
-              </a:rPr>
-              <a:t>ST_IpcMsg.iMsgType — 메시지 종류를 구분하는 필드</a:t>
-            </a:r>
-          </a:p>
-        </p:txBody>
-      </p:sp>
-      <p:sp>
-        <p:nvSpPr>
-          <p:cNvPr id="23" name="Text 21"/>
-          <p:cNvSpPr txBox="1"/>
-          <p:nvPr/>
-        </p:nvSpPr>
-        <p:spPr>
-          <a:xfrm>
-            <a:off x="804672" y="3438144"/>
-            <a:ext cx="5248656" cy="219456"/>
-          </a:xfrm>
-          <a:prstGeom prst="rect">
-            <a:avLst/>
-          </a:prstGeom>
-          <a:noFill/>
-          <a:ln/>
-        </p:spPr>
-        <p:txBody>
-          <a:bodyPr wrap="square" lIns="0" tIns="0" rIns="0" bIns="0" rtlCol="0" anchor="ctr"/>
-          <a:lstStyle/>
-          <a:p>
-            <a:pPr indent="0" marL="0">
-              <a:buNone/>
-            </a:pPr>
-            <a:r>
-              <a:rPr lang="en-US" sz="860" dirty="0">
+                <a:latin typeface="Consolas" pitchFamily="34" charset="0"/>
+                <a:ea typeface="Consolas" pitchFamily="34" charset="-122"/>
+                <a:cs typeface="Consolas" pitchFamily="34" charset="-120"/>
+              </a:rPr>
+              <a:t>빈 슬롯 개수 · 처음 64</a:t>
+            </a:r>
+            <a:endParaRPr lang="en-US" sz="780" dirty="0"/>
+          </a:p>
+        </p:txBody>
+      </p:sp>
+      <p:sp>
+        <p:nvSpPr>
+          <p:cNvPr id="82" name="Text 39"/>
+          <p:cNvSpPr txBox="1"/>
+          <p:nvPr/>
+        </p:nvSpPr>
+        <p:spPr>
+          <a:xfrm>
+            <a:off x="2468880" y="3721608"/>
+            <a:ext cx="1554480" cy="201168"/>
+          </a:xfrm>
+          <a:prstGeom prst="rect">
+            <a:avLst/>
+          </a:prstGeom>
+          <a:noFill/>
+          <a:ln/>
+        </p:spPr>
+        <p:txBody>
+          <a:bodyPr wrap="square" lIns="0" tIns="0" rIns="0" bIns="0" rtlCol="0" anchor="ctr"/>
+          <a:lstStyle/>
+          <a:p>
+            <a:pPr algn="ctr" indent="0" marL="0">
+              <a:buNone/>
+            </a:pPr>
+            <a:r>
+              <a:rPr lang="en-US" sz="850" dirty="0">
                 <a:solidFill>
                   <a:srgbClr val="7A828F"/>
                 </a:solidFill>
@@ -21855,25 +15818,170 @@
                 <a:ea typeface="맑은 고딕" pitchFamily="34" charset="-122"/>
                 <a:cs typeface="맑은 고딕" pitchFamily="34" charset="-120"/>
               </a:rPr>
-              <a:t>※ 이름 하나로 같은 큐를 찾아 붙고, 가득 차면 보내는 쪽이 · 비어 있으면 받는 쪽이 대기한다</a:t>
-            </a:r>
-          </a:p>
-        </p:txBody>
-      </p:sp>
-      <p:sp>
-        <p:nvSpPr>
-          <p:cNvPr id="24" name="Shape 22"/>
+              <a:t>이름  IpcDemoQ.sem.e</a:t>
+            </a:r>
+            <a:endParaRPr lang="en-US" sz="850" dirty="0"/>
+          </a:p>
+        </p:txBody>
+      </p:sp>
+      <p:sp>
+        <p:nvSpPr>
+          <p:cNvPr id="83" name="Shape 40"/>
           <p:cNvSpPr/>
           <p:nvPr/>
         </p:nvSpPr>
         <p:spPr>
           <a:xfrm>
-            <a:off x="548640" y="3913632"/>
-            <a:ext cx="5760720" cy="2441448"/>
+            <a:off x="4133088" y="3291840"/>
+            <a:ext cx="1554480" cy="658368"/>
           </a:xfrm>
           <a:prstGeom prst="roundRect">
             <a:avLst>
-              <a:gd name="adj" fmla="val 2326"/>
+              <a:gd name="adj" fmla="val 5556"/>
+            </a:avLst>
+          </a:prstGeom>
+          <a:solidFill>
+            <a:srgbClr val="F2F4F7"/>
+          </a:solidFill>
+          <a:ln w="12700">
+            <a:solidFill>
+              <a:srgbClr val="13757A"/>
+            </a:solidFill>
+            <a:prstDash val="solid"/>
+          </a:ln>
+        </p:spPr>
+      </p:sp>
+      <p:sp>
+        <p:nvSpPr>
+          <p:cNvPr id="84" name="Text 41"/>
+          <p:cNvSpPr txBox="1"/>
+          <p:nvPr/>
+        </p:nvSpPr>
+        <p:spPr>
+          <a:xfrm>
+            <a:off x="4133088" y="3319272"/>
+            <a:ext cx="1554480" cy="219456"/>
+          </a:xfrm>
+          <a:prstGeom prst="rect">
+            <a:avLst/>
+          </a:prstGeom>
+          <a:noFill/>
+          <a:ln/>
+        </p:spPr>
+        <p:txBody>
+          <a:bodyPr wrap="square" lIns="0" tIns="0" rIns="0" bIns="0" rtlCol="0" anchor="ctr"/>
+          <a:lstStyle/>
+          <a:p>
+            <a:pPr algn="ctr" indent="0" marL="0">
+              <a:buNone/>
+            </a:pPr>
+            <a:r>
+              <a:rPr lang="en-US" sz="950" b="1" dirty="0">
+                <a:solidFill>
+                  <a:srgbClr val="13757A"/>
+                </a:solidFill>
+                <a:latin typeface="맑은 고딕" pitchFamily="34" charset="0"/>
+                <a:ea typeface="맑은 고딕" pitchFamily="34" charset="-122"/>
+                <a:cs typeface="맑은 고딕" pitchFamily="34" charset="-120"/>
+              </a:rPr>
+              <a:t>세마포어 full</a:t>
+            </a:r>
+            <a:endParaRPr lang="en-US" sz="950" dirty="0"/>
+          </a:p>
+        </p:txBody>
+      </p:sp>
+      <p:sp>
+        <p:nvSpPr>
+          <p:cNvPr id="85" name="Text 42"/>
+          <p:cNvSpPr txBox="1"/>
+          <p:nvPr/>
+        </p:nvSpPr>
+        <p:spPr>
+          <a:xfrm>
+            <a:off x="4133088" y="3538728"/>
+            <a:ext cx="1554480" cy="201168"/>
+          </a:xfrm>
+          <a:prstGeom prst="rect">
+            <a:avLst/>
+          </a:prstGeom>
+          <a:noFill/>
+          <a:ln/>
+        </p:spPr>
+        <p:txBody>
+          <a:bodyPr wrap="square" lIns="0" tIns="0" rIns="0" bIns="0" rtlCol="0" anchor="ctr"/>
+          <a:lstStyle/>
+          <a:p>
+            <a:pPr algn="ctr" indent="0" marL="0">
+              <a:buNone/>
+            </a:pPr>
+            <a:r>
+              <a:rPr lang="en-US" sz="780" dirty="0">
+                <a:solidFill>
+                  <a:srgbClr val="3D4451"/>
+                </a:solidFill>
+                <a:latin typeface="Consolas" pitchFamily="34" charset="0"/>
+                <a:ea typeface="Consolas" pitchFamily="34" charset="-122"/>
+                <a:cs typeface="Consolas" pitchFamily="34" charset="-120"/>
+              </a:rPr>
+              <a:t>찬 슬롯 개수 · 처음 0</a:t>
+            </a:r>
+            <a:endParaRPr lang="en-US" sz="780" dirty="0"/>
+          </a:p>
+        </p:txBody>
+      </p:sp>
+      <p:sp>
+        <p:nvSpPr>
+          <p:cNvPr id="86" name="Text 43"/>
+          <p:cNvSpPr txBox="1"/>
+          <p:nvPr/>
+        </p:nvSpPr>
+        <p:spPr>
+          <a:xfrm>
+            <a:off x="4133088" y="3721608"/>
+            <a:ext cx="1554480" cy="201168"/>
+          </a:xfrm>
+          <a:prstGeom prst="rect">
+            <a:avLst/>
+          </a:prstGeom>
+          <a:noFill/>
+          <a:ln/>
+        </p:spPr>
+        <p:txBody>
+          <a:bodyPr wrap="square" lIns="0" tIns="0" rIns="0" bIns="0" rtlCol="0" anchor="ctr"/>
+          <a:lstStyle/>
+          <a:p>
+            <a:pPr algn="ctr" indent="0" marL="0">
+              <a:buNone/>
+            </a:pPr>
+            <a:r>
+              <a:rPr lang="en-US" sz="850" dirty="0">
+                <a:solidFill>
+                  <a:srgbClr val="7A828F"/>
+                </a:solidFill>
+                <a:latin typeface="맑은 고딕" pitchFamily="34" charset="0"/>
+                <a:ea typeface="맑은 고딕" pitchFamily="34" charset="-122"/>
+                <a:cs typeface="맑은 고딕" pitchFamily="34" charset="-120"/>
+              </a:rPr>
+              <a:t>이름  IpcDemoQ.sem.f</a:t>
+            </a:r>
+            <a:endParaRPr lang="en-US" sz="850" dirty="0"/>
+          </a:p>
+        </p:txBody>
+      </p:sp>
+      <p:sp>
+        <p:nvSpPr>
+          <p:cNvPr id="87" name="Shape 44"/>
+          <p:cNvSpPr/>
+          <p:nvPr/>
+        </p:nvSpPr>
+        <p:spPr>
+          <a:xfrm>
+            <a:off x="548640" y="4224528"/>
+            <a:ext cx="5577840" cy="2130552"/>
+          </a:xfrm>
+          <a:prstGeom prst="roundRect">
+            <a:avLst>
+              <a:gd name="adj" fmla="val 2575"/>
             </a:avLst>
           </a:prstGeom>
           <a:solidFill>
@@ -21889,30 +15997,30 @@
       </p:sp>
       <p:sp>
         <p:nvSpPr>
-          <p:cNvPr id="25" name="Text 23"/>
-          <p:cNvSpPr txBox="1"/>
-          <p:nvPr/>
-        </p:nvSpPr>
-        <p:spPr>
-          <a:xfrm>
-            <a:off x="804672" y="4005072"/>
-            <a:ext cx="5248656" cy="256032"/>
-          </a:xfrm>
-          <a:prstGeom prst="rect">
-            <a:avLst/>
-          </a:prstGeom>
-          <a:noFill/>
-          <a:ln/>
-        </p:spPr>
-        <p:txBody>
-          <a:bodyPr wrap="square" lIns="0" tIns="0" rIns="0" bIns="0" rtlCol="0" anchor="ctr"/>
-          <a:lstStyle/>
-          <a:p>
-            <a:pPr indent="0" marL="0">
-              <a:buNone/>
-            </a:pPr>
-            <a:r>
-              <a:rPr lang="en-US" sz="1050" b="1" dirty="0">
+          <p:cNvPr id="88" name="Text 45"/>
+          <p:cNvSpPr txBox="1"/>
+          <p:nvPr/>
+        </p:nvSpPr>
+        <p:spPr>
+          <a:xfrm>
+            <a:off x="804672" y="4334256"/>
+            <a:ext cx="3657600" cy="237744"/>
+          </a:xfrm>
+          <a:prstGeom prst="rect">
+            <a:avLst/>
+          </a:prstGeom>
+          <a:noFill/>
+          <a:ln/>
+        </p:spPr>
+        <p:txBody>
+          <a:bodyPr wrap="square" lIns="0" tIns="0" rIns="0" bIns="0" rtlCol="0" anchor="ctr"/>
+          <a:lstStyle/>
+          <a:p>
+            <a:pPr indent="0" marL="0">
+              <a:buNone/>
+            </a:pPr>
+            <a:r>
+              <a:rPr lang="en-US" sz="1100" b="1" spc="60" kern="0" dirty="0">
                 <a:solidFill>
                   <a:srgbClr val="1E232E"/>
                 </a:solidFill>
@@ -21920,146 +16028,295 @@
                 <a:ea typeface="맑은 고딕" pitchFamily="34" charset="-122"/>
                 <a:cs typeface="맑은 고딕" pitchFamily="34" charset="-120"/>
               </a:rPr>
-              <a:t>큐 하나 = 공유메모리 + 링버퍼 + 세마포어 2 개 + 뮤텍스</a:t>
-            </a:r>
-          </a:p>
-        </p:txBody>
-      </p:sp>
-      <p:sp>
-        <p:nvSpPr>
-          <p:cNvPr id="26" name="Text 24"/>
-          <p:cNvSpPr txBox="1"/>
-          <p:nvPr/>
-        </p:nvSpPr>
-        <p:spPr>
-          <a:xfrm>
-            <a:off x="804672" y="4279392"/>
-            <a:ext cx="5248656" cy="237744"/>
-          </a:xfrm>
-          <a:prstGeom prst="rect">
-            <a:avLst/>
-          </a:prstGeom>
-          <a:noFill/>
-          <a:ln/>
-        </p:spPr>
-        <p:txBody>
-          <a:bodyPr wrap="square" lIns="0" tIns="0" rIns="0" bIns="0" rtlCol="0" anchor="ctr"/>
-          <a:lstStyle/>
-          <a:p>
-            <a:pPr indent="0" marL="0">
-              <a:buNone/>
-            </a:pPr>
-            <a:r>
-              <a:rPr lang="en-US" sz="900" dirty="0">
+              <a:t>LINUX 대응</a:t>
+            </a:r>
+            <a:endParaRPr lang="en-US" sz="1100" dirty="0"/>
+          </a:p>
+        </p:txBody>
+      </p:sp>
+      <p:sp>
+        <p:nvSpPr>
+          <p:cNvPr id="89" name="Text 46"/>
+          <p:cNvSpPr txBox="1"/>
+          <p:nvPr/>
+        </p:nvSpPr>
+        <p:spPr>
+          <a:xfrm>
+            <a:off x="804672" y="4626864"/>
+            <a:ext cx="2606040" cy="274320"/>
+          </a:xfrm>
+          <a:prstGeom prst="rect">
+            <a:avLst/>
+          </a:prstGeom>
+          <a:noFill/>
+          <a:ln/>
+        </p:spPr>
+        <p:txBody>
+          <a:bodyPr wrap="square" lIns="0" tIns="0" rIns="0" bIns="0" rtlCol="0" anchor="ctr"/>
+          <a:lstStyle/>
+          <a:p>
+            <a:pPr indent="0" marL="0">
+              <a:buNone/>
+            </a:pPr>
+            <a:r>
+              <a:rPr lang="en-US" sz="850" dirty="0">
+                <a:solidFill>
+                  <a:srgbClr val="3D4451"/>
+                </a:solidFill>
+                <a:latin typeface="Consolas" pitchFamily="34" charset="0"/>
+                <a:ea typeface="Consolas" pitchFamily="34" charset="-122"/>
+                <a:cs typeface="Consolas" pitchFamily="34" charset="-120"/>
+              </a:rPr>
+              <a:t>CreateFileMapping / MapViewOfFile</a:t>
+            </a:r>
+            <a:endParaRPr lang="en-US" sz="850" dirty="0"/>
+          </a:p>
+        </p:txBody>
+      </p:sp>
+      <p:sp>
+        <p:nvSpPr>
+          <p:cNvPr id="90" name="Text 47"/>
+          <p:cNvSpPr txBox="1"/>
+          <p:nvPr/>
+        </p:nvSpPr>
+        <p:spPr>
+          <a:xfrm>
+            <a:off x="3438144" y="4626864"/>
+            <a:ext cx="274320" cy="274320"/>
+          </a:xfrm>
+          <a:prstGeom prst="rect">
+            <a:avLst/>
+          </a:prstGeom>
+          <a:noFill/>
+          <a:ln/>
+        </p:spPr>
+        <p:txBody>
+          <a:bodyPr wrap="square" lIns="0" tIns="0" rIns="0" bIns="0" rtlCol="0" anchor="ctr"/>
+          <a:lstStyle/>
+          <a:p>
+            <a:pPr algn="ctr" indent="0" marL="0">
+              <a:buNone/>
+            </a:pPr>
+            <a:r>
+              <a:rPr lang="en-US" sz="850" dirty="0">
                 <a:solidFill>
                   <a:srgbClr val="7A828F"/>
                 </a:solidFill>
-                <a:latin typeface="맑은 고딕" pitchFamily="34" charset="0"/>
-                <a:ea typeface="맑은 고딕" pitchFamily="34" charset="-122"/>
-                <a:cs typeface="맑은 고딕" pitchFamily="34" charset="-120"/>
-              </a:rPr>
-              <a:t>두 프로세스는 서로의 메모리를 못 본다 — 같은 이름을 커널에 대면 같은 물건을 받는다</a:t>
-            </a:r>
-          </a:p>
-        </p:txBody>
-      </p:sp>
-      <p:sp>
-        <p:nvSpPr>
-          <p:cNvPr id="27" name="Text 25"/>
-          <p:cNvSpPr txBox="1"/>
-          <p:nvPr/>
-        </p:nvSpPr>
-        <p:spPr>
-          <a:xfrm>
-            <a:off x="804672" y="4535424"/>
-            <a:ext cx="5248656" cy="237744"/>
-          </a:xfrm>
-          <a:prstGeom prst="rect">
-            <a:avLst/>
-          </a:prstGeom>
-          <a:noFill/>
-          <a:ln/>
-        </p:spPr>
-        <p:txBody>
-          <a:bodyPr wrap="square" lIns="0" tIns="0" rIns="0" bIns="0" rtlCol="0" anchor="ctr"/>
-          <a:lstStyle/>
-          <a:p>
-            <a:pPr indent="0" marL="0">
-              <a:buNone/>
-            </a:pPr>
-            <a:r>
-              <a:rPr lang="en-US" sz="880" dirty="0">
+                <a:latin typeface="Consolas" pitchFamily="34" charset="0"/>
+                <a:ea typeface="Consolas" pitchFamily="34" charset="-122"/>
+                <a:cs typeface="Consolas" pitchFamily="34" charset="-120"/>
+              </a:rPr>
+              <a:t>→</a:t>
+            </a:r>
+            <a:endParaRPr lang="en-US" sz="850" dirty="0"/>
+          </a:p>
+        </p:txBody>
+      </p:sp>
+      <p:sp>
+        <p:nvSpPr>
+          <p:cNvPr id="91" name="Text 48"/>
+          <p:cNvSpPr txBox="1"/>
+          <p:nvPr/>
+        </p:nvSpPr>
+        <p:spPr>
+          <a:xfrm>
+            <a:off x="3749040" y="4626864"/>
+            <a:ext cx="2103120" cy="274320"/>
+          </a:xfrm>
+          <a:prstGeom prst="rect">
+            <a:avLst/>
+          </a:prstGeom>
+          <a:noFill/>
+          <a:ln/>
+        </p:spPr>
+        <p:txBody>
+          <a:bodyPr wrap="square" lIns="0" tIns="0" rIns="0" bIns="0" rtlCol="0" anchor="ctr"/>
+          <a:lstStyle/>
+          <a:p>
+            <a:pPr indent="0" marL="0">
+              <a:buNone/>
+            </a:pPr>
+            <a:r>
+              <a:rPr lang="en-US" sz="850" b="1" dirty="0">
+                <a:solidFill>
+                  <a:srgbClr val="13757A"/>
+                </a:solidFill>
+                <a:latin typeface="Consolas" pitchFamily="34" charset="0"/>
+                <a:ea typeface="Consolas" pitchFamily="34" charset="-122"/>
+                <a:cs typeface="Consolas" pitchFamily="34" charset="-120"/>
+              </a:rPr>
+              <a:t>shmget / shmat</a:t>
+            </a:r>
+            <a:endParaRPr lang="en-US" sz="850" dirty="0"/>
+          </a:p>
+        </p:txBody>
+      </p:sp>
+      <p:sp>
+        <p:nvSpPr>
+          <p:cNvPr id="92" name="Text 49"/>
+          <p:cNvSpPr txBox="1"/>
+          <p:nvPr/>
+        </p:nvSpPr>
+        <p:spPr>
+          <a:xfrm>
+            <a:off x="804672" y="4937760"/>
+            <a:ext cx="2606040" cy="274320"/>
+          </a:xfrm>
+          <a:prstGeom prst="rect">
+            <a:avLst/>
+          </a:prstGeom>
+          <a:noFill/>
+          <a:ln/>
+        </p:spPr>
+        <p:txBody>
+          <a:bodyPr wrap="square" lIns="0" tIns="0" rIns="0" bIns="0" rtlCol="0" anchor="ctr"/>
+          <a:lstStyle/>
+          <a:p>
+            <a:pPr indent="0" marL="0">
+              <a:buNone/>
+            </a:pPr>
+            <a:r>
+              <a:rPr lang="en-US" sz="850" dirty="0">
                 <a:solidFill>
                   <a:srgbClr val="3D4451"/>
                 </a:solidFill>
-                <a:latin typeface="맑은 고딕" pitchFamily="34" charset="0"/>
-                <a:ea typeface="맑은 고딕" pitchFamily="34" charset="-122"/>
-                <a:cs typeface="맑은 고딕" pitchFamily="34" charset="-120"/>
-              </a:rPr>
-              <a:t>이름은 모두  </a:t>
-            </a:r>
-            <a:r>
-              <a:rPr lang="en-US" sz="880" b="1" dirty="0">
-                <a:solidFill>
-                  <a:srgbClr val="1E232E"/>
-                </a:solidFill>
-                <a:latin typeface="Consolas" pitchFamily="34" charset="0"/>
-                <a:ea typeface="Consolas" pitchFamily="34" charset="-122"/>
-                <a:cs typeface="Consolas" pitchFamily="34" charset="-120"/>
-              </a:rPr>
-              <a:t>Local\IpcProc.IpcDemoQ</a:t>
-            </a:r>
-            <a:r>
-              <a:rPr lang="en-US" sz="880" dirty="0">
+                <a:latin typeface="Consolas" pitchFamily="34" charset="0"/>
+                <a:ea typeface="Consolas" pitchFamily="34" charset="-122"/>
+                <a:cs typeface="Consolas" pitchFamily="34" charset="-120"/>
+              </a:rPr>
+              <a:t>CreateMutex</a:t>
+            </a:r>
+            <a:endParaRPr lang="en-US" sz="850" dirty="0"/>
+          </a:p>
+        </p:txBody>
+      </p:sp>
+      <p:sp>
+        <p:nvSpPr>
+          <p:cNvPr id="93" name="Text 50"/>
+          <p:cNvSpPr txBox="1"/>
+          <p:nvPr/>
+        </p:nvSpPr>
+        <p:spPr>
+          <a:xfrm>
+            <a:off x="3438144" y="4937760"/>
+            <a:ext cx="274320" cy="274320"/>
+          </a:xfrm>
+          <a:prstGeom prst="rect">
+            <a:avLst/>
+          </a:prstGeom>
+          <a:noFill/>
+          <a:ln/>
+        </p:spPr>
+        <p:txBody>
+          <a:bodyPr wrap="square" lIns="0" tIns="0" rIns="0" bIns="0" rtlCol="0" anchor="ctr"/>
+          <a:lstStyle/>
+          <a:p>
+            <a:pPr algn="ctr" indent="0" marL="0">
+              <a:buNone/>
+            </a:pPr>
+            <a:r>
+              <a:rPr lang="en-US" sz="850" dirty="0">
+                <a:solidFill>
+                  <a:srgbClr val="7A828F"/>
+                </a:solidFill>
+                <a:latin typeface="Consolas" pitchFamily="34" charset="0"/>
+                <a:ea typeface="Consolas" pitchFamily="34" charset="-122"/>
+                <a:cs typeface="Consolas" pitchFamily="34" charset="-120"/>
+              </a:rPr>
+              <a:t>→</a:t>
+            </a:r>
+            <a:endParaRPr lang="en-US" sz="850" dirty="0"/>
+          </a:p>
+        </p:txBody>
+      </p:sp>
+      <p:sp>
+        <p:nvSpPr>
+          <p:cNvPr id="94" name="Text 51"/>
+          <p:cNvSpPr txBox="1"/>
+          <p:nvPr/>
+        </p:nvSpPr>
+        <p:spPr>
+          <a:xfrm>
+            <a:off x="3749040" y="4937760"/>
+            <a:ext cx="2103120" cy="274320"/>
+          </a:xfrm>
+          <a:prstGeom prst="rect">
+            <a:avLst/>
+          </a:prstGeom>
+          <a:noFill/>
+          <a:ln/>
+        </p:spPr>
+        <p:txBody>
+          <a:bodyPr wrap="square" lIns="0" tIns="0" rIns="0" bIns="0" rtlCol="0" anchor="ctr"/>
+          <a:lstStyle/>
+          <a:p>
+            <a:pPr indent="0" marL="0">
+              <a:buNone/>
+            </a:pPr>
+            <a:r>
+              <a:rPr lang="en-US" sz="850" b="1" dirty="0">
+                <a:solidFill>
+                  <a:srgbClr val="13757A"/>
+                </a:solidFill>
+                <a:latin typeface="Consolas" pitchFamily="34" charset="0"/>
+                <a:ea typeface="Consolas" pitchFamily="34" charset="-122"/>
+                <a:cs typeface="Consolas" pitchFamily="34" charset="-120"/>
+              </a:rPr>
+              <a:t>pthread_mutex_t</a:t>
+            </a:r>
+            <a:endParaRPr lang="en-US" sz="850" dirty="0"/>
+          </a:p>
+        </p:txBody>
+      </p:sp>
+      <p:sp>
+        <p:nvSpPr>
+          <p:cNvPr id="95" name="Text 52"/>
+          <p:cNvSpPr txBox="1"/>
+          <p:nvPr/>
+        </p:nvSpPr>
+        <p:spPr>
+          <a:xfrm>
+            <a:off x="804672" y="5248656"/>
+            <a:ext cx="2606040" cy="274320"/>
+          </a:xfrm>
+          <a:prstGeom prst="rect">
+            <a:avLst/>
+          </a:prstGeom>
+          <a:noFill/>
+          <a:ln/>
+        </p:spPr>
+        <p:txBody>
+          <a:bodyPr wrap="square" lIns="0" tIns="0" rIns="0" bIns="0" rtlCol="0" anchor="ctr"/>
+          <a:lstStyle/>
+          <a:p>
+            <a:pPr indent="0" marL="0">
+              <a:buNone/>
+            </a:pPr>
+            <a:r>
+              <a:rPr lang="en-US" sz="850" dirty="0">
                 <a:solidFill>
                   <a:srgbClr val="3D4451"/>
                 </a:solidFill>
-                <a:latin typeface="맑은 고딕" pitchFamily="34" charset="0"/>
-                <a:ea typeface="맑은 고딕" pitchFamily="34" charset="-122"/>
-                <a:cs typeface="맑은 고딕" pitchFamily="34" charset="-120"/>
-              </a:rPr>
-              <a:t>  로 시작하고 뒤에 넷이 붙는다</a:t>
-            </a:r>
-          </a:p>
-        </p:txBody>
-      </p:sp>
-      <p:sp>
-        <p:nvSpPr>
-          <p:cNvPr id="28" name="Shape 26"/>
-          <p:cNvSpPr/>
-          <p:nvPr/>
-        </p:nvSpPr>
-        <p:spPr>
-          <a:xfrm>
-            <a:off x="969264" y="4828032"/>
-            <a:ext cx="786384" cy="237744"/>
-          </a:xfrm>
-          <a:prstGeom prst="roundRect">
-            <a:avLst>
-              <a:gd name="adj" fmla="val 25000"/>
-            </a:avLst>
-          </a:prstGeom>
-          <a:solidFill>
-            <a:srgbClr val="FFFFFF"/>
-          </a:solidFill>
-          <a:ln w="12700">
-            <a:solidFill>
-              <a:srgbClr val="C8891F"/>
-            </a:solidFill>
-            <a:prstDash val="solid"/>
-          </a:ln>
-        </p:spPr>
-      </p:sp>
-      <p:sp>
-        <p:nvSpPr>
-          <p:cNvPr id="29" name="Text 27"/>
-          <p:cNvSpPr txBox="1"/>
-          <p:nvPr/>
-        </p:nvSpPr>
-        <p:spPr>
-          <a:xfrm>
-            <a:off x="969264" y="4828032"/>
-            <a:ext cx="786384" cy="237744"/>
+                <a:latin typeface="Consolas" pitchFamily="34" charset="0"/>
+                <a:ea typeface="Consolas" pitchFamily="34" charset="-122"/>
+                <a:cs typeface="Consolas" pitchFamily="34" charset="-120"/>
+              </a:rPr>
+              <a:t>CreateSemaphore / WaitForSingleObject</a:t>
+            </a:r>
+            <a:endParaRPr lang="en-US" sz="850" dirty="0"/>
+          </a:p>
+        </p:txBody>
+      </p:sp>
+      <p:sp>
+        <p:nvSpPr>
+          <p:cNvPr id="96" name="Text 53"/>
+          <p:cNvSpPr txBox="1"/>
+          <p:nvPr/>
+        </p:nvSpPr>
+        <p:spPr>
+          <a:xfrm>
+            <a:off x="3438144" y="5248656"/>
+            <a:ext cx="274320" cy="274320"/>
           </a:xfrm>
           <a:prstGeom prst="rect">
             <a:avLst/>
@@ -22075,94 +16332,108 @@
               <a:buNone/>
             </a:pPr>
             <a:r>
-              <a:rPr lang="en-US" sz="840" b="1" dirty="0">
-                <a:solidFill>
-                  <a:srgbClr val="C8891F"/>
-                </a:solidFill>
-                <a:latin typeface="Consolas" pitchFamily="34" charset="0"/>
-                <a:ea typeface="Consolas" pitchFamily="34" charset="-122"/>
-                <a:cs typeface="Consolas" pitchFamily="34" charset="-120"/>
-              </a:rPr>
-              <a:t>.map</a:t>
-            </a:r>
-          </a:p>
-        </p:txBody>
-      </p:sp>
-      <p:sp>
-        <p:nvSpPr>
-          <p:cNvPr id="30" name="Text 28"/>
-          <p:cNvSpPr txBox="1"/>
-          <p:nvPr/>
-        </p:nvSpPr>
-        <p:spPr>
-          <a:xfrm>
-            <a:off x="1883664" y="4828032"/>
-            <a:ext cx="4114800" cy="237744"/>
-          </a:xfrm>
-          <a:prstGeom prst="rect">
-            <a:avLst/>
-          </a:prstGeom>
-          <a:noFill/>
-          <a:ln/>
-        </p:spPr>
-        <p:txBody>
-          <a:bodyPr wrap="square" lIns="0" tIns="0" rIns="0" bIns="0" rtlCol="0" anchor="ctr"/>
-          <a:lstStyle/>
-          <a:p>
-            <a:pPr indent="0" marL="0">
-              <a:buNone/>
-            </a:pPr>
-            <a:r>
-              <a:rPr lang="en-US" sz="880" dirty="0">
+              <a:rPr lang="en-US" sz="850" dirty="0">
+                <a:solidFill>
+                  <a:srgbClr val="7A828F"/>
+                </a:solidFill>
+                <a:latin typeface="Consolas" pitchFamily="34" charset="0"/>
+                <a:ea typeface="Consolas" pitchFamily="34" charset="-122"/>
+                <a:cs typeface="Consolas" pitchFamily="34" charset="-120"/>
+              </a:rPr>
+              <a:t>→</a:t>
+            </a:r>
+            <a:endParaRPr lang="en-US" sz="850" dirty="0"/>
+          </a:p>
+        </p:txBody>
+      </p:sp>
+      <p:sp>
+        <p:nvSpPr>
+          <p:cNvPr id="97" name="Text 54"/>
+          <p:cNvSpPr txBox="1"/>
+          <p:nvPr/>
+        </p:nvSpPr>
+        <p:spPr>
+          <a:xfrm>
+            <a:off x="3749040" y="5248656"/>
+            <a:ext cx="2103120" cy="274320"/>
+          </a:xfrm>
+          <a:prstGeom prst="rect">
+            <a:avLst/>
+          </a:prstGeom>
+          <a:noFill/>
+          <a:ln/>
+        </p:spPr>
+        <p:txBody>
+          <a:bodyPr wrap="square" lIns="0" tIns="0" rIns="0" bIns="0" rtlCol="0" anchor="ctr"/>
+          <a:lstStyle/>
+          <a:p>
+            <a:pPr indent="0" marL="0">
+              <a:buNone/>
+            </a:pPr>
+            <a:r>
+              <a:rPr lang="en-US" sz="850" b="1" dirty="0">
+                <a:solidFill>
+                  <a:srgbClr val="13757A"/>
+                </a:solidFill>
+                <a:latin typeface="Consolas" pitchFamily="34" charset="0"/>
+                <a:ea typeface="Consolas" pitchFamily="34" charset="-122"/>
+                <a:cs typeface="Consolas" pitchFamily="34" charset="-120"/>
+              </a:rPr>
+              <a:t>sem_open / sem_wait</a:t>
+            </a:r>
+            <a:endParaRPr lang="en-US" sz="850" dirty="0"/>
+          </a:p>
+        </p:txBody>
+      </p:sp>
+      <p:sp>
+        <p:nvSpPr>
+          <p:cNvPr id="98" name="Text 55"/>
+          <p:cNvSpPr txBox="1"/>
+          <p:nvPr/>
+        </p:nvSpPr>
+        <p:spPr>
+          <a:xfrm>
+            <a:off x="804672" y="5559552"/>
+            <a:ext cx="2606040" cy="274320"/>
+          </a:xfrm>
+          <a:prstGeom prst="rect">
+            <a:avLst/>
+          </a:prstGeom>
+          <a:noFill/>
+          <a:ln/>
+        </p:spPr>
+        <p:txBody>
+          <a:bodyPr wrap="square" lIns="0" tIns="0" rIns="0" bIns="0" rtlCol="0" anchor="ctr"/>
+          <a:lstStyle/>
+          <a:p>
+            <a:pPr indent="0" marL="0">
+              <a:buNone/>
+            </a:pPr>
+            <a:r>
+              <a:rPr lang="en-US" sz="850" dirty="0">
                 <a:solidFill>
                   <a:srgbClr val="3D4451"/>
                 </a:solidFill>
-                <a:latin typeface="맑은 고딕" pitchFamily="34" charset="0"/>
-                <a:ea typeface="맑은 고딕" pitchFamily="34" charset="-122"/>
-                <a:cs typeface="맑은 고딕" pitchFamily="34" charset="-120"/>
-              </a:rPr>
-              <a:t>공유메모리 — 링버퍼 64 슬롯이 여기 올라간다</a:t>
-            </a:r>
-          </a:p>
-        </p:txBody>
-      </p:sp>
-      <p:sp>
-        <p:nvSpPr>
-          <p:cNvPr id="31" name="Shape 29"/>
-          <p:cNvSpPr/>
-          <p:nvPr/>
-        </p:nvSpPr>
-        <p:spPr>
-          <a:xfrm>
-            <a:off x="969264" y="5120640"/>
-            <a:ext cx="786384" cy="237744"/>
-          </a:xfrm>
-          <a:prstGeom prst="roundRect">
-            <a:avLst>
-              <a:gd name="adj" fmla="val 25000"/>
-            </a:avLst>
-          </a:prstGeom>
-          <a:solidFill>
-            <a:srgbClr val="FFFFFF"/>
-          </a:solidFill>
-          <a:ln w="12700">
-            <a:solidFill>
-              <a:srgbClr val="D9532B"/>
-            </a:solidFill>
-            <a:prstDash val="solid"/>
-          </a:ln>
-        </p:spPr>
-      </p:sp>
-      <p:sp>
-        <p:nvSpPr>
-          <p:cNvPr id="32" name="Text 30"/>
-          <p:cNvSpPr txBox="1"/>
-          <p:nvPr/>
-        </p:nvSpPr>
-        <p:spPr>
-          <a:xfrm>
-            <a:off x="969264" y="5120640"/>
-            <a:ext cx="786384" cy="237744"/>
+                <a:latin typeface="Consolas" pitchFamily="34" charset="0"/>
+                <a:ea typeface="Consolas" pitchFamily="34" charset="-122"/>
+                <a:cs typeface="Consolas" pitchFamily="34" charset="-120"/>
+              </a:rPr>
+              <a:t>CloseHandle</a:t>
+            </a:r>
+            <a:endParaRPr lang="en-US" sz="850" dirty="0"/>
+          </a:p>
+        </p:txBody>
+      </p:sp>
+      <p:sp>
+        <p:nvSpPr>
+          <p:cNvPr id="99" name="Text 56"/>
+          <p:cNvSpPr txBox="1"/>
+          <p:nvPr/>
+        </p:nvSpPr>
+        <p:spPr>
+          <a:xfrm>
+            <a:off x="3438144" y="5559552"/>
+            <a:ext cx="274320" cy="274320"/>
           </a:xfrm>
           <a:prstGeom prst="rect">
             <a:avLst/>
@@ -22178,110 +16449,46 @@
               <a:buNone/>
             </a:pPr>
             <a:r>
-              <a:rPr lang="en-US" sz="840" b="1" dirty="0">
-                <a:solidFill>
-                  <a:srgbClr val="D9532B"/>
-                </a:solidFill>
-                <a:latin typeface="Consolas" pitchFamily="34" charset="0"/>
-                <a:ea typeface="Consolas" pitchFamily="34" charset="-122"/>
-                <a:cs typeface="Consolas" pitchFamily="34" charset="-120"/>
-              </a:rPr>
-              <a:t>.mtx</a:t>
-            </a:r>
-          </a:p>
-        </p:txBody>
-      </p:sp>
-      <p:sp>
-        <p:nvSpPr>
-          <p:cNvPr id="33" name="Text 31"/>
-          <p:cNvSpPr txBox="1"/>
-          <p:nvPr/>
-        </p:nvSpPr>
-        <p:spPr>
-          <a:xfrm>
-            <a:off x="1883664" y="5120640"/>
-            <a:ext cx="4114800" cy="237744"/>
-          </a:xfrm>
-          <a:prstGeom prst="rect">
-            <a:avLst/>
-          </a:prstGeom>
-          <a:noFill/>
-          <a:ln/>
-        </p:spPr>
-        <p:txBody>
-          <a:bodyPr wrap="square" lIns="0" tIns="0" rIns="0" bIns="0" rtlCol="0" anchor="ctr"/>
-          <a:lstStyle/>
-          <a:p>
-            <a:pPr indent="0" marL="0">
-              <a:buNone/>
-            </a:pPr>
-            <a:r>
-              <a:rPr lang="en-US" sz="880" dirty="0">
-                <a:solidFill>
-                  <a:srgbClr val="3D4451"/>
-                </a:solidFill>
-                <a:latin typeface="맑은 고딕" pitchFamily="34" charset="0"/>
-                <a:ea typeface="맑은 고딕" pitchFamily="34" charset="-122"/>
-                <a:cs typeface="맑은 고딕" pitchFamily="34" charset="-120"/>
-              </a:rPr>
-              <a:t>뮤텍스 — head · tail 을 한 번에 하나만</a:t>
-            </a:r>
-          </a:p>
-        </p:txBody>
-      </p:sp>
-      <p:sp>
-        <p:nvSpPr>
-          <p:cNvPr id="34" name="Shape 32"/>
-          <p:cNvSpPr/>
-          <p:nvPr/>
-        </p:nvSpPr>
-        <p:spPr>
-          <a:xfrm>
-            <a:off x="969264" y="5413248"/>
-            <a:ext cx="786384" cy="237744"/>
-          </a:xfrm>
-          <a:prstGeom prst="roundRect">
-            <a:avLst>
-              <a:gd name="adj" fmla="val 25000"/>
-            </a:avLst>
-          </a:prstGeom>
-          <a:solidFill>
-            <a:srgbClr val="FFFFFF"/>
-          </a:solidFill>
-          <a:ln w="12700">
-            <a:solidFill>
-              <a:srgbClr val="13757A"/>
-            </a:solidFill>
-            <a:prstDash val="solid"/>
-          </a:ln>
-        </p:spPr>
-      </p:sp>
-      <p:sp>
-        <p:nvSpPr>
-          <p:cNvPr id="35" name="Text 33"/>
-          <p:cNvSpPr txBox="1"/>
-          <p:nvPr/>
-        </p:nvSpPr>
-        <p:spPr>
-          <a:xfrm>
-            <a:off x="969264" y="5413248"/>
-            <a:ext cx="786384" cy="237744"/>
-          </a:xfrm>
-          <a:prstGeom prst="rect">
-            <a:avLst/>
-          </a:prstGeom>
-          <a:noFill/>
-          <a:ln/>
-        </p:spPr>
-        <p:txBody>
-          <a:bodyPr wrap="square" lIns="0" tIns="0" rIns="0" bIns="0" rtlCol="0" anchor="ctr"/>
-          <a:lstStyle/>
-          <a:p>
-            <a:pPr algn="ctr" indent="0" marL="0">
-              <a:buNone/>
-            </a:pPr>
-            <a:r>
-              <a:rPr lang="en-US" sz="840" b="1" dirty="0">
+              <a:rPr lang="en-US" sz="850" dirty="0">
+                <a:solidFill>
+                  <a:srgbClr val="7A828F"/>
+                </a:solidFill>
+                <a:latin typeface="Consolas" pitchFamily="34" charset="0"/>
+                <a:ea typeface="Consolas" pitchFamily="34" charset="-122"/>
+                <a:cs typeface="Consolas" pitchFamily="34" charset="-120"/>
+              </a:rPr>
+              <a:t>→</a:t>
+            </a:r>
+            <a:endParaRPr lang="en-US" sz="850" dirty="0"/>
+          </a:p>
+        </p:txBody>
+      </p:sp>
+      <p:sp>
+        <p:nvSpPr>
+          <p:cNvPr id="100" name="Text 57"/>
+          <p:cNvSpPr txBox="1"/>
+          <p:nvPr/>
+        </p:nvSpPr>
+        <p:spPr>
+          <a:xfrm>
+            <a:off x="3749040" y="5559552"/>
+            <a:ext cx="2103120" cy="274320"/>
+          </a:xfrm>
+          <a:prstGeom prst="rect">
+            <a:avLst/>
+          </a:prstGeom>
+          <a:noFill/>
+          <a:ln/>
+        </p:spPr>
+        <p:txBody>
+          <a:bodyPr wrap="square" lIns="0" tIns="0" rIns="0" bIns="0" rtlCol="0" anchor="ctr"/>
+          <a:lstStyle/>
+          <a:p>
+            <a:pPr indent="0" marL="0">
+              <a:buNone/>
+            </a:pPr>
+            <a:r>
+              <a:rPr lang="en-US" sz="850" b="1" dirty="0">
                 <a:solidFill>
                   <a:srgbClr val="13757A"/>
                 </a:solidFill>
@@ -22289,178 +16496,38 @@
                 <a:ea typeface="Consolas" pitchFamily="34" charset="-122"/>
                 <a:cs typeface="Consolas" pitchFamily="34" charset="-120"/>
               </a:rPr>
-              <a:t>.sem.e</a:t>
-            </a:r>
-          </a:p>
-        </p:txBody>
-      </p:sp>
-      <p:sp>
-        <p:nvSpPr>
-          <p:cNvPr id="36" name="Text 34"/>
-          <p:cNvSpPr txBox="1"/>
-          <p:nvPr/>
-        </p:nvSpPr>
-        <p:spPr>
-          <a:xfrm>
-            <a:off x="1883664" y="5413248"/>
-            <a:ext cx="4114800" cy="237744"/>
-          </a:xfrm>
-          <a:prstGeom prst="rect">
-            <a:avLst/>
-          </a:prstGeom>
-          <a:noFill/>
-          <a:ln/>
-        </p:spPr>
-        <p:txBody>
-          <a:bodyPr wrap="square" lIns="0" tIns="0" rIns="0" bIns="0" rtlCol="0" anchor="ctr"/>
-          <a:lstStyle/>
-          <a:p>
-            <a:pPr indent="0" marL="0">
-              <a:buNone/>
-            </a:pPr>
-            <a:r>
-              <a:rPr lang="en-US" sz="880" dirty="0">
-                <a:solidFill>
-                  <a:srgbClr val="3D4451"/>
-                </a:solidFill>
-                <a:latin typeface="맑은 고딕" pitchFamily="34" charset="0"/>
-                <a:ea typeface="맑은 고딕" pitchFamily="34" charset="-122"/>
-                <a:cs typeface="맑은 고딕" pitchFamily="34" charset="-120"/>
-              </a:rPr>
-              <a:t>세마포어 — 빈 슬롯 수 (처음 64)</a:t>
-            </a:r>
-          </a:p>
-        </p:txBody>
-      </p:sp>
-      <p:sp>
-        <p:nvSpPr>
-          <p:cNvPr id="37" name="Shape 35"/>
-          <p:cNvSpPr/>
-          <p:nvPr/>
-        </p:nvSpPr>
-        <p:spPr>
-          <a:xfrm>
-            <a:off x="969264" y="5705856"/>
-            <a:ext cx="786384" cy="237744"/>
-          </a:xfrm>
-          <a:prstGeom prst="roundRect">
-            <a:avLst>
-              <a:gd name="adj" fmla="val 25000"/>
-            </a:avLst>
-          </a:prstGeom>
-          <a:solidFill>
-            <a:srgbClr val="FFFFFF"/>
-          </a:solidFill>
-          <a:ln w="12700">
-            <a:solidFill>
-              <a:srgbClr val="13757A"/>
-            </a:solidFill>
-            <a:prstDash val="solid"/>
-          </a:ln>
-        </p:spPr>
-      </p:sp>
-      <p:sp>
-        <p:nvSpPr>
-          <p:cNvPr id="38" name="Text 36"/>
-          <p:cNvSpPr txBox="1"/>
-          <p:nvPr/>
-        </p:nvSpPr>
-        <p:spPr>
-          <a:xfrm>
-            <a:off x="969264" y="5705856"/>
-            <a:ext cx="786384" cy="237744"/>
-          </a:xfrm>
-          <a:prstGeom prst="rect">
-            <a:avLst/>
-          </a:prstGeom>
-          <a:noFill/>
-          <a:ln/>
-        </p:spPr>
-        <p:txBody>
-          <a:bodyPr wrap="square" lIns="0" tIns="0" rIns="0" bIns="0" rtlCol="0" anchor="ctr"/>
-          <a:lstStyle/>
-          <a:p>
-            <a:pPr algn="ctr" indent="0" marL="0">
-              <a:buNone/>
-            </a:pPr>
-            <a:r>
-              <a:rPr lang="en-US" sz="840" b="1" dirty="0">
-                <a:solidFill>
-                  <a:srgbClr val="13757A"/>
-                </a:solidFill>
-                <a:latin typeface="Consolas" pitchFamily="34" charset="0"/>
-                <a:ea typeface="Consolas" pitchFamily="34" charset="-122"/>
-                <a:cs typeface="Consolas" pitchFamily="34" charset="-120"/>
-              </a:rPr>
-              <a:t>.sem.f</a:t>
-            </a:r>
-          </a:p>
-        </p:txBody>
-      </p:sp>
-      <p:sp>
-        <p:nvSpPr>
-          <p:cNvPr id="39" name="Text 37"/>
-          <p:cNvSpPr txBox="1"/>
-          <p:nvPr/>
-        </p:nvSpPr>
-        <p:spPr>
-          <a:xfrm>
-            <a:off x="1883664" y="5705856"/>
-            <a:ext cx="4114800" cy="237744"/>
-          </a:xfrm>
-          <a:prstGeom prst="rect">
-            <a:avLst/>
-          </a:prstGeom>
-          <a:noFill/>
-          <a:ln/>
-        </p:spPr>
-        <p:txBody>
-          <a:bodyPr wrap="square" lIns="0" tIns="0" rIns="0" bIns="0" rtlCol="0" anchor="ctr"/>
-          <a:lstStyle/>
-          <a:p>
-            <a:pPr indent="0" marL="0">
-              <a:buNone/>
-            </a:pPr>
-            <a:r>
-              <a:rPr lang="en-US" sz="880" dirty="0">
-                <a:solidFill>
-                  <a:srgbClr val="3D4451"/>
-                </a:solidFill>
-                <a:latin typeface="맑은 고딕" pitchFamily="34" charset="0"/>
-                <a:ea typeface="맑은 고딕" pitchFamily="34" charset="-122"/>
-                <a:cs typeface="맑은 고딕" pitchFamily="34" charset="-120"/>
-              </a:rPr>
-              <a:t>세마포어 — 찬 슬롯 수 (처음 0)</a:t>
-            </a:r>
-          </a:p>
-        </p:txBody>
-      </p:sp>
-      <p:sp>
-        <p:nvSpPr>
-          <p:cNvPr id="40" name="Text 38"/>
-          <p:cNvSpPr txBox="1"/>
-          <p:nvPr/>
-        </p:nvSpPr>
-        <p:spPr>
-          <a:xfrm>
-            <a:off x="804672" y="5998464"/>
-            <a:ext cx="5248656" cy="237744"/>
-          </a:xfrm>
-          <a:prstGeom prst="rect">
-            <a:avLst/>
-          </a:prstGeom>
-          <a:noFill/>
-          <a:ln/>
-        </p:spPr>
-        <p:txBody>
-          <a:bodyPr wrap="square" lIns="0" tIns="0" rIns="0" bIns="0" rtlCol="0" anchor="ctr"/>
-          <a:lstStyle/>
-          <a:p>
-            <a:pPr indent="0" marL="0">
-              <a:buNone/>
-            </a:pPr>
-            <a:r>
-              <a:rPr lang="en-US" sz="860" dirty="0">
+              <a:t>shmdt / shmctl</a:t>
+            </a:r>
+            <a:endParaRPr lang="en-US" sz="850" dirty="0"/>
+          </a:p>
+        </p:txBody>
+      </p:sp>
+      <p:sp>
+        <p:nvSpPr>
+          <p:cNvPr id="101" name="Text 58"/>
+          <p:cNvSpPr txBox="1"/>
+          <p:nvPr/>
+        </p:nvSpPr>
+        <p:spPr>
+          <a:xfrm>
+            <a:off x="804672" y="5925312"/>
+            <a:ext cx="5029200" cy="274320"/>
+          </a:xfrm>
+          <a:prstGeom prst="rect">
+            <a:avLst/>
+          </a:prstGeom>
+          <a:noFill/>
+          <a:ln/>
+        </p:spPr>
+        <p:txBody>
+          <a:bodyPr wrap="square" lIns="0" tIns="0" rIns="0" bIns="0" rtlCol="0" anchor="ctr"/>
+          <a:lstStyle/>
+          <a:p>
+            <a:pPr indent="0" marL="0">
+              <a:buNone/>
+            </a:pPr>
+            <a:r>
+              <a:rPr lang="en-US" sz="950" dirty="0">
                 <a:solidFill>
                   <a:srgbClr val="7A828F"/>
                 </a:solidFill>
@@ -22468,8 +16535,9 @@
                 <a:ea typeface="맑은 고딕" pitchFamily="34" charset="-122"/>
                 <a:cs typeface="맑은 고딕" pitchFamily="34" charset="-120"/>
               </a:rPr>
-              <a:t>※ Local\ 이라 관리자 권한이 필요 없다 · Create 는 없으면 만들고 있으면 참여 → 기동 순서 무관</a:t>
-            </a:r>
+              <a:t>※ Windows 에는 리눅스의 메시지 큐가 없어서, 위 조합으로 같은 동작을 직접 만들었다</a:t>
+            </a:r>
+            <a:endParaRPr lang="en-US" sz="950" dirty="0"/>
           </a:p>
         </p:txBody>
       </p:sp>
